--- a/Final/Slides_novos.pptx
+++ b/Final/Slides_novos.pptx
@@ -21,6 +21,7 @@
     <p:sldId id="269" r:id="rId21"/>
     <p:sldId id="270" r:id="rId22"/>
     <p:sldId id="271" r:id="rId23"/>
+    <p:sldId id="272" r:id="rId24"/>
   </p:sldIdLst>
   <p:sldSz cx="12192000" cy="6858000" type="screen4x3"/>
   <p:notesSz cx="6858000" cy="9144000"/>
@@ -938,6 +939,76 @@
           <a:p>
             <a:r>
               <a:t>Sequência Morph com avanço automático: um clique no slide de repouso toca o caminho inteiro. O caminho é o real, medido no transcript da sessão (trace_sessao.py), não desenhado.</a:t>
+            </a:r>
+          </a:p>
+        </p:txBody>
+      </p:sp>
+      <p:sp>
+        <p:nvSpPr>
+          <p:cNvPr id="4" name="Slide Number Placeholder 3"/>
+          <p:cNvSpPr>
+            <a:spLocks noGrp="1"/>
+          </p:cNvSpPr>
+          <p:nvPr>
+            <p:ph type="sldNum" idx="5" sz="quarter"/>
+          </p:nvPr>
+        </p:nvSpPr>
+        <p:spPr/>
+      </p:sp>
+    </p:spTree>
+  </p:cSld>
+  <p:clrMapOvr>
+    <a:masterClrMapping/>
+  </p:clrMapOvr>
+</p:notes>
+</file>
+
+<file path=ppt/notesSlides/notesSlide16.xml><?xml version="1.0" encoding="utf-8"?>
+<p:notes xmlns:a="http://schemas.openxmlformats.org/drawingml/2006/main" xmlns:p="http://schemas.openxmlformats.org/presentationml/2006/main" xmlns:r="http://schemas.openxmlformats.org/officeDocument/2006/relationships">
+  <p:cSld>
+    <p:spTree>
+      <p:nvGrpSpPr>
+        <p:cNvPr id="1" name=""/>
+        <p:cNvGrpSpPr/>
+        <p:nvPr/>
+      </p:nvGrpSpPr>
+      <p:grpSpPr>
+        <a:xfrm>
+          <a:off x="0" y="0"/>
+          <a:ext cx="0" cy="0"/>
+          <a:chOff x="0" y="0"/>
+          <a:chExt cx="0" cy="0"/>
+        </a:xfrm>
+      </p:grpSpPr>
+      <p:sp>
+        <p:nvSpPr>
+          <p:cNvPr id="2" name="Slide Image Placeholder 1"/>
+          <p:cNvSpPr>
+            <a:spLocks noGrp="1"/>
+          </p:cNvSpPr>
+          <p:nvPr>
+            <p:ph type="sldImg" idx="2"/>
+          </p:nvPr>
+        </p:nvSpPr>
+        <p:spPr/>
+      </p:sp>
+      <p:sp>
+        <p:nvSpPr>
+          <p:cNvPr id="3" name="Notes Placeholder 2"/>
+          <p:cNvSpPr>
+            <a:spLocks noGrp="1"/>
+          </p:cNvSpPr>
+          <p:nvPr>
+            <p:ph type="body" idx="3" sz="quarter"/>
+          </p:nvPr>
+        </p:nvSpPr>
+        <p:spPr/>
+        <p:txBody>
+          <a:bodyPr/>
+          <a:lstStyle/>
+          <a:p>
+            <a:r>
+              <a:t>Números da página 5 do relatório (corte de 15/08, 91 sessões dos três LOGs) — Uteis/analises/Metricas_p5.md. VR de Uteis/analises/Premissa_tendencia.md. Peneira: GRUPOS do slide 8 da semi.</a:t>
             </a:r>
           </a:p>
         </p:txBody>
@@ -7082,7 +7153,7 @@
                 </a:solidFill>
                 <a:latin typeface="Consolas"/>
               </a:rPr>
-              <a:t>205 arquivos  ·  690 ligações  ·  medido no branch por grafo_repo.py</a:t>
+              <a:t>205 arquivos  ·  700 ligações  ·  medido no branch por grafo_repo.py</a:t>
             </a:r>
           </a:p>
         </p:txBody>
@@ -7095,7 +7166,7 @@
         </p:nvSpPr>
         <p:spPr>
           <a:xfrm>
-            <a:off x="2946411" y="4024372"/>
+            <a:off x="3032275" y="3979405"/>
             <a:ext cx="182880" cy="182880"/>
           </a:xfrm>
           <a:prstGeom prst="ellipse">
@@ -7142,9 +7213,9 @@
           <p:nvPr/>
         </p:nvCxnSpPr>
         <p:spPr>
-          <a:xfrm flipH="1">
-            <a:off x="1926259" y="4115812"/>
-            <a:ext cx="1111592" cy="715243"/>
+          <a:xfrm flipV="1">
+            <a:off x="3123715" y="2966173"/>
+            <a:ext cx="1452894" cy="1104672"/>
           </a:xfrm>
           <a:prstGeom prst="line">
             <a:avLst/>
@@ -7180,7 +7251,7 @@
         </p:nvSpPr>
         <p:spPr>
           <a:xfrm>
-            <a:off x="1834819" y="4739615"/>
+            <a:off x="4485169" y="2874733"/>
             <a:ext cx="182880" cy="182880"/>
           </a:xfrm>
           <a:prstGeom prst="ellipse">
@@ -7227,9 +7298,9 @@
           <p:nvPr/>
         </p:nvCxnSpPr>
         <p:spPr>
-          <a:xfrm flipV="1">
-            <a:off x="1926259" y="3779288"/>
-            <a:ext cx="17743" cy="1051767"/>
+          <a:xfrm flipH="1">
+            <a:off x="4229439" y="2966173"/>
+            <a:ext cx="347170" cy="1402079"/>
           </a:xfrm>
           <a:prstGeom prst="line">
             <a:avLst/>
@@ -7265,7 +7336,7 @@
         </p:nvSpPr>
         <p:spPr>
           <a:xfrm>
-            <a:off x="1852562" y="3687848"/>
+            <a:off x="4137999" y="4276812"/>
             <a:ext cx="182880" cy="182880"/>
           </a:xfrm>
           <a:prstGeom prst="ellipse">
@@ -7312,9 +7383,9 @@
           <p:nvPr/>
         </p:nvCxnSpPr>
         <p:spPr>
-          <a:xfrm>
-            <a:off x="1944002" y="3779288"/>
-            <a:ext cx="865626" cy="224418"/>
+          <a:xfrm flipH="1" flipV="1">
+            <a:off x="3322795" y="3741475"/>
+            <a:ext cx="906644" cy="626777"/>
           </a:xfrm>
           <a:prstGeom prst="line">
             <a:avLst/>
@@ -7350,7 +7421,7 @@
         </p:nvSpPr>
         <p:spPr>
           <a:xfrm>
-            <a:off x="2718188" y="3912266"/>
+            <a:off x="3231355" y="3650035"/>
             <a:ext cx="182880" cy="182880"/>
           </a:xfrm>
           <a:prstGeom prst="ellipse">
@@ -7398,8 +7469,8 @@
         </p:nvCxnSpPr>
         <p:spPr>
           <a:xfrm>
-            <a:off x="2809628" y="4003706"/>
-            <a:ext cx="481523" cy="295403"/>
+            <a:off x="3322795" y="3741475"/>
+            <a:ext cx="135298" cy="506725"/>
           </a:xfrm>
           <a:prstGeom prst="line">
             <a:avLst/>
@@ -7435,7 +7506,7 @@
         </p:nvSpPr>
         <p:spPr>
           <a:xfrm>
-            <a:off x="3199711" y="4207669"/>
+            <a:off x="3366653" y="4156760"/>
             <a:ext cx="182880" cy="182880"/>
           </a:xfrm>
           <a:prstGeom prst="ellipse">
@@ -7482,9 +7553,9 @@
           <p:nvPr/>
         </p:nvCxnSpPr>
         <p:spPr>
-          <a:xfrm flipV="1">
-            <a:off x="3291151" y="3923102"/>
-            <a:ext cx="559467" cy="376007"/>
+          <a:xfrm flipH="1" flipV="1">
+            <a:off x="3415287" y="3111280"/>
+            <a:ext cx="42806" cy="1136920"/>
           </a:xfrm>
           <a:prstGeom prst="line">
             <a:avLst/>
@@ -7520,7 +7591,7 @@
         </p:nvSpPr>
         <p:spPr>
           <a:xfrm>
-            <a:off x="3759178" y="3831662"/>
+            <a:off x="3323847" y="3019840"/>
             <a:ext cx="182880" cy="182880"/>
           </a:xfrm>
           <a:prstGeom prst="ellipse">
@@ -7568,7 +7639,7 @@
         </p:nvSpPr>
         <p:spPr>
           <a:xfrm>
-            <a:off x="3599158" y="3671642"/>
+            <a:off x="3163827" y="2859820"/>
             <a:ext cx="502920" cy="502920"/>
           </a:xfrm>
           <a:prstGeom prst="ellipse">
@@ -8984,7 +9055,7 @@
                 </a:solidFill>
                 <a:latin typeface="Consolas"/>
               </a:rPr>
-              <a:t>205 arquivos  ·  690 ligações  ·  medido no branch por grafo_repo.py</a:t>
+              <a:t>205 arquivos  ·  700 ligações  ·  medido no branch por grafo_repo.py</a:t>
             </a:r>
           </a:p>
         </p:txBody>
@@ -8997,7 +9068,7 @@
         </p:nvSpPr>
         <p:spPr>
           <a:xfrm>
-            <a:off x="2946411" y="4024372"/>
+            <a:off x="3032275" y="3979405"/>
             <a:ext cx="182880" cy="182880"/>
           </a:xfrm>
           <a:prstGeom prst="ellipse">
@@ -9044,9 +9115,9 @@
           <p:nvPr/>
         </p:nvCxnSpPr>
         <p:spPr>
-          <a:xfrm flipH="1">
-            <a:off x="1926259" y="4115812"/>
-            <a:ext cx="1111592" cy="715243"/>
+          <a:xfrm flipV="1">
+            <a:off x="3123715" y="2966173"/>
+            <a:ext cx="1452894" cy="1104672"/>
           </a:xfrm>
           <a:prstGeom prst="line">
             <a:avLst/>
@@ -9082,7 +9153,7 @@
         </p:nvSpPr>
         <p:spPr>
           <a:xfrm>
-            <a:off x="1834819" y="4739615"/>
+            <a:off x="4485169" y="2874733"/>
             <a:ext cx="182880" cy="182880"/>
           </a:xfrm>
           <a:prstGeom prst="ellipse">
@@ -9129,9 +9200,9 @@
           <p:nvPr/>
         </p:nvCxnSpPr>
         <p:spPr>
-          <a:xfrm flipV="1">
-            <a:off x="1926259" y="3779288"/>
-            <a:ext cx="17743" cy="1051767"/>
+          <a:xfrm flipH="1">
+            <a:off x="4229439" y="2966173"/>
+            <a:ext cx="347170" cy="1402079"/>
           </a:xfrm>
           <a:prstGeom prst="line">
             <a:avLst/>
@@ -9167,7 +9238,7 @@
         </p:nvSpPr>
         <p:spPr>
           <a:xfrm>
-            <a:off x="1852562" y="3687848"/>
+            <a:off x="4137999" y="4276812"/>
             <a:ext cx="182880" cy="182880"/>
           </a:xfrm>
           <a:prstGeom prst="ellipse">
@@ -9214,9 +9285,9 @@
           <p:nvPr/>
         </p:nvCxnSpPr>
         <p:spPr>
-          <a:xfrm>
-            <a:off x="1944002" y="3779288"/>
-            <a:ext cx="865626" cy="224418"/>
+          <a:xfrm flipH="1" flipV="1">
+            <a:off x="3322795" y="3741475"/>
+            <a:ext cx="906644" cy="626777"/>
           </a:xfrm>
           <a:prstGeom prst="line">
             <a:avLst/>
@@ -9252,7 +9323,7 @@
         </p:nvSpPr>
         <p:spPr>
           <a:xfrm>
-            <a:off x="2718188" y="3912266"/>
+            <a:off x="3231355" y="3650035"/>
             <a:ext cx="182880" cy="182880"/>
           </a:xfrm>
           <a:prstGeom prst="ellipse">
@@ -9300,8 +9371,8 @@
         </p:nvCxnSpPr>
         <p:spPr>
           <a:xfrm>
-            <a:off x="2809628" y="4003706"/>
-            <a:ext cx="481523" cy="295403"/>
+            <a:off x="3322795" y="3741475"/>
+            <a:ext cx="135298" cy="506725"/>
           </a:xfrm>
           <a:prstGeom prst="line">
             <a:avLst/>
@@ -9337,7 +9408,7 @@
         </p:nvSpPr>
         <p:spPr>
           <a:xfrm>
-            <a:off x="3199711" y="4207669"/>
+            <a:off x="3366653" y="4156760"/>
             <a:ext cx="182880" cy="182880"/>
           </a:xfrm>
           <a:prstGeom prst="ellipse">
@@ -9384,9 +9455,9 @@
           <p:nvPr/>
         </p:nvCxnSpPr>
         <p:spPr>
-          <a:xfrm flipV="1">
-            <a:off x="3291151" y="3923102"/>
-            <a:ext cx="559467" cy="376007"/>
+          <a:xfrm flipH="1" flipV="1">
+            <a:off x="3415287" y="3111280"/>
+            <a:ext cx="42806" cy="1136920"/>
           </a:xfrm>
           <a:prstGeom prst="line">
             <a:avLst/>
@@ -9422,7 +9493,7 @@
         </p:nvSpPr>
         <p:spPr>
           <a:xfrm>
-            <a:off x="3759178" y="3831662"/>
+            <a:off x="3323847" y="3019840"/>
             <a:ext cx="182880" cy="182880"/>
           </a:xfrm>
           <a:prstGeom prst="ellipse">
@@ -9469,9 +9540,9 @@
           <p:nvPr/>
         </p:nvCxnSpPr>
         <p:spPr>
-          <a:xfrm flipH="1" flipV="1">
-            <a:off x="3399735" y="3579698"/>
-            <a:ext cx="450883" cy="343404"/>
+          <a:xfrm flipH="1">
+            <a:off x="2500956" y="3111280"/>
+            <a:ext cx="914331" cy="395045"/>
           </a:xfrm>
           <a:prstGeom prst="line">
             <a:avLst/>
@@ -9507,7 +9578,7 @@
         </p:nvSpPr>
         <p:spPr>
           <a:xfrm>
-            <a:off x="3308295" y="3488258"/>
+            <a:off x="2409516" y="3414885"/>
             <a:ext cx="182880" cy="182880"/>
           </a:xfrm>
           <a:prstGeom prst="ellipse">
@@ -9555,7 +9626,7 @@
         </p:nvSpPr>
         <p:spPr>
           <a:xfrm>
-            <a:off x="3148275" y="3328238"/>
+            <a:off x="2249496" y="3254865"/>
             <a:ext cx="502920" cy="502920"/>
           </a:xfrm>
           <a:prstGeom prst="ellipse">
@@ -11025,7 +11096,7 @@
                 </a:solidFill>
                 <a:latin typeface="Consolas"/>
               </a:rPr>
-              <a:t>205 arquivos  ·  690 ligações  ·  medido no branch por grafo_repo.py</a:t>
+              <a:t>205 arquivos  ·  700 ligações  ·  medido no branch por grafo_repo.py</a:t>
             </a:r>
           </a:p>
         </p:txBody>
@@ -11038,7 +11109,7 @@
         </p:nvSpPr>
         <p:spPr>
           <a:xfrm>
-            <a:off x="2946411" y="4024372"/>
+            <a:off x="3032275" y="3979405"/>
             <a:ext cx="182880" cy="182880"/>
           </a:xfrm>
           <a:prstGeom prst="ellipse">
@@ -11085,9 +11156,9 @@
           <p:nvPr/>
         </p:nvCxnSpPr>
         <p:spPr>
-          <a:xfrm flipH="1">
-            <a:off x="1926259" y="4115812"/>
-            <a:ext cx="1111592" cy="715243"/>
+          <a:xfrm flipV="1">
+            <a:off x="3123715" y="2966173"/>
+            <a:ext cx="1452894" cy="1104672"/>
           </a:xfrm>
           <a:prstGeom prst="line">
             <a:avLst/>
@@ -11123,7 +11194,7 @@
         </p:nvSpPr>
         <p:spPr>
           <a:xfrm>
-            <a:off x="1834819" y="4739615"/>
+            <a:off x="4485169" y="2874733"/>
             <a:ext cx="182880" cy="182880"/>
           </a:xfrm>
           <a:prstGeom prst="ellipse">
@@ -11170,9 +11241,9 @@
           <p:nvPr/>
         </p:nvCxnSpPr>
         <p:spPr>
-          <a:xfrm flipV="1">
-            <a:off x="1926259" y="3779288"/>
-            <a:ext cx="17743" cy="1051767"/>
+          <a:xfrm flipH="1">
+            <a:off x="4229439" y="2966173"/>
+            <a:ext cx="347170" cy="1402079"/>
           </a:xfrm>
           <a:prstGeom prst="line">
             <a:avLst/>
@@ -11208,7 +11279,7 @@
         </p:nvSpPr>
         <p:spPr>
           <a:xfrm>
-            <a:off x="1852562" y="3687848"/>
+            <a:off x="4137999" y="4276812"/>
             <a:ext cx="182880" cy="182880"/>
           </a:xfrm>
           <a:prstGeom prst="ellipse">
@@ -11255,9 +11326,9 @@
           <p:nvPr/>
         </p:nvCxnSpPr>
         <p:spPr>
-          <a:xfrm>
-            <a:off x="1944002" y="3779288"/>
-            <a:ext cx="865626" cy="224418"/>
+          <a:xfrm flipH="1" flipV="1">
+            <a:off x="3322795" y="3741475"/>
+            <a:ext cx="906644" cy="626777"/>
           </a:xfrm>
           <a:prstGeom prst="line">
             <a:avLst/>
@@ -11293,7 +11364,7 @@
         </p:nvSpPr>
         <p:spPr>
           <a:xfrm>
-            <a:off x="2718188" y="3912266"/>
+            <a:off x="3231355" y="3650035"/>
             <a:ext cx="182880" cy="182880"/>
           </a:xfrm>
           <a:prstGeom prst="ellipse">
@@ -11341,8 +11412,8 @@
         </p:nvCxnSpPr>
         <p:spPr>
           <a:xfrm>
-            <a:off x="2809628" y="4003706"/>
-            <a:ext cx="481523" cy="295403"/>
+            <a:off x="3322795" y="3741475"/>
+            <a:ext cx="135298" cy="506725"/>
           </a:xfrm>
           <a:prstGeom prst="line">
             <a:avLst/>
@@ -11378,7 +11449,7 @@
         </p:nvSpPr>
         <p:spPr>
           <a:xfrm>
-            <a:off x="3199711" y="4207669"/>
+            <a:off x="3366653" y="4156760"/>
             <a:ext cx="182880" cy="182880"/>
           </a:xfrm>
           <a:prstGeom prst="ellipse">
@@ -11425,9 +11496,9 @@
           <p:nvPr/>
         </p:nvCxnSpPr>
         <p:spPr>
-          <a:xfrm flipV="1">
-            <a:off x="3291151" y="3923102"/>
-            <a:ext cx="559467" cy="376007"/>
+          <a:xfrm flipH="1" flipV="1">
+            <a:off x="3415287" y="3111280"/>
+            <a:ext cx="42806" cy="1136920"/>
           </a:xfrm>
           <a:prstGeom prst="line">
             <a:avLst/>
@@ -11463,7 +11534,7 @@
         </p:nvSpPr>
         <p:spPr>
           <a:xfrm>
-            <a:off x="3759178" y="3831662"/>
+            <a:off x="3323847" y="3019840"/>
             <a:ext cx="182880" cy="182880"/>
           </a:xfrm>
           <a:prstGeom prst="ellipse">
@@ -11510,9 +11581,9 @@
           <p:nvPr/>
         </p:nvCxnSpPr>
         <p:spPr>
-          <a:xfrm flipH="1" flipV="1">
-            <a:off x="3399735" y="3579698"/>
-            <a:ext cx="450883" cy="343404"/>
+          <a:xfrm flipH="1">
+            <a:off x="2500956" y="3111280"/>
+            <a:ext cx="914331" cy="395045"/>
           </a:xfrm>
           <a:prstGeom prst="line">
             <a:avLst/>
@@ -11548,7 +11619,7 @@
         </p:nvSpPr>
         <p:spPr>
           <a:xfrm>
-            <a:off x="3308295" y="3488258"/>
+            <a:off x="2409516" y="3414885"/>
             <a:ext cx="182880" cy="182880"/>
           </a:xfrm>
           <a:prstGeom prst="ellipse">
@@ -11595,9 +11666,9 @@
           <p:nvPr/>
         </p:nvCxnSpPr>
         <p:spPr>
-          <a:xfrm flipH="1">
-            <a:off x="3116127" y="3579698"/>
-            <a:ext cx="283608" cy="681101"/>
+          <a:xfrm>
+            <a:off x="2500956" y="3506325"/>
+            <a:ext cx="992426" cy="334916"/>
           </a:xfrm>
           <a:prstGeom prst="line">
             <a:avLst/>
@@ -11633,7 +11704,7 @@
         </p:nvSpPr>
         <p:spPr>
           <a:xfrm>
-            <a:off x="3024687" y="4169359"/>
+            <a:off x="3401942" y="3749801"/>
             <a:ext cx="182880" cy="182880"/>
           </a:xfrm>
           <a:prstGeom prst="ellipse">
@@ -11681,7 +11752,7 @@
         </p:nvSpPr>
         <p:spPr>
           <a:xfrm>
-            <a:off x="2864667" y="4009339"/>
+            <a:off x="3241922" y="3589781"/>
             <a:ext cx="502920" cy="502920"/>
           </a:xfrm>
           <a:prstGeom prst="ellipse">
@@ -13205,7 +13276,7 @@
                 </a:solidFill>
                 <a:latin typeface="Consolas"/>
               </a:rPr>
-              <a:t>205 arquivos  ·  690 ligações  ·  medido no branch por grafo_repo.py</a:t>
+              <a:t>205 arquivos  ·  700 ligações  ·  medido no branch por grafo_repo.py</a:t>
             </a:r>
           </a:p>
         </p:txBody>
@@ -13218,7 +13289,7 @@
         </p:nvSpPr>
         <p:spPr>
           <a:xfrm>
-            <a:off x="2946411" y="4024372"/>
+            <a:off x="3032275" y="3979405"/>
             <a:ext cx="182880" cy="182880"/>
           </a:xfrm>
           <a:prstGeom prst="ellipse">
@@ -13265,9 +13336,9 @@
           <p:nvPr/>
         </p:nvCxnSpPr>
         <p:spPr>
-          <a:xfrm flipH="1">
-            <a:off x="1926259" y="4115812"/>
-            <a:ext cx="1111592" cy="715243"/>
+          <a:xfrm flipV="1">
+            <a:off x="3123715" y="2966173"/>
+            <a:ext cx="1452894" cy="1104672"/>
           </a:xfrm>
           <a:prstGeom prst="line">
             <a:avLst/>
@@ -13303,7 +13374,7 @@
         </p:nvSpPr>
         <p:spPr>
           <a:xfrm>
-            <a:off x="1834819" y="4739615"/>
+            <a:off x="4485169" y="2874733"/>
             <a:ext cx="182880" cy="182880"/>
           </a:xfrm>
           <a:prstGeom prst="ellipse">
@@ -13350,9 +13421,9 @@
           <p:nvPr/>
         </p:nvCxnSpPr>
         <p:spPr>
-          <a:xfrm flipV="1">
-            <a:off x="1926259" y="3779288"/>
-            <a:ext cx="17743" cy="1051767"/>
+          <a:xfrm flipH="1">
+            <a:off x="4229439" y="2966173"/>
+            <a:ext cx="347170" cy="1402079"/>
           </a:xfrm>
           <a:prstGeom prst="line">
             <a:avLst/>
@@ -13388,7 +13459,7 @@
         </p:nvSpPr>
         <p:spPr>
           <a:xfrm>
-            <a:off x="1852562" y="3687848"/>
+            <a:off x="4137999" y="4276812"/>
             <a:ext cx="182880" cy="182880"/>
           </a:xfrm>
           <a:prstGeom prst="ellipse">
@@ -13435,9 +13506,9 @@
           <p:nvPr/>
         </p:nvCxnSpPr>
         <p:spPr>
-          <a:xfrm>
-            <a:off x="1944002" y="3779288"/>
-            <a:ext cx="865626" cy="224418"/>
+          <a:xfrm flipH="1" flipV="1">
+            <a:off x="3322795" y="3741475"/>
+            <a:ext cx="906644" cy="626777"/>
           </a:xfrm>
           <a:prstGeom prst="line">
             <a:avLst/>
@@ -13473,7 +13544,7 @@
         </p:nvSpPr>
         <p:spPr>
           <a:xfrm>
-            <a:off x="2718188" y="3912266"/>
+            <a:off x="3231355" y="3650035"/>
             <a:ext cx="182880" cy="182880"/>
           </a:xfrm>
           <a:prstGeom prst="ellipse">
@@ -13521,8 +13592,8 @@
         </p:nvCxnSpPr>
         <p:spPr>
           <a:xfrm>
-            <a:off x="2809628" y="4003706"/>
-            <a:ext cx="481523" cy="295403"/>
+            <a:off x="3322795" y="3741475"/>
+            <a:ext cx="135298" cy="506725"/>
           </a:xfrm>
           <a:prstGeom prst="line">
             <a:avLst/>
@@ -13558,7 +13629,7 @@
         </p:nvSpPr>
         <p:spPr>
           <a:xfrm>
-            <a:off x="3199711" y="4207669"/>
+            <a:off x="3366653" y="4156760"/>
             <a:ext cx="182880" cy="182880"/>
           </a:xfrm>
           <a:prstGeom prst="ellipse">
@@ -13605,9 +13676,9 @@
           <p:nvPr/>
         </p:nvCxnSpPr>
         <p:spPr>
-          <a:xfrm flipV="1">
-            <a:off x="3291151" y="3923102"/>
-            <a:ext cx="559467" cy="376007"/>
+          <a:xfrm flipH="1" flipV="1">
+            <a:off x="3415287" y="3111280"/>
+            <a:ext cx="42806" cy="1136920"/>
           </a:xfrm>
           <a:prstGeom prst="line">
             <a:avLst/>
@@ -13643,7 +13714,7 @@
         </p:nvSpPr>
         <p:spPr>
           <a:xfrm>
-            <a:off x="3759178" y="3831662"/>
+            <a:off x="3323847" y="3019840"/>
             <a:ext cx="182880" cy="182880"/>
           </a:xfrm>
           <a:prstGeom prst="ellipse">
@@ -13690,9 +13761,9 @@
           <p:nvPr/>
         </p:nvCxnSpPr>
         <p:spPr>
-          <a:xfrm flipH="1" flipV="1">
-            <a:off x="3399735" y="3579698"/>
-            <a:ext cx="450883" cy="343404"/>
+          <a:xfrm flipH="1">
+            <a:off x="2500956" y="3111280"/>
+            <a:ext cx="914331" cy="395045"/>
           </a:xfrm>
           <a:prstGeom prst="line">
             <a:avLst/>
@@ -13728,7 +13799,7 @@
         </p:nvSpPr>
         <p:spPr>
           <a:xfrm>
-            <a:off x="3308295" y="3488258"/>
+            <a:off x="2409516" y="3414885"/>
             <a:ext cx="182880" cy="182880"/>
           </a:xfrm>
           <a:prstGeom prst="ellipse">
@@ -13775,9 +13846,9 @@
           <p:nvPr/>
         </p:nvCxnSpPr>
         <p:spPr>
-          <a:xfrm flipH="1">
-            <a:off x="3116127" y="3579698"/>
-            <a:ext cx="283608" cy="681101"/>
+          <a:xfrm>
+            <a:off x="2500956" y="3506325"/>
+            <a:ext cx="992426" cy="334916"/>
           </a:xfrm>
           <a:prstGeom prst="line">
             <a:avLst/>
@@ -13813,7 +13884,7 @@
         </p:nvSpPr>
         <p:spPr>
           <a:xfrm>
-            <a:off x="3024687" y="4169359"/>
+            <a:off x="3401942" y="3749801"/>
             <a:ext cx="182880" cy="182880"/>
           </a:xfrm>
           <a:prstGeom prst="ellipse">
@@ -13861,8 +13932,8 @@
         </p:nvCxnSpPr>
         <p:spPr>
           <a:xfrm flipH="1" flipV="1">
-            <a:off x="2688795" y="3030284"/>
-            <a:ext cx="427332" cy="1230515"/>
+            <a:off x="2452158" y="3068098"/>
+            <a:ext cx="1041224" cy="773143"/>
           </a:xfrm>
           <a:prstGeom prst="line">
             <a:avLst/>
@@ -13898,7 +13969,7 @@
         </p:nvSpPr>
         <p:spPr>
           <a:xfrm>
-            <a:off x="2597355" y="2938844"/>
+            <a:off x="2360718" y="2976658"/>
             <a:ext cx="182880" cy="182880"/>
           </a:xfrm>
           <a:prstGeom prst="ellipse">
@@ -13946,7 +14017,7 @@
         </p:nvSpPr>
         <p:spPr>
           <a:xfrm>
-            <a:off x="2437335" y="2778824"/>
+            <a:off x="2200698" y="2816638"/>
             <a:ext cx="502920" cy="502920"/>
           </a:xfrm>
           <a:prstGeom prst="ellipse">
@@ -15524,7 +15595,7 @@
                 </a:solidFill>
                 <a:latin typeface="Consolas"/>
               </a:rPr>
-              <a:t>205 arquivos  ·  690 ligações  ·  medido no branch por grafo_repo.py</a:t>
+              <a:t>205 arquivos  ·  700 ligações  ·  medido no branch por grafo_repo.py</a:t>
             </a:r>
           </a:p>
         </p:txBody>
@@ -15537,7 +15608,7 @@
         </p:nvSpPr>
         <p:spPr>
           <a:xfrm>
-            <a:off x="2946411" y="4024372"/>
+            <a:off x="3032275" y="3979405"/>
             <a:ext cx="182880" cy="182880"/>
           </a:xfrm>
           <a:prstGeom prst="ellipse">
@@ -15584,9 +15655,9 @@
           <p:nvPr/>
         </p:nvCxnSpPr>
         <p:spPr>
-          <a:xfrm flipH="1">
-            <a:off x="1926259" y="4115812"/>
-            <a:ext cx="1111592" cy="715243"/>
+          <a:xfrm flipV="1">
+            <a:off x="3123715" y="2966173"/>
+            <a:ext cx="1452894" cy="1104672"/>
           </a:xfrm>
           <a:prstGeom prst="line">
             <a:avLst/>
@@ -15622,7 +15693,7 @@
         </p:nvSpPr>
         <p:spPr>
           <a:xfrm>
-            <a:off x="1834819" y="4739615"/>
+            <a:off x="4485169" y="2874733"/>
             <a:ext cx="182880" cy="182880"/>
           </a:xfrm>
           <a:prstGeom prst="ellipse">
@@ -15669,9 +15740,9 @@
           <p:nvPr/>
         </p:nvCxnSpPr>
         <p:spPr>
-          <a:xfrm flipV="1">
-            <a:off x="1926259" y="3779288"/>
-            <a:ext cx="17743" cy="1051767"/>
+          <a:xfrm flipH="1">
+            <a:off x="4229439" y="2966173"/>
+            <a:ext cx="347170" cy="1402079"/>
           </a:xfrm>
           <a:prstGeom prst="line">
             <a:avLst/>
@@ -15707,7 +15778,7 @@
         </p:nvSpPr>
         <p:spPr>
           <a:xfrm>
-            <a:off x="1852562" y="3687848"/>
+            <a:off x="4137999" y="4276812"/>
             <a:ext cx="182880" cy="182880"/>
           </a:xfrm>
           <a:prstGeom prst="ellipse">
@@ -15754,9 +15825,9 @@
           <p:nvPr/>
         </p:nvCxnSpPr>
         <p:spPr>
-          <a:xfrm>
-            <a:off x="1944002" y="3779288"/>
-            <a:ext cx="865626" cy="224418"/>
+          <a:xfrm flipH="1" flipV="1">
+            <a:off x="3322795" y="3741475"/>
+            <a:ext cx="906644" cy="626777"/>
           </a:xfrm>
           <a:prstGeom prst="line">
             <a:avLst/>
@@ -15792,7 +15863,7 @@
         </p:nvSpPr>
         <p:spPr>
           <a:xfrm>
-            <a:off x="2718188" y="3912266"/>
+            <a:off x="3231355" y="3650035"/>
             <a:ext cx="182880" cy="182880"/>
           </a:xfrm>
           <a:prstGeom prst="ellipse">
@@ -15840,8 +15911,8 @@
         </p:nvCxnSpPr>
         <p:spPr>
           <a:xfrm>
-            <a:off x="2809628" y="4003706"/>
-            <a:ext cx="481523" cy="295403"/>
+            <a:off x="3322795" y="3741475"/>
+            <a:ext cx="135298" cy="506725"/>
           </a:xfrm>
           <a:prstGeom prst="line">
             <a:avLst/>
@@ -15877,7 +15948,7 @@
         </p:nvSpPr>
         <p:spPr>
           <a:xfrm>
-            <a:off x="3199711" y="4207669"/>
+            <a:off x="3366653" y="4156760"/>
             <a:ext cx="182880" cy="182880"/>
           </a:xfrm>
           <a:prstGeom prst="ellipse">
@@ -15924,9 +15995,9 @@
           <p:nvPr/>
         </p:nvCxnSpPr>
         <p:spPr>
-          <a:xfrm flipV="1">
-            <a:off x="3291151" y="3923102"/>
-            <a:ext cx="559467" cy="376007"/>
+          <a:xfrm flipH="1" flipV="1">
+            <a:off x="3415287" y="3111280"/>
+            <a:ext cx="42806" cy="1136920"/>
           </a:xfrm>
           <a:prstGeom prst="line">
             <a:avLst/>
@@ -15962,7 +16033,7 @@
         </p:nvSpPr>
         <p:spPr>
           <a:xfrm>
-            <a:off x="3759178" y="3831662"/>
+            <a:off x="3323847" y="3019840"/>
             <a:ext cx="182880" cy="182880"/>
           </a:xfrm>
           <a:prstGeom prst="ellipse">
@@ -16009,9 +16080,9 @@
           <p:nvPr/>
         </p:nvCxnSpPr>
         <p:spPr>
-          <a:xfrm flipH="1" flipV="1">
-            <a:off x="3399735" y="3579698"/>
-            <a:ext cx="450883" cy="343404"/>
+          <a:xfrm flipH="1">
+            <a:off x="2500956" y="3111280"/>
+            <a:ext cx="914331" cy="395045"/>
           </a:xfrm>
           <a:prstGeom prst="line">
             <a:avLst/>
@@ -16047,7 +16118,7 @@
         </p:nvSpPr>
         <p:spPr>
           <a:xfrm>
-            <a:off x="3308295" y="3488258"/>
+            <a:off x="2409516" y="3414885"/>
             <a:ext cx="182880" cy="182880"/>
           </a:xfrm>
           <a:prstGeom prst="ellipse">
@@ -16094,9 +16165,9 @@
           <p:nvPr/>
         </p:nvCxnSpPr>
         <p:spPr>
-          <a:xfrm flipH="1">
-            <a:off x="3116127" y="3579698"/>
-            <a:ext cx="283608" cy="681101"/>
+          <a:xfrm>
+            <a:off x="2500956" y="3506325"/>
+            <a:ext cx="992426" cy="334916"/>
           </a:xfrm>
           <a:prstGeom prst="line">
             <a:avLst/>
@@ -16132,7 +16203,7 @@
         </p:nvSpPr>
         <p:spPr>
           <a:xfrm>
-            <a:off x="3024687" y="4169359"/>
+            <a:off x="3401942" y="3749801"/>
             <a:ext cx="182880" cy="182880"/>
           </a:xfrm>
           <a:prstGeom prst="ellipse">
@@ -16180,8 +16251,8 @@
         </p:nvCxnSpPr>
         <p:spPr>
           <a:xfrm flipH="1" flipV="1">
-            <a:off x="2688795" y="3030284"/>
-            <a:ext cx="427332" cy="1230515"/>
+            <a:off x="2452158" y="3068098"/>
+            <a:ext cx="1041224" cy="773143"/>
           </a:xfrm>
           <a:prstGeom prst="line">
             <a:avLst/>
@@ -16217,7 +16288,7 @@
         </p:nvSpPr>
         <p:spPr>
           <a:xfrm>
-            <a:off x="2597355" y="2938844"/>
+            <a:off x="2360718" y="2976658"/>
             <a:ext cx="182880" cy="182880"/>
           </a:xfrm>
           <a:prstGeom prst="ellipse">
@@ -16265,8 +16336,8 @@
         </p:nvCxnSpPr>
         <p:spPr>
           <a:xfrm>
-            <a:off x="2688795" y="3030284"/>
-            <a:ext cx="987339" cy="489319"/>
+            <a:off x="2452158" y="3068098"/>
+            <a:ext cx="403729" cy="793720"/>
           </a:xfrm>
           <a:prstGeom prst="line">
             <a:avLst/>
@@ -16302,7 +16373,7 @@
         </p:nvSpPr>
         <p:spPr>
           <a:xfrm>
-            <a:off x="3584694" y="3428163"/>
+            <a:off x="2764447" y="3770378"/>
             <a:ext cx="182880" cy="182880"/>
           </a:xfrm>
           <a:prstGeom prst="ellipse">
@@ -16350,7 +16421,7 @@
         </p:nvSpPr>
         <p:spPr>
           <a:xfrm>
-            <a:off x="3424674" y="3268143"/>
+            <a:off x="2604427" y="3610358"/>
             <a:ext cx="502920" cy="502920"/>
           </a:xfrm>
           <a:prstGeom prst="ellipse">
@@ -17982,7 +18053,7 @@
                 </a:solidFill>
                 <a:latin typeface="Consolas"/>
               </a:rPr>
-              <a:t>205 arquivos  ·  690 ligações  ·  medido no branch por grafo_repo.py</a:t>
+              <a:t>205 arquivos  ·  700 ligações  ·  medido no branch por grafo_repo.py</a:t>
             </a:r>
           </a:p>
         </p:txBody>
@@ -17995,7 +18066,7 @@
         </p:nvSpPr>
         <p:spPr>
           <a:xfrm>
-            <a:off x="2946411" y="4024372"/>
+            <a:off x="3032275" y="3979405"/>
             <a:ext cx="182880" cy="182880"/>
           </a:xfrm>
           <a:prstGeom prst="ellipse">
@@ -18042,9 +18113,9 @@
           <p:nvPr/>
         </p:nvCxnSpPr>
         <p:spPr>
-          <a:xfrm flipH="1">
-            <a:off x="1926259" y="4115812"/>
-            <a:ext cx="1111592" cy="715243"/>
+          <a:xfrm flipV="1">
+            <a:off x="3123715" y="2966173"/>
+            <a:ext cx="1452894" cy="1104672"/>
           </a:xfrm>
           <a:prstGeom prst="line">
             <a:avLst/>
@@ -18080,7 +18151,7 @@
         </p:nvSpPr>
         <p:spPr>
           <a:xfrm>
-            <a:off x="1834819" y="4739615"/>
+            <a:off x="4485169" y="2874733"/>
             <a:ext cx="182880" cy="182880"/>
           </a:xfrm>
           <a:prstGeom prst="ellipse">
@@ -18127,9 +18198,9 @@
           <p:nvPr/>
         </p:nvCxnSpPr>
         <p:spPr>
-          <a:xfrm flipV="1">
-            <a:off x="1926259" y="3779288"/>
-            <a:ext cx="17743" cy="1051767"/>
+          <a:xfrm flipH="1">
+            <a:off x="4229439" y="2966173"/>
+            <a:ext cx="347170" cy="1402079"/>
           </a:xfrm>
           <a:prstGeom prst="line">
             <a:avLst/>
@@ -18165,7 +18236,7 @@
         </p:nvSpPr>
         <p:spPr>
           <a:xfrm>
-            <a:off x="1852562" y="3687848"/>
+            <a:off x="4137999" y="4276812"/>
             <a:ext cx="182880" cy="182880"/>
           </a:xfrm>
           <a:prstGeom prst="ellipse">
@@ -18212,9 +18283,9 @@
           <p:nvPr/>
         </p:nvCxnSpPr>
         <p:spPr>
-          <a:xfrm>
-            <a:off x="1944002" y="3779288"/>
-            <a:ext cx="865626" cy="224418"/>
+          <a:xfrm flipH="1" flipV="1">
+            <a:off x="3322795" y="3741475"/>
+            <a:ext cx="906644" cy="626777"/>
           </a:xfrm>
           <a:prstGeom prst="line">
             <a:avLst/>
@@ -18250,7 +18321,7 @@
         </p:nvSpPr>
         <p:spPr>
           <a:xfrm>
-            <a:off x="2718188" y="3912266"/>
+            <a:off x="3231355" y="3650035"/>
             <a:ext cx="182880" cy="182880"/>
           </a:xfrm>
           <a:prstGeom prst="ellipse">
@@ -18298,8 +18369,8 @@
         </p:nvCxnSpPr>
         <p:spPr>
           <a:xfrm>
-            <a:off x="2809628" y="4003706"/>
-            <a:ext cx="481523" cy="295403"/>
+            <a:off x="3322795" y="3741475"/>
+            <a:ext cx="135298" cy="506725"/>
           </a:xfrm>
           <a:prstGeom prst="line">
             <a:avLst/>
@@ -18335,7 +18406,7 @@
         </p:nvSpPr>
         <p:spPr>
           <a:xfrm>
-            <a:off x="3199711" y="4207669"/>
+            <a:off x="3366653" y="4156760"/>
             <a:ext cx="182880" cy="182880"/>
           </a:xfrm>
           <a:prstGeom prst="ellipse">
@@ -18382,9 +18453,9 @@
           <p:nvPr/>
         </p:nvCxnSpPr>
         <p:spPr>
-          <a:xfrm flipV="1">
-            <a:off x="3291151" y="3923102"/>
-            <a:ext cx="559467" cy="376007"/>
+          <a:xfrm flipH="1" flipV="1">
+            <a:off x="3415287" y="3111280"/>
+            <a:ext cx="42806" cy="1136920"/>
           </a:xfrm>
           <a:prstGeom prst="line">
             <a:avLst/>
@@ -18420,7 +18491,7 @@
         </p:nvSpPr>
         <p:spPr>
           <a:xfrm>
-            <a:off x="3759178" y="3831662"/>
+            <a:off x="3323847" y="3019840"/>
             <a:ext cx="182880" cy="182880"/>
           </a:xfrm>
           <a:prstGeom prst="ellipse">
@@ -18467,9 +18538,9 @@
           <p:nvPr/>
         </p:nvCxnSpPr>
         <p:spPr>
-          <a:xfrm flipH="1" flipV="1">
-            <a:off x="3399735" y="3579698"/>
-            <a:ext cx="450883" cy="343404"/>
+          <a:xfrm flipH="1">
+            <a:off x="2500956" y="3111280"/>
+            <a:ext cx="914331" cy="395045"/>
           </a:xfrm>
           <a:prstGeom prst="line">
             <a:avLst/>
@@ -18505,7 +18576,7 @@
         </p:nvSpPr>
         <p:spPr>
           <a:xfrm>
-            <a:off x="3308295" y="3488258"/>
+            <a:off x="2409516" y="3414885"/>
             <a:ext cx="182880" cy="182880"/>
           </a:xfrm>
           <a:prstGeom prst="ellipse">
@@ -18552,9 +18623,9 @@
           <p:nvPr/>
         </p:nvCxnSpPr>
         <p:spPr>
-          <a:xfrm flipH="1">
-            <a:off x="3116127" y="3579698"/>
-            <a:ext cx="283608" cy="681101"/>
+          <a:xfrm>
+            <a:off x="2500956" y="3506325"/>
+            <a:ext cx="992426" cy="334916"/>
           </a:xfrm>
           <a:prstGeom prst="line">
             <a:avLst/>
@@ -18590,7 +18661,7 @@
         </p:nvSpPr>
         <p:spPr>
           <a:xfrm>
-            <a:off x="3024687" y="4169359"/>
+            <a:off x="3401942" y="3749801"/>
             <a:ext cx="182880" cy="182880"/>
           </a:xfrm>
           <a:prstGeom prst="ellipse">
@@ -18638,8 +18709,8 @@
         </p:nvCxnSpPr>
         <p:spPr>
           <a:xfrm flipH="1" flipV="1">
-            <a:off x="2688795" y="3030284"/>
-            <a:ext cx="427332" cy="1230515"/>
+            <a:off x="2452158" y="3068098"/>
+            <a:ext cx="1041224" cy="773143"/>
           </a:xfrm>
           <a:prstGeom prst="line">
             <a:avLst/>
@@ -18675,7 +18746,7 @@
         </p:nvSpPr>
         <p:spPr>
           <a:xfrm>
-            <a:off x="2597355" y="2938844"/>
+            <a:off x="2360718" y="2976658"/>
             <a:ext cx="182880" cy="182880"/>
           </a:xfrm>
           <a:prstGeom prst="ellipse">
@@ -18723,8 +18794,8 @@
         </p:nvCxnSpPr>
         <p:spPr>
           <a:xfrm>
-            <a:off x="2688795" y="3030284"/>
-            <a:ext cx="987339" cy="489319"/>
+            <a:off x="2452158" y="3068098"/>
+            <a:ext cx="403729" cy="793720"/>
           </a:xfrm>
           <a:prstGeom prst="line">
             <a:avLst/>
@@ -18760,7 +18831,7 @@
         </p:nvSpPr>
         <p:spPr>
           <a:xfrm>
-            <a:off x="3584694" y="3428163"/>
+            <a:off x="2764447" y="3770378"/>
             <a:ext cx="182880" cy="182880"/>
           </a:xfrm>
           <a:prstGeom prst="ellipse">
@@ -18807,9 +18878,9 @@
           <p:nvPr/>
         </p:nvCxnSpPr>
         <p:spPr>
-          <a:xfrm flipH="1">
-            <a:off x="2583343" y="3519603"/>
-            <a:ext cx="1092791" cy="1817209"/>
+          <a:xfrm>
+            <a:off x="2855887" y="3861818"/>
+            <a:ext cx="267397" cy="1591998"/>
           </a:xfrm>
           <a:prstGeom prst="line">
             <a:avLst/>
@@ -18845,7 +18916,7 @@
         </p:nvSpPr>
         <p:spPr>
           <a:xfrm>
-            <a:off x="2491903" y="5245372"/>
+            <a:off x="3031844" y="5362376"/>
             <a:ext cx="182880" cy="182880"/>
           </a:xfrm>
           <a:prstGeom prst="ellipse">
@@ -18893,7 +18964,7 @@
         </p:nvSpPr>
         <p:spPr>
           <a:xfrm>
-            <a:off x="2331883" y="5085352"/>
+            <a:off x="2871824" y="5202356"/>
             <a:ext cx="502920" cy="502920"/>
           </a:xfrm>
           <a:prstGeom prst="ellipse">
@@ -20579,7 +20650,7 @@
                 </a:solidFill>
                 <a:latin typeface="Consolas"/>
               </a:rPr>
-              <a:t>205 arquivos  ·  690 ligações  ·  medido no branch por grafo_repo.py</a:t>
+              <a:t>205 arquivos  ·  700 ligações  ·  medido no branch por grafo_repo.py</a:t>
             </a:r>
           </a:p>
         </p:txBody>
@@ -20592,7 +20663,7 @@
         </p:nvSpPr>
         <p:spPr>
           <a:xfrm>
-            <a:off x="2946411" y="4024372"/>
+            <a:off x="3032275" y="3979405"/>
             <a:ext cx="182880" cy="182880"/>
           </a:xfrm>
           <a:prstGeom prst="ellipse">
@@ -20639,9 +20710,9 @@
           <p:nvPr/>
         </p:nvCxnSpPr>
         <p:spPr>
-          <a:xfrm flipH="1">
-            <a:off x="1926259" y="4115812"/>
-            <a:ext cx="1111592" cy="715243"/>
+          <a:xfrm flipV="1">
+            <a:off x="3123715" y="2966173"/>
+            <a:ext cx="1452894" cy="1104672"/>
           </a:xfrm>
           <a:prstGeom prst="line">
             <a:avLst/>
@@ -20677,7 +20748,7 @@
         </p:nvSpPr>
         <p:spPr>
           <a:xfrm>
-            <a:off x="1834819" y="4739615"/>
+            <a:off x="4485169" y="2874733"/>
             <a:ext cx="182880" cy="182880"/>
           </a:xfrm>
           <a:prstGeom prst="ellipse">
@@ -20724,9 +20795,9 @@
           <p:nvPr/>
         </p:nvCxnSpPr>
         <p:spPr>
-          <a:xfrm flipV="1">
-            <a:off x="1926259" y="3779288"/>
-            <a:ext cx="17743" cy="1051767"/>
+          <a:xfrm flipH="1">
+            <a:off x="4229439" y="2966173"/>
+            <a:ext cx="347170" cy="1402079"/>
           </a:xfrm>
           <a:prstGeom prst="line">
             <a:avLst/>
@@ -20762,7 +20833,7 @@
         </p:nvSpPr>
         <p:spPr>
           <a:xfrm>
-            <a:off x="1852562" y="3687848"/>
+            <a:off x="4137999" y="4276812"/>
             <a:ext cx="182880" cy="182880"/>
           </a:xfrm>
           <a:prstGeom prst="ellipse">
@@ -20809,9 +20880,9 @@
           <p:nvPr/>
         </p:nvCxnSpPr>
         <p:spPr>
-          <a:xfrm>
-            <a:off x="1944002" y="3779288"/>
-            <a:ext cx="865626" cy="224418"/>
+          <a:xfrm flipH="1" flipV="1">
+            <a:off x="3322795" y="3741475"/>
+            <a:ext cx="906644" cy="626777"/>
           </a:xfrm>
           <a:prstGeom prst="line">
             <a:avLst/>
@@ -20847,7 +20918,7 @@
         </p:nvSpPr>
         <p:spPr>
           <a:xfrm>
-            <a:off x="2718188" y="3912266"/>
+            <a:off x="3231355" y="3650035"/>
             <a:ext cx="182880" cy="182880"/>
           </a:xfrm>
           <a:prstGeom prst="ellipse">
@@ -20895,8 +20966,8 @@
         </p:nvCxnSpPr>
         <p:spPr>
           <a:xfrm>
-            <a:off x="2809628" y="4003706"/>
-            <a:ext cx="481523" cy="295403"/>
+            <a:off x="3322795" y="3741475"/>
+            <a:ext cx="135298" cy="506725"/>
           </a:xfrm>
           <a:prstGeom prst="line">
             <a:avLst/>
@@ -20932,7 +21003,7 @@
         </p:nvSpPr>
         <p:spPr>
           <a:xfrm>
-            <a:off x="3199711" y="4207669"/>
+            <a:off x="3366653" y="4156760"/>
             <a:ext cx="182880" cy="182880"/>
           </a:xfrm>
           <a:prstGeom prst="ellipse">
@@ -20979,9 +21050,9 @@
           <p:nvPr/>
         </p:nvCxnSpPr>
         <p:spPr>
-          <a:xfrm flipV="1">
-            <a:off x="3291151" y="3923102"/>
-            <a:ext cx="559467" cy="376007"/>
+          <a:xfrm flipH="1" flipV="1">
+            <a:off x="3415287" y="3111280"/>
+            <a:ext cx="42806" cy="1136920"/>
           </a:xfrm>
           <a:prstGeom prst="line">
             <a:avLst/>
@@ -21017,7 +21088,7 @@
         </p:nvSpPr>
         <p:spPr>
           <a:xfrm>
-            <a:off x="3759178" y="3831662"/>
+            <a:off x="3323847" y="3019840"/>
             <a:ext cx="182880" cy="182880"/>
           </a:xfrm>
           <a:prstGeom prst="ellipse">
@@ -21064,9 +21135,9 @@
           <p:nvPr/>
         </p:nvCxnSpPr>
         <p:spPr>
-          <a:xfrm flipH="1" flipV="1">
-            <a:off x="3399735" y="3579698"/>
-            <a:ext cx="450883" cy="343404"/>
+          <a:xfrm flipH="1">
+            <a:off x="2500956" y="3111280"/>
+            <a:ext cx="914331" cy="395045"/>
           </a:xfrm>
           <a:prstGeom prst="line">
             <a:avLst/>
@@ -21102,7 +21173,7 @@
         </p:nvSpPr>
         <p:spPr>
           <a:xfrm>
-            <a:off x="3308295" y="3488258"/>
+            <a:off x="2409516" y="3414885"/>
             <a:ext cx="182880" cy="182880"/>
           </a:xfrm>
           <a:prstGeom prst="ellipse">
@@ -21149,9 +21220,9 @@
           <p:nvPr/>
         </p:nvCxnSpPr>
         <p:spPr>
-          <a:xfrm flipH="1">
-            <a:off x="3116127" y="3579698"/>
-            <a:ext cx="283608" cy="681101"/>
+          <a:xfrm>
+            <a:off x="2500956" y="3506325"/>
+            <a:ext cx="992426" cy="334916"/>
           </a:xfrm>
           <a:prstGeom prst="line">
             <a:avLst/>
@@ -21187,7 +21258,7 @@
         </p:nvSpPr>
         <p:spPr>
           <a:xfrm>
-            <a:off x="3024687" y="4169359"/>
+            <a:off x="3401942" y="3749801"/>
             <a:ext cx="182880" cy="182880"/>
           </a:xfrm>
           <a:prstGeom prst="ellipse">
@@ -21235,8 +21306,8 @@
         </p:nvCxnSpPr>
         <p:spPr>
           <a:xfrm flipH="1" flipV="1">
-            <a:off x="2688795" y="3030284"/>
-            <a:ext cx="427332" cy="1230515"/>
+            <a:off x="2452158" y="3068098"/>
+            <a:ext cx="1041224" cy="773143"/>
           </a:xfrm>
           <a:prstGeom prst="line">
             <a:avLst/>
@@ -21272,7 +21343,7 @@
         </p:nvSpPr>
         <p:spPr>
           <a:xfrm>
-            <a:off x="2597355" y="2938844"/>
+            <a:off x="2360718" y="2976658"/>
             <a:ext cx="182880" cy="182880"/>
           </a:xfrm>
           <a:prstGeom prst="ellipse">
@@ -21320,8 +21391,8 @@
         </p:nvCxnSpPr>
         <p:spPr>
           <a:xfrm>
-            <a:off x="2688795" y="3030284"/>
-            <a:ext cx="987339" cy="489319"/>
+            <a:off x="2452158" y="3068098"/>
+            <a:ext cx="403729" cy="793720"/>
           </a:xfrm>
           <a:prstGeom prst="line">
             <a:avLst/>
@@ -21357,7 +21428,7 @@
         </p:nvSpPr>
         <p:spPr>
           <a:xfrm>
-            <a:off x="3584694" y="3428163"/>
+            <a:off x="2764447" y="3770378"/>
             <a:ext cx="182880" cy="182880"/>
           </a:xfrm>
           <a:prstGeom prst="ellipse">
@@ -21404,9 +21475,9 @@
           <p:nvPr/>
         </p:nvCxnSpPr>
         <p:spPr>
-          <a:xfrm flipH="1">
-            <a:off x="2583343" y="3519603"/>
-            <a:ext cx="1092791" cy="1817209"/>
+          <a:xfrm>
+            <a:off x="2855887" y="3861818"/>
+            <a:ext cx="267397" cy="1591998"/>
           </a:xfrm>
           <a:prstGeom prst="line">
             <a:avLst/>
@@ -21442,7 +21513,7 @@
         </p:nvSpPr>
         <p:spPr>
           <a:xfrm>
-            <a:off x="2491903" y="5245372"/>
+            <a:off x="3031844" y="5362376"/>
             <a:ext cx="182880" cy="182880"/>
           </a:xfrm>
           <a:prstGeom prst="ellipse">
@@ -22505,6 +22576,6220 @@
       </p:transition>
     </mc:Fallback>
   </mc:AlternateContent>
+</p:sld>
+</file>
+
+<file path=ppt/slides/slide17.xml><?xml version="1.0" encoding="utf-8"?>
+<p:sld xmlns:a="http://schemas.openxmlformats.org/drawingml/2006/main" xmlns:p="http://schemas.openxmlformats.org/presentationml/2006/main" xmlns:r="http://schemas.openxmlformats.org/officeDocument/2006/relationships">
+  <p:cSld>
+    <p:bg>
+      <p:bgPr>
+        <a:gradFill rotWithShape="1">
+          <a:gsLst>
+            <a:gs pos="0">
+              <a:srgbClr val="10203A"/>
+            </a:gs>
+            <a:gs pos="55000">
+              <a:srgbClr val="0A1325"/>
+            </a:gs>
+            <a:gs pos="100000">
+              <a:srgbClr val="04070E"/>
+            </a:gs>
+          </a:gsLst>
+          <a:path path="circle">
+            <a:fillToRect l="38000" r="62000" b="100000"/>
+          </a:path>
+        </a:gradFill>
+        <a:effectLst/>
+      </p:bgPr>
+    </p:bg>
+    <p:spTree>
+      <p:nvGrpSpPr>
+        <p:cNvPr id="1" name=""/>
+        <p:cNvGrpSpPr/>
+        <p:nvPr/>
+      </p:nvGrpSpPr>
+      <p:grpSpPr/>
+      <p:sp>
+        <p:nvSpPr>
+          <p:cNvPr id="2" name="!!glow_tl"/>
+          <p:cNvSpPr/>
+          <p:nvPr/>
+        </p:nvSpPr>
+        <p:spPr>
+          <a:xfrm>
+            <a:off x="-2600000" y="-2200000"/>
+            <a:ext cx="7000000" cy="5200000"/>
+          </a:xfrm>
+          <a:prstGeom prst="ellipse">
+            <a:avLst/>
+          </a:prstGeom>
+          <a:gradFill rotWithShape="1">
+            <a:gsLst>
+              <a:gs pos="0">
+                <a:srgbClr val="4F8EF7">
+                  <a:alpha val="10000"/>
+                </a:srgbClr>
+              </a:gs>
+              <a:gs pos="45000">
+                <a:srgbClr val="4F8EF7">
+                  <a:alpha val="4000"/>
+                </a:srgbClr>
+              </a:gs>
+              <a:gs pos="80000">
+                <a:srgbClr val="4F8EF7">
+                  <a:alpha val="1000"/>
+                </a:srgbClr>
+              </a:gs>
+              <a:gs pos="100000">
+                <a:srgbClr val="4F8EF7">
+                  <a:alpha val="0"/>
+                </a:srgbClr>
+              </a:gs>
+            </a:gsLst>
+            <a:path path="circle">
+              <a:fillToRect l="50000" t="50000" r="50000" b="50000"/>
+            </a:path>
+          </a:gradFill>
+          <a:ln>
+            <a:noFill/>
+          </a:ln>
+        </p:spPr>
+        <p:style>
+          <a:lnRef idx="1">
+            <a:schemeClr val="accent1"/>
+          </a:lnRef>
+          <a:fillRef idx="3">
+            <a:schemeClr val="accent1"/>
+          </a:fillRef>
+          <a:effectRef idx="2">
+            <a:schemeClr val="accent1"/>
+          </a:effectRef>
+          <a:fontRef idx="minor">
+            <a:schemeClr val="lt1"/>
+          </a:fontRef>
+        </p:style>
+        <p:txBody>
+          <a:bodyPr rtlCol="0" anchor="ctr"/>
+          <a:lstStyle/>
+          <a:p/>
+        </p:txBody>
+      </p:sp>
+      <p:sp>
+        <p:nvSpPr>
+          <p:cNvPr id="3" name="!!glow_br"/>
+          <p:cNvSpPr/>
+          <p:nvPr/>
+        </p:nvSpPr>
+        <p:spPr>
+          <a:xfrm>
+            <a:off x="8200000" y="4600000"/>
+            <a:ext cx="7000000" cy="5200000"/>
+          </a:xfrm>
+          <a:prstGeom prst="ellipse">
+            <a:avLst/>
+          </a:prstGeom>
+          <a:gradFill rotWithShape="1">
+            <a:gsLst>
+              <a:gs pos="0">
+                <a:srgbClr val="FFB531">
+                  <a:alpha val="7000"/>
+                </a:srgbClr>
+              </a:gs>
+              <a:gs pos="45000">
+                <a:srgbClr val="FFB531">
+                  <a:alpha val="2800"/>
+                </a:srgbClr>
+              </a:gs>
+              <a:gs pos="80000">
+                <a:srgbClr val="FFB531">
+                  <a:alpha val="1000"/>
+                </a:srgbClr>
+              </a:gs>
+              <a:gs pos="100000">
+                <a:srgbClr val="FFB531">
+                  <a:alpha val="0"/>
+                </a:srgbClr>
+              </a:gs>
+            </a:gsLst>
+            <a:path path="circle">
+              <a:fillToRect l="50000" t="50000" r="50000" b="50000"/>
+            </a:path>
+          </a:gradFill>
+          <a:ln>
+            <a:noFill/>
+          </a:ln>
+        </p:spPr>
+        <p:style>
+          <a:lnRef idx="1">
+            <a:schemeClr val="accent1"/>
+          </a:lnRef>
+          <a:fillRef idx="3">
+            <a:schemeClr val="accent1"/>
+          </a:fillRef>
+          <a:effectRef idx="2">
+            <a:schemeClr val="accent1"/>
+          </a:effectRef>
+          <a:fontRef idx="minor">
+            <a:schemeClr val="lt1"/>
+          </a:fontRef>
+        </p:style>
+        <p:txBody>
+          <a:bodyPr rtlCol="0" anchor="ctr"/>
+          <a:lstStyle/>
+          <a:p/>
+        </p:txBody>
+      </p:sp>
+      <p:sp>
+        <p:nvSpPr>
+          <p:cNvPr id="4" name="!!ghost"/>
+          <p:cNvSpPr txBox="1"/>
+          <p:nvPr/>
+        </p:nvSpPr>
+        <p:spPr>
+          <a:xfrm>
+            <a:off x="6900062" y="-230428"/>
+            <a:ext cx="4949647" cy="1999792"/>
+          </a:xfrm>
+          <a:prstGeom prst="rect">
+            <a:avLst/>
+          </a:prstGeom>
+          <a:noFill/>
+        </p:spPr>
+        <p:txBody>
+          <a:bodyPr wrap="none" lIns="0" rIns="0" tIns="0" bIns="0" anchor="t">
+            <a:spAutoFit/>
+          </a:bodyPr>
+          <a:lstStyle/>
+          <a:p>
+            <a:pPr algn="r">
+              <a:lnSpc>
+                <a:spcPct val="100000"/>
+              </a:lnSpc>
+              <a:spcBef>
+                <a:spcPts val="0"/>
+              </a:spcBef>
+              <a:spcAft>
+                <a:spcPts val="0"/>
+              </a:spcAft>
+            </a:pPr>
+            <a:r>
+              <a:rPr sz="15000" b="0" i="0">
+                <a:solidFill>
+                  <a:srgbClr val="101A2E"/>
+                </a:solidFill>
+                <a:latin typeface="Bahnschrift SemiBold Condensed"/>
+              </a:rPr>
+              <a:t>13</a:t>
+            </a:r>
+          </a:p>
+        </p:txBody>
+      </p:sp>
+      <p:sp>
+        <p:nvSpPr>
+          <p:cNvPr id="5" name="!!tick"/>
+          <p:cNvSpPr/>
+          <p:nvPr/>
+        </p:nvSpPr>
+        <p:spPr>
+          <a:xfrm>
+            <a:off x="603504" y="446024"/>
+            <a:ext cx="45720" cy="164592"/>
+          </a:xfrm>
+          <a:prstGeom prst="rect">
+            <a:avLst/>
+          </a:prstGeom>
+          <a:solidFill>
+            <a:srgbClr val="FFB531"/>
+          </a:solidFill>
+          <a:ln>
+            <a:noFill/>
+          </a:ln>
+        </p:spPr>
+        <p:style>
+          <a:lnRef idx="1">
+            <a:schemeClr val="accent1"/>
+          </a:lnRef>
+          <a:fillRef idx="3">
+            <a:schemeClr val="accent1"/>
+          </a:fillRef>
+          <a:effectRef idx="2">
+            <a:schemeClr val="accent1"/>
+          </a:effectRef>
+          <a:fontRef idx="minor">
+            <a:schemeClr val="lt1"/>
+          </a:fontRef>
+        </p:style>
+        <p:txBody>
+          <a:bodyPr rtlCol="0" anchor="ctr"/>
+          <a:lstStyle/>
+          <a:p>
+            <a:pPr algn="ctr"/>
+          </a:p>
+        </p:txBody>
+      </p:sp>
+      <p:sp>
+        <p:nvSpPr>
+          <p:cNvPr id="6" name="s13_4"/>
+          <p:cNvSpPr txBox="1"/>
+          <p:nvPr/>
+        </p:nvSpPr>
+        <p:spPr>
+          <a:xfrm>
+            <a:off x="731520" y="427024"/>
+            <a:ext cx="7315200" cy="202996"/>
+          </a:xfrm>
+          <a:prstGeom prst="rect">
+            <a:avLst/>
+          </a:prstGeom>
+          <a:noFill/>
+        </p:spPr>
+        <p:txBody>
+          <a:bodyPr wrap="square" lIns="0" rIns="0" tIns="0" bIns="0" anchor="ctr">
+            <a:spAutoFit/>
+          </a:bodyPr>
+          <a:lstStyle/>
+          <a:p>
+            <a:pPr algn="l">
+              <a:lnSpc>
+                <a:spcPct val="100000"/>
+              </a:lnSpc>
+              <a:spcBef>
+                <a:spcPts val="0"/>
+              </a:spcBef>
+              <a:spcAft>
+                <a:spcPts val="0"/>
+              </a:spcAft>
+            </a:pPr>
+            <a:r>
+              <a:rPr sz="1200" b="1" i="0" spc="300">
+                <a:solidFill>
+                  <a:srgbClr val="FFB531"/>
+                </a:solidFill>
+                <a:latin typeface="Consolas"/>
+              </a:rPr>
+              <a:t>KAIROS</a:t>
+            </a:r>
+            <a:r>
+              <a:rPr sz="1100" b="0" i="0" spc="72">
+                <a:solidFill>
+                  <a:srgbClr val="8395B5"/>
+                </a:solidFill>
+                <a:latin typeface="Consolas"/>
+              </a:rPr>
+              <a:t>   IA em números</a:t>
+            </a:r>
+          </a:p>
+        </p:txBody>
+      </p:sp>
+      <p:sp>
+        <p:nvSpPr>
+          <p:cNvPr id="7" name="s13_5"/>
+          <p:cNvSpPr txBox="1"/>
+          <p:nvPr/>
+        </p:nvSpPr>
+        <p:spPr>
+          <a:xfrm>
+            <a:off x="0" y="467258"/>
+            <a:ext cx="11457432" cy="152704"/>
+          </a:xfrm>
+          <a:prstGeom prst="rect">
+            <a:avLst/>
+          </a:prstGeom>
+          <a:noFill/>
+        </p:spPr>
+        <p:txBody>
+          <a:bodyPr wrap="square" lIns="0" rIns="0" tIns="0" bIns="0" anchor="ctr">
+            <a:spAutoFit/>
+          </a:bodyPr>
+          <a:lstStyle/>
+          <a:p>
+            <a:pPr algn="r">
+              <a:lnSpc>
+                <a:spcPct val="100000"/>
+              </a:lnSpc>
+              <a:spcBef>
+                <a:spcPts val="0"/>
+              </a:spcBef>
+              <a:spcAft>
+                <a:spcPts val="0"/>
+              </a:spcAft>
+            </a:pPr>
+            <a:r>
+              <a:rPr sz="900" b="0" i="0" spc="45">
+                <a:solidFill>
+                  <a:srgbClr val="8395B5"/>
+                </a:solidFill>
+                <a:latin typeface="Consolas"/>
+              </a:rPr>
+              <a:t>13</a:t>
+            </a:r>
+          </a:p>
+        </p:txBody>
+      </p:sp>
+      <p:cxnSp>
+        <p:nvCxnSpPr>
+          <p:cNvPr id="8" name="s13_6"/>
+          <p:cNvCxnSpPr/>
+          <p:nvPr/>
+        </p:nvCxnSpPr>
+        <p:spPr>
+          <a:xfrm>
+            <a:off x="731520" y="705002"/>
+            <a:ext cx="10725912" cy="0"/>
+          </a:xfrm>
+          <a:prstGeom prst="line">
+            <a:avLst/>
+          </a:prstGeom>
+          <a:ln w="12700">
+            <a:gradFill rotWithShape="1">
+              <a:gsLst>
+                <a:gs pos="0">
+                  <a:srgbClr val="FFB531"/>
+                </a:gs>
+                <a:gs pos="30000">
+                  <a:srgbClr val="2A3F63"/>
+                </a:gs>
+                <a:gs pos="100000">
+                  <a:srgbClr val="2A3F63">
+                    <a:alpha val="30000"/>
+                  </a:srgbClr>
+                </a:gs>
+              </a:gsLst>
+              <a:lin ang="0" scaled="0"/>
+            </a:gradFill>
+          </a:ln>
+        </p:spPr>
+        <p:style>
+          <a:lnRef idx="2">
+            <a:schemeClr val="accent1"/>
+          </a:lnRef>
+          <a:fillRef idx="0">
+            <a:schemeClr val="accent1"/>
+          </a:fillRef>
+          <a:effectRef idx="1">
+            <a:schemeClr val="accent1"/>
+          </a:effectRef>
+          <a:fontRef idx="minor">
+            <a:schemeClr val="tx1"/>
+          </a:fontRef>
+        </p:style>
+      </p:cxnSp>
+      <p:sp>
+        <p:nvSpPr>
+          <p:cNvPr id="9" name="s13_7"/>
+          <p:cNvSpPr txBox="1"/>
+          <p:nvPr/>
+        </p:nvSpPr>
+        <p:spPr>
+          <a:xfrm>
+            <a:off x="731520" y="850392"/>
+            <a:ext cx="10725911" cy="640080"/>
+          </a:xfrm>
+          <a:prstGeom prst="rect">
+            <a:avLst/>
+          </a:prstGeom>
+          <a:noFill/>
+        </p:spPr>
+        <p:txBody>
+          <a:bodyPr wrap="square" lIns="0" rIns="0" tIns="0" bIns="0" anchor="t">
+            <a:spAutoFit/>
+          </a:bodyPr>
+          <a:lstStyle/>
+          <a:p>
+            <a:pPr algn="l">
+              <a:lnSpc>
+                <a:spcPct val="100000"/>
+              </a:lnSpc>
+              <a:spcBef>
+                <a:spcPts val="0"/>
+              </a:spcBef>
+              <a:spcAft>
+                <a:spcPts val="0"/>
+              </a:spcAft>
+            </a:pPr>
+            <a:r>
+              <a:rPr sz="2000" b="0" i="0">
+                <a:solidFill>
+                  <a:srgbClr val="F5F7FB"/>
+                </a:solidFill>
+                <a:latin typeface="Bahnschrift SemiBold"/>
+              </a:rPr>
+              <a:t>Medimos o uso de IA como medimos a estratégia: pelo registro.</a:t>
+            </a:r>
+          </a:p>
+        </p:txBody>
+      </p:sp>
+      <p:cxnSp>
+        <p:nvCxnSpPr>
+          <p:cNvPr id="10" name="s13_8"/>
+          <p:cNvCxnSpPr/>
+          <p:nvPr/>
+        </p:nvCxnSpPr>
+        <p:spPr>
+          <a:xfrm>
+            <a:off x="731520" y="6553504"/>
+            <a:ext cx="10725912" cy="0"/>
+          </a:xfrm>
+          <a:prstGeom prst="line">
+            <a:avLst/>
+          </a:prstGeom>
+          <a:ln w="9525">
+            <a:solidFill>
+              <a:srgbClr val="2A3F63"/>
+            </a:solidFill>
+          </a:ln>
+        </p:spPr>
+        <p:style>
+          <a:lnRef idx="2">
+            <a:schemeClr val="accent1"/>
+          </a:lnRef>
+          <a:fillRef idx="0">
+            <a:schemeClr val="accent1"/>
+          </a:fillRef>
+          <a:effectRef idx="1">
+            <a:schemeClr val="accent1"/>
+          </a:effectRef>
+          <a:fontRef idx="minor">
+            <a:schemeClr val="tx1"/>
+          </a:fontRef>
+        </p:style>
+      </p:cxnSp>
+      <p:sp>
+        <p:nvSpPr>
+          <p:cNvPr id="11" name="!!foot_l"/>
+          <p:cNvSpPr txBox="1"/>
+          <p:nvPr/>
+        </p:nvSpPr>
+        <p:spPr>
+          <a:xfrm>
+            <a:off x="731520" y="6653174"/>
+            <a:ext cx="5998464" cy="160020"/>
+          </a:xfrm>
+          <a:prstGeom prst="rect">
+            <a:avLst/>
+          </a:prstGeom>
+          <a:noFill/>
+        </p:spPr>
+        <p:txBody>
+          <a:bodyPr wrap="none" lIns="0" rIns="0" tIns="0" bIns="0" anchor="t">
+            <a:spAutoFit/>
+          </a:bodyPr>
+          <a:lstStyle/>
+          <a:p>
+            <a:pPr algn="l">
+              <a:lnSpc>
+                <a:spcPct val="100000"/>
+              </a:lnSpc>
+              <a:spcBef>
+                <a:spcPts val="0"/>
+              </a:spcBef>
+              <a:spcAft>
+                <a:spcPts val="0"/>
+              </a:spcAft>
+            </a:pPr>
+            <a:r>
+              <a:rPr sz="700" b="0" i="0" spc="120">
+                <a:solidFill>
+                  <a:srgbClr val="58698A"/>
+                </a:solidFill>
+                <a:latin typeface="Consolas"/>
+              </a:rPr>
+              <a:t>ITAÚ QUANT AI CHALLENGE  ·  FINAL 2026</a:t>
+            </a:r>
+          </a:p>
+        </p:txBody>
+      </p:sp>
+      <p:sp>
+        <p:nvSpPr>
+          <p:cNvPr id="12" name="!!foot_r"/>
+          <p:cNvSpPr txBox="1"/>
+          <p:nvPr/>
+        </p:nvSpPr>
+        <p:spPr>
+          <a:xfrm>
+            <a:off x="5457139" y="6653174"/>
+            <a:ext cx="5998464" cy="160020"/>
+          </a:xfrm>
+          <a:prstGeom prst="rect">
+            <a:avLst/>
+          </a:prstGeom>
+          <a:noFill/>
+        </p:spPr>
+        <p:txBody>
+          <a:bodyPr wrap="none" lIns="0" rIns="0" tIns="0" bIns="0" anchor="t">
+            <a:spAutoFit/>
+          </a:bodyPr>
+          <a:lstStyle/>
+          <a:p>
+            <a:pPr algn="r">
+              <a:lnSpc>
+                <a:spcPct val="100000"/>
+              </a:lnSpc>
+              <a:spcBef>
+                <a:spcPts val="0"/>
+              </a:spcBef>
+              <a:spcAft>
+                <a:spcPts val="0"/>
+              </a:spcAft>
+            </a:pPr>
+            <a:r>
+              <a:rPr sz="700" b="0" i="0" spc="120">
+                <a:solidFill>
+                  <a:srgbClr val="58698A"/>
+                </a:solidFill>
+                <a:latin typeface="Consolas"/>
+              </a:rPr>
+              <a:t>BLACK-LITTERMAN  ×  POLYMARKET</a:t>
+            </a:r>
+          </a:p>
+        </p:txBody>
+      </p:sp>
+      <p:sp>
+        <p:nvSpPr>
+          <p:cNvPr id="13" name="s13_11"/>
+          <p:cNvSpPr/>
+          <p:nvPr/>
+        </p:nvSpPr>
+        <p:spPr>
+          <a:xfrm>
+            <a:off x="731520" y="1554480"/>
+            <a:ext cx="1245870" cy="896112"/>
+          </a:xfrm>
+          <a:prstGeom prst="roundRect">
+            <a:avLst>
+              <a:gd name="adj" fmla="val 4000"/>
+            </a:avLst>
+          </a:prstGeom>
+          <a:gradFill rotWithShape="1">
+            <a:gsLst>
+              <a:gs pos="0">
+                <a:srgbClr val="182946"/>
+              </a:gs>
+              <a:gs pos="100000">
+                <a:srgbClr val="0F182B"/>
+              </a:gs>
+            </a:gsLst>
+            <a:lin ang="5400000" scaled="0"/>
+          </a:gradFill>
+          <a:ln w="9525">
+            <a:gradFill rotWithShape="1">
+              <a:gsLst>
+                <a:gs pos="0">
+                  <a:srgbClr val="35507A"/>
+                </a:gs>
+                <a:gs pos="100000">
+                  <a:srgbClr val="22345A"/>
+                </a:gs>
+              </a:gsLst>
+              <a:lin ang="5400000" scaled="0"/>
+            </a:gradFill>
+          </a:ln>
+          <a:effectLst/>
+        </p:spPr>
+        <p:style>
+          <a:lnRef idx="1">
+            <a:schemeClr val="accent1"/>
+          </a:lnRef>
+          <a:fillRef idx="3">
+            <a:schemeClr val="accent1"/>
+          </a:fillRef>
+          <a:effectRef idx="2">
+            <a:schemeClr val="accent1"/>
+          </a:effectRef>
+          <a:fontRef idx="minor">
+            <a:schemeClr val="lt1"/>
+          </a:fontRef>
+        </p:style>
+        <p:txBody>
+          <a:bodyPr rtlCol="0" anchor="ctr"/>
+          <a:lstStyle/>
+          <a:p/>
+        </p:txBody>
+      </p:sp>
+      <p:sp>
+        <p:nvSpPr>
+          <p:cNvPr id="14" name="s13_12"/>
+          <p:cNvSpPr txBox="1"/>
+          <p:nvPr/>
+        </p:nvSpPr>
+        <p:spPr>
+          <a:xfrm>
+            <a:off x="877824" y="1609344"/>
+            <a:ext cx="971550" cy="457200"/>
+          </a:xfrm>
+          <a:prstGeom prst="rect">
+            <a:avLst/>
+          </a:prstGeom>
+          <a:noFill/>
+        </p:spPr>
+        <p:txBody>
+          <a:bodyPr wrap="square" lIns="0" rIns="0" tIns="0" bIns="0" anchor="t">
+            <a:spAutoFit/>
+          </a:bodyPr>
+          <a:lstStyle/>
+          <a:p>
+            <a:pPr algn="l">
+              <a:lnSpc>
+                <a:spcPct val="100000"/>
+              </a:lnSpc>
+              <a:spcBef>
+                <a:spcPts val="0"/>
+              </a:spcBef>
+              <a:spcAft>
+                <a:spcPts val="0"/>
+              </a:spcAft>
+            </a:pPr>
+            <a:r>
+              <a:rPr sz="2600" b="0" i="0">
+                <a:solidFill>
+                  <a:srgbClr val="FFB531"/>
+                </a:solidFill>
+                <a:latin typeface="Bahnschrift SemiBold Condensed"/>
+              </a:rPr>
+              <a:t>91</a:t>
+            </a:r>
+          </a:p>
+        </p:txBody>
+      </p:sp>
+      <p:sp>
+        <p:nvSpPr>
+          <p:cNvPr id="15" name="s13_13"/>
+          <p:cNvSpPr txBox="1"/>
+          <p:nvPr/>
+        </p:nvSpPr>
+        <p:spPr>
+          <a:xfrm>
+            <a:off x="877824" y="2048256"/>
+            <a:ext cx="971550" cy="182880"/>
+          </a:xfrm>
+          <a:prstGeom prst="rect">
+            <a:avLst/>
+          </a:prstGeom>
+          <a:noFill/>
+        </p:spPr>
+        <p:txBody>
+          <a:bodyPr wrap="none" lIns="0" rIns="0" tIns="0" bIns="0" anchor="t">
+            <a:spAutoFit/>
+          </a:bodyPr>
+          <a:lstStyle/>
+          <a:p>
+            <a:pPr algn="l">
+              <a:lnSpc>
+                <a:spcPct val="100000"/>
+              </a:lnSpc>
+              <a:spcBef>
+                <a:spcPts val="0"/>
+              </a:spcBef>
+              <a:spcAft>
+                <a:spcPts val="0"/>
+              </a:spcAft>
+            </a:pPr>
+            <a:r>
+              <a:rPr sz="650" b="1" i="0" spc="40">
+                <a:solidFill>
+                  <a:srgbClr val="F5F7FB"/>
+                </a:solidFill>
+                <a:latin typeface="Consolas"/>
+              </a:rPr>
+              <a:t>SESSÕES DE IA</a:t>
+            </a:r>
+          </a:p>
+        </p:txBody>
+      </p:sp>
+      <p:sp>
+        <p:nvSpPr>
+          <p:cNvPr id="16" name="s13_14"/>
+          <p:cNvSpPr txBox="1"/>
+          <p:nvPr/>
+        </p:nvSpPr>
+        <p:spPr>
+          <a:xfrm>
+            <a:off x="877824" y="2212848"/>
+            <a:ext cx="971550" cy="182880"/>
+          </a:xfrm>
+          <a:prstGeom prst="rect">
+            <a:avLst/>
+          </a:prstGeom>
+          <a:noFill/>
+        </p:spPr>
+        <p:txBody>
+          <a:bodyPr wrap="none" lIns="0" rIns="0" tIns="0" bIns="0" anchor="t">
+            <a:spAutoFit/>
+          </a:bodyPr>
+          <a:lstStyle/>
+          <a:p>
+            <a:pPr algn="l">
+              <a:lnSpc>
+                <a:spcPct val="100000"/>
+              </a:lnSpc>
+              <a:spcBef>
+                <a:spcPts val="0"/>
+              </a:spcBef>
+              <a:spcAft>
+                <a:spcPts val="0"/>
+              </a:spcAft>
+            </a:pPr>
+            <a:r>
+              <a:rPr sz="750" b="0" i="0">
+                <a:solidFill>
+                  <a:srgbClr val="8395B5"/>
+                </a:solidFill>
+                <a:latin typeface="Bahnschrift SemiLight"/>
+              </a:rPr>
+              <a:t>Felipe 55 · Lia 18 · Paulo 18</a:t>
+            </a:r>
+          </a:p>
+        </p:txBody>
+      </p:sp>
+      <p:sp>
+        <p:nvSpPr>
+          <p:cNvPr id="17" name="s13_15"/>
+          <p:cNvSpPr/>
+          <p:nvPr/>
+        </p:nvSpPr>
+        <p:spPr>
+          <a:xfrm>
+            <a:off x="2068830" y="1554480"/>
+            <a:ext cx="1245870" cy="896112"/>
+          </a:xfrm>
+          <a:prstGeom prst="roundRect">
+            <a:avLst>
+              <a:gd name="adj" fmla="val 4000"/>
+            </a:avLst>
+          </a:prstGeom>
+          <a:gradFill rotWithShape="1">
+            <a:gsLst>
+              <a:gs pos="0">
+                <a:srgbClr val="182946"/>
+              </a:gs>
+              <a:gs pos="100000">
+                <a:srgbClr val="0F182B"/>
+              </a:gs>
+            </a:gsLst>
+            <a:lin ang="5400000" scaled="0"/>
+          </a:gradFill>
+          <a:ln w="9525">
+            <a:gradFill rotWithShape="1">
+              <a:gsLst>
+                <a:gs pos="0">
+                  <a:srgbClr val="35507A"/>
+                </a:gs>
+                <a:gs pos="100000">
+                  <a:srgbClr val="22345A"/>
+                </a:gs>
+              </a:gsLst>
+              <a:lin ang="5400000" scaled="0"/>
+            </a:gradFill>
+          </a:ln>
+          <a:effectLst/>
+        </p:spPr>
+        <p:style>
+          <a:lnRef idx="1">
+            <a:schemeClr val="accent1"/>
+          </a:lnRef>
+          <a:fillRef idx="3">
+            <a:schemeClr val="accent1"/>
+          </a:fillRef>
+          <a:effectRef idx="2">
+            <a:schemeClr val="accent1"/>
+          </a:effectRef>
+          <a:fontRef idx="minor">
+            <a:schemeClr val="lt1"/>
+          </a:fontRef>
+        </p:style>
+        <p:txBody>
+          <a:bodyPr rtlCol="0" anchor="ctr"/>
+          <a:lstStyle/>
+          <a:p/>
+        </p:txBody>
+      </p:sp>
+      <p:sp>
+        <p:nvSpPr>
+          <p:cNvPr id="18" name="s13_16"/>
+          <p:cNvSpPr txBox="1"/>
+          <p:nvPr/>
+        </p:nvSpPr>
+        <p:spPr>
+          <a:xfrm>
+            <a:off x="2215134" y="1609344"/>
+            <a:ext cx="971550" cy="457200"/>
+          </a:xfrm>
+          <a:prstGeom prst="rect">
+            <a:avLst/>
+          </a:prstGeom>
+          <a:noFill/>
+        </p:spPr>
+        <p:txBody>
+          <a:bodyPr wrap="square" lIns="0" rIns="0" tIns="0" bIns="0" anchor="t">
+            <a:spAutoFit/>
+          </a:bodyPr>
+          <a:lstStyle/>
+          <a:p>
+            <a:pPr algn="l">
+              <a:lnSpc>
+                <a:spcPct val="100000"/>
+              </a:lnSpc>
+              <a:spcBef>
+                <a:spcPts val="0"/>
+              </a:spcBef>
+              <a:spcAft>
+                <a:spcPts val="0"/>
+              </a:spcAft>
+            </a:pPr>
+            <a:r>
+              <a:rPr sz="2600" b="0" i="0">
+                <a:solidFill>
+                  <a:srgbClr val="FFB531"/>
+                </a:solidFill>
+                <a:latin typeface="Bahnschrift SemiBold Condensed"/>
+              </a:rPr>
+              <a:t>232k</a:t>
+            </a:r>
+          </a:p>
+        </p:txBody>
+      </p:sp>
+      <p:sp>
+        <p:nvSpPr>
+          <p:cNvPr id="19" name="s13_17"/>
+          <p:cNvSpPr txBox="1"/>
+          <p:nvPr/>
+        </p:nvSpPr>
+        <p:spPr>
+          <a:xfrm>
+            <a:off x="2215134" y="2048256"/>
+            <a:ext cx="971550" cy="182880"/>
+          </a:xfrm>
+          <a:prstGeom prst="rect">
+            <a:avLst/>
+          </a:prstGeom>
+          <a:noFill/>
+        </p:spPr>
+        <p:txBody>
+          <a:bodyPr wrap="none" lIns="0" rIns="0" tIns="0" bIns="0" anchor="t">
+            <a:spAutoFit/>
+          </a:bodyPr>
+          <a:lstStyle/>
+          <a:p>
+            <a:pPr algn="l">
+              <a:lnSpc>
+                <a:spcPct val="100000"/>
+              </a:lnSpc>
+              <a:spcBef>
+                <a:spcPts val="0"/>
+              </a:spcBef>
+              <a:spcAft>
+                <a:spcPts val="0"/>
+              </a:spcAft>
+            </a:pPr>
+            <a:r>
+              <a:rPr sz="650" b="1" i="0" spc="40">
+                <a:solidFill>
+                  <a:srgbClr val="F5F7FB"/>
+                </a:solidFill>
+                <a:latin typeface="Consolas"/>
+              </a:rPr>
+              <a:t>TOKENS POR SESSÃO</a:t>
+            </a:r>
+          </a:p>
+        </p:txBody>
+      </p:sp>
+      <p:sp>
+        <p:nvSpPr>
+          <p:cNvPr id="20" name="s13_18"/>
+          <p:cNvSpPr txBox="1"/>
+          <p:nvPr/>
+        </p:nvSpPr>
+        <p:spPr>
+          <a:xfrm>
+            <a:off x="2215134" y="2212848"/>
+            <a:ext cx="971550" cy="182880"/>
+          </a:xfrm>
+          <a:prstGeom prst="rect">
+            <a:avLst/>
+          </a:prstGeom>
+          <a:noFill/>
+        </p:spPr>
+        <p:txBody>
+          <a:bodyPr wrap="none" lIns="0" rIns="0" tIns="0" bIns="0" anchor="t">
+            <a:spAutoFit/>
+          </a:bodyPr>
+          <a:lstStyle/>
+          <a:p>
+            <a:pPr algn="l">
+              <a:lnSpc>
+                <a:spcPct val="100000"/>
+              </a:lnSpc>
+              <a:spcBef>
+                <a:spcPts val="0"/>
+              </a:spcBef>
+              <a:spcAft>
+                <a:spcPts val="0"/>
+              </a:spcAft>
+            </a:pPr>
+            <a:r>
+              <a:rPr sz="750" b="0" i="0">
+                <a:solidFill>
+                  <a:srgbClr val="8395B5"/>
+                </a:solidFill>
+                <a:latin typeface="Bahnschrift SemiLight"/>
+              </a:rPr>
+              <a:t>média · 19,7M no total</a:t>
+            </a:r>
+          </a:p>
+        </p:txBody>
+      </p:sp>
+      <p:sp>
+        <p:nvSpPr>
+          <p:cNvPr id="21" name="s13_19"/>
+          <p:cNvSpPr/>
+          <p:nvPr/>
+        </p:nvSpPr>
+        <p:spPr>
+          <a:xfrm>
+            <a:off x="3406140" y="1554480"/>
+            <a:ext cx="1245870" cy="896112"/>
+          </a:xfrm>
+          <a:prstGeom prst="roundRect">
+            <a:avLst>
+              <a:gd name="adj" fmla="val 4000"/>
+            </a:avLst>
+          </a:prstGeom>
+          <a:gradFill rotWithShape="1">
+            <a:gsLst>
+              <a:gs pos="0">
+                <a:srgbClr val="182946"/>
+              </a:gs>
+              <a:gs pos="100000">
+                <a:srgbClr val="0F182B"/>
+              </a:gs>
+            </a:gsLst>
+            <a:lin ang="5400000" scaled="0"/>
+          </a:gradFill>
+          <a:ln w="9525">
+            <a:gradFill rotWithShape="1">
+              <a:gsLst>
+                <a:gs pos="0">
+                  <a:srgbClr val="35507A"/>
+                </a:gs>
+                <a:gs pos="100000">
+                  <a:srgbClr val="22345A"/>
+                </a:gs>
+              </a:gsLst>
+              <a:lin ang="5400000" scaled="0"/>
+            </a:gradFill>
+          </a:ln>
+          <a:effectLst/>
+        </p:spPr>
+        <p:style>
+          <a:lnRef idx="1">
+            <a:schemeClr val="accent1"/>
+          </a:lnRef>
+          <a:fillRef idx="3">
+            <a:schemeClr val="accent1"/>
+          </a:fillRef>
+          <a:effectRef idx="2">
+            <a:schemeClr val="accent1"/>
+          </a:effectRef>
+          <a:fontRef idx="minor">
+            <a:schemeClr val="lt1"/>
+          </a:fontRef>
+        </p:style>
+        <p:txBody>
+          <a:bodyPr rtlCol="0" anchor="ctr"/>
+          <a:lstStyle/>
+          <a:p/>
+        </p:txBody>
+      </p:sp>
+      <p:sp>
+        <p:nvSpPr>
+          <p:cNvPr id="22" name="s13_20"/>
+          <p:cNvSpPr txBox="1"/>
+          <p:nvPr/>
+        </p:nvSpPr>
+        <p:spPr>
+          <a:xfrm>
+            <a:off x="3552444" y="1609344"/>
+            <a:ext cx="971550" cy="457200"/>
+          </a:xfrm>
+          <a:prstGeom prst="rect">
+            <a:avLst/>
+          </a:prstGeom>
+          <a:noFill/>
+        </p:spPr>
+        <p:txBody>
+          <a:bodyPr wrap="square" lIns="0" rIns="0" tIns="0" bIns="0" anchor="t">
+            <a:spAutoFit/>
+          </a:bodyPr>
+          <a:lstStyle/>
+          <a:p>
+            <a:pPr algn="l">
+              <a:lnSpc>
+                <a:spcPct val="100000"/>
+              </a:lnSpc>
+              <a:spcBef>
+                <a:spcPts val="0"/>
+              </a:spcBef>
+              <a:spcAft>
+                <a:spcPts val="0"/>
+              </a:spcAft>
+            </a:pPr>
+            <a:r>
+              <a:rPr sz="2600" b="0" i="0">
+                <a:solidFill>
+                  <a:srgbClr val="FFB531"/>
+                </a:solidFill>
+                <a:latin typeface="Bahnschrift SemiBold Condensed"/>
+              </a:rPr>
+              <a:t>81</a:t>
+            </a:r>
+          </a:p>
+        </p:txBody>
+      </p:sp>
+      <p:sp>
+        <p:nvSpPr>
+          <p:cNvPr id="23" name="s13_21"/>
+          <p:cNvSpPr txBox="1"/>
+          <p:nvPr/>
+        </p:nvSpPr>
+        <p:spPr>
+          <a:xfrm>
+            <a:off x="3552444" y="2048256"/>
+            <a:ext cx="971550" cy="182880"/>
+          </a:xfrm>
+          <a:prstGeom prst="rect">
+            <a:avLst/>
+          </a:prstGeom>
+          <a:noFill/>
+        </p:spPr>
+        <p:txBody>
+          <a:bodyPr wrap="none" lIns="0" rIns="0" tIns="0" bIns="0" anchor="t">
+            <a:spAutoFit/>
+          </a:bodyPr>
+          <a:lstStyle/>
+          <a:p>
+            <a:pPr algn="l">
+              <a:lnSpc>
+                <a:spcPct val="100000"/>
+              </a:lnSpc>
+              <a:spcBef>
+                <a:spcPts val="0"/>
+              </a:spcBef>
+              <a:spcAft>
+                <a:spcPts val="0"/>
+              </a:spcAft>
+            </a:pPr>
+            <a:r>
+              <a:rPr sz="650" b="1" i="0" spc="40">
+                <a:solidFill>
+                  <a:srgbClr val="F5F7FB"/>
+                </a:solidFill>
+                <a:latin typeface="Consolas"/>
+              </a:rPr>
+              <a:t>DECISÕES REGISTRADAS</a:t>
+            </a:r>
+          </a:p>
+        </p:txBody>
+      </p:sp>
+      <p:sp>
+        <p:nvSpPr>
+          <p:cNvPr id="24" name="s13_22"/>
+          <p:cNvSpPr txBox="1"/>
+          <p:nvPr/>
+        </p:nvSpPr>
+        <p:spPr>
+          <a:xfrm>
+            <a:off x="3552444" y="2212848"/>
+            <a:ext cx="971550" cy="182880"/>
+          </a:xfrm>
+          <a:prstGeom prst="rect">
+            <a:avLst/>
+          </a:prstGeom>
+          <a:noFill/>
+        </p:spPr>
+        <p:txBody>
+          <a:bodyPr wrap="none" lIns="0" rIns="0" tIns="0" bIns="0" anchor="t">
+            <a:spAutoFit/>
+          </a:bodyPr>
+          <a:lstStyle/>
+          <a:p>
+            <a:pPr algn="l">
+              <a:lnSpc>
+                <a:spcPct val="100000"/>
+              </a:lnSpc>
+              <a:spcBef>
+                <a:spcPts val="0"/>
+              </a:spcBef>
+              <a:spcAft>
+                <a:spcPts val="0"/>
+              </a:spcAft>
+            </a:pPr>
+            <a:r>
+              <a:rPr sz="750" b="0" i="0">
+                <a:solidFill>
+                  <a:srgbClr val="8395B5"/>
+                </a:solidFill>
+                <a:latin typeface="Bahnschrift SemiLight"/>
+              </a:rPr>
+              <a:t>escaladas ao humano</a:t>
+            </a:r>
+          </a:p>
+        </p:txBody>
+      </p:sp>
+      <p:sp>
+        <p:nvSpPr>
+          <p:cNvPr id="25" name="s13_23"/>
+          <p:cNvSpPr/>
+          <p:nvPr/>
+        </p:nvSpPr>
+        <p:spPr>
+          <a:xfrm>
+            <a:off x="4743450" y="1554480"/>
+            <a:ext cx="1245870" cy="896112"/>
+          </a:xfrm>
+          <a:prstGeom prst="roundRect">
+            <a:avLst>
+              <a:gd name="adj" fmla="val 4000"/>
+            </a:avLst>
+          </a:prstGeom>
+          <a:gradFill rotWithShape="1">
+            <a:gsLst>
+              <a:gs pos="0">
+                <a:srgbClr val="182946"/>
+              </a:gs>
+              <a:gs pos="100000">
+                <a:srgbClr val="0F182B"/>
+              </a:gs>
+            </a:gsLst>
+            <a:lin ang="5400000" scaled="0"/>
+          </a:gradFill>
+          <a:ln w="9525">
+            <a:gradFill rotWithShape="1">
+              <a:gsLst>
+                <a:gs pos="0">
+                  <a:srgbClr val="35507A"/>
+                </a:gs>
+                <a:gs pos="100000">
+                  <a:srgbClr val="22345A"/>
+                </a:gs>
+              </a:gsLst>
+              <a:lin ang="5400000" scaled="0"/>
+            </a:gradFill>
+          </a:ln>
+          <a:effectLst/>
+        </p:spPr>
+        <p:style>
+          <a:lnRef idx="1">
+            <a:schemeClr val="accent1"/>
+          </a:lnRef>
+          <a:fillRef idx="3">
+            <a:schemeClr val="accent1"/>
+          </a:fillRef>
+          <a:effectRef idx="2">
+            <a:schemeClr val="accent1"/>
+          </a:effectRef>
+          <a:fontRef idx="minor">
+            <a:schemeClr val="lt1"/>
+          </a:fontRef>
+        </p:style>
+        <p:txBody>
+          <a:bodyPr rtlCol="0" anchor="ctr"/>
+          <a:lstStyle/>
+          <a:p/>
+        </p:txBody>
+      </p:sp>
+      <p:sp>
+        <p:nvSpPr>
+          <p:cNvPr id="26" name="s13_24"/>
+          <p:cNvSpPr txBox="1"/>
+          <p:nvPr/>
+        </p:nvSpPr>
+        <p:spPr>
+          <a:xfrm>
+            <a:off x="4889754" y="1609344"/>
+            <a:ext cx="971550" cy="457200"/>
+          </a:xfrm>
+          <a:prstGeom prst="rect">
+            <a:avLst/>
+          </a:prstGeom>
+          <a:noFill/>
+        </p:spPr>
+        <p:txBody>
+          <a:bodyPr wrap="square" lIns="0" rIns="0" tIns="0" bIns="0" anchor="t">
+            <a:spAutoFit/>
+          </a:bodyPr>
+          <a:lstStyle/>
+          <a:p>
+            <a:pPr algn="l">
+              <a:lnSpc>
+                <a:spcPct val="100000"/>
+              </a:lnSpc>
+              <a:spcBef>
+                <a:spcPts val="0"/>
+              </a:spcBef>
+              <a:spcAft>
+                <a:spcPts val="0"/>
+              </a:spcAft>
+            </a:pPr>
+            <a:r>
+              <a:rPr sz="2600" b="0" i="0">
+                <a:solidFill>
+                  <a:srgbClr val="FFB531"/>
+                </a:solidFill>
+                <a:latin typeface="Bahnschrift SemiBold Condensed"/>
+              </a:rPr>
+              <a:t>37%</a:t>
+            </a:r>
+          </a:p>
+        </p:txBody>
+      </p:sp>
+      <p:sp>
+        <p:nvSpPr>
+          <p:cNvPr id="27" name="s13_25"/>
+          <p:cNvSpPr txBox="1"/>
+          <p:nvPr/>
+        </p:nvSpPr>
+        <p:spPr>
+          <a:xfrm>
+            <a:off x="4889754" y="2048256"/>
+            <a:ext cx="971550" cy="182880"/>
+          </a:xfrm>
+          <a:prstGeom prst="rect">
+            <a:avLst/>
+          </a:prstGeom>
+          <a:noFill/>
+        </p:spPr>
+        <p:txBody>
+          <a:bodyPr wrap="none" lIns="0" rIns="0" tIns="0" bIns="0" anchor="t">
+            <a:spAutoFit/>
+          </a:bodyPr>
+          <a:lstStyle/>
+          <a:p>
+            <a:pPr algn="l">
+              <a:lnSpc>
+                <a:spcPct val="100000"/>
+              </a:lnSpc>
+              <a:spcBef>
+                <a:spcPts val="0"/>
+              </a:spcBef>
+              <a:spcAft>
+                <a:spcPts val="0"/>
+              </a:spcAft>
+            </a:pPr>
+            <a:r>
+              <a:rPr sz="650" b="1" i="0" spc="40">
+                <a:solidFill>
+                  <a:srgbClr val="F5F7FB"/>
+                </a:solidFill>
+                <a:latin typeface="Consolas"/>
+              </a:rPr>
+              <a:t>TAXA DE RECORREÇÃO</a:t>
+            </a:r>
+          </a:p>
+        </p:txBody>
+      </p:sp>
+      <p:sp>
+        <p:nvSpPr>
+          <p:cNvPr id="28" name="s13_26"/>
+          <p:cNvSpPr txBox="1"/>
+          <p:nvPr/>
+        </p:nvSpPr>
+        <p:spPr>
+          <a:xfrm>
+            <a:off x="4889754" y="2212848"/>
+            <a:ext cx="971550" cy="182880"/>
+          </a:xfrm>
+          <a:prstGeom prst="rect">
+            <a:avLst/>
+          </a:prstGeom>
+          <a:noFill/>
+        </p:spPr>
+        <p:txBody>
+          <a:bodyPr wrap="none" lIns="0" rIns="0" tIns="0" bIns="0" anchor="t">
+            <a:spAutoFit/>
+          </a:bodyPr>
+          <a:lstStyle/>
+          <a:p>
+            <a:pPr algn="l">
+              <a:lnSpc>
+                <a:spcPct val="100000"/>
+              </a:lnSpc>
+              <a:spcBef>
+                <a:spcPts val="0"/>
+              </a:spcBef>
+              <a:spcAft>
+                <a:spcPts val="0"/>
+              </a:spcAft>
+            </a:pPr>
+            <a:r>
+              <a:rPr sz="750" b="0" i="0">
+                <a:solidFill>
+                  <a:srgbClr val="8395B5"/>
+                </a:solidFill>
+                <a:latin typeface="Bahnschrift SemiLight"/>
+              </a:rPr>
+              <a:t>pediram 2ª rodada</a:t>
+            </a:r>
+          </a:p>
+        </p:txBody>
+      </p:sp>
+      <p:sp>
+        <p:nvSpPr>
+          <p:cNvPr id="29" name="s13_27"/>
+          <p:cNvSpPr txBox="1"/>
+          <p:nvPr/>
+        </p:nvSpPr>
+        <p:spPr>
+          <a:xfrm>
+            <a:off x="731520" y="2633472"/>
+            <a:ext cx="5257800" cy="182880"/>
+          </a:xfrm>
+          <a:prstGeom prst="rect">
+            <a:avLst/>
+          </a:prstGeom>
+          <a:noFill/>
+        </p:spPr>
+        <p:txBody>
+          <a:bodyPr wrap="square" lIns="0" rIns="0" tIns="0" bIns="0" anchor="t">
+            <a:spAutoFit/>
+          </a:bodyPr>
+          <a:lstStyle/>
+          <a:p>
+            <a:pPr algn="l">
+              <a:lnSpc>
+                <a:spcPct val="100000"/>
+              </a:lnSpc>
+              <a:spcBef>
+                <a:spcPts val="0"/>
+              </a:spcBef>
+              <a:spcAft>
+                <a:spcPts val="0"/>
+              </a:spcAft>
+            </a:pPr>
+            <a:r>
+              <a:rPr sz="900" b="1" i="0" spc="180">
+                <a:solidFill>
+                  <a:srgbClr val="FFB531"/>
+                </a:solidFill>
+                <a:latin typeface="Consolas"/>
+              </a:rPr>
+              <a:t>ONDE FOI O ESFORÇO</a:t>
+            </a:r>
+          </a:p>
+        </p:txBody>
+      </p:sp>
+      <p:sp>
+        <p:nvSpPr>
+          <p:cNvPr id="30" name="s13_28"/>
+          <p:cNvSpPr txBox="1"/>
+          <p:nvPr/>
+        </p:nvSpPr>
+        <p:spPr>
+          <a:xfrm>
+            <a:off x="731520" y="2880360"/>
+            <a:ext cx="822960" cy="219456"/>
+          </a:xfrm>
+          <a:prstGeom prst="rect">
+            <a:avLst/>
+          </a:prstGeom>
+          <a:noFill/>
+        </p:spPr>
+        <p:txBody>
+          <a:bodyPr wrap="square" lIns="0" rIns="0" tIns="0" bIns="0" anchor="ctr">
+            <a:spAutoFit/>
+          </a:bodyPr>
+          <a:lstStyle/>
+          <a:p>
+            <a:pPr algn="l">
+              <a:lnSpc>
+                <a:spcPct val="100000"/>
+              </a:lnSpc>
+              <a:spcBef>
+                <a:spcPts val="0"/>
+              </a:spcBef>
+              <a:spcAft>
+                <a:spcPts val="0"/>
+              </a:spcAft>
+            </a:pPr>
+            <a:r>
+              <a:rPr sz="850" b="0" i="0">
+                <a:solidFill>
+                  <a:srgbClr val="8395B5"/>
+                </a:solidFill>
+                <a:latin typeface="Bahnschrift SemiLight"/>
+              </a:rPr>
+              <a:t>por sessão</a:t>
+            </a:r>
+          </a:p>
+        </p:txBody>
+      </p:sp>
+      <p:sp>
+        <p:nvSpPr>
+          <p:cNvPr id="31" name="s13_29"/>
+          <p:cNvSpPr/>
+          <p:nvPr/>
+        </p:nvSpPr>
+        <p:spPr>
+          <a:xfrm>
+            <a:off x="1600200" y="2880360"/>
+            <a:ext cx="1350498" cy="219456"/>
+          </a:xfrm>
+          <a:prstGeom prst="rect">
+            <a:avLst/>
+          </a:prstGeom>
+          <a:solidFill>
+            <a:srgbClr val="FFB531"/>
+          </a:solidFill>
+          <a:ln w="9525">
+            <a:solidFill>
+              <a:srgbClr val="0A1325"/>
+            </a:solidFill>
+          </a:ln>
+          <a:effectLst/>
+        </p:spPr>
+        <p:style>
+          <a:lnRef idx="1">
+            <a:schemeClr val="accent1"/>
+          </a:lnRef>
+          <a:fillRef idx="3">
+            <a:schemeClr val="accent1"/>
+          </a:fillRef>
+          <a:effectRef idx="2">
+            <a:schemeClr val="accent1"/>
+          </a:effectRef>
+          <a:fontRef idx="minor">
+            <a:schemeClr val="lt1"/>
+          </a:fontRef>
+        </p:style>
+        <p:txBody>
+          <a:bodyPr rtlCol="0" anchor="ctr"/>
+          <a:lstStyle/>
+          <a:p/>
+        </p:txBody>
+      </p:sp>
+      <p:sp>
+        <p:nvSpPr>
+          <p:cNvPr id="32" name="s13_30"/>
+          <p:cNvSpPr txBox="1"/>
+          <p:nvPr/>
+        </p:nvSpPr>
+        <p:spPr>
+          <a:xfrm>
+            <a:off x="1600200" y="2880360"/>
+            <a:ext cx="1350498" cy="219456"/>
+          </a:xfrm>
+          <a:prstGeom prst="rect">
+            <a:avLst/>
+          </a:prstGeom>
+          <a:noFill/>
+        </p:spPr>
+        <p:txBody>
+          <a:bodyPr wrap="none" lIns="0" rIns="0" tIns="0" bIns="0" anchor="ctr">
+            <a:spAutoFit/>
+          </a:bodyPr>
+          <a:lstStyle/>
+          <a:p>
+            <a:pPr algn="ctr">
+              <a:lnSpc>
+                <a:spcPct val="100000"/>
+              </a:lnSpc>
+              <a:spcBef>
+                <a:spcPts val="0"/>
+              </a:spcBef>
+              <a:spcAft>
+                <a:spcPts val="0"/>
+              </a:spcAft>
+            </a:pPr>
+            <a:r>
+              <a:rPr sz="850" b="1" i="0">
+                <a:solidFill>
+                  <a:srgbClr val="0A1325"/>
+                </a:solidFill>
+                <a:latin typeface="Consolas"/>
+              </a:rPr>
+              <a:t>31%</a:t>
+            </a:r>
+          </a:p>
+        </p:txBody>
+      </p:sp>
+      <p:sp>
+        <p:nvSpPr>
+          <p:cNvPr id="33" name="s13_31"/>
+          <p:cNvSpPr/>
+          <p:nvPr/>
+        </p:nvSpPr>
+        <p:spPr>
+          <a:xfrm>
+            <a:off x="2950698" y="2880360"/>
+            <a:ext cx="2363372" cy="219456"/>
+          </a:xfrm>
+          <a:prstGeom prst="rect">
+            <a:avLst/>
+          </a:prstGeom>
+          <a:solidFill>
+            <a:srgbClr val="4F8EF7"/>
+          </a:solidFill>
+          <a:ln w="9525">
+            <a:solidFill>
+              <a:srgbClr val="0A1325"/>
+            </a:solidFill>
+          </a:ln>
+          <a:effectLst/>
+        </p:spPr>
+        <p:style>
+          <a:lnRef idx="1">
+            <a:schemeClr val="accent1"/>
+          </a:lnRef>
+          <a:fillRef idx="3">
+            <a:schemeClr val="accent1"/>
+          </a:fillRef>
+          <a:effectRef idx="2">
+            <a:schemeClr val="accent1"/>
+          </a:effectRef>
+          <a:fontRef idx="minor">
+            <a:schemeClr val="lt1"/>
+          </a:fontRef>
+        </p:style>
+        <p:txBody>
+          <a:bodyPr rtlCol="0" anchor="ctr"/>
+          <a:lstStyle/>
+          <a:p/>
+        </p:txBody>
+      </p:sp>
+      <p:sp>
+        <p:nvSpPr>
+          <p:cNvPr id="34" name="s13_32"/>
+          <p:cNvSpPr txBox="1"/>
+          <p:nvPr/>
+        </p:nvSpPr>
+        <p:spPr>
+          <a:xfrm>
+            <a:off x="2950698" y="2880360"/>
+            <a:ext cx="2363372" cy="219456"/>
+          </a:xfrm>
+          <a:prstGeom prst="rect">
+            <a:avLst/>
+          </a:prstGeom>
+          <a:noFill/>
+        </p:spPr>
+        <p:txBody>
+          <a:bodyPr wrap="none" lIns="0" rIns="0" tIns="0" bIns="0" anchor="ctr">
+            <a:spAutoFit/>
+          </a:bodyPr>
+          <a:lstStyle/>
+          <a:p>
+            <a:pPr algn="ctr">
+              <a:lnSpc>
+                <a:spcPct val="100000"/>
+              </a:lnSpc>
+              <a:spcBef>
+                <a:spcPts val="0"/>
+              </a:spcBef>
+              <a:spcAft>
+                <a:spcPts val="0"/>
+              </a:spcAft>
+            </a:pPr>
+            <a:r>
+              <a:rPr sz="850" b="1" i="0">
+                <a:solidFill>
+                  <a:srgbClr val="0A1325"/>
+                </a:solidFill>
+                <a:latin typeface="Consolas"/>
+              </a:rPr>
+              <a:t>54%</a:t>
+            </a:r>
+          </a:p>
+        </p:txBody>
+      </p:sp>
+      <p:sp>
+        <p:nvSpPr>
+          <p:cNvPr id="35" name="s13_33"/>
+          <p:cNvSpPr/>
+          <p:nvPr/>
+        </p:nvSpPr>
+        <p:spPr>
+          <a:xfrm>
+            <a:off x="5314070" y="2880360"/>
+            <a:ext cx="675249" cy="219456"/>
+          </a:xfrm>
+          <a:prstGeom prst="rect">
+            <a:avLst/>
+          </a:prstGeom>
+          <a:solidFill>
+            <a:srgbClr val="2FD3B0"/>
+          </a:solidFill>
+          <a:ln w="9525">
+            <a:solidFill>
+              <a:srgbClr val="0A1325"/>
+            </a:solidFill>
+          </a:ln>
+          <a:effectLst/>
+        </p:spPr>
+        <p:style>
+          <a:lnRef idx="1">
+            <a:schemeClr val="accent1"/>
+          </a:lnRef>
+          <a:fillRef idx="3">
+            <a:schemeClr val="accent1"/>
+          </a:fillRef>
+          <a:effectRef idx="2">
+            <a:schemeClr val="accent1"/>
+          </a:effectRef>
+          <a:fontRef idx="minor">
+            <a:schemeClr val="lt1"/>
+          </a:fontRef>
+        </p:style>
+        <p:txBody>
+          <a:bodyPr rtlCol="0" anchor="ctr"/>
+          <a:lstStyle/>
+          <a:p/>
+        </p:txBody>
+      </p:sp>
+      <p:sp>
+        <p:nvSpPr>
+          <p:cNvPr id="36" name="s13_34"/>
+          <p:cNvSpPr txBox="1"/>
+          <p:nvPr/>
+        </p:nvSpPr>
+        <p:spPr>
+          <a:xfrm>
+            <a:off x="5314070" y="2880360"/>
+            <a:ext cx="675249" cy="219456"/>
+          </a:xfrm>
+          <a:prstGeom prst="rect">
+            <a:avLst/>
+          </a:prstGeom>
+          <a:noFill/>
+        </p:spPr>
+        <p:txBody>
+          <a:bodyPr wrap="none" lIns="0" rIns="0" tIns="0" bIns="0" anchor="ctr">
+            <a:spAutoFit/>
+          </a:bodyPr>
+          <a:lstStyle/>
+          <a:p>
+            <a:pPr algn="ctr">
+              <a:lnSpc>
+                <a:spcPct val="100000"/>
+              </a:lnSpc>
+              <a:spcBef>
+                <a:spcPts val="0"/>
+              </a:spcBef>
+              <a:spcAft>
+                <a:spcPts val="0"/>
+              </a:spcAft>
+            </a:pPr>
+            <a:r>
+              <a:rPr sz="850" b="1" i="0">
+                <a:solidFill>
+                  <a:srgbClr val="0A1325"/>
+                </a:solidFill>
+                <a:latin typeface="Consolas"/>
+              </a:rPr>
+              <a:t>15%</a:t>
+            </a:r>
+          </a:p>
+        </p:txBody>
+      </p:sp>
+      <p:sp>
+        <p:nvSpPr>
+          <p:cNvPr id="37" name="s13_35"/>
+          <p:cNvSpPr txBox="1"/>
+          <p:nvPr/>
+        </p:nvSpPr>
+        <p:spPr>
+          <a:xfrm>
+            <a:off x="731520" y="3209544"/>
+            <a:ext cx="822960" cy="219456"/>
+          </a:xfrm>
+          <a:prstGeom prst="rect">
+            <a:avLst/>
+          </a:prstGeom>
+          <a:noFill/>
+        </p:spPr>
+        <p:txBody>
+          <a:bodyPr wrap="square" lIns="0" rIns="0" tIns="0" bIns="0" anchor="ctr">
+            <a:spAutoFit/>
+          </a:bodyPr>
+          <a:lstStyle/>
+          <a:p>
+            <a:pPr algn="l">
+              <a:lnSpc>
+                <a:spcPct val="100000"/>
+              </a:lnSpc>
+              <a:spcBef>
+                <a:spcPts val="0"/>
+              </a:spcBef>
+              <a:spcAft>
+                <a:spcPts val="0"/>
+              </a:spcAft>
+            </a:pPr>
+            <a:r>
+              <a:rPr sz="850" b="0" i="0">
+                <a:solidFill>
+                  <a:srgbClr val="8395B5"/>
+                </a:solidFill>
+                <a:latin typeface="Bahnschrift SemiLight"/>
+              </a:rPr>
+              <a:t>por token</a:t>
+            </a:r>
+          </a:p>
+        </p:txBody>
+      </p:sp>
+      <p:sp>
+        <p:nvSpPr>
+          <p:cNvPr id="38" name="s13_36"/>
+          <p:cNvSpPr/>
+          <p:nvPr/>
+        </p:nvSpPr>
+        <p:spPr>
+          <a:xfrm>
+            <a:off x="1600200" y="3209544"/>
+            <a:ext cx="1083937" cy="219456"/>
+          </a:xfrm>
+          <a:prstGeom prst="rect">
+            <a:avLst/>
+          </a:prstGeom>
+          <a:solidFill>
+            <a:srgbClr val="FFB531"/>
+          </a:solidFill>
+          <a:ln w="9525">
+            <a:solidFill>
+              <a:srgbClr val="0A1325"/>
+            </a:solidFill>
+          </a:ln>
+          <a:effectLst/>
+        </p:spPr>
+        <p:style>
+          <a:lnRef idx="1">
+            <a:schemeClr val="accent1"/>
+          </a:lnRef>
+          <a:fillRef idx="3">
+            <a:schemeClr val="accent1"/>
+          </a:fillRef>
+          <a:effectRef idx="2">
+            <a:schemeClr val="accent1"/>
+          </a:effectRef>
+          <a:fontRef idx="minor">
+            <a:schemeClr val="lt1"/>
+          </a:fontRef>
+        </p:style>
+        <p:txBody>
+          <a:bodyPr rtlCol="0" anchor="ctr"/>
+          <a:lstStyle/>
+          <a:p/>
+        </p:txBody>
+      </p:sp>
+      <p:sp>
+        <p:nvSpPr>
+          <p:cNvPr id="39" name="s13_37"/>
+          <p:cNvSpPr txBox="1"/>
+          <p:nvPr/>
+        </p:nvSpPr>
+        <p:spPr>
+          <a:xfrm>
+            <a:off x="1600200" y="3209544"/>
+            <a:ext cx="1083937" cy="219456"/>
+          </a:xfrm>
+          <a:prstGeom prst="rect">
+            <a:avLst/>
+          </a:prstGeom>
+          <a:noFill/>
+        </p:spPr>
+        <p:txBody>
+          <a:bodyPr wrap="none" lIns="0" rIns="0" tIns="0" bIns="0" anchor="ctr">
+            <a:spAutoFit/>
+          </a:bodyPr>
+          <a:lstStyle/>
+          <a:p>
+            <a:pPr algn="ctr">
+              <a:lnSpc>
+                <a:spcPct val="100000"/>
+              </a:lnSpc>
+              <a:spcBef>
+                <a:spcPts val="0"/>
+              </a:spcBef>
+              <a:spcAft>
+                <a:spcPts val="0"/>
+              </a:spcAft>
+            </a:pPr>
+            <a:r>
+              <a:rPr sz="850" b="1" i="0">
+                <a:solidFill>
+                  <a:srgbClr val="0A1325"/>
+                </a:solidFill>
+                <a:latin typeface="Consolas"/>
+              </a:rPr>
+              <a:t>25%</a:t>
+            </a:r>
+          </a:p>
+        </p:txBody>
+      </p:sp>
+      <p:sp>
+        <p:nvSpPr>
+          <p:cNvPr id="40" name="s13_38"/>
+          <p:cNvSpPr/>
+          <p:nvPr/>
+        </p:nvSpPr>
+        <p:spPr>
+          <a:xfrm>
+            <a:off x="2684137" y="3209544"/>
+            <a:ext cx="3128987" cy="219456"/>
+          </a:xfrm>
+          <a:prstGeom prst="rect">
+            <a:avLst/>
+          </a:prstGeom>
+          <a:solidFill>
+            <a:srgbClr val="4F8EF7"/>
+          </a:solidFill>
+          <a:ln w="9525">
+            <a:solidFill>
+              <a:srgbClr val="0A1325"/>
+            </a:solidFill>
+          </a:ln>
+          <a:effectLst/>
+        </p:spPr>
+        <p:style>
+          <a:lnRef idx="1">
+            <a:schemeClr val="accent1"/>
+          </a:lnRef>
+          <a:fillRef idx="3">
+            <a:schemeClr val="accent1"/>
+          </a:fillRef>
+          <a:effectRef idx="2">
+            <a:schemeClr val="accent1"/>
+          </a:effectRef>
+          <a:fontRef idx="minor">
+            <a:schemeClr val="lt1"/>
+          </a:fontRef>
+        </p:style>
+        <p:txBody>
+          <a:bodyPr rtlCol="0" anchor="ctr"/>
+          <a:lstStyle/>
+          <a:p/>
+        </p:txBody>
+      </p:sp>
+      <p:sp>
+        <p:nvSpPr>
+          <p:cNvPr id="41" name="s13_39"/>
+          <p:cNvSpPr txBox="1"/>
+          <p:nvPr/>
+        </p:nvSpPr>
+        <p:spPr>
+          <a:xfrm>
+            <a:off x="2684137" y="3209544"/>
+            <a:ext cx="3128987" cy="219456"/>
+          </a:xfrm>
+          <a:prstGeom prst="rect">
+            <a:avLst/>
+          </a:prstGeom>
+          <a:noFill/>
+        </p:spPr>
+        <p:txBody>
+          <a:bodyPr wrap="none" lIns="0" rIns="0" tIns="0" bIns="0" anchor="ctr">
+            <a:spAutoFit/>
+          </a:bodyPr>
+          <a:lstStyle/>
+          <a:p>
+            <a:pPr algn="ctr">
+              <a:lnSpc>
+                <a:spcPct val="100000"/>
+              </a:lnSpc>
+              <a:spcBef>
+                <a:spcPts val="0"/>
+              </a:spcBef>
+              <a:spcAft>
+                <a:spcPts val="0"/>
+              </a:spcAft>
+            </a:pPr>
+            <a:r>
+              <a:rPr sz="850" b="1" i="0">
+                <a:solidFill>
+                  <a:srgbClr val="0A1325"/>
+                </a:solidFill>
+                <a:latin typeface="Consolas"/>
+              </a:rPr>
+              <a:t>71%</a:t>
+            </a:r>
+          </a:p>
+        </p:txBody>
+      </p:sp>
+      <p:sp>
+        <p:nvSpPr>
+          <p:cNvPr id="42" name="s13_40"/>
+          <p:cNvSpPr/>
+          <p:nvPr/>
+        </p:nvSpPr>
+        <p:spPr>
+          <a:xfrm>
+            <a:off x="5813124" y="3209544"/>
+            <a:ext cx="176195" cy="219456"/>
+          </a:xfrm>
+          <a:prstGeom prst="rect">
+            <a:avLst/>
+          </a:prstGeom>
+          <a:solidFill>
+            <a:srgbClr val="2FD3B0"/>
+          </a:solidFill>
+          <a:ln w="9525">
+            <a:solidFill>
+              <a:srgbClr val="0A1325"/>
+            </a:solidFill>
+          </a:ln>
+          <a:effectLst/>
+        </p:spPr>
+        <p:style>
+          <a:lnRef idx="1">
+            <a:schemeClr val="accent1"/>
+          </a:lnRef>
+          <a:fillRef idx="3">
+            <a:schemeClr val="accent1"/>
+          </a:fillRef>
+          <a:effectRef idx="2">
+            <a:schemeClr val="accent1"/>
+          </a:effectRef>
+          <a:fontRef idx="minor">
+            <a:schemeClr val="lt1"/>
+          </a:fontRef>
+        </p:style>
+        <p:txBody>
+          <a:bodyPr rtlCol="0" anchor="ctr"/>
+          <a:lstStyle/>
+          <a:p/>
+        </p:txBody>
+      </p:sp>
+      <p:sp>
+        <p:nvSpPr>
+          <p:cNvPr id="43" name="s13_41"/>
+          <p:cNvSpPr/>
+          <p:nvPr/>
+        </p:nvSpPr>
+        <p:spPr>
+          <a:xfrm>
+            <a:off x="1604772" y="3607308"/>
+            <a:ext cx="100584" cy="100584"/>
+          </a:xfrm>
+          <a:prstGeom prst="ellipse">
+            <a:avLst/>
+          </a:prstGeom>
+          <a:solidFill>
+            <a:srgbClr val="FFB531"/>
+          </a:solidFill>
+          <a:ln>
+            <a:noFill/>
+          </a:ln>
+          <a:effectLst/>
+        </p:spPr>
+        <p:style>
+          <a:lnRef idx="1">
+            <a:schemeClr val="accent1"/>
+          </a:lnRef>
+          <a:fillRef idx="3">
+            <a:schemeClr val="accent1"/>
+          </a:fillRef>
+          <a:effectRef idx="2">
+            <a:schemeClr val="accent1"/>
+          </a:effectRef>
+          <a:fontRef idx="minor">
+            <a:schemeClr val="lt1"/>
+          </a:fontRef>
+        </p:style>
+        <p:txBody>
+          <a:bodyPr rtlCol="0" anchor="ctr"/>
+          <a:lstStyle/>
+          <a:p/>
+        </p:txBody>
+      </p:sp>
+      <p:sp>
+        <p:nvSpPr>
+          <p:cNvPr id="44" name="s13_42"/>
+          <p:cNvSpPr txBox="1"/>
+          <p:nvPr/>
+        </p:nvSpPr>
+        <p:spPr>
+          <a:xfrm>
+            <a:off x="1773936" y="3566160"/>
+            <a:ext cx="2194560" cy="182880"/>
+          </a:xfrm>
+          <a:prstGeom prst="rect">
+            <a:avLst/>
+          </a:prstGeom>
+          <a:noFill/>
+        </p:spPr>
+        <p:txBody>
+          <a:bodyPr wrap="none" lIns="0" rIns="0" tIns="0" bIns="0" anchor="ctr">
+            <a:spAutoFit/>
+          </a:bodyPr>
+          <a:lstStyle/>
+          <a:p>
+            <a:pPr algn="l">
+              <a:lnSpc>
+                <a:spcPct val="100000"/>
+              </a:lnSpc>
+              <a:spcBef>
+                <a:spcPts val="0"/>
+              </a:spcBef>
+              <a:spcAft>
+                <a:spcPts val="0"/>
+              </a:spcAft>
+            </a:pPr>
+            <a:r>
+              <a:rPr sz="850" b="0" i="0">
+                <a:solidFill>
+                  <a:srgbClr val="8395B5"/>
+                </a:solidFill>
+                <a:latin typeface="Bahnschrift SemiLight"/>
+              </a:rPr>
+              <a:t>pesquisa e decisão</a:t>
+            </a:r>
+          </a:p>
+        </p:txBody>
+      </p:sp>
+      <p:sp>
+        <p:nvSpPr>
+          <p:cNvPr id="45" name="s13_43"/>
+          <p:cNvSpPr/>
+          <p:nvPr/>
+        </p:nvSpPr>
+        <p:spPr>
+          <a:xfrm>
+            <a:off x="2963570" y="3607308"/>
+            <a:ext cx="100584" cy="100584"/>
+          </a:xfrm>
+          <a:prstGeom prst="ellipse">
+            <a:avLst/>
+          </a:prstGeom>
+          <a:solidFill>
+            <a:srgbClr val="4F8EF7"/>
+          </a:solidFill>
+          <a:ln>
+            <a:noFill/>
+          </a:ln>
+          <a:effectLst/>
+        </p:spPr>
+        <p:style>
+          <a:lnRef idx="1">
+            <a:schemeClr val="accent1"/>
+          </a:lnRef>
+          <a:fillRef idx="3">
+            <a:schemeClr val="accent1"/>
+          </a:fillRef>
+          <a:effectRef idx="2">
+            <a:schemeClr val="accent1"/>
+          </a:effectRef>
+          <a:fontRef idx="minor">
+            <a:schemeClr val="lt1"/>
+          </a:fontRef>
+        </p:style>
+        <p:txBody>
+          <a:bodyPr rtlCol="0" anchor="ctr"/>
+          <a:lstStyle/>
+          <a:p/>
+        </p:txBody>
+      </p:sp>
+      <p:sp>
+        <p:nvSpPr>
+          <p:cNvPr id="46" name="s13_44"/>
+          <p:cNvSpPr txBox="1"/>
+          <p:nvPr/>
+        </p:nvSpPr>
+        <p:spPr>
+          <a:xfrm>
+            <a:off x="3132734" y="3566160"/>
+            <a:ext cx="2194560" cy="182880"/>
+          </a:xfrm>
+          <a:prstGeom prst="rect">
+            <a:avLst/>
+          </a:prstGeom>
+          <a:noFill/>
+        </p:spPr>
+        <p:txBody>
+          <a:bodyPr wrap="none" lIns="0" rIns="0" tIns="0" bIns="0" anchor="ctr">
+            <a:spAutoFit/>
+          </a:bodyPr>
+          <a:lstStyle/>
+          <a:p>
+            <a:pPr algn="l">
+              <a:lnSpc>
+                <a:spcPct val="100000"/>
+              </a:lnSpc>
+              <a:spcBef>
+                <a:spcPts val="0"/>
+              </a:spcBef>
+              <a:spcAft>
+                <a:spcPts val="0"/>
+              </a:spcAft>
+            </a:pPr>
+            <a:r>
+              <a:rPr sz="850" b="0" i="0">
+                <a:solidFill>
+                  <a:srgbClr val="8395B5"/>
+                </a:solidFill>
+                <a:latin typeface="Bahnschrift SemiLight"/>
+              </a:rPr>
+              <a:t>análise e medição</a:t>
+            </a:r>
+          </a:p>
+        </p:txBody>
+      </p:sp>
+      <p:sp>
+        <p:nvSpPr>
+          <p:cNvPr id="47" name="s13_45"/>
+          <p:cNvSpPr/>
+          <p:nvPr/>
+        </p:nvSpPr>
+        <p:spPr>
+          <a:xfrm>
+            <a:off x="4265676" y="3607308"/>
+            <a:ext cx="100584" cy="100584"/>
+          </a:xfrm>
+          <a:prstGeom prst="ellipse">
+            <a:avLst/>
+          </a:prstGeom>
+          <a:solidFill>
+            <a:srgbClr val="2FD3B0"/>
+          </a:solidFill>
+          <a:ln>
+            <a:noFill/>
+          </a:ln>
+          <a:effectLst/>
+        </p:spPr>
+        <p:style>
+          <a:lnRef idx="1">
+            <a:schemeClr val="accent1"/>
+          </a:lnRef>
+          <a:fillRef idx="3">
+            <a:schemeClr val="accent1"/>
+          </a:fillRef>
+          <a:effectRef idx="2">
+            <a:schemeClr val="accent1"/>
+          </a:effectRef>
+          <a:fontRef idx="minor">
+            <a:schemeClr val="lt1"/>
+          </a:fontRef>
+        </p:style>
+        <p:txBody>
+          <a:bodyPr rtlCol="0" anchor="ctr"/>
+          <a:lstStyle/>
+          <a:p/>
+        </p:txBody>
+      </p:sp>
+      <p:sp>
+        <p:nvSpPr>
+          <p:cNvPr id="48" name="s13_46"/>
+          <p:cNvSpPr txBox="1"/>
+          <p:nvPr/>
+        </p:nvSpPr>
+        <p:spPr>
+          <a:xfrm>
+            <a:off x="4434840" y="3566160"/>
+            <a:ext cx="2194560" cy="182880"/>
+          </a:xfrm>
+          <a:prstGeom prst="rect">
+            <a:avLst/>
+          </a:prstGeom>
+          <a:noFill/>
+        </p:spPr>
+        <p:txBody>
+          <a:bodyPr wrap="none" lIns="0" rIns="0" tIns="0" bIns="0" anchor="ctr">
+            <a:spAutoFit/>
+          </a:bodyPr>
+          <a:lstStyle/>
+          <a:p>
+            <a:pPr algn="l">
+              <a:lnSpc>
+                <a:spcPct val="100000"/>
+              </a:lnSpc>
+              <a:spcBef>
+                <a:spcPts val="0"/>
+              </a:spcBef>
+              <a:spcAft>
+                <a:spcPts val="0"/>
+              </a:spcAft>
+            </a:pPr>
+            <a:r>
+              <a:rPr sz="850" b="0" i="0">
+                <a:solidFill>
+                  <a:srgbClr val="8395B5"/>
+                </a:solidFill>
+                <a:latin typeface="Bahnschrift SemiLight"/>
+              </a:rPr>
+              <a:t>código</a:t>
+            </a:r>
+          </a:p>
+        </p:txBody>
+      </p:sp>
+      <p:sp>
+        <p:nvSpPr>
+          <p:cNvPr id="49" name="s13_47"/>
+          <p:cNvSpPr txBox="1"/>
+          <p:nvPr/>
+        </p:nvSpPr>
+        <p:spPr>
+          <a:xfrm>
+            <a:off x="731520" y="3913632"/>
+            <a:ext cx="5257800" cy="182880"/>
+          </a:xfrm>
+          <a:prstGeom prst="rect">
+            <a:avLst/>
+          </a:prstGeom>
+          <a:noFill/>
+        </p:spPr>
+        <p:txBody>
+          <a:bodyPr wrap="square" lIns="0" rIns="0" tIns="0" bIns="0" anchor="t">
+            <a:spAutoFit/>
+          </a:bodyPr>
+          <a:lstStyle/>
+          <a:p>
+            <a:pPr algn="l">
+              <a:lnSpc>
+                <a:spcPct val="100000"/>
+              </a:lnSpc>
+              <a:spcBef>
+                <a:spcPts val="0"/>
+              </a:spcBef>
+              <a:spcAft>
+                <a:spcPts val="0"/>
+              </a:spcAft>
+            </a:pPr>
+            <a:r>
+              <a:rPr sz="900" b="1" i="0" spc="180">
+                <a:solidFill>
+                  <a:srgbClr val="FFB531"/>
+                </a:solidFill>
+                <a:latin typeface="Consolas"/>
+              </a:rPr>
+              <a:t>145 ERROS DA IA  ·  QUEM PEGOU</a:t>
+            </a:r>
+          </a:p>
+        </p:txBody>
+      </p:sp>
+      <p:sp>
+        <p:nvSpPr>
+          <p:cNvPr id="50" name="s13_48"/>
+          <p:cNvSpPr/>
+          <p:nvPr/>
+        </p:nvSpPr>
+        <p:spPr>
+          <a:xfrm>
+            <a:off x="731520" y="4160520"/>
+            <a:ext cx="1813034" cy="237744"/>
+          </a:xfrm>
+          <a:prstGeom prst="rect">
+            <a:avLst/>
+          </a:prstGeom>
+          <a:solidFill>
+            <a:srgbClr val="2FD3B0"/>
+          </a:solidFill>
+          <a:ln w="9525">
+            <a:solidFill>
+              <a:srgbClr val="0A1325"/>
+            </a:solidFill>
+          </a:ln>
+          <a:effectLst/>
+        </p:spPr>
+        <p:style>
+          <a:lnRef idx="1">
+            <a:schemeClr val="accent1"/>
+          </a:lnRef>
+          <a:fillRef idx="3">
+            <a:schemeClr val="accent1"/>
+          </a:fillRef>
+          <a:effectRef idx="2">
+            <a:schemeClr val="accent1"/>
+          </a:effectRef>
+          <a:fontRef idx="minor">
+            <a:schemeClr val="lt1"/>
+          </a:fontRef>
+        </p:style>
+        <p:txBody>
+          <a:bodyPr rtlCol="0" anchor="ctr"/>
+          <a:lstStyle/>
+          <a:p/>
+        </p:txBody>
+      </p:sp>
+      <p:sp>
+        <p:nvSpPr>
+          <p:cNvPr id="51" name="s13_49"/>
+          <p:cNvSpPr txBox="1"/>
+          <p:nvPr/>
+        </p:nvSpPr>
+        <p:spPr>
+          <a:xfrm>
+            <a:off x="731520" y="4160520"/>
+            <a:ext cx="1813034" cy="237744"/>
+          </a:xfrm>
+          <a:prstGeom prst="rect">
+            <a:avLst/>
+          </a:prstGeom>
+          <a:noFill/>
+        </p:spPr>
+        <p:txBody>
+          <a:bodyPr wrap="none" lIns="0" rIns="0" tIns="0" bIns="0" anchor="ctr">
+            <a:spAutoFit/>
+          </a:bodyPr>
+          <a:lstStyle/>
+          <a:p>
+            <a:pPr algn="ctr">
+              <a:lnSpc>
+                <a:spcPct val="100000"/>
+              </a:lnSpc>
+              <a:spcBef>
+                <a:spcPts val="0"/>
+              </a:spcBef>
+              <a:spcAft>
+                <a:spcPts val="0"/>
+              </a:spcAft>
+            </a:pPr>
+            <a:r>
+              <a:rPr sz="850" b="1" i="0">
+                <a:solidFill>
+                  <a:srgbClr val="0A1325"/>
+                </a:solidFill>
+                <a:latin typeface="Consolas"/>
+              </a:rPr>
+              <a:t>50</a:t>
+            </a:r>
+          </a:p>
+        </p:txBody>
+      </p:sp>
+      <p:sp>
+        <p:nvSpPr>
+          <p:cNvPr id="52" name="s13_50"/>
+          <p:cNvSpPr/>
+          <p:nvPr/>
+        </p:nvSpPr>
+        <p:spPr>
+          <a:xfrm>
+            <a:off x="2544554" y="4160520"/>
+            <a:ext cx="1667991" cy="237744"/>
+          </a:xfrm>
+          <a:prstGeom prst="rect">
+            <a:avLst/>
+          </a:prstGeom>
+          <a:solidFill>
+            <a:srgbClr val="4F8EF7"/>
+          </a:solidFill>
+          <a:ln w="9525">
+            <a:solidFill>
+              <a:srgbClr val="0A1325"/>
+            </a:solidFill>
+          </a:ln>
+          <a:effectLst/>
+        </p:spPr>
+        <p:style>
+          <a:lnRef idx="1">
+            <a:schemeClr val="accent1"/>
+          </a:lnRef>
+          <a:fillRef idx="3">
+            <a:schemeClr val="accent1"/>
+          </a:fillRef>
+          <a:effectRef idx="2">
+            <a:schemeClr val="accent1"/>
+          </a:effectRef>
+          <a:fontRef idx="minor">
+            <a:schemeClr val="lt1"/>
+          </a:fontRef>
+        </p:style>
+        <p:txBody>
+          <a:bodyPr rtlCol="0" anchor="ctr"/>
+          <a:lstStyle/>
+          <a:p/>
+        </p:txBody>
+      </p:sp>
+      <p:sp>
+        <p:nvSpPr>
+          <p:cNvPr id="53" name="s13_51"/>
+          <p:cNvSpPr txBox="1"/>
+          <p:nvPr/>
+        </p:nvSpPr>
+        <p:spPr>
+          <a:xfrm>
+            <a:off x="2544554" y="4160520"/>
+            <a:ext cx="1667991" cy="237744"/>
+          </a:xfrm>
+          <a:prstGeom prst="rect">
+            <a:avLst/>
+          </a:prstGeom>
+          <a:noFill/>
+        </p:spPr>
+        <p:txBody>
+          <a:bodyPr wrap="none" lIns="0" rIns="0" tIns="0" bIns="0" anchor="ctr">
+            <a:spAutoFit/>
+          </a:bodyPr>
+          <a:lstStyle/>
+          <a:p>
+            <a:pPr algn="ctr">
+              <a:lnSpc>
+                <a:spcPct val="100000"/>
+              </a:lnSpc>
+              <a:spcBef>
+                <a:spcPts val="0"/>
+              </a:spcBef>
+              <a:spcAft>
+                <a:spcPts val="0"/>
+              </a:spcAft>
+            </a:pPr>
+            <a:r>
+              <a:rPr sz="850" b="1" i="0">
+                <a:solidFill>
+                  <a:srgbClr val="0A1325"/>
+                </a:solidFill>
+                <a:latin typeface="Consolas"/>
+              </a:rPr>
+              <a:t>46</a:t>
+            </a:r>
+          </a:p>
+        </p:txBody>
+      </p:sp>
+      <p:sp>
+        <p:nvSpPr>
+          <p:cNvPr id="54" name="s13_52"/>
+          <p:cNvSpPr/>
+          <p:nvPr/>
+        </p:nvSpPr>
+        <p:spPr>
+          <a:xfrm>
+            <a:off x="4212546" y="4160520"/>
+            <a:ext cx="1160342" cy="237744"/>
+          </a:xfrm>
+          <a:prstGeom prst="rect">
+            <a:avLst/>
+          </a:prstGeom>
+          <a:solidFill>
+            <a:srgbClr val="FFB531"/>
+          </a:solidFill>
+          <a:ln w="9525">
+            <a:solidFill>
+              <a:srgbClr val="0A1325"/>
+            </a:solidFill>
+          </a:ln>
+          <a:effectLst/>
+        </p:spPr>
+        <p:style>
+          <a:lnRef idx="1">
+            <a:schemeClr val="accent1"/>
+          </a:lnRef>
+          <a:fillRef idx="3">
+            <a:schemeClr val="accent1"/>
+          </a:fillRef>
+          <a:effectRef idx="2">
+            <a:schemeClr val="accent1"/>
+          </a:effectRef>
+          <a:fontRef idx="minor">
+            <a:schemeClr val="lt1"/>
+          </a:fontRef>
+        </p:style>
+        <p:txBody>
+          <a:bodyPr rtlCol="0" anchor="ctr"/>
+          <a:lstStyle/>
+          <a:p/>
+        </p:txBody>
+      </p:sp>
+      <p:sp>
+        <p:nvSpPr>
+          <p:cNvPr id="55" name="s13_53"/>
+          <p:cNvSpPr txBox="1"/>
+          <p:nvPr/>
+        </p:nvSpPr>
+        <p:spPr>
+          <a:xfrm>
+            <a:off x="4212546" y="4160520"/>
+            <a:ext cx="1160342" cy="237744"/>
+          </a:xfrm>
+          <a:prstGeom prst="rect">
+            <a:avLst/>
+          </a:prstGeom>
+          <a:noFill/>
+        </p:spPr>
+        <p:txBody>
+          <a:bodyPr wrap="none" lIns="0" rIns="0" tIns="0" bIns="0" anchor="ctr">
+            <a:spAutoFit/>
+          </a:bodyPr>
+          <a:lstStyle/>
+          <a:p>
+            <a:pPr algn="ctr">
+              <a:lnSpc>
+                <a:spcPct val="100000"/>
+              </a:lnSpc>
+              <a:spcBef>
+                <a:spcPts val="0"/>
+              </a:spcBef>
+              <a:spcAft>
+                <a:spcPts val="0"/>
+              </a:spcAft>
+            </a:pPr>
+            <a:r>
+              <a:rPr sz="850" b="1" i="0">
+                <a:solidFill>
+                  <a:srgbClr val="0A1325"/>
+                </a:solidFill>
+                <a:latin typeface="Consolas"/>
+              </a:rPr>
+              <a:t>32</a:t>
+            </a:r>
+          </a:p>
+        </p:txBody>
+      </p:sp>
+      <p:sp>
+        <p:nvSpPr>
+          <p:cNvPr id="56" name="s13_54"/>
+          <p:cNvSpPr/>
+          <p:nvPr/>
+        </p:nvSpPr>
+        <p:spPr>
+          <a:xfrm>
+            <a:off x="5372888" y="4160520"/>
+            <a:ext cx="616431" cy="237744"/>
+          </a:xfrm>
+          <a:prstGeom prst="rect">
+            <a:avLst/>
+          </a:prstGeom>
+          <a:solidFill>
+            <a:srgbClr val="C2544D"/>
+          </a:solidFill>
+          <a:ln w="9525">
+            <a:solidFill>
+              <a:srgbClr val="0A1325"/>
+            </a:solidFill>
+          </a:ln>
+          <a:effectLst/>
+        </p:spPr>
+        <p:style>
+          <a:lnRef idx="1">
+            <a:schemeClr val="accent1"/>
+          </a:lnRef>
+          <a:fillRef idx="3">
+            <a:schemeClr val="accent1"/>
+          </a:fillRef>
+          <a:effectRef idx="2">
+            <a:schemeClr val="accent1"/>
+          </a:effectRef>
+          <a:fontRef idx="minor">
+            <a:schemeClr val="lt1"/>
+          </a:fontRef>
+        </p:style>
+        <p:txBody>
+          <a:bodyPr rtlCol="0" anchor="ctr"/>
+          <a:lstStyle/>
+          <a:p/>
+        </p:txBody>
+      </p:sp>
+      <p:sp>
+        <p:nvSpPr>
+          <p:cNvPr id="57" name="s13_55"/>
+          <p:cNvSpPr txBox="1"/>
+          <p:nvPr/>
+        </p:nvSpPr>
+        <p:spPr>
+          <a:xfrm>
+            <a:off x="5372888" y="4160520"/>
+            <a:ext cx="616431" cy="237744"/>
+          </a:xfrm>
+          <a:prstGeom prst="rect">
+            <a:avLst/>
+          </a:prstGeom>
+          <a:noFill/>
+        </p:spPr>
+        <p:txBody>
+          <a:bodyPr wrap="none" lIns="0" rIns="0" tIns="0" bIns="0" anchor="ctr">
+            <a:spAutoFit/>
+          </a:bodyPr>
+          <a:lstStyle/>
+          <a:p>
+            <a:pPr algn="ctr">
+              <a:lnSpc>
+                <a:spcPct val="100000"/>
+              </a:lnSpc>
+              <a:spcBef>
+                <a:spcPts val="0"/>
+              </a:spcBef>
+              <a:spcAft>
+                <a:spcPts val="0"/>
+              </a:spcAft>
+            </a:pPr>
+            <a:r>
+              <a:rPr sz="850" b="1" i="0">
+                <a:solidFill>
+                  <a:srgbClr val="0A1325"/>
+                </a:solidFill>
+                <a:latin typeface="Consolas"/>
+              </a:rPr>
+              <a:t>17</a:t>
+            </a:r>
+          </a:p>
+        </p:txBody>
+      </p:sp>
+      <p:sp>
+        <p:nvSpPr>
+          <p:cNvPr id="58" name="s13_56"/>
+          <p:cNvSpPr/>
+          <p:nvPr/>
+        </p:nvSpPr>
+        <p:spPr>
+          <a:xfrm>
+            <a:off x="736092" y="4503420"/>
+            <a:ext cx="100584" cy="100584"/>
+          </a:xfrm>
+          <a:prstGeom prst="ellipse">
+            <a:avLst/>
+          </a:prstGeom>
+          <a:solidFill>
+            <a:srgbClr val="2FD3B0"/>
+          </a:solidFill>
+          <a:ln>
+            <a:noFill/>
+          </a:ln>
+          <a:effectLst/>
+        </p:spPr>
+        <p:style>
+          <a:lnRef idx="1">
+            <a:schemeClr val="accent1"/>
+          </a:lnRef>
+          <a:fillRef idx="3">
+            <a:schemeClr val="accent1"/>
+          </a:fillRef>
+          <a:effectRef idx="2">
+            <a:schemeClr val="accent1"/>
+          </a:effectRef>
+          <a:fontRef idx="minor">
+            <a:schemeClr val="lt1"/>
+          </a:fontRef>
+        </p:style>
+        <p:txBody>
+          <a:bodyPr rtlCol="0" anchor="ctr"/>
+          <a:lstStyle/>
+          <a:p/>
+        </p:txBody>
+      </p:sp>
+      <p:sp>
+        <p:nvSpPr>
+          <p:cNvPr id="59" name="s13_57"/>
+          <p:cNvSpPr txBox="1"/>
+          <p:nvPr/>
+        </p:nvSpPr>
+        <p:spPr>
+          <a:xfrm>
+            <a:off x="905256" y="4462272"/>
+            <a:ext cx="2194560" cy="182880"/>
+          </a:xfrm>
+          <a:prstGeom prst="rect">
+            <a:avLst/>
+          </a:prstGeom>
+          <a:noFill/>
+        </p:spPr>
+        <p:txBody>
+          <a:bodyPr wrap="none" lIns="0" rIns="0" tIns="0" bIns="0" anchor="ctr">
+            <a:spAutoFit/>
+          </a:bodyPr>
+          <a:lstStyle/>
+          <a:p>
+            <a:pPr algn="l">
+              <a:lnSpc>
+                <a:spcPct val="100000"/>
+              </a:lnSpc>
+              <a:spcBef>
+                <a:spcPts val="0"/>
+              </a:spcBef>
+              <a:spcAft>
+                <a:spcPts val="0"/>
+              </a:spcAft>
+            </a:pPr>
+            <a:r>
+              <a:rPr sz="850" b="0" i="0">
+                <a:solidFill>
+                  <a:srgbClr val="8395B5"/>
+                </a:solidFill>
+                <a:latin typeface="Bahnschrift SemiLight"/>
+              </a:rPr>
+              <a:t>execução / teste</a:t>
+            </a:r>
+          </a:p>
+        </p:txBody>
+      </p:sp>
+      <p:sp>
+        <p:nvSpPr>
+          <p:cNvPr id="60" name="s13_58"/>
+          <p:cNvSpPr/>
+          <p:nvPr/>
+        </p:nvSpPr>
+        <p:spPr>
+          <a:xfrm>
+            <a:off x="1981504" y="4503420"/>
+            <a:ext cx="100584" cy="100584"/>
+          </a:xfrm>
+          <a:prstGeom prst="ellipse">
+            <a:avLst/>
+          </a:prstGeom>
+          <a:solidFill>
+            <a:srgbClr val="4F8EF7"/>
+          </a:solidFill>
+          <a:ln>
+            <a:noFill/>
+          </a:ln>
+          <a:effectLst/>
+        </p:spPr>
+        <p:style>
+          <a:lnRef idx="1">
+            <a:schemeClr val="accent1"/>
+          </a:lnRef>
+          <a:fillRef idx="3">
+            <a:schemeClr val="accent1"/>
+          </a:fillRef>
+          <a:effectRef idx="2">
+            <a:schemeClr val="accent1"/>
+          </a:effectRef>
+          <a:fontRef idx="minor">
+            <a:schemeClr val="lt1"/>
+          </a:fontRef>
+        </p:style>
+        <p:txBody>
+          <a:bodyPr rtlCol="0" anchor="ctr"/>
+          <a:lstStyle/>
+          <a:p/>
+        </p:txBody>
+      </p:sp>
+      <p:sp>
+        <p:nvSpPr>
+          <p:cNvPr id="61" name="s13_59"/>
+          <p:cNvSpPr txBox="1"/>
+          <p:nvPr/>
+        </p:nvSpPr>
+        <p:spPr>
+          <a:xfrm>
+            <a:off x="2150668" y="4462272"/>
+            <a:ext cx="2194560" cy="182880"/>
+          </a:xfrm>
+          <a:prstGeom prst="rect">
+            <a:avLst/>
+          </a:prstGeom>
+          <a:noFill/>
+        </p:spPr>
+        <p:txBody>
+          <a:bodyPr wrap="none" lIns="0" rIns="0" tIns="0" bIns="0" anchor="ctr">
+            <a:spAutoFit/>
+          </a:bodyPr>
+          <a:lstStyle/>
+          <a:p>
+            <a:pPr algn="l">
+              <a:lnSpc>
+                <a:spcPct val="100000"/>
+              </a:lnSpc>
+              <a:spcBef>
+                <a:spcPts val="0"/>
+              </a:spcBef>
+              <a:spcAft>
+                <a:spcPts val="0"/>
+              </a:spcAft>
+            </a:pPr>
+            <a:r>
+              <a:rPr sz="850" b="0" i="0">
+                <a:solidFill>
+                  <a:srgbClr val="8395B5"/>
+                </a:solidFill>
+                <a:latin typeface="Bahnschrift SemiLight"/>
+              </a:rPr>
+              <a:t>auto-correção na sessão</a:t>
+            </a:r>
+          </a:p>
+        </p:txBody>
+      </p:sp>
+      <p:sp>
+        <p:nvSpPr>
+          <p:cNvPr id="62" name="s13_60"/>
+          <p:cNvSpPr/>
+          <p:nvPr/>
+        </p:nvSpPr>
+        <p:spPr>
+          <a:xfrm>
+            <a:off x="3623767" y="4503420"/>
+            <a:ext cx="100584" cy="100584"/>
+          </a:xfrm>
+          <a:prstGeom prst="ellipse">
+            <a:avLst/>
+          </a:prstGeom>
+          <a:solidFill>
+            <a:srgbClr val="FFB531"/>
+          </a:solidFill>
+          <a:ln>
+            <a:noFill/>
+          </a:ln>
+          <a:effectLst/>
+        </p:spPr>
+        <p:style>
+          <a:lnRef idx="1">
+            <a:schemeClr val="accent1"/>
+          </a:lnRef>
+          <a:fillRef idx="3">
+            <a:schemeClr val="accent1"/>
+          </a:fillRef>
+          <a:effectRef idx="2">
+            <a:schemeClr val="accent1"/>
+          </a:effectRef>
+          <a:fontRef idx="minor">
+            <a:schemeClr val="lt1"/>
+          </a:fontRef>
+        </p:style>
+        <p:txBody>
+          <a:bodyPr rtlCol="0" anchor="ctr"/>
+          <a:lstStyle/>
+          <a:p/>
+        </p:txBody>
+      </p:sp>
+      <p:sp>
+        <p:nvSpPr>
+          <p:cNvPr id="63" name="s13_61"/>
+          <p:cNvSpPr txBox="1"/>
+          <p:nvPr/>
+        </p:nvSpPr>
+        <p:spPr>
+          <a:xfrm>
+            <a:off x="3792931" y="4462272"/>
+            <a:ext cx="2194560" cy="182880"/>
+          </a:xfrm>
+          <a:prstGeom prst="rect">
+            <a:avLst/>
+          </a:prstGeom>
+          <a:noFill/>
+        </p:spPr>
+        <p:txBody>
+          <a:bodyPr wrap="none" lIns="0" rIns="0" tIns="0" bIns="0" anchor="ctr">
+            <a:spAutoFit/>
+          </a:bodyPr>
+          <a:lstStyle/>
+          <a:p>
+            <a:pPr algn="l">
+              <a:lnSpc>
+                <a:spcPct val="100000"/>
+              </a:lnSpc>
+              <a:spcBef>
+                <a:spcPts val="0"/>
+              </a:spcBef>
+              <a:spcAft>
+                <a:spcPts val="0"/>
+              </a:spcAft>
+            </a:pPr>
+            <a:r>
+              <a:rPr sz="850" b="0" i="0">
+                <a:solidFill>
+                  <a:srgbClr val="8395B5"/>
+                </a:solidFill>
+                <a:latin typeface="Bahnschrift SemiLight"/>
+              </a:rPr>
+              <a:t>conferência humana</a:t>
+            </a:r>
+          </a:p>
+        </p:txBody>
+      </p:sp>
+      <p:sp>
+        <p:nvSpPr>
+          <p:cNvPr id="64" name="s13_62"/>
+          <p:cNvSpPr/>
+          <p:nvPr/>
+        </p:nvSpPr>
+        <p:spPr>
+          <a:xfrm>
+            <a:off x="4982565" y="4503420"/>
+            <a:ext cx="100584" cy="100584"/>
+          </a:xfrm>
+          <a:prstGeom prst="ellipse">
+            <a:avLst/>
+          </a:prstGeom>
+          <a:solidFill>
+            <a:srgbClr val="C2544D"/>
+          </a:solidFill>
+          <a:ln>
+            <a:noFill/>
+          </a:ln>
+          <a:effectLst/>
+        </p:spPr>
+        <p:style>
+          <a:lnRef idx="1">
+            <a:schemeClr val="accent1"/>
+          </a:lnRef>
+          <a:fillRef idx="3">
+            <a:schemeClr val="accent1"/>
+          </a:fillRef>
+          <a:effectRef idx="2">
+            <a:schemeClr val="accent1"/>
+          </a:effectRef>
+          <a:fontRef idx="minor">
+            <a:schemeClr val="lt1"/>
+          </a:fontRef>
+        </p:style>
+        <p:txBody>
+          <a:bodyPr rtlCol="0" anchor="ctr"/>
+          <a:lstStyle/>
+          <a:p/>
+        </p:txBody>
+      </p:sp>
+      <p:sp>
+        <p:nvSpPr>
+          <p:cNvPr id="65" name="s13_63"/>
+          <p:cNvSpPr txBox="1"/>
+          <p:nvPr/>
+        </p:nvSpPr>
+        <p:spPr>
+          <a:xfrm>
+            <a:off x="5151729" y="4462272"/>
+            <a:ext cx="2194560" cy="182880"/>
+          </a:xfrm>
+          <a:prstGeom prst="rect">
+            <a:avLst/>
+          </a:prstGeom>
+          <a:noFill/>
+        </p:spPr>
+        <p:txBody>
+          <a:bodyPr wrap="none" lIns="0" rIns="0" tIns="0" bIns="0" anchor="ctr">
+            <a:spAutoFit/>
+          </a:bodyPr>
+          <a:lstStyle/>
+          <a:p>
+            <a:pPr algn="l">
+              <a:lnSpc>
+                <a:spcPct val="100000"/>
+              </a:lnSpc>
+              <a:spcBef>
+                <a:spcPts val="0"/>
+              </a:spcBef>
+              <a:spcAft>
+                <a:spcPts val="0"/>
+              </a:spcAft>
+            </a:pPr>
+            <a:r>
+              <a:rPr sz="850" b="0" i="0">
+                <a:solidFill>
+                  <a:srgbClr val="8395B5"/>
+                </a:solidFill>
+                <a:latin typeface="Bahnschrift SemiLight"/>
+              </a:rPr>
+              <a:t>só pego depois</a:t>
+            </a:r>
+          </a:p>
+        </p:txBody>
+      </p:sp>
+      <p:sp>
+        <p:nvSpPr>
+          <p:cNvPr id="66" name="s13_64"/>
+          <p:cNvSpPr txBox="1"/>
+          <p:nvPr/>
+        </p:nvSpPr>
+        <p:spPr>
+          <a:xfrm>
+            <a:off x="731520" y="4690872"/>
+            <a:ext cx="5257800" cy="365760"/>
+          </a:xfrm>
+          <a:prstGeom prst="rect">
+            <a:avLst/>
+          </a:prstGeom>
+          <a:noFill/>
+        </p:spPr>
+        <p:txBody>
+          <a:bodyPr wrap="square" lIns="0" rIns="0" tIns="0" bIns="0" anchor="t">
+            <a:spAutoFit/>
+          </a:bodyPr>
+          <a:lstStyle/>
+          <a:p>
+            <a:pPr algn="l">
+              <a:lnSpc>
+                <a:spcPct val="115000"/>
+              </a:lnSpc>
+              <a:spcBef>
+                <a:spcPts val="0"/>
+              </a:spcBef>
+              <a:spcAft>
+                <a:spcPts val="0"/>
+              </a:spcAft>
+            </a:pPr>
+            <a:r>
+              <a:rPr sz="950" b="0" i="0">
+                <a:solidFill>
+                  <a:srgbClr val="F5F7FB"/>
+                </a:solidFill>
+                <a:latin typeface="Bahnschrift SemiBold"/>
+              </a:rPr>
+              <a:t>88% pegos na própria sessão. </a:t>
+            </a:r>
+            <a:r>
+              <a:rPr sz="850" b="0" i="0">
+                <a:solidFill>
+                  <a:srgbClr val="8395B5"/>
+                </a:solidFill>
+                <a:latin typeface="Bahnschrift SemiLight"/>
+              </a:rPr>
+              <a:t>72 código quebrado  ·  25 alucinação numérica  ·  13 generalização além do teste  ·  13 texto impreciso ou contraditório  ·  12 premissa herdada  ·  10 escopo ou condução errada</a:t>
+            </a:r>
+          </a:p>
+        </p:txBody>
+      </p:sp>
+      <p:sp>
+        <p:nvSpPr>
+          <p:cNvPr id="67" name="s13_65"/>
+          <p:cNvSpPr txBox="1"/>
+          <p:nvPr/>
+        </p:nvSpPr>
+        <p:spPr>
+          <a:xfrm>
+            <a:off x="731520" y="5138928"/>
+            <a:ext cx="5257800" cy="182880"/>
+          </a:xfrm>
+          <a:prstGeom prst="rect">
+            <a:avLst/>
+          </a:prstGeom>
+          <a:noFill/>
+        </p:spPr>
+        <p:txBody>
+          <a:bodyPr wrap="square" lIns="0" rIns="0" tIns="0" bIns="0" anchor="t">
+            <a:spAutoFit/>
+          </a:bodyPr>
+          <a:lstStyle/>
+          <a:p>
+            <a:pPr algn="l">
+              <a:lnSpc>
+                <a:spcPct val="100000"/>
+              </a:lnSpc>
+              <a:spcBef>
+                <a:spcPts val="0"/>
+              </a:spcBef>
+              <a:spcAft>
+                <a:spcPts val="0"/>
+              </a:spcAft>
+            </a:pPr>
+            <a:r>
+              <a:rPr sz="900" b="1" i="0" spc="180">
+                <a:solidFill>
+                  <a:srgbClr val="FFB531"/>
+                </a:solidFill>
+                <a:latin typeface="Consolas"/>
+              </a:rPr>
+              <a:t>USOS PRÁTICOS  ·  37 TESTES  ·  39 ANÁLISES EM .MD</a:t>
+            </a:r>
+          </a:p>
+        </p:txBody>
+      </p:sp>
+      <p:sp>
+        <p:nvSpPr>
+          <p:cNvPr id="68" name="s13_66"/>
+          <p:cNvSpPr txBox="1"/>
+          <p:nvPr/>
+        </p:nvSpPr>
+        <p:spPr>
+          <a:xfrm>
+            <a:off x="731520" y="5394960"/>
+            <a:ext cx="2537460" cy="228600"/>
+          </a:xfrm>
+          <a:prstGeom prst="rect">
+            <a:avLst/>
+          </a:prstGeom>
+          <a:noFill/>
+        </p:spPr>
+        <p:txBody>
+          <a:bodyPr wrap="none" lIns="0" rIns="0" tIns="0" bIns="0" anchor="ctr">
+            <a:spAutoFit/>
+          </a:bodyPr>
+          <a:lstStyle/>
+          <a:p>
+            <a:pPr algn="l">
+              <a:lnSpc>
+                <a:spcPct val="100000"/>
+              </a:lnSpc>
+              <a:spcBef>
+                <a:spcPts val="0"/>
+              </a:spcBef>
+              <a:spcAft>
+                <a:spcPts val="0"/>
+              </a:spcAft>
+            </a:pPr>
+            <a:r>
+              <a:rPr sz="800" b="1" i="0">
+                <a:solidFill>
+                  <a:srgbClr val="4F8EF7"/>
+                </a:solidFill>
+                <a:latin typeface="Consolas"/>
+              </a:rPr>
+              <a:t>surpresa_fomc.py</a:t>
+            </a:r>
+            <a:r>
+              <a:rPr sz="850" b="0" i="0">
+                <a:solidFill>
+                  <a:srgbClr val="BAC6DA"/>
+                </a:solidFill>
+                <a:latin typeface="Bahnschrift SemiLight"/>
+              </a:rPr>
+              <a:t>  β por event-study, 36 reuniões</a:t>
+            </a:r>
+          </a:p>
+        </p:txBody>
+      </p:sp>
+      <p:sp>
+        <p:nvSpPr>
+          <p:cNvPr id="69" name="s13_67"/>
+          <p:cNvSpPr txBox="1"/>
+          <p:nvPr/>
+        </p:nvSpPr>
+        <p:spPr>
+          <a:xfrm>
+            <a:off x="731520" y="5641848"/>
+            <a:ext cx="2537460" cy="228600"/>
+          </a:xfrm>
+          <a:prstGeom prst="rect">
+            <a:avLst/>
+          </a:prstGeom>
+          <a:noFill/>
+        </p:spPr>
+        <p:txBody>
+          <a:bodyPr wrap="none" lIns="0" rIns="0" tIns="0" bIns="0" anchor="ctr">
+            <a:spAutoFit/>
+          </a:bodyPr>
+          <a:lstStyle/>
+          <a:p>
+            <a:pPr algn="l">
+              <a:lnSpc>
+                <a:spcPct val="100000"/>
+              </a:lnSpc>
+              <a:spcBef>
+                <a:spcPts val="0"/>
+              </a:spcBef>
+              <a:spcAft>
+                <a:spcPts val="0"/>
+              </a:spcAft>
+            </a:pPr>
+            <a:r>
+              <a:rPr sz="800" b="1" i="0">
+                <a:solidFill>
+                  <a:srgbClr val="4F8EF7"/>
+                </a:solidFill>
+                <a:latin typeface="Consolas"/>
+              </a:rPr>
+              <a:t>9 × gate_*.py</a:t>
+            </a:r>
+            <a:r>
+              <a:rPr sz="850" b="0" i="0">
+                <a:solidFill>
+                  <a:srgbClr val="BAC6DA"/>
+                </a:solidFill>
+                <a:latin typeface="Bahnschrift SemiLight"/>
+              </a:rPr>
+              <a:t>  um teste por candidata tática</a:t>
+            </a:r>
+          </a:p>
+        </p:txBody>
+      </p:sp>
+      <p:sp>
+        <p:nvSpPr>
+          <p:cNvPr id="70" name="s13_68"/>
+          <p:cNvSpPr txBox="1"/>
+          <p:nvPr/>
+        </p:nvSpPr>
+        <p:spPr>
+          <a:xfrm>
+            <a:off x="731520" y="5888736"/>
+            <a:ext cx="2537460" cy="228600"/>
+          </a:xfrm>
+          <a:prstGeom prst="rect">
+            <a:avLst/>
+          </a:prstGeom>
+          <a:noFill/>
+        </p:spPr>
+        <p:txBody>
+          <a:bodyPr wrap="none" lIns="0" rIns="0" tIns="0" bIns="0" anchor="ctr">
+            <a:spAutoFit/>
+          </a:bodyPr>
+          <a:lstStyle/>
+          <a:p>
+            <a:pPr algn="l">
+              <a:lnSpc>
+                <a:spcPct val="100000"/>
+              </a:lnSpc>
+              <a:spcBef>
+                <a:spcPts val="0"/>
+              </a:spcBef>
+              <a:spcAft>
+                <a:spcPts val="0"/>
+              </a:spcAft>
+            </a:pPr>
+            <a:r>
+              <a:rPr sz="800" b="1" i="0">
+                <a:solidFill>
+                  <a:srgbClr val="4F8EF7"/>
+                </a:solidFill>
+                <a:latin typeface="Consolas"/>
+              </a:rPr>
+              <a:t>curva_c.py</a:t>
+            </a:r>
+            <a:r>
+              <a:rPr sz="850" b="0" i="0">
+                <a:solidFill>
+                  <a:srgbClr val="BAC6DA"/>
+                </a:solidFill>
+                <a:latin typeface="Bahnschrift SemiLight"/>
+              </a:rPr>
+              <a:t>  varredura da régua do Ω</a:t>
+            </a:r>
+          </a:p>
+        </p:txBody>
+      </p:sp>
+      <p:sp>
+        <p:nvSpPr>
+          <p:cNvPr id="71" name="s13_69"/>
+          <p:cNvSpPr txBox="1"/>
+          <p:nvPr/>
+        </p:nvSpPr>
+        <p:spPr>
+          <a:xfrm>
+            <a:off x="731520" y="6135624"/>
+            <a:ext cx="2537460" cy="228600"/>
+          </a:xfrm>
+          <a:prstGeom prst="rect">
+            <a:avLst/>
+          </a:prstGeom>
+          <a:noFill/>
+        </p:spPr>
+        <p:txBody>
+          <a:bodyPr wrap="none" lIns="0" rIns="0" tIns="0" bIns="0" anchor="ctr">
+            <a:spAutoFit/>
+          </a:bodyPr>
+          <a:lstStyle/>
+          <a:p>
+            <a:pPr algn="l">
+              <a:lnSpc>
+                <a:spcPct val="100000"/>
+              </a:lnSpc>
+              <a:spcBef>
+                <a:spcPts val="0"/>
+              </a:spcBef>
+              <a:spcAft>
+                <a:spcPts val="0"/>
+              </a:spcAft>
+            </a:pPr>
+            <a:r>
+              <a:rPr sz="800" b="1" i="0">
+                <a:solidFill>
+                  <a:srgbClr val="4F8EF7"/>
+                </a:solidFill>
+                <a:latin typeface="Consolas"/>
+              </a:rPr>
+              <a:t>backtest_v1.py</a:t>
+            </a:r>
+            <a:r>
+              <a:rPr sz="850" b="0" i="0">
+                <a:solidFill>
+                  <a:srgbClr val="BAC6DA"/>
+                </a:solidFill>
+                <a:latin typeface="Bahnschrift SemiLight"/>
+              </a:rPr>
+              <a:t>  8 tetos × 374 pregões</a:t>
+            </a:r>
+          </a:p>
+        </p:txBody>
+      </p:sp>
+      <p:sp>
+        <p:nvSpPr>
+          <p:cNvPr id="72" name="s13_70"/>
+          <p:cNvSpPr txBox="1"/>
+          <p:nvPr/>
+        </p:nvSpPr>
+        <p:spPr>
+          <a:xfrm>
+            <a:off x="3406139" y="5394960"/>
+            <a:ext cx="2537460" cy="228600"/>
+          </a:xfrm>
+          <a:prstGeom prst="rect">
+            <a:avLst/>
+          </a:prstGeom>
+          <a:noFill/>
+        </p:spPr>
+        <p:txBody>
+          <a:bodyPr wrap="none" lIns="0" rIns="0" tIns="0" bIns="0" anchor="ctr">
+            <a:spAutoFit/>
+          </a:bodyPr>
+          <a:lstStyle/>
+          <a:p>
+            <a:pPr algn="l">
+              <a:lnSpc>
+                <a:spcPct val="100000"/>
+              </a:lnSpc>
+              <a:spcBef>
+                <a:spcPts val="0"/>
+              </a:spcBef>
+              <a:spcAft>
+                <a:spcPts val="0"/>
+              </a:spcAft>
+            </a:pPr>
+            <a:r>
+              <a:rPr sz="800" b="1" i="0">
+                <a:solidFill>
+                  <a:srgbClr val="4F8EF7"/>
+                </a:solidFill>
+                <a:latin typeface="Consolas"/>
+              </a:rPr>
+              <a:t>download_polymarket_fed.py</a:t>
+            </a:r>
+            <a:r>
+              <a:rPr sz="850" b="0" i="0">
+                <a:solidFill>
+                  <a:srgbClr val="BAC6DA"/>
+                </a:solidFill>
+                <a:latin typeface="Bahnschrift SemiLight"/>
+              </a:rPr>
+              <a:t>  Gamma + CLOB API</a:t>
+            </a:r>
+          </a:p>
+        </p:txBody>
+      </p:sp>
+      <p:sp>
+        <p:nvSpPr>
+          <p:cNvPr id="73" name="s13_71"/>
+          <p:cNvSpPr txBox="1"/>
+          <p:nvPr/>
+        </p:nvSpPr>
+        <p:spPr>
+          <a:xfrm>
+            <a:off x="3406139" y="5641848"/>
+            <a:ext cx="2537460" cy="228600"/>
+          </a:xfrm>
+          <a:prstGeom prst="rect">
+            <a:avLst/>
+          </a:prstGeom>
+          <a:noFill/>
+        </p:spPr>
+        <p:txBody>
+          <a:bodyPr wrap="none" lIns="0" rIns="0" tIns="0" bIns="0" anchor="ctr">
+            <a:spAutoFit/>
+          </a:bodyPr>
+          <a:lstStyle/>
+          <a:p>
+            <a:pPr algn="l">
+              <a:lnSpc>
+                <a:spcPct val="100000"/>
+              </a:lnSpc>
+              <a:spcBef>
+                <a:spcPts val="0"/>
+              </a:spcBef>
+              <a:spcAft>
+                <a:spcPts val="0"/>
+              </a:spcAft>
+            </a:pPr>
+            <a:r>
+              <a:rPr sz="800" b="1" i="0">
+                <a:solidFill>
+                  <a:srgbClr val="4F8EF7"/>
+                </a:solidFill>
+                <a:latin typeface="Consolas"/>
+              </a:rPr>
+              <a:t>graficos_p5.py</a:t>
+            </a:r>
+            <a:r>
+              <a:rPr sz="850" b="0" i="0">
+                <a:solidFill>
+                  <a:srgbClr val="BAC6DA"/>
+                </a:solidFill>
+                <a:latin typeface="Bahnschrift SemiLight"/>
+              </a:rPr>
+              <a:t>  3 LOGs → estes números</a:t>
+            </a:r>
+          </a:p>
+        </p:txBody>
+      </p:sp>
+      <p:sp>
+        <p:nvSpPr>
+          <p:cNvPr id="74" name="s13_72"/>
+          <p:cNvSpPr txBox="1"/>
+          <p:nvPr/>
+        </p:nvSpPr>
+        <p:spPr>
+          <a:xfrm>
+            <a:off x="3406139" y="5888736"/>
+            <a:ext cx="2537460" cy="228600"/>
+          </a:xfrm>
+          <a:prstGeom prst="rect">
+            <a:avLst/>
+          </a:prstGeom>
+          <a:noFill/>
+        </p:spPr>
+        <p:txBody>
+          <a:bodyPr wrap="none" lIns="0" rIns="0" tIns="0" bIns="0" anchor="ctr">
+            <a:spAutoFit/>
+          </a:bodyPr>
+          <a:lstStyle/>
+          <a:p>
+            <a:pPr algn="l">
+              <a:lnSpc>
+                <a:spcPct val="100000"/>
+              </a:lnSpc>
+              <a:spcBef>
+                <a:spcPts val="0"/>
+              </a:spcBef>
+              <a:spcAft>
+                <a:spcPts val="0"/>
+              </a:spcAft>
+            </a:pPr>
+            <a:r>
+              <a:rPr sz="800" b="1" i="0">
+                <a:solidFill>
+                  <a:srgbClr val="4F8EF7"/>
+                </a:solidFill>
+                <a:latin typeface="Consolas"/>
+              </a:rPr>
+              <a:t>grafo_repo.py</a:t>
+            </a:r>
+            <a:r>
+              <a:rPr sz="850" b="0" i="0">
+                <a:solidFill>
+                  <a:srgbClr val="BAC6DA"/>
+                </a:solidFill>
+                <a:latin typeface="Bahnschrift SemiLight"/>
+              </a:rPr>
+              <a:t>  o second brain, medido</a:t>
+            </a:r>
+          </a:p>
+        </p:txBody>
+      </p:sp>
+      <p:sp>
+        <p:nvSpPr>
+          <p:cNvPr id="75" name="s13_73"/>
+          <p:cNvSpPr txBox="1"/>
+          <p:nvPr/>
+        </p:nvSpPr>
+        <p:spPr>
+          <a:xfrm>
+            <a:off x="3406139" y="6135624"/>
+            <a:ext cx="2537460" cy="228600"/>
+          </a:xfrm>
+          <a:prstGeom prst="rect">
+            <a:avLst/>
+          </a:prstGeom>
+          <a:noFill/>
+        </p:spPr>
+        <p:txBody>
+          <a:bodyPr wrap="none" lIns="0" rIns="0" tIns="0" bIns="0" anchor="ctr">
+            <a:spAutoFit/>
+          </a:bodyPr>
+          <a:lstStyle/>
+          <a:p>
+            <a:pPr algn="l">
+              <a:lnSpc>
+                <a:spcPct val="100000"/>
+              </a:lnSpc>
+              <a:spcBef>
+                <a:spcPts val="0"/>
+              </a:spcBef>
+              <a:spcAft>
+                <a:spcPts val="0"/>
+              </a:spcAft>
+            </a:pPr>
+            <a:r>
+              <a:rPr sz="800" b="1" i="0">
+                <a:solidFill>
+                  <a:srgbClr val="4F8EF7"/>
+                </a:solidFill>
+                <a:latin typeface="Consolas"/>
+              </a:rPr>
+              <a:t>slides_*_pptx.py</a:t>
+            </a:r>
+            <a:r>
+              <a:rPr sz="850" b="0" i="0">
+                <a:solidFill>
+                  <a:srgbClr val="BAC6DA"/>
+                </a:solidFill>
+                <a:latin typeface="Bahnschrift SemiLight"/>
+              </a:rPr>
+              <a:t>  este deck, Morph incluso</a:t>
+            </a:r>
+          </a:p>
+        </p:txBody>
+      </p:sp>
+      <p:sp>
+        <p:nvSpPr>
+          <p:cNvPr id="76" name="s13_74"/>
+          <p:cNvSpPr txBox="1"/>
+          <p:nvPr/>
+        </p:nvSpPr>
+        <p:spPr>
+          <a:xfrm>
+            <a:off x="6327648" y="1554480"/>
+            <a:ext cx="5129783" cy="182880"/>
+          </a:xfrm>
+          <a:prstGeom prst="rect">
+            <a:avLst/>
+          </a:prstGeom>
+          <a:noFill/>
+        </p:spPr>
+        <p:txBody>
+          <a:bodyPr wrap="square" lIns="0" rIns="0" tIns="0" bIns="0" anchor="t">
+            <a:spAutoFit/>
+          </a:bodyPr>
+          <a:lstStyle/>
+          <a:p>
+            <a:pPr algn="l">
+              <a:lnSpc>
+                <a:spcPct val="100000"/>
+              </a:lnSpc>
+              <a:spcBef>
+                <a:spcPts val="0"/>
+              </a:spcBef>
+              <a:spcAft>
+                <a:spcPts val="0"/>
+              </a:spcAft>
+            </a:pPr>
+            <a:r>
+              <a:rPr sz="900" b="1" i="0" spc="180">
+                <a:solidFill>
+                  <a:srgbClr val="FFB531"/>
+                </a:solidFill>
+                <a:latin typeface="Consolas"/>
+              </a:rPr>
+              <a:t>PESQUISA  ·  O MÉTODO, TODA VEZ</a:t>
+            </a:r>
+          </a:p>
+        </p:txBody>
+      </p:sp>
+      <p:sp>
+        <p:nvSpPr>
+          <p:cNvPr id="77" name="s13_75"/>
+          <p:cNvSpPr txBox="1"/>
+          <p:nvPr/>
+        </p:nvSpPr>
+        <p:spPr>
+          <a:xfrm>
+            <a:off x="6327648" y="1801368"/>
+            <a:ext cx="5129783" cy="1920240"/>
+          </a:xfrm>
+          <a:prstGeom prst="rect">
+            <a:avLst/>
+          </a:prstGeom>
+          <a:noFill/>
+        </p:spPr>
+        <p:txBody>
+          <a:bodyPr wrap="square" lIns="0" rIns="0" tIns="0" bIns="0" anchor="t">
+            <a:spAutoFit/>
+          </a:bodyPr>
+          <a:lstStyle/>
+          <a:p>
+            <a:pPr algn="l">
+              <a:lnSpc>
+                <a:spcPct val="110000"/>
+              </a:lnSpc>
+              <a:spcBef>
+                <a:spcPts val="0"/>
+              </a:spcBef>
+              <a:spcAft>
+                <a:spcPts val="500"/>
+              </a:spcAft>
+            </a:pPr>
+            <a:r>
+              <a:rPr sz="1050" b="0" i="0">
+                <a:solidFill>
+                  <a:srgbClr val="F5F7FB"/>
+                </a:solidFill>
+                <a:latin typeface="Bahnschrift SemiBold"/>
+              </a:rPr>
+              <a:t>1 · Hipótese escrita antes. </a:t>
+            </a:r>
+            <a:r>
+              <a:rPr sz="1050" b="0" i="0">
+                <a:solidFill>
+                  <a:srgbClr val="BAC6DA"/>
+                </a:solidFill>
+                <a:latin typeface="Bahnschrift SemiLight"/>
+              </a:rPr>
+              <a:t>Entra em Decisoes_pendentes.md com o teste que a derruba e a régua de corte — antes de olhar o dado.</a:t>
+            </a:r>
+          </a:p>
+          <a:p>
+            <a:pPr algn="l">
+              <a:lnSpc>
+                <a:spcPct val="110000"/>
+              </a:lnSpc>
+              <a:spcBef>
+                <a:spcPts val="0"/>
+              </a:spcBef>
+              <a:spcAft>
+                <a:spcPts val="500"/>
+              </a:spcAft>
+            </a:pPr>
+            <a:r>
+              <a:rPr sz="1050" b="0" i="0">
+                <a:solidFill>
+                  <a:srgbClr val="F5F7FB"/>
+                </a:solidFill>
+                <a:latin typeface="Bahnschrift SemiBold"/>
+              </a:rPr>
+              <a:t>2 · Um script por hipótese. </a:t>
+            </a:r>
+            <a:r>
+              <a:rPr sz="1050" b="0" i="0">
+                <a:solidFill>
+                  <a:srgbClr val="BAC6DA"/>
+                </a:solidFill>
+                <a:latin typeface="Bahnschrift SemiLight"/>
+              </a:rPr>
+              <a:t>gate_*.py e premissa_*.py medem no dado; a saída é um .md com os números e o carimbo “mede; não decide”.</a:t>
+            </a:r>
+          </a:p>
+          <a:p>
+            <a:pPr algn="l">
+              <a:lnSpc>
+                <a:spcPct val="110000"/>
+              </a:lnSpc>
+              <a:spcBef>
+                <a:spcPts val="0"/>
+              </a:spcBef>
+              <a:spcAft>
+                <a:spcPts val="500"/>
+              </a:spcAft>
+            </a:pPr>
+            <a:r>
+              <a:rPr sz="1050" b="0" i="0">
+                <a:solidFill>
+                  <a:srgbClr val="F5F7FB"/>
+                </a:solidFill>
+                <a:latin typeface="Bahnschrift SemiBold"/>
+              </a:rPr>
+              <a:t>3 · Régua declarada, não ajustada. </a:t>
+            </a:r>
+            <a:r>
+              <a:rPr sz="1050" b="0" i="0">
+                <a:solidFill>
+                  <a:srgbClr val="BAC6DA"/>
+                </a:solidFill>
+                <a:latin typeface="Bahnschrift SemiLight"/>
+              </a:rPr>
+              <a:t>|t| ≥ 2, sinal coerente com a literatura, janela expansiva sem lookahead. Passa no dado, não no retorno.</a:t>
+            </a:r>
+          </a:p>
+          <a:p>
+            <a:pPr algn="l">
+              <a:lnSpc>
+                <a:spcPct val="110000"/>
+              </a:lnSpc>
+              <a:spcBef>
+                <a:spcPts val="0"/>
+              </a:spcBef>
+              <a:spcAft>
+                <a:spcPts val="500"/>
+              </a:spcAft>
+            </a:pPr>
+            <a:r>
+              <a:rPr sz="1050" b="0" i="0">
+                <a:solidFill>
+                  <a:srgbClr val="F5F7FB"/>
+                </a:solidFill>
+                <a:latin typeface="Bahnschrift SemiBold"/>
+              </a:rPr>
+              <a:t>4 · Humano fecha; o que caiu fica. </a:t>
+            </a:r>
+            <a:r>
+              <a:rPr sz="1050" b="0" i="0">
+                <a:solidFill>
+                  <a:srgbClr val="BAC6DA"/>
+                </a:solidFill>
+                <a:latin typeface="Bahnschrift SemiLight"/>
+              </a:rPr>
+              <a:t>A IA nunca fecha decisão. Cada reprovação continua no repositório, com número — e a banca pode conferir.</a:t>
+            </a:r>
+          </a:p>
+        </p:txBody>
+      </p:sp>
+      <p:sp>
+        <p:nvSpPr>
+          <p:cNvPr id="78" name="s13_76"/>
+          <p:cNvSpPr/>
+          <p:nvPr/>
+        </p:nvSpPr>
+        <p:spPr>
+          <a:xfrm>
+            <a:off x="6327648" y="3858768"/>
+            <a:ext cx="5129783" cy="1371600"/>
+          </a:xfrm>
+          <a:prstGeom prst="roundRect">
+            <a:avLst>
+              <a:gd name="adj" fmla="val 4000"/>
+            </a:avLst>
+          </a:prstGeom>
+          <a:gradFill rotWithShape="1">
+            <a:gsLst>
+              <a:gs pos="0">
+                <a:srgbClr val="182946"/>
+              </a:gs>
+              <a:gs pos="100000">
+                <a:srgbClr val="0F182B"/>
+              </a:gs>
+            </a:gsLst>
+            <a:lin ang="5400000" scaled="0"/>
+          </a:gradFill>
+          <a:ln w="9525">
+            <a:gradFill rotWithShape="1">
+              <a:gsLst>
+                <a:gs pos="0">
+                  <a:srgbClr val="35507A"/>
+                </a:gs>
+                <a:gs pos="100000">
+                  <a:srgbClr val="22345A"/>
+                </a:gs>
+              </a:gsLst>
+              <a:lin ang="5400000" scaled="0"/>
+            </a:gradFill>
+          </a:ln>
+          <a:effectLst/>
+        </p:spPr>
+        <p:style>
+          <a:lnRef idx="1">
+            <a:schemeClr val="accent1"/>
+          </a:lnRef>
+          <a:fillRef idx="3">
+            <a:schemeClr val="accent1"/>
+          </a:fillRef>
+          <a:effectRef idx="2">
+            <a:schemeClr val="accent1"/>
+          </a:effectRef>
+          <a:fontRef idx="minor">
+            <a:schemeClr val="lt1"/>
+          </a:fontRef>
+        </p:style>
+        <p:txBody>
+          <a:bodyPr rtlCol="0" anchor="ctr"/>
+          <a:lstStyle/>
+          <a:p/>
+        </p:txBody>
+      </p:sp>
+      <p:sp>
+        <p:nvSpPr>
+          <p:cNvPr id="79" name="s13_77"/>
+          <p:cNvSpPr txBox="1"/>
+          <p:nvPr/>
+        </p:nvSpPr>
+        <p:spPr>
+          <a:xfrm>
+            <a:off x="6547104" y="4005072"/>
+            <a:ext cx="4764023" cy="182880"/>
+          </a:xfrm>
+          <a:prstGeom prst="rect">
+            <a:avLst/>
+          </a:prstGeom>
+          <a:noFill/>
+        </p:spPr>
+        <p:txBody>
+          <a:bodyPr wrap="square" lIns="0" rIns="0" tIns="0" bIns="0" anchor="t">
+            <a:spAutoFit/>
+          </a:bodyPr>
+          <a:lstStyle/>
+          <a:p>
+            <a:pPr algn="l">
+              <a:lnSpc>
+                <a:spcPct val="100000"/>
+              </a:lnSpc>
+              <a:spcBef>
+                <a:spcPts val="0"/>
+              </a:spcBef>
+              <a:spcAft>
+                <a:spcPts val="0"/>
+              </a:spcAft>
+            </a:pPr>
+            <a:r>
+              <a:rPr sz="900" b="1" i="0" spc="180">
+                <a:solidFill>
+                  <a:srgbClr val="FFB531"/>
+                </a:solidFill>
+                <a:latin typeface="Consolas"/>
+              </a:rPr>
+              <a:t>UMA QUE CAIU  ·  MOMENTUM DO SINAL</a:t>
+            </a:r>
+          </a:p>
+        </p:txBody>
+      </p:sp>
+      <p:sp>
+        <p:nvSpPr>
+          <p:cNvPr id="80" name="s13_78"/>
+          <p:cNvSpPr txBox="1"/>
+          <p:nvPr/>
+        </p:nvSpPr>
+        <p:spPr>
+          <a:xfrm>
+            <a:off x="6547104" y="4242816"/>
+            <a:ext cx="4690871" cy="457200"/>
+          </a:xfrm>
+          <a:prstGeom prst="rect">
+            <a:avLst/>
+          </a:prstGeom>
+          <a:noFill/>
+        </p:spPr>
+        <p:txBody>
+          <a:bodyPr wrap="square" lIns="0" rIns="0" tIns="0" bIns="0" anchor="t">
+            <a:spAutoFit/>
+          </a:bodyPr>
+          <a:lstStyle/>
+          <a:p>
+            <a:pPr algn="l">
+              <a:lnSpc>
+                <a:spcPct val="110000"/>
+              </a:lnSpc>
+              <a:spcBef>
+                <a:spcPts val="0"/>
+              </a:spcBef>
+              <a:spcAft>
+                <a:spcPts val="0"/>
+              </a:spcAft>
+            </a:pPr>
+            <a:r>
+              <a:rPr sz="950" b="0" i="0">
+                <a:solidFill>
+                  <a:srgbClr val="F5F7FB"/>
+                </a:solidFill>
+                <a:latin typeface="Bahnschrift SemiBold"/>
+              </a:rPr>
+              <a:t>Tese: </a:t>
+            </a:r>
+            <a:r>
+              <a:rPr sz="950" b="0" i="0">
+                <a:solidFill>
+                  <a:srgbClr val="BAC6DA"/>
+                </a:solidFill>
+                <a:latin typeface="Bahnschrift SemiLight"/>
+              </a:rPr>
+              <a:t>se a probabilidade subiu hoje, continua subindo amanhã — daria uma sleeve de tendência. Teste: variance ratio dos incrementos, VR = 1 é passeio aleatório.</a:t>
+            </a:r>
+          </a:p>
+        </p:txBody>
+      </p:sp>
+      <p:sp>
+        <p:nvSpPr>
+          <p:cNvPr id="81" name="s13_79"/>
+          <p:cNvSpPr txBox="1"/>
+          <p:nvPr/>
+        </p:nvSpPr>
+        <p:spPr>
+          <a:xfrm>
+            <a:off x="6547104" y="4645152"/>
+            <a:ext cx="781811" cy="182880"/>
+          </a:xfrm>
+          <a:prstGeom prst="rect">
+            <a:avLst/>
+          </a:prstGeom>
+          <a:noFill/>
+        </p:spPr>
+        <p:txBody>
+          <a:bodyPr wrap="square" lIns="0" rIns="0" tIns="0" bIns="0" anchor="t">
+            <a:spAutoFit/>
+          </a:bodyPr>
+          <a:lstStyle/>
+          <a:p>
+            <a:pPr algn="ctr">
+              <a:lnSpc>
+                <a:spcPct val="100000"/>
+              </a:lnSpc>
+              <a:spcBef>
+                <a:spcPts val="0"/>
+              </a:spcBef>
+              <a:spcAft>
+                <a:spcPts val="0"/>
+              </a:spcAft>
+            </a:pPr>
+            <a:r>
+              <a:rPr sz="750" b="0" i="0">
+                <a:solidFill>
+                  <a:srgbClr val="8395B5"/>
+                </a:solidFill>
+                <a:latin typeface="Consolas"/>
+              </a:rPr>
+              <a:t>k=1</a:t>
+            </a:r>
+          </a:p>
+        </p:txBody>
+      </p:sp>
+      <p:sp>
+        <p:nvSpPr>
+          <p:cNvPr id="82" name="s13_80"/>
+          <p:cNvSpPr txBox="1"/>
+          <p:nvPr/>
+        </p:nvSpPr>
+        <p:spPr>
+          <a:xfrm>
+            <a:off x="6547104" y="4791456"/>
+            <a:ext cx="781811" cy="256032"/>
+          </a:xfrm>
+          <a:prstGeom prst="rect">
+            <a:avLst/>
+          </a:prstGeom>
+          <a:noFill/>
+        </p:spPr>
+        <p:txBody>
+          <a:bodyPr wrap="square" lIns="0" rIns="0" tIns="0" bIns="0" anchor="t">
+            <a:spAutoFit/>
+          </a:bodyPr>
+          <a:lstStyle/>
+          <a:p>
+            <a:pPr algn="ctr">
+              <a:lnSpc>
+                <a:spcPct val="100000"/>
+              </a:lnSpc>
+              <a:spcBef>
+                <a:spcPts val="0"/>
+              </a:spcBef>
+              <a:spcAft>
+                <a:spcPts val="0"/>
+              </a:spcAft>
+            </a:pPr>
+            <a:r>
+              <a:rPr sz="1500" b="0" i="0">
+                <a:solidFill>
+                  <a:srgbClr val="FFB531"/>
+                </a:solidFill>
+                <a:latin typeface="Bahnschrift SemiBold Condensed"/>
+              </a:rPr>
+              <a:t>1,00</a:t>
+            </a:r>
+          </a:p>
+        </p:txBody>
+      </p:sp>
+      <p:sp>
+        <p:nvSpPr>
+          <p:cNvPr id="83" name="s13_81"/>
+          <p:cNvSpPr txBox="1"/>
+          <p:nvPr/>
+        </p:nvSpPr>
+        <p:spPr>
+          <a:xfrm>
+            <a:off x="7328916" y="4645152"/>
+            <a:ext cx="781811" cy="182880"/>
+          </a:xfrm>
+          <a:prstGeom prst="rect">
+            <a:avLst/>
+          </a:prstGeom>
+          <a:noFill/>
+        </p:spPr>
+        <p:txBody>
+          <a:bodyPr wrap="square" lIns="0" rIns="0" tIns="0" bIns="0" anchor="t">
+            <a:spAutoFit/>
+          </a:bodyPr>
+          <a:lstStyle/>
+          <a:p>
+            <a:pPr algn="ctr">
+              <a:lnSpc>
+                <a:spcPct val="100000"/>
+              </a:lnSpc>
+              <a:spcBef>
+                <a:spcPts val="0"/>
+              </a:spcBef>
+              <a:spcAft>
+                <a:spcPts val="0"/>
+              </a:spcAft>
+            </a:pPr>
+            <a:r>
+              <a:rPr sz="750" b="0" i="0">
+                <a:solidFill>
+                  <a:srgbClr val="8395B5"/>
+                </a:solidFill>
+                <a:latin typeface="Consolas"/>
+              </a:rPr>
+              <a:t>k=2</a:t>
+            </a:r>
+          </a:p>
+        </p:txBody>
+      </p:sp>
+      <p:sp>
+        <p:nvSpPr>
+          <p:cNvPr id="84" name="s13_82"/>
+          <p:cNvSpPr txBox="1"/>
+          <p:nvPr/>
+        </p:nvSpPr>
+        <p:spPr>
+          <a:xfrm>
+            <a:off x="7328916" y="4791456"/>
+            <a:ext cx="781811" cy="256032"/>
+          </a:xfrm>
+          <a:prstGeom prst="rect">
+            <a:avLst/>
+          </a:prstGeom>
+          <a:noFill/>
+        </p:spPr>
+        <p:txBody>
+          <a:bodyPr wrap="square" lIns="0" rIns="0" tIns="0" bIns="0" anchor="t">
+            <a:spAutoFit/>
+          </a:bodyPr>
+          <a:lstStyle/>
+          <a:p>
+            <a:pPr algn="ctr">
+              <a:lnSpc>
+                <a:spcPct val="100000"/>
+              </a:lnSpc>
+              <a:spcBef>
+                <a:spcPts val="0"/>
+              </a:spcBef>
+              <a:spcAft>
+                <a:spcPts val="0"/>
+              </a:spcAft>
+            </a:pPr>
+            <a:r>
+              <a:rPr sz="1500" b="0" i="0">
+                <a:solidFill>
+                  <a:srgbClr val="FFB531"/>
+                </a:solidFill>
+                <a:latin typeface="Bahnschrift SemiBold Condensed"/>
+              </a:rPr>
+              <a:t>1,05</a:t>
+            </a:r>
+          </a:p>
+        </p:txBody>
+      </p:sp>
+      <p:sp>
+        <p:nvSpPr>
+          <p:cNvPr id="85" name="s13_83"/>
+          <p:cNvSpPr txBox="1"/>
+          <p:nvPr/>
+        </p:nvSpPr>
+        <p:spPr>
+          <a:xfrm>
+            <a:off x="8110727" y="4645152"/>
+            <a:ext cx="781811" cy="182880"/>
+          </a:xfrm>
+          <a:prstGeom prst="rect">
+            <a:avLst/>
+          </a:prstGeom>
+          <a:noFill/>
+        </p:spPr>
+        <p:txBody>
+          <a:bodyPr wrap="square" lIns="0" rIns="0" tIns="0" bIns="0" anchor="t">
+            <a:spAutoFit/>
+          </a:bodyPr>
+          <a:lstStyle/>
+          <a:p>
+            <a:pPr algn="ctr">
+              <a:lnSpc>
+                <a:spcPct val="100000"/>
+              </a:lnSpc>
+              <a:spcBef>
+                <a:spcPts val="0"/>
+              </a:spcBef>
+              <a:spcAft>
+                <a:spcPts val="0"/>
+              </a:spcAft>
+            </a:pPr>
+            <a:r>
+              <a:rPr sz="750" b="0" i="0">
+                <a:solidFill>
+                  <a:srgbClr val="8395B5"/>
+                </a:solidFill>
+                <a:latin typeface="Consolas"/>
+              </a:rPr>
+              <a:t>k=3</a:t>
+            </a:r>
+          </a:p>
+        </p:txBody>
+      </p:sp>
+      <p:sp>
+        <p:nvSpPr>
+          <p:cNvPr id="86" name="s13_84"/>
+          <p:cNvSpPr txBox="1"/>
+          <p:nvPr/>
+        </p:nvSpPr>
+        <p:spPr>
+          <a:xfrm>
+            <a:off x="8110727" y="4791456"/>
+            <a:ext cx="781811" cy="256032"/>
+          </a:xfrm>
+          <a:prstGeom prst="rect">
+            <a:avLst/>
+          </a:prstGeom>
+          <a:noFill/>
+        </p:spPr>
+        <p:txBody>
+          <a:bodyPr wrap="square" lIns="0" rIns="0" tIns="0" bIns="0" anchor="t">
+            <a:spAutoFit/>
+          </a:bodyPr>
+          <a:lstStyle/>
+          <a:p>
+            <a:pPr algn="ctr">
+              <a:lnSpc>
+                <a:spcPct val="100000"/>
+              </a:lnSpc>
+              <a:spcBef>
+                <a:spcPts val="0"/>
+              </a:spcBef>
+              <a:spcAft>
+                <a:spcPts val="0"/>
+              </a:spcAft>
+            </a:pPr>
+            <a:r>
+              <a:rPr sz="1500" b="0" i="0">
+                <a:solidFill>
+                  <a:srgbClr val="FFB531"/>
+                </a:solidFill>
+                <a:latin typeface="Bahnschrift SemiBold Condensed"/>
+              </a:rPr>
+              <a:t>1,12</a:t>
+            </a:r>
+          </a:p>
+        </p:txBody>
+      </p:sp>
+      <p:sp>
+        <p:nvSpPr>
+          <p:cNvPr id="87" name="s13_85"/>
+          <p:cNvSpPr txBox="1"/>
+          <p:nvPr/>
+        </p:nvSpPr>
+        <p:spPr>
+          <a:xfrm>
+            <a:off x="8892540" y="4645152"/>
+            <a:ext cx="781811" cy="182880"/>
+          </a:xfrm>
+          <a:prstGeom prst="rect">
+            <a:avLst/>
+          </a:prstGeom>
+          <a:noFill/>
+        </p:spPr>
+        <p:txBody>
+          <a:bodyPr wrap="square" lIns="0" rIns="0" tIns="0" bIns="0" anchor="t">
+            <a:spAutoFit/>
+          </a:bodyPr>
+          <a:lstStyle/>
+          <a:p>
+            <a:pPr algn="ctr">
+              <a:lnSpc>
+                <a:spcPct val="100000"/>
+              </a:lnSpc>
+              <a:spcBef>
+                <a:spcPts val="0"/>
+              </a:spcBef>
+              <a:spcAft>
+                <a:spcPts val="0"/>
+              </a:spcAft>
+            </a:pPr>
+            <a:r>
+              <a:rPr sz="750" b="0" i="0">
+                <a:solidFill>
+                  <a:srgbClr val="8395B5"/>
+                </a:solidFill>
+                <a:latin typeface="Consolas"/>
+              </a:rPr>
+              <a:t>k=5</a:t>
+            </a:r>
+          </a:p>
+        </p:txBody>
+      </p:sp>
+      <p:sp>
+        <p:nvSpPr>
+          <p:cNvPr id="88" name="s13_86"/>
+          <p:cNvSpPr txBox="1"/>
+          <p:nvPr/>
+        </p:nvSpPr>
+        <p:spPr>
+          <a:xfrm>
+            <a:off x="8892540" y="4791456"/>
+            <a:ext cx="781811" cy="256032"/>
+          </a:xfrm>
+          <a:prstGeom prst="rect">
+            <a:avLst/>
+          </a:prstGeom>
+          <a:noFill/>
+        </p:spPr>
+        <p:txBody>
+          <a:bodyPr wrap="square" lIns="0" rIns="0" tIns="0" bIns="0" anchor="t">
+            <a:spAutoFit/>
+          </a:bodyPr>
+          <a:lstStyle/>
+          <a:p>
+            <a:pPr algn="ctr">
+              <a:lnSpc>
+                <a:spcPct val="100000"/>
+              </a:lnSpc>
+              <a:spcBef>
+                <a:spcPts val="0"/>
+              </a:spcBef>
+              <a:spcAft>
+                <a:spcPts val="0"/>
+              </a:spcAft>
+            </a:pPr>
+            <a:r>
+              <a:rPr sz="1500" b="0" i="0">
+                <a:solidFill>
+                  <a:srgbClr val="FFB531"/>
+                </a:solidFill>
+                <a:latin typeface="Bahnschrift SemiBold Condensed"/>
+              </a:rPr>
+              <a:t>1,11</a:t>
+            </a:r>
+          </a:p>
+        </p:txBody>
+      </p:sp>
+      <p:sp>
+        <p:nvSpPr>
+          <p:cNvPr id="89" name="s13_87"/>
+          <p:cNvSpPr txBox="1"/>
+          <p:nvPr/>
+        </p:nvSpPr>
+        <p:spPr>
+          <a:xfrm>
+            <a:off x="9674352" y="4645152"/>
+            <a:ext cx="781811" cy="182880"/>
+          </a:xfrm>
+          <a:prstGeom prst="rect">
+            <a:avLst/>
+          </a:prstGeom>
+          <a:noFill/>
+        </p:spPr>
+        <p:txBody>
+          <a:bodyPr wrap="square" lIns="0" rIns="0" tIns="0" bIns="0" anchor="t">
+            <a:spAutoFit/>
+          </a:bodyPr>
+          <a:lstStyle/>
+          <a:p>
+            <a:pPr algn="ctr">
+              <a:lnSpc>
+                <a:spcPct val="100000"/>
+              </a:lnSpc>
+              <a:spcBef>
+                <a:spcPts val="0"/>
+              </a:spcBef>
+              <a:spcAft>
+                <a:spcPts val="0"/>
+              </a:spcAft>
+            </a:pPr>
+            <a:r>
+              <a:rPr sz="750" b="0" i="0">
+                <a:solidFill>
+                  <a:srgbClr val="8395B5"/>
+                </a:solidFill>
+                <a:latin typeface="Consolas"/>
+              </a:rPr>
+              <a:t>k=10</a:t>
+            </a:r>
+          </a:p>
+        </p:txBody>
+      </p:sp>
+      <p:sp>
+        <p:nvSpPr>
+          <p:cNvPr id="90" name="s13_88"/>
+          <p:cNvSpPr txBox="1"/>
+          <p:nvPr/>
+        </p:nvSpPr>
+        <p:spPr>
+          <a:xfrm>
+            <a:off x="9674352" y="4791456"/>
+            <a:ext cx="781811" cy="256032"/>
+          </a:xfrm>
+          <a:prstGeom prst="rect">
+            <a:avLst/>
+          </a:prstGeom>
+          <a:noFill/>
+        </p:spPr>
+        <p:txBody>
+          <a:bodyPr wrap="square" lIns="0" rIns="0" tIns="0" bIns="0" anchor="t">
+            <a:spAutoFit/>
+          </a:bodyPr>
+          <a:lstStyle/>
+          <a:p>
+            <a:pPr algn="ctr">
+              <a:lnSpc>
+                <a:spcPct val="100000"/>
+              </a:lnSpc>
+              <a:spcBef>
+                <a:spcPts val="0"/>
+              </a:spcBef>
+              <a:spcAft>
+                <a:spcPts val="0"/>
+              </a:spcAft>
+            </a:pPr>
+            <a:r>
+              <a:rPr sz="1500" b="0" i="0">
+                <a:solidFill>
+                  <a:srgbClr val="FFB531"/>
+                </a:solidFill>
+                <a:latin typeface="Bahnschrift SemiBold Condensed"/>
+              </a:rPr>
+              <a:t>1,18</a:t>
+            </a:r>
+          </a:p>
+        </p:txBody>
+      </p:sp>
+      <p:sp>
+        <p:nvSpPr>
+          <p:cNvPr id="91" name="s13_89"/>
+          <p:cNvSpPr txBox="1"/>
+          <p:nvPr/>
+        </p:nvSpPr>
+        <p:spPr>
+          <a:xfrm>
+            <a:off x="10456163" y="4645152"/>
+            <a:ext cx="781811" cy="182880"/>
+          </a:xfrm>
+          <a:prstGeom prst="rect">
+            <a:avLst/>
+          </a:prstGeom>
+          <a:noFill/>
+        </p:spPr>
+        <p:txBody>
+          <a:bodyPr wrap="square" lIns="0" rIns="0" tIns="0" bIns="0" anchor="t">
+            <a:spAutoFit/>
+          </a:bodyPr>
+          <a:lstStyle/>
+          <a:p>
+            <a:pPr algn="ctr">
+              <a:lnSpc>
+                <a:spcPct val="100000"/>
+              </a:lnSpc>
+              <a:spcBef>
+                <a:spcPts val="0"/>
+              </a:spcBef>
+              <a:spcAft>
+                <a:spcPts val="0"/>
+              </a:spcAft>
+            </a:pPr>
+            <a:r>
+              <a:rPr sz="750" b="0" i="0">
+                <a:solidFill>
+                  <a:srgbClr val="8395B5"/>
+                </a:solidFill>
+                <a:latin typeface="Consolas"/>
+              </a:rPr>
+              <a:t>k=20</a:t>
+            </a:r>
+          </a:p>
+        </p:txBody>
+      </p:sp>
+      <p:sp>
+        <p:nvSpPr>
+          <p:cNvPr id="92" name="s13_90"/>
+          <p:cNvSpPr txBox="1"/>
+          <p:nvPr/>
+        </p:nvSpPr>
+        <p:spPr>
+          <a:xfrm>
+            <a:off x="10456163" y="4791456"/>
+            <a:ext cx="781811" cy="256032"/>
+          </a:xfrm>
+          <a:prstGeom prst="rect">
+            <a:avLst/>
+          </a:prstGeom>
+          <a:noFill/>
+        </p:spPr>
+        <p:txBody>
+          <a:bodyPr wrap="square" lIns="0" rIns="0" tIns="0" bIns="0" anchor="t">
+            <a:spAutoFit/>
+          </a:bodyPr>
+          <a:lstStyle/>
+          <a:p>
+            <a:pPr algn="ctr">
+              <a:lnSpc>
+                <a:spcPct val="100000"/>
+              </a:lnSpc>
+              <a:spcBef>
+                <a:spcPts val="0"/>
+              </a:spcBef>
+              <a:spcAft>
+                <a:spcPts val="0"/>
+              </a:spcAft>
+            </a:pPr>
+            <a:r>
+              <a:rPr sz="1500" b="0" i="0">
+                <a:solidFill>
+                  <a:srgbClr val="FFB531"/>
+                </a:solidFill>
+                <a:latin typeface="Bahnschrift SemiBold Condensed"/>
+              </a:rPr>
+              <a:t>0,97</a:t>
+            </a:r>
+          </a:p>
+        </p:txBody>
+      </p:sp>
+      <p:sp>
+        <p:nvSpPr>
+          <p:cNvPr id="93" name="s13_91"/>
+          <p:cNvSpPr txBox="1"/>
+          <p:nvPr/>
+        </p:nvSpPr>
+        <p:spPr>
+          <a:xfrm>
+            <a:off x="6547104" y="5029200"/>
+            <a:ext cx="4690871" cy="182880"/>
+          </a:xfrm>
+          <a:prstGeom prst="rect">
+            <a:avLst/>
+          </a:prstGeom>
+          <a:noFill/>
+        </p:spPr>
+        <p:txBody>
+          <a:bodyPr wrap="none" lIns="0" rIns="0" tIns="0" bIns="0" anchor="t">
+            <a:spAutoFit/>
+          </a:bodyPr>
+          <a:lstStyle/>
+          <a:p>
+            <a:pPr algn="l">
+              <a:lnSpc>
+                <a:spcPct val="100000"/>
+              </a:lnSpc>
+              <a:spcBef>
+                <a:spcPts val="0"/>
+              </a:spcBef>
+              <a:spcAft>
+                <a:spcPts val="0"/>
+              </a:spcAft>
+            </a:pPr>
+            <a:r>
+              <a:rPr sz="850" b="0" i="0">
+                <a:solidFill>
+                  <a:srgbClr val="8395B5"/>
+                </a:solidFill>
+                <a:latin typeface="Bahnschrift SemiLight"/>
+              </a:rPr>
+              <a:t>colado em 1 e nenhum |t| ≥ 2 nos seis horizontes: a sleeve não entrou (Premissa_tendencia.md).</a:t>
+            </a:r>
+          </a:p>
+        </p:txBody>
+      </p:sp>
+      <p:sp>
+        <p:nvSpPr>
+          <p:cNvPr id="94" name="s13_92"/>
+          <p:cNvSpPr txBox="1"/>
+          <p:nvPr/>
+        </p:nvSpPr>
+        <p:spPr>
+          <a:xfrm>
+            <a:off x="6327648" y="5413248"/>
+            <a:ext cx="5129783" cy="182880"/>
+          </a:xfrm>
+          <a:prstGeom prst="rect">
+            <a:avLst/>
+          </a:prstGeom>
+          <a:noFill/>
+        </p:spPr>
+        <p:txBody>
+          <a:bodyPr wrap="square" lIns="0" rIns="0" tIns="0" bIns="0" anchor="t">
+            <a:spAutoFit/>
+          </a:bodyPr>
+          <a:lstStyle/>
+          <a:p>
+            <a:pPr algn="l">
+              <a:lnSpc>
+                <a:spcPct val="100000"/>
+              </a:lnSpc>
+              <a:spcBef>
+                <a:spcPts val="0"/>
+              </a:spcBef>
+              <a:spcAft>
+                <a:spcPts val="0"/>
+              </a:spcAft>
+            </a:pPr>
+            <a:r>
+              <a:rPr sz="900" b="1" i="0" spc="180">
+                <a:solidFill>
+                  <a:srgbClr val="FFB531"/>
+                </a:solidFill>
+                <a:latin typeface="Consolas"/>
+              </a:rPr>
+              <a:t>A PENEIRA  ·  31 HIPÓTESES MEDIDAS, 7 ENTRARAM</a:t>
+            </a:r>
+          </a:p>
+        </p:txBody>
+      </p:sp>
+      <p:sp>
+        <p:nvSpPr>
+          <p:cNvPr id="95" name="s13_93"/>
+          <p:cNvSpPr txBox="1"/>
+          <p:nvPr/>
+        </p:nvSpPr>
+        <p:spPr>
+          <a:xfrm>
+            <a:off x="6327648" y="5650992"/>
+            <a:ext cx="1600200" cy="182880"/>
+          </a:xfrm>
+          <a:prstGeom prst="rect">
+            <a:avLst/>
+          </a:prstGeom>
+          <a:noFill/>
+        </p:spPr>
+        <p:txBody>
+          <a:bodyPr wrap="square" lIns="0" rIns="0" tIns="0" bIns="0" anchor="ctr">
+            <a:spAutoFit/>
+          </a:bodyPr>
+          <a:lstStyle/>
+          <a:p>
+            <a:pPr algn="l">
+              <a:lnSpc>
+                <a:spcPct val="100000"/>
+              </a:lnSpc>
+              <a:spcBef>
+                <a:spcPts val="0"/>
+              </a:spcBef>
+              <a:spcAft>
+                <a:spcPts val="0"/>
+              </a:spcAft>
+            </a:pPr>
+            <a:r>
+              <a:rPr sz="850" b="0" i="0">
+                <a:solidFill>
+                  <a:srgbClr val="BAC6DA"/>
+                </a:solidFill>
+                <a:latin typeface="Bahnschrift SemiLight"/>
+              </a:rPr>
+              <a:t>13 ideias de sinal</a:t>
+            </a:r>
+          </a:p>
+        </p:txBody>
+      </p:sp>
+      <p:sp>
+        <p:nvSpPr>
+          <p:cNvPr id="96" name="s13_94"/>
+          <p:cNvSpPr/>
+          <p:nvPr/>
+        </p:nvSpPr>
+        <p:spPr>
+          <a:xfrm>
+            <a:off x="7978140" y="5701284"/>
+            <a:ext cx="82296" cy="82296"/>
+          </a:xfrm>
+          <a:prstGeom prst="ellipse">
+            <a:avLst/>
+          </a:prstGeom>
+          <a:solidFill>
+            <a:srgbClr val="2A3F63"/>
+          </a:solidFill>
+          <a:ln>
+            <a:noFill/>
+          </a:ln>
+          <a:effectLst/>
+        </p:spPr>
+        <p:style>
+          <a:lnRef idx="1">
+            <a:schemeClr val="accent1"/>
+          </a:lnRef>
+          <a:fillRef idx="3">
+            <a:schemeClr val="accent1"/>
+          </a:fillRef>
+          <a:effectRef idx="2">
+            <a:schemeClr val="accent1"/>
+          </a:effectRef>
+          <a:fontRef idx="minor">
+            <a:schemeClr val="lt1"/>
+          </a:fontRef>
+        </p:style>
+        <p:txBody>
+          <a:bodyPr rtlCol="0" anchor="ctr"/>
+          <a:lstStyle/>
+          <a:p/>
+        </p:txBody>
+      </p:sp>
+      <p:sp>
+        <p:nvSpPr>
+          <p:cNvPr id="97" name="s13_95"/>
+          <p:cNvSpPr/>
+          <p:nvPr/>
+        </p:nvSpPr>
+        <p:spPr>
+          <a:xfrm>
+            <a:off x="8161019" y="5701284"/>
+            <a:ext cx="82296" cy="82296"/>
+          </a:xfrm>
+          <a:prstGeom prst="ellipse">
+            <a:avLst/>
+          </a:prstGeom>
+          <a:solidFill>
+            <a:srgbClr val="2A3F63"/>
+          </a:solidFill>
+          <a:ln>
+            <a:noFill/>
+          </a:ln>
+          <a:effectLst/>
+        </p:spPr>
+        <p:style>
+          <a:lnRef idx="1">
+            <a:schemeClr val="accent1"/>
+          </a:lnRef>
+          <a:fillRef idx="3">
+            <a:schemeClr val="accent1"/>
+          </a:fillRef>
+          <a:effectRef idx="2">
+            <a:schemeClr val="accent1"/>
+          </a:effectRef>
+          <a:fontRef idx="minor">
+            <a:schemeClr val="lt1"/>
+          </a:fontRef>
+        </p:style>
+        <p:txBody>
+          <a:bodyPr rtlCol="0" anchor="ctr"/>
+          <a:lstStyle/>
+          <a:p/>
+        </p:txBody>
+      </p:sp>
+      <p:sp>
+        <p:nvSpPr>
+          <p:cNvPr id="98" name="s13_96"/>
+          <p:cNvSpPr/>
+          <p:nvPr/>
+        </p:nvSpPr>
+        <p:spPr>
+          <a:xfrm>
+            <a:off x="8343900" y="5701284"/>
+            <a:ext cx="82296" cy="82296"/>
+          </a:xfrm>
+          <a:prstGeom prst="ellipse">
+            <a:avLst/>
+          </a:prstGeom>
+          <a:solidFill>
+            <a:srgbClr val="2A3F63"/>
+          </a:solidFill>
+          <a:ln>
+            <a:noFill/>
+          </a:ln>
+          <a:effectLst/>
+        </p:spPr>
+        <p:style>
+          <a:lnRef idx="1">
+            <a:schemeClr val="accent1"/>
+          </a:lnRef>
+          <a:fillRef idx="3">
+            <a:schemeClr val="accent1"/>
+          </a:fillRef>
+          <a:effectRef idx="2">
+            <a:schemeClr val="accent1"/>
+          </a:effectRef>
+          <a:fontRef idx="minor">
+            <a:schemeClr val="lt1"/>
+          </a:fontRef>
+        </p:style>
+        <p:txBody>
+          <a:bodyPr rtlCol="0" anchor="ctr"/>
+          <a:lstStyle/>
+          <a:p/>
+        </p:txBody>
+      </p:sp>
+      <p:sp>
+        <p:nvSpPr>
+          <p:cNvPr id="99" name="s13_97"/>
+          <p:cNvSpPr/>
+          <p:nvPr/>
+        </p:nvSpPr>
+        <p:spPr>
+          <a:xfrm>
+            <a:off x="8526780" y="5701284"/>
+            <a:ext cx="82296" cy="82296"/>
+          </a:xfrm>
+          <a:prstGeom prst="ellipse">
+            <a:avLst/>
+          </a:prstGeom>
+          <a:solidFill>
+            <a:srgbClr val="2A3F63"/>
+          </a:solidFill>
+          <a:ln>
+            <a:noFill/>
+          </a:ln>
+          <a:effectLst/>
+        </p:spPr>
+        <p:style>
+          <a:lnRef idx="1">
+            <a:schemeClr val="accent1"/>
+          </a:lnRef>
+          <a:fillRef idx="3">
+            <a:schemeClr val="accent1"/>
+          </a:fillRef>
+          <a:effectRef idx="2">
+            <a:schemeClr val="accent1"/>
+          </a:effectRef>
+          <a:fontRef idx="minor">
+            <a:schemeClr val="lt1"/>
+          </a:fontRef>
+        </p:style>
+        <p:txBody>
+          <a:bodyPr rtlCol="0" anchor="ctr"/>
+          <a:lstStyle/>
+          <a:p/>
+        </p:txBody>
+      </p:sp>
+      <p:sp>
+        <p:nvSpPr>
+          <p:cNvPr id="100" name="s13_98"/>
+          <p:cNvSpPr/>
+          <p:nvPr/>
+        </p:nvSpPr>
+        <p:spPr>
+          <a:xfrm>
+            <a:off x="8709660" y="5701284"/>
+            <a:ext cx="82296" cy="82296"/>
+          </a:xfrm>
+          <a:prstGeom prst="ellipse">
+            <a:avLst/>
+          </a:prstGeom>
+          <a:solidFill>
+            <a:srgbClr val="2A3F63"/>
+          </a:solidFill>
+          <a:ln>
+            <a:noFill/>
+          </a:ln>
+          <a:effectLst/>
+        </p:spPr>
+        <p:style>
+          <a:lnRef idx="1">
+            <a:schemeClr val="accent1"/>
+          </a:lnRef>
+          <a:fillRef idx="3">
+            <a:schemeClr val="accent1"/>
+          </a:fillRef>
+          <a:effectRef idx="2">
+            <a:schemeClr val="accent1"/>
+          </a:effectRef>
+          <a:fontRef idx="minor">
+            <a:schemeClr val="lt1"/>
+          </a:fontRef>
+        </p:style>
+        <p:txBody>
+          <a:bodyPr rtlCol="0" anchor="ctr"/>
+          <a:lstStyle/>
+          <a:p/>
+        </p:txBody>
+      </p:sp>
+      <p:sp>
+        <p:nvSpPr>
+          <p:cNvPr id="101" name="s13_99"/>
+          <p:cNvSpPr/>
+          <p:nvPr/>
+        </p:nvSpPr>
+        <p:spPr>
+          <a:xfrm>
+            <a:off x="8892540" y="5701284"/>
+            <a:ext cx="82296" cy="82296"/>
+          </a:xfrm>
+          <a:prstGeom prst="ellipse">
+            <a:avLst/>
+          </a:prstGeom>
+          <a:solidFill>
+            <a:srgbClr val="2A3F63"/>
+          </a:solidFill>
+          <a:ln>
+            <a:noFill/>
+          </a:ln>
+          <a:effectLst/>
+        </p:spPr>
+        <p:style>
+          <a:lnRef idx="1">
+            <a:schemeClr val="accent1"/>
+          </a:lnRef>
+          <a:fillRef idx="3">
+            <a:schemeClr val="accent1"/>
+          </a:fillRef>
+          <a:effectRef idx="2">
+            <a:schemeClr val="accent1"/>
+          </a:effectRef>
+          <a:fontRef idx="minor">
+            <a:schemeClr val="lt1"/>
+          </a:fontRef>
+        </p:style>
+        <p:txBody>
+          <a:bodyPr rtlCol="0" anchor="ctr"/>
+          <a:lstStyle/>
+          <a:p/>
+        </p:txBody>
+      </p:sp>
+      <p:sp>
+        <p:nvSpPr>
+          <p:cNvPr id="102" name="s13_100"/>
+          <p:cNvSpPr/>
+          <p:nvPr/>
+        </p:nvSpPr>
+        <p:spPr>
+          <a:xfrm>
+            <a:off x="9061703" y="5687568"/>
+            <a:ext cx="109728" cy="109728"/>
+          </a:xfrm>
+          <a:prstGeom prst="ellipse">
+            <a:avLst/>
+          </a:prstGeom>
+          <a:solidFill>
+            <a:srgbClr val="FFB531"/>
+          </a:solidFill>
+          <a:ln>
+            <a:noFill/>
+          </a:ln>
+          <a:effectLst>
+            <a:glow rad="50000">
+              <a:srgbClr val="FFB531">
+                <a:alpha val="40000"/>
+              </a:srgbClr>
+            </a:glow>
+          </a:effectLst>
+        </p:spPr>
+        <p:style>
+          <a:lnRef idx="1">
+            <a:schemeClr val="accent1"/>
+          </a:lnRef>
+          <a:fillRef idx="3">
+            <a:schemeClr val="accent1"/>
+          </a:fillRef>
+          <a:effectRef idx="2">
+            <a:schemeClr val="accent1"/>
+          </a:effectRef>
+          <a:fontRef idx="minor">
+            <a:schemeClr val="lt1"/>
+          </a:fontRef>
+        </p:style>
+        <p:txBody>
+          <a:bodyPr rtlCol="0" anchor="ctr"/>
+          <a:lstStyle/>
+          <a:p/>
+        </p:txBody>
+      </p:sp>
+      <p:sp>
+        <p:nvSpPr>
+          <p:cNvPr id="103" name="s13_101"/>
+          <p:cNvSpPr/>
+          <p:nvPr/>
+        </p:nvSpPr>
+        <p:spPr>
+          <a:xfrm>
+            <a:off x="9258300" y="5701284"/>
+            <a:ext cx="82296" cy="82296"/>
+          </a:xfrm>
+          <a:prstGeom prst="ellipse">
+            <a:avLst/>
+          </a:prstGeom>
+          <a:solidFill>
+            <a:srgbClr val="2A3F63"/>
+          </a:solidFill>
+          <a:ln>
+            <a:noFill/>
+          </a:ln>
+          <a:effectLst/>
+        </p:spPr>
+        <p:style>
+          <a:lnRef idx="1">
+            <a:schemeClr val="accent1"/>
+          </a:lnRef>
+          <a:fillRef idx="3">
+            <a:schemeClr val="accent1"/>
+          </a:fillRef>
+          <a:effectRef idx="2">
+            <a:schemeClr val="accent1"/>
+          </a:effectRef>
+          <a:fontRef idx="minor">
+            <a:schemeClr val="lt1"/>
+          </a:fontRef>
+        </p:style>
+        <p:txBody>
+          <a:bodyPr rtlCol="0" anchor="ctr"/>
+          <a:lstStyle/>
+          <a:p/>
+        </p:txBody>
+      </p:sp>
+      <p:sp>
+        <p:nvSpPr>
+          <p:cNvPr id="104" name="s13_102"/>
+          <p:cNvSpPr/>
+          <p:nvPr/>
+        </p:nvSpPr>
+        <p:spPr>
+          <a:xfrm>
+            <a:off x="9441180" y="5701284"/>
+            <a:ext cx="82296" cy="82296"/>
+          </a:xfrm>
+          <a:prstGeom prst="ellipse">
+            <a:avLst/>
+          </a:prstGeom>
+          <a:solidFill>
+            <a:srgbClr val="2A3F63"/>
+          </a:solidFill>
+          <a:ln>
+            <a:noFill/>
+          </a:ln>
+          <a:effectLst/>
+        </p:spPr>
+        <p:style>
+          <a:lnRef idx="1">
+            <a:schemeClr val="accent1"/>
+          </a:lnRef>
+          <a:fillRef idx="3">
+            <a:schemeClr val="accent1"/>
+          </a:fillRef>
+          <a:effectRef idx="2">
+            <a:schemeClr val="accent1"/>
+          </a:effectRef>
+          <a:fontRef idx="minor">
+            <a:schemeClr val="lt1"/>
+          </a:fontRef>
+        </p:style>
+        <p:txBody>
+          <a:bodyPr rtlCol="0" anchor="ctr"/>
+          <a:lstStyle/>
+          <a:p/>
+        </p:txBody>
+      </p:sp>
+      <p:sp>
+        <p:nvSpPr>
+          <p:cNvPr id="105" name="s13_103"/>
+          <p:cNvSpPr/>
+          <p:nvPr/>
+        </p:nvSpPr>
+        <p:spPr>
+          <a:xfrm>
+            <a:off x="9624060" y="5701284"/>
+            <a:ext cx="82296" cy="82296"/>
+          </a:xfrm>
+          <a:prstGeom prst="ellipse">
+            <a:avLst/>
+          </a:prstGeom>
+          <a:solidFill>
+            <a:srgbClr val="2A3F63"/>
+          </a:solidFill>
+          <a:ln>
+            <a:noFill/>
+          </a:ln>
+          <a:effectLst/>
+        </p:spPr>
+        <p:style>
+          <a:lnRef idx="1">
+            <a:schemeClr val="accent1"/>
+          </a:lnRef>
+          <a:fillRef idx="3">
+            <a:schemeClr val="accent1"/>
+          </a:fillRef>
+          <a:effectRef idx="2">
+            <a:schemeClr val="accent1"/>
+          </a:effectRef>
+          <a:fontRef idx="minor">
+            <a:schemeClr val="lt1"/>
+          </a:fontRef>
+        </p:style>
+        <p:txBody>
+          <a:bodyPr rtlCol="0" anchor="ctr"/>
+          <a:lstStyle/>
+          <a:p/>
+        </p:txBody>
+      </p:sp>
+      <p:sp>
+        <p:nvSpPr>
+          <p:cNvPr id="106" name="s13_104"/>
+          <p:cNvSpPr/>
+          <p:nvPr/>
+        </p:nvSpPr>
+        <p:spPr>
+          <a:xfrm>
+            <a:off x="9806940" y="5701284"/>
+            <a:ext cx="82296" cy="82296"/>
+          </a:xfrm>
+          <a:prstGeom prst="ellipse">
+            <a:avLst/>
+          </a:prstGeom>
+          <a:solidFill>
+            <a:srgbClr val="2A3F63"/>
+          </a:solidFill>
+          <a:ln>
+            <a:noFill/>
+          </a:ln>
+          <a:effectLst/>
+        </p:spPr>
+        <p:style>
+          <a:lnRef idx="1">
+            <a:schemeClr val="accent1"/>
+          </a:lnRef>
+          <a:fillRef idx="3">
+            <a:schemeClr val="accent1"/>
+          </a:fillRef>
+          <a:effectRef idx="2">
+            <a:schemeClr val="accent1"/>
+          </a:effectRef>
+          <a:fontRef idx="minor">
+            <a:schemeClr val="lt1"/>
+          </a:fontRef>
+        </p:style>
+        <p:txBody>
+          <a:bodyPr rtlCol="0" anchor="ctr"/>
+          <a:lstStyle/>
+          <a:p/>
+        </p:txBody>
+      </p:sp>
+      <p:sp>
+        <p:nvSpPr>
+          <p:cNvPr id="107" name="s13_105"/>
+          <p:cNvSpPr/>
+          <p:nvPr/>
+        </p:nvSpPr>
+        <p:spPr>
+          <a:xfrm>
+            <a:off x="9989819" y="5701284"/>
+            <a:ext cx="82296" cy="82296"/>
+          </a:xfrm>
+          <a:prstGeom prst="ellipse">
+            <a:avLst/>
+          </a:prstGeom>
+          <a:solidFill>
+            <a:srgbClr val="2A3F63"/>
+          </a:solidFill>
+          <a:ln>
+            <a:noFill/>
+          </a:ln>
+          <a:effectLst/>
+        </p:spPr>
+        <p:style>
+          <a:lnRef idx="1">
+            <a:schemeClr val="accent1"/>
+          </a:lnRef>
+          <a:fillRef idx="3">
+            <a:schemeClr val="accent1"/>
+          </a:fillRef>
+          <a:effectRef idx="2">
+            <a:schemeClr val="accent1"/>
+          </a:effectRef>
+          <a:fontRef idx="minor">
+            <a:schemeClr val="lt1"/>
+          </a:fontRef>
+        </p:style>
+        <p:txBody>
+          <a:bodyPr rtlCol="0" anchor="ctr"/>
+          <a:lstStyle/>
+          <a:p/>
+        </p:txBody>
+      </p:sp>
+      <p:sp>
+        <p:nvSpPr>
+          <p:cNvPr id="108" name="s13_106"/>
+          <p:cNvSpPr/>
+          <p:nvPr/>
+        </p:nvSpPr>
+        <p:spPr>
+          <a:xfrm>
+            <a:off x="10172700" y="5701284"/>
+            <a:ext cx="82296" cy="82296"/>
+          </a:xfrm>
+          <a:prstGeom prst="ellipse">
+            <a:avLst/>
+          </a:prstGeom>
+          <a:solidFill>
+            <a:srgbClr val="2A3F63"/>
+          </a:solidFill>
+          <a:ln>
+            <a:noFill/>
+          </a:ln>
+          <a:effectLst/>
+        </p:spPr>
+        <p:style>
+          <a:lnRef idx="1">
+            <a:schemeClr val="accent1"/>
+          </a:lnRef>
+          <a:fillRef idx="3">
+            <a:schemeClr val="accent1"/>
+          </a:fillRef>
+          <a:effectRef idx="2">
+            <a:schemeClr val="accent1"/>
+          </a:effectRef>
+          <a:fontRef idx="minor">
+            <a:schemeClr val="lt1"/>
+          </a:fontRef>
+        </p:style>
+        <p:txBody>
+          <a:bodyPr rtlCol="0" anchor="ctr"/>
+          <a:lstStyle/>
+          <a:p/>
+        </p:txBody>
+      </p:sp>
+      <p:sp>
+        <p:nvSpPr>
+          <p:cNvPr id="109" name="s13_107"/>
+          <p:cNvSpPr txBox="1"/>
+          <p:nvPr/>
+        </p:nvSpPr>
+        <p:spPr>
+          <a:xfrm>
+            <a:off x="10488167" y="5650992"/>
+            <a:ext cx="1371600" cy="182880"/>
+          </a:xfrm>
+          <a:prstGeom prst="rect">
+            <a:avLst/>
+          </a:prstGeom>
+          <a:noFill/>
+        </p:spPr>
+        <p:txBody>
+          <a:bodyPr wrap="square" lIns="0" rIns="0" tIns="0" bIns="0" anchor="ctr">
+            <a:spAutoFit/>
+          </a:bodyPr>
+          <a:lstStyle/>
+          <a:p>
+            <a:pPr algn="l">
+              <a:lnSpc>
+                <a:spcPct val="100000"/>
+              </a:lnSpc>
+              <a:spcBef>
+                <a:spcPts val="0"/>
+              </a:spcBef>
+              <a:spcAft>
+                <a:spcPts val="0"/>
+              </a:spcAft>
+            </a:pPr>
+            <a:r>
+              <a:rPr sz="800" b="0" i="0">
+                <a:solidFill>
+                  <a:srgbClr val="FFB531"/>
+                </a:solidFill>
+                <a:latin typeface="Consolas"/>
+              </a:rPr>
+              <a:t>1 de 13</a:t>
+            </a:r>
+          </a:p>
+        </p:txBody>
+      </p:sp>
+      <p:sp>
+        <p:nvSpPr>
+          <p:cNvPr id="110" name="s13_108"/>
+          <p:cNvSpPr txBox="1"/>
+          <p:nvPr/>
+        </p:nvSpPr>
+        <p:spPr>
+          <a:xfrm>
+            <a:off x="6327648" y="5852160"/>
+            <a:ext cx="1600200" cy="182880"/>
+          </a:xfrm>
+          <a:prstGeom prst="rect">
+            <a:avLst/>
+          </a:prstGeom>
+          <a:noFill/>
+        </p:spPr>
+        <p:txBody>
+          <a:bodyPr wrap="square" lIns="0" rIns="0" tIns="0" bIns="0" anchor="ctr">
+            <a:spAutoFit/>
+          </a:bodyPr>
+          <a:lstStyle/>
+          <a:p>
+            <a:pPr algn="l">
+              <a:lnSpc>
+                <a:spcPct val="100000"/>
+              </a:lnSpc>
+              <a:spcBef>
+                <a:spcPts val="0"/>
+              </a:spcBef>
+              <a:spcAft>
+                <a:spcPts val="0"/>
+              </a:spcAft>
+            </a:pPr>
+            <a:r>
+              <a:rPr sz="850" b="0" i="0">
+                <a:solidFill>
+                  <a:srgbClr val="BAC6DA"/>
+                </a:solidFill>
+                <a:latin typeface="Bahnschrift SemiLight"/>
+              </a:rPr>
+              <a:t>4 critérios do Ω</a:t>
+            </a:r>
+          </a:p>
+        </p:txBody>
+      </p:sp>
+      <p:sp>
+        <p:nvSpPr>
+          <p:cNvPr id="111" name="s13_109"/>
+          <p:cNvSpPr/>
+          <p:nvPr/>
+        </p:nvSpPr>
+        <p:spPr>
+          <a:xfrm>
+            <a:off x="7978140" y="5902452"/>
+            <a:ext cx="82296" cy="82296"/>
+          </a:xfrm>
+          <a:prstGeom prst="ellipse">
+            <a:avLst/>
+          </a:prstGeom>
+          <a:solidFill>
+            <a:srgbClr val="2A3F63"/>
+          </a:solidFill>
+          <a:ln>
+            <a:noFill/>
+          </a:ln>
+          <a:effectLst/>
+        </p:spPr>
+        <p:style>
+          <a:lnRef idx="1">
+            <a:schemeClr val="accent1"/>
+          </a:lnRef>
+          <a:fillRef idx="3">
+            <a:schemeClr val="accent1"/>
+          </a:fillRef>
+          <a:effectRef idx="2">
+            <a:schemeClr val="accent1"/>
+          </a:effectRef>
+          <a:fontRef idx="minor">
+            <a:schemeClr val="lt1"/>
+          </a:fontRef>
+        </p:style>
+        <p:txBody>
+          <a:bodyPr rtlCol="0" anchor="ctr"/>
+          <a:lstStyle/>
+          <a:p/>
+        </p:txBody>
+      </p:sp>
+      <p:sp>
+        <p:nvSpPr>
+          <p:cNvPr id="112" name="s13_110"/>
+          <p:cNvSpPr/>
+          <p:nvPr/>
+        </p:nvSpPr>
+        <p:spPr>
+          <a:xfrm>
+            <a:off x="8147303" y="5888736"/>
+            <a:ext cx="109728" cy="109728"/>
+          </a:xfrm>
+          <a:prstGeom prst="ellipse">
+            <a:avLst/>
+          </a:prstGeom>
+          <a:solidFill>
+            <a:srgbClr val="FFB531"/>
+          </a:solidFill>
+          <a:ln>
+            <a:noFill/>
+          </a:ln>
+          <a:effectLst>
+            <a:glow rad="50000">
+              <a:srgbClr val="FFB531">
+                <a:alpha val="40000"/>
+              </a:srgbClr>
+            </a:glow>
+          </a:effectLst>
+        </p:spPr>
+        <p:style>
+          <a:lnRef idx="1">
+            <a:schemeClr val="accent1"/>
+          </a:lnRef>
+          <a:fillRef idx="3">
+            <a:schemeClr val="accent1"/>
+          </a:fillRef>
+          <a:effectRef idx="2">
+            <a:schemeClr val="accent1"/>
+          </a:effectRef>
+          <a:fontRef idx="minor">
+            <a:schemeClr val="lt1"/>
+          </a:fontRef>
+        </p:style>
+        <p:txBody>
+          <a:bodyPr rtlCol="0" anchor="ctr"/>
+          <a:lstStyle/>
+          <a:p/>
+        </p:txBody>
+      </p:sp>
+      <p:sp>
+        <p:nvSpPr>
+          <p:cNvPr id="113" name="s13_111"/>
+          <p:cNvSpPr/>
+          <p:nvPr/>
+        </p:nvSpPr>
+        <p:spPr>
+          <a:xfrm>
+            <a:off x="8330183" y="5888736"/>
+            <a:ext cx="109728" cy="109728"/>
+          </a:xfrm>
+          <a:prstGeom prst="ellipse">
+            <a:avLst/>
+          </a:prstGeom>
+          <a:solidFill>
+            <a:srgbClr val="FFB531"/>
+          </a:solidFill>
+          <a:ln>
+            <a:noFill/>
+          </a:ln>
+          <a:effectLst>
+            <a:glow rad="50000">
+              <a:srgbClr val="FFB531">
+                <a:alpha val="40000"/>
+              </a:srgbClr>
+            </a:glow>
+          </a:effectLst>
+        </p:spPr>
+        <p:style>
+          <a:lnRef idx="1">
+            <a:schemeClr val="accent1"/>
+          </a:lnRef>
+          <a:fillRef idx="3">
+            <a:schemeClr val="accent1"/>
+          </a:fillRef>
+          <a:effectRef idx="2">
+            <a:schemeClr val="accent1"/>
+          </a:effectRef>
+          <a:fontRef idx="minor">
+            <a:schemeClr val="lt1"/>
+          </a:fontRef>
+        </p:style>
+        <p:txBody>
+          <a:bodyPr rtlCol="0" anchor="ctr"/>
+          <a:lstStyle/>
+          <a:p/>
+        </p:txBody>
+      </p:sp>
+      <p:sp>
+        <p:nvSpPr>
+          <p:cNvPr id="114" name="s13_112"/>
+          <p:cNvSpPr/>
+          <p:nvPr/>
+        </p:nvSpPr>
+        <p:spPr>
+          <a:xfrm>
+            <a:off x="8526780" y="5902452"/>
+            <a:ext cx="82296" cy="82296"/>
+          </a:xfrm>
+          <a:prstGeom prst="ellipse">
+            <a:avLst/>
+          </a:prstGeom>
+          <a:solidFill>
+            <a:srgbClr val="2A3F63"/>
+          </a:solidFill>
+          <a:ln>
+            <a:noFill/>
+          </a:ln>
+          <a:effectLst/>
+        </p:spPr>
+        <p:style>
+          <a:lnRef idx="1">
+            <a:schemeClr val="accent1"/>
+          </a:lnRef>
+          <a:fillRef idx="3">
+            <a:schemeClr val="accent1"/>
+          </a:fillRef>
+          <a:effectRef idx="2">
+            <a:schemeClr val="accent1"/>
+          </a:effectRef>
+          <a:fontRef idx="minor">
+            <a:schemeClr val="lt1"/>
+          </a:fontRef>
+        </p:style>
+        <p:txBody>
+          <a:bodyPr rtlCol="0" anchor="ctr"/>
+          <a:lstStyle/>
+          <a:p/>
+        </p:txBody>
+      </p:sp>
+      <p:sp>
+        <p:nvSpPr>
+          <p:cNvPr id="115" name="s13_113"/>
+          <p:cNvSpPr txBox="1"/>
+          <p:nvPr/>
+        </p:nvSpPr>
+        <p:spPr>
+          <a:xfrm>
+            <a:off x="10488167" y="5852160"/>
+            <a:ext cx="1371600" cy="182880"/>
+          </a:xfrm>
+          <a:prstGeom prst="rect">
+            <a:avLst/>
+          </a:prstGeom>
+          <a:noFill/>
+        </p:spPr>
+        <p:txBody>
+          <a:bodyPr wrap="square" lIns="0" rIns="0" tIns="0" bIns="0" anchor="ctr">
+            <a:spAutoFit/>
+          </a:bodyPr>
+          <a:lstStyle/>
+          <a:p>
+            <a:pPr algn="l">
+              <a:lnSpc>
+                <a:spcPct val="100000"/>
+              </a:lnSpc>
+              <a:spcBef>
+                <a:spcPts val="0"/>
+              </a:spcBef>
+              <a:spcAft>
+                <a:spcPts val="0"/>
+              </a:spcAft>
+            </a:pPr>
+            <a:r>
+              <a:rPr sz="800" b="0" i="0">
+                <a:solidFill>
+                  <a:srgbClr val="FFB531"/>
+                </a:solidFill>
+                <a:latin typeface="Consolas"/>
+              </a:rPr>
+              <a:t>2 de 4</a:t>
+            </a:r>
+          </a:p>
+        </p:txBody>
+      </p:sp>
+      <p:sp>
+        <p:nvSpPr>
+          <p:cNvPr id="116" name="s13_114"/>
+          <p:cNvSpPr txBox="1"/>
+          <p:nvPr/>
+        </p:nvSpPr>
+        <p:spPr>
+          <a:xfrm>
+            <a:off x="6327648" y="6053328"/>
+            <a:ext cx="1600200" cy="182880"/>
+          </a:xfrm>
+          <a:prstGeom prst="rect">
+            <a:avLst/>
+          </a:prstGeom>
+          <a:noFill/>
+        </p:spPr>
+        <p:txBody>
+          <a:bodyPr wrap="square" lIns="0" rIns="0" tIns="0" bIns="0" anchor="ctr">
+            <a:spAutoFit/>
+          </a:bodyPr>
+          <a:lstStyle/>
+          <a:p>
+            <a:pPr algn="l">
+              <a:lnSpc>
+                <a:spcPct val="100000"/>
+              </a:lnSpc>
+              <a:spcBef>
+                <a:spcPts val="0"/>
+              </a:spcBef>
+              <a:spcAft>
+                <a:spcPts val="0"/>
+              </a:spcAft>
+            </a:pPr>
+            <a:r>
+              <a:rPr sz="850" b="0" i="0">
+                <a:solidFill>
+                  <a:srgbClr val="BAC6DA"/>
+                </a:solidFill>
+                <a:latin typeface="Bahnschrift SemiLight"/>
+              </a:rPr>
+              <a:t>6 janelas</a:t>
+            </a:r>
+          </a:p>
+        </p:txBody>
+      </p:sp>
+      <p:sp>
+        <p:nvSpPr>
+          <p:cNvPr id="117" name="s13_115"/>
+          <p:cNvSpPr/>
+          <p:nvPr/>
+        </p:nvSpPr>
+        <p:spPr>
+          <a:xfrm>
+            <a:off x="7978140" y="6103620"/>
+            <a:ext cx="82296" cy="82296"/>
+          </a:xfrm>
+          <a:prstGeom prst="ellipse">
+            <a:avLst/>
+          </a:prstGeom>
+          <a:solidFill>
+            <a:srgbClr val="2A3F63"/>
+          </a:solidFill>
+          <a:ln>
+            <a:noFill/>
+          </a:ln>
+          <a:effectLst/>
+        </p:spPr>
+        <p:style>
+          <a:lnRef idx="1">
+            <a:schemeClr val="accent1"/>
+          </a:lnRef>
+          <a:fillRef idx="3">
+            <a:schemeClr val="accent1"/>
+          </a:fillRef>
+          <a:effectRef idx="2">
+            <a:schemeClr val="accent1"/>
+          </a:effectRef>
+          <a:fontRef idx="minor">
+            <a:schemeClr val="lt1"/>
+          </a:fontRef>
+        </p:style>
+        <p:txBody>
+          <a:bodyPr rtlCol="0" anchor="ctr"/>
+          <a:lstStyle/>
+          <a:p/>
+        </p:txBody>
+      </p:sp>
+      <p:sp>
+        <p:nvSpPr>
+          <p:cNvPr id="118" name="s13_116"/>
+          <p:cNvSpPr/>
+          <p:nvPr/>
+        </p:nvSpPr>
+        <p:spPr>
+          <a:xfrm>
+            <a:off x="8147303" y="6089904"/>
+            <a:ext cx="109728" cy="109728"/>
+          </a:xfrm>
+          <a:prstGeom prst="ellipse">
+            <a:avLst/>
+          </a:prstGeom>
+          <a:solidFill>
+            <a:srgbClr val="FFB531"/>
+          </a:solidFill>
+          <a:ln>
+            <a:noFill/>
+          </a:ln>
+          <a:effectLst>
+            <a:glow rad="50000">
+              <a:srgbClr val="FFB531">
+                <a:alpha val="40000"/>
+              </a:srgbClr>
+            </a:glow>
+          </a:effectLst>
+        </p:spPr>
+        <p:style>
+          <a:lnRef idx="1">
+            <a:schemeClr val="accent1"/>
+          </a:lnRef>
+          <a:fillRef idx="3">
+            <a:schemeClr val="accent1"/>
+          </a:fillRef>
+          <a:effectRef idx="2">
+            <a:schemeClr val="accent1"/>
+          </a:effectRef>
+          <a:fontRef idx="minor">
+            <a:schemeClr val="lt1"/>
+          </a:fontRef>
+        </p:style>
+        <p:txBody>
+          <a:bodyPr rtlCol="0" anchor="ctr"/>
+          <a:lstStyle/>
+          <a:p/>
+        </p:txBody>
+      </p:sp>
+      <p:sp>
+        <p:nvSpPr>
+          <p:cNvPr id="119" name="s13_117"/>
+          <p:cNvSpPr/>
+          <p:nvPr/>
+        </p:nvSpPr>
+        <p:spPr>
+          <a:xfrm>
+            <a:off x="8330183" y="6089904"/>
+            <a:ext cx="109728" cy="109728"/>
+          </a:xfrm>
+          <a:prstGeom prst="ellipse">
+            <a:avLst/>
+          </a:prstGeom>
+          <a:solidFill>
+            <a:srgbClr val="FFB531"/>
+          </a:solidFill>
+          <a:ln>
+            <a:noFill/>
+          </a:ln>
+          <a:effectLst>
+            <a:glow rad="50000">
+              <a:srgbClr val="FFB531">
+                <a:alpha val="40000"/>
+              </a:srgbClr>
+            </a:glow>
+          </a:effectLst>
+        </p:spPr>
+        <p:style>
+          <a:lnRef idx="1">
+            <a:schemeClr val="accent1"/>
+          </a:lnRef>
+          <a:fillRef idx="3">
+            <a:schemeClr val="accent1"/>
+          </a:fillRef>
+          <a:effectRef idx="2">
+            <a:schemeClr val="accent1"/>
+          </a:effectRef>
+          <a:fontRef idx="minor">
+            <a:schemeClr val="lt1"/>
+          </a:fontRef>
+        </p:style>
+        <p:txBody>
+          <a:bodyPr rtlCol="0" anchor="ctr"/>
+          <a:lstStyle/>
+          <a:p/>
+        </p:txBody>
+      </p:sp>
+      <p:sp>
+        <p:nvSpPr>
+          <p:cNvPr id="120" name="s13_118"/>
+          <p:cNvSpPr/>
+          <p:nvPr/>
+        </p:nvSpPr>
+        <p:spPr>
+          <a:xfrm>
+            <a:off x="8513063" y="6089904"/>
+            <a:ext cx="109728" cy="109728"/>
+          </a:xfrm>
+          <a:prstGeom prst="ellipse">
+            <a:avLst/>
+          </a:prstGeom>
+          <a:solidFill>
+            <a:srgbClr val="FFB531"/>
+          </a:solidFill>
+          <a:ln>
+            <a:noFill/>
+          </a:ln>
+          <a:effectLst>
+            <a:glow rad="50000">
+              <a:srgbClr val="FFB531">
+                <a:alpha val="40000"/>
+              </a:srgbClr>
+            </a:glow>
+          </a:effectLst>
+        </p:spPr>
+        <p:style>
+          <a:lnRef idx="1">
+            <a:schemeClr val="accent1"/>
+          </a:lnRef>
+          <a:fillRef idx="3">
+            <a:schemeClr val="accent1"/>
+          </a:fillRef>
+          <a:effectRef idx="2">
+            <a:schemeClr val="accent1"/>
+          </a:effectRef>
+          <a:fontRef idx="minor">
+            <a:schemeClr val="lt1"/>
+          </a:fontRef>
+        </p:style>
+        <p:txBody>
+          <a:bodyPr rtlCol="0" anchor="ctr"/>
+          <a:lstStyle/>
+          <a:p/>
+        </p:txBody>
+      </p:sp>
+      <p:sp>
+        <p:nvSpPr>
+          <p:cNvPr id="121" name="s13_119"/>
+          <p:cNvSpPr/>
+          <p:nvPr/>
+        </p:nvSpPr>
+        <p:spPr>
+          <a:xfrm>
+            <a:off x="8709660" y="6103620"/>
+            <a:ext cx="82296" cy="82296"/>
+          </a:xfrm>
+          <a:prstGeom prst="ellipse">
+            <a:avLst/>
+          </a:prstGeom>
+          <a:solidFill>
+            <a:srgbClr val="2A3F63"/>
+          </a:solidFill>
+          <a:ln>
+            <a:noFill/>
+          </a:ln>
+          <a:effectLst/>
+        </p:spPr>
+        <p:style>
+          <a:lnRef idx="1">
+            <a:schemeClr val="accent1"/>
+          </a:lnRef>
+          <a:fillRef idx="3">
+            <a:schemeClr val="accent1"/>
+          </a:fillRef>
+          <a:effectRef idx="2">
+            <a:schemeClr val="accent1"/>
+          </a:effectRef>
+          <a:fontRef idx="minor">
+            <a:schemeClr val="lt1"/>
+          </a:fontRef>
+        </p:style>
+        <p:txBody>
+          <a:bodyPr rtlCol="0" anchor="ctr"/>
+          <a:lstStyle/>
+          <a:p/>
+        </p:txBody>
+      </p:sp>
+      <p:sp>
+        <p:nvSpPr>
+          <p:cNvPr id="122" name="s13_120"/>
+          <p:cNvSpPr/>
+          <p:nvPr/>
+        </p:nvSpPr>
+        <p:spPr>
+          <a:xfrm>
+            <a:off x="8892540" y="6103620"/>
+            <a:ext cx="82296" cy="82296"/>
+          </a:xfrm>
+          <a:prstGeom prst="ellipse">
+            <a:avLst/>
+          </a:prstGeom>
+          <a:solidFill>
+            <a:srgbClr val="2A3F63"/>
+          </a:solidFill>
+          <a:ln>
+            <a:noFill/>
+          </a:ln>
+          <a:effectLst/>
+        </p:spPr>
+        <p:style>
+          <a:lnRef idx="1">
+            <a:schemeClr val="accent1"/>
+          </a:lnRef>
+          <a:fillRef idx="3">
+            <a:schemeClr val="accent1"/>
+          </a:fillRef>
+          <a:effectRef idx="2">
+            <a:schemeClr val="accent1"/>
+          </a:effectRef>
+          <a:fontRef idx="minor">
+            <a:schemeClr val="lt1"/>
+          </a:fontRef>
+        </p:style>
+        <p:txBody>
+          <a:bodyPr rtlCol="0" anchor="ctr"/>
+          <a:lstStyle/>
+          <a:p/>
+        </p:txBody>
+      </p:sp>
+      <p:sp>
+        <p:nvSpPr>
+          <p:cNvPr id="123" name="s13_121"/>
+          <p:cNvSpPr txBox="1"/>
+          <p:nvPr/>
+        </p:nvSpPr>
+        <p:spPr>
+          <a:xfrm>
+            <a:off x="10488167" y="6053328"/>
+            <a:ext cx="1371600" cy="182880"/>
+          </a:xfrm>
+          <a:prstGeom prst="rect">
+            <a:avLst/>
+          </a:prstGeom>
+          <a:noFill/>
+        </p:spPr>
+        <p:txBody>
+          <a:bodyPr wrap="square" lIns="0" rIns="0" tIns="0" bIns="0" anchor="ctr">
+            <a:spAutoFit/>
+          </a:bodyPr>
+          <a:lstStyle/>
+          <a:p>
+            <a:pPr algn="l">
+              <a:lnSpc>
+                <a:spcPct val="100000"/>
+              </a:lnSpc>
+              <a:spcBef>
+                <a:spcPts val="0"/>
+              </a:spcBef>
+              <a:spcAft>
+                <a:spcPts val="0"/>
+              </a:spcAft>
+            </a:pPr>
+            <a:r>
+              <a:rPr sz="800" b="0" i="0">
+                <a:solidFill>
+                  <a:srgbClr val="FFB531"/>
+                </a:solidFill>
+                <a:latin typeface="Consolas"/>
+              </a:rPr>
+              <a:t>3 de 6</a:t>
+            </a:r>
+          </a:p>
+        </p:txBody>
+      </p:sp>
+      <p:sp>
+        <p:nvSpPr>
+          <p:cNvPr id="124" name="s13_122"/>
+          <p:cNvSpPr txBox="1"/>
+          <p:nvPr/>
+        </p:nvSpPr>
+        <p:spPr>
+          <a:xfrm>
+            <a:off x="6327648" y="6254496"/>
+            <a:ext cx="1600200" cy="182880"/>
+          </a:xfrm>
+          <a:prstGeom prst="rect">
+            <a:avLst/>
+          </a:prstGeom>
+          <a:noFill/>
+        </p:spPr>
+        <p:txBody>
+          <a:bodyPr wrap="square" lIns="0" rIns="0" tIns="0" bIns="0" anchor="ctr">
+            <a:spAutoFit/>
+          </a:bodyPr>
+          <a:lstStyle/>
+          <a:p>
+            <a:pPr algn="l">
+              <a:lnSpc>
+                <a:spcPct val="100000"/>
+              </a:lnSpc>
+              <a:spcBef>
+                <a:spcPts val="0"/>
+              </a:spcBef>
+              <a:spcAft>
+                <a:spcPts val="0"/>
+              </a:spcAft>
+            </a:pPr>
+            <a:r>
+              <a:rPr sz="850" b="0" i="0">
+                <a:solidFill>
+                  <a:srgbClr val="BAC6DA"/>
+                </a:solidFill>
+                <a:latin typeface="Bahnschrift SemiLight"/>
+              </a:rPr>
+              <a:t>8 tetos de risco</a:t>
+            </a:r>
+          </a:p>
+        </p:txBody>
+      </p:sp>
+      <p:sp>
+        <p:nvSpPr>
+          <p:cNvPr id="125" name="s13_123"/>
+          <p:cNvSpPr/>
+          <p:nvPr/>
+        </p:nvSpPr>
+        <p:spPr>
+          <a:xfrm>
+            <a:off x="7978140" y="6304788"/>
+            <a:ext cx="82296" cy="82296"/>
+          </a:xfrm>
+          <a:prstGeom prst="ellipse">
+            <a:avLst/>
+          </a:prstGeom>
+          <a:solidFill>
+            <a:srgbClr val="2A3F63"/>
+          </a:solidFill>
+          <a:ln>
+            <a:noFill/>
+          </a:ln>
+          <a:effectLst/>
+        </p:spPr>
+        <p:style>
+          <a:lnRef idx="1">
+            <a:schemeClr val="accent1"/>
+          </a:lnRef>
+          <a:fillRef idx="3">
+            <a:schemeClr val="accent1"/>
+          </a:fillRef>
+          <a:effectRef idx="2">
+            <a:schemeClr val="accent1"/>
+          </a:effectRef>
+          <a:fontRef idx="minor">
+            <a:schemeClr val="lt1"/>
+          </a:fontRef>
+        </p:style>
+        <p:txBody>
+          <a:bodyPr rtlCol="0" anchor="ctr"/>
+          <a:lstStyle/>
+          <a:p/>
+        </p:txBody>
+      </p:sp>
+      <p:sp>
+        <p:nvSpPr>
+          <p:cNvPr id="126" name="s13_124"/>
+          <p:cNvSpPr/>
+          <p:nvPr/>
+        </p:nvSpPr>
+        <p:spPr>
+          <a:xfrm>
+            <a:off x="8161019" y="6304788"/>
+            <a:ext cx="82296" cy="82296"/>
+          </a:xfrm>
+          <a:prstGeom prst="ellipse">
+            <a:avLst/>
+          </a:prstGeom>
+          <a:solidFill>
+            <a:srgbClr val="2A3F63"/>
+          </a:solidFill>
+          <a:ln>
+            <a:noFill/>
+          </a:ln>
+          <a:effectLst/>
+        </p:spPr>
+        <p:style>
+          <a:lnRef idx="1">
+            <a:schemeClr val="accent1"/>
+          </a:lnRef>
+          <a:fillRef idx="3">
+            <a:schemeClr val="accent1"/>
+          </a:fillRef>
+          <a:effectRef idx="2">
+            <a:schemeClr val="accent1"/>
+          </a:effectRef>
+          <a:fontRef idx="minor">
+            <a:schemeClr val="lt1"/>
+          </a:fontRef>
+        </p:style>
+        <p:txBody>
+          <a:bodyPr rtlCol="0" anchor="ctr"/>
+          <a:lstStyle/>
+          <a:p/>
+        </p:txBody>
+      </p:sp>
+      <p:sp>
+        <p:nvSpPr>
+          <p:cNvPr id="127" name="s13_125"/>
+          <p:cNvSpPr/>
+          <p:nvPr/>
+        </p:nvSpPr>
+        <p:spPr>
+          <a:xfrm>
+            <a:off x="8343900" y="6304788"/>
+            <a:ext cx="82296" cy="82296"/>
+          </a:xfrm>
+          <a:prstGeom prst="ellipse">
+            <a:avLst/>
+          </a:prstGeom>
+          <a:solidFill>
+            <a:srgbClr val="2A3F63"/>
+          </a:solidFill>
+          <a:ln>
+            <a:noFill/>
+          </a:ln>
+          <a:effectLst/>
+        </p:spPr>
+        <p:style>
+          <a:lnRef idx="1">
+            <a:schemeClr val="accent1"/>
+          </a:lnRef>
+          <a:fillRef idx="3">
+            <a:schemeClr val="accent1"/>
+          </a:fillRef>
+          <a:effectRef idx="2">
+            <a:schemeClr val="accent1"/>
+          </a:effectRef>
+          <a:fontRef idx="minor">
+            <a:schemeClr val="lt1"/>
+          </a:fontRef>
+        </p:style>
+        <p:txBody>
+          <a:bodyPr rtlCol="0" anchor="ctr"/>
+          <a:lstStyle/>
+          <a:p/>
+        </p:txBody>
+      </p:sp>
+      <p:sp>
+        <p:nvSpPr>
+          <p:cNvPr id="128" name="s13_126"/>
+          <p:cNvSpPr/>
+          <p:nvPr/>
+        </p:nvSpPr>
+        <p:spPr>
+          <a:xfrm>
+            <a:off x="8513063" y="6291072"/>
+            <a:ext cx="109728" cy="109728"/>
+          </a:xfrm>
+          <a:prstGeom prst="ellipse">
+            <a:avLst/>
+          </a:prstGeom>
+          <a:solidFill>
+            <a:srgbClr val="FFB531"/>
+          </a:solidFill>
+          <a:ln>
+            <a:noFill/>
+          </a:ln>
+          <a:effectLst>
+            <a:glow rad="50000">
+              <a:srgbClr val="FFB531">
+                <a:alpha val="40000"/>
+              </a:srgbClr>
+            </a:glow>
+          </a:effectLst>
+        </p:spPr>
+        <p:style>
+          <a:lnRef idx="1">
+            <a:schemeClr val="accent1"/>
+          </a:lnRef>
+          <a:fillRef idx="3">
+            <a:schemeClr val="accent1"/>
+          </a:fillRef>
+          <a:effectRef idx="2">
+            <a:schemeClr val="accent1"/>
+          </a:effectRef>
+          <a:fontRef idx="minor">
+            <a:schemeClr val="lt1"/>
+          </a:fontRef>
+        </p:style>
+        <p:txBody>
+          <a:bodyPr rtlCol="0" anchor="ctr"/>
+          <a:lstStyle/>
+          <a:p/>
+        </p:txBody>
+      </p:sp>
+      <p:sp>
+        <p:nvSpPr>
+          <p:cNvPr id="129" name="s13_127"/>
+          <p:cNvSpPr/>
+          <p:nvPr/>
+        </p:nvSpPr>
+        <p:spPr>
+          <a:xfrm>
+            <a:off x="8709660" y="6304788"/>
+            <a:ext cx="82296" cy="82296"/>
+          </a:xfrm>
+          <a:prstGeom prst="ellipse">
+            <a:avLst/>
+          </a:prstGeom>
+          <a:solidFill>
+            <a:srgbClr val="2A3F63"/>
+          </a:solidFill>
+          <a:ln>
+            <a:noFill/>
+          </a:ln>
+          <a:effectLst/>
+        </p:spPr>
+        <p:style>
+          <a:lnRef idx="1">
+            <a:schemeClr val="accent1"/>
+          </a:lnRef>
+          <a:fillRef idx="3">
+            <a:schemeClr val="accent1"/>
+          </a:fillRef>
+          <a:effectRef idx="2">
+            <a:schemeClr val="accent1"/>
+          </a:effectRef>
+          <a:fontRef idx="minor">
+            <a:schemeClr val="lt1"/>
+          </a:fontRef>
+        </p:style>
+        <p:txBody>
+          <a:bodyPr rtlCol="0" anchor="ctr"/>
+          <a:lstStyle/>
+          <a:p/>
+        </p:txBody>
+      </p:sp>
+      <p:sp>
+        <p:nvSpPr>
+          <p:cNvPr id="130" name="s13_128"/>
+          <p:cNvSpPr/>
+          <p:nvPr/>
+        </p:nvSpPr>
+        <p:spPr>
+          <a:xfrm>
+            <a:off x="8892540" y="6304788"/>
+            <a:ext cx="82296" cy="82296"/>
+          </a:xfrm>
+          <a:prstGeom prst="ellipse">
+            <a:avLst/>
+          </a:prstGeom>
+          <a:solidFill>
+            <a:srgbClr val="2A3F63"/>
+          </a:solidFill>
+          <a:ln>
+            <a:noFill/>
+          </a:ln>
+          <a:effectLst/>
+        </p:spPr>
+        <p:style>
+          <a:lnRef idx="1">
+            <a:schemeClr val="accent1"/>
+          </a:lnRef>
+          <a:fillRef idx="3">
+            <a:schemeClr val="accent1"/>
+          </a:fillRef>
+          <a:effectRef idx="2">
+            <a:schemeClr val="accent1"/>
+          </a:effectRef>
+          <a:fontRef idx="minor">
+            <a:schemeClr val="lt1"/>
+          </a:fontRef>
+        </p:style>
+        <p:txBody>
+          <a:bodyPr rtlCol="0" anchor="ctr"/>
+          <a:lstStyle/>
+          <a:p/>
+        </p:txBody>
+      </p:sp>
+      <p:sp>
+        <p:nvSpPr>
+          <p:cNvPr id="131" name="s13_129"/>
+          <p:cNvSpPr/>
+          <p:nvPr/>
+        </p:nvSpPr>
+        <p:spPr>
+          <a:xfrm>
+            <a:off x="9075419" y="6304788"/>
+            <a:ext cx="82296" cy="82296"/>
+          </a:xfrm>
+          <a:prstGeom prst="ellipse">
+            <a:avLst/>
+          </a:prstGeom>
+          <a:solidFill>
+            <a:srgbClr val="2A3F63"/>
+          </a:solidFill>
+          <a:ln>
+            <a:noFill/>
+          </a:ln>
+          <a:effectLst/>
+        </p:spPr>
+        <p:style>
+          <a:lnRef idx="1">
+            <a:schemeClr val="accent1"/>
+          </a:lnRef>
+          <a:fillRef idx="3">
+            <a:schemeClr val="accent1"/>
+          </a:fillRef>
+          <a:effectRef idx="2">
+            <a:schemeClr val="accent1"/>
+          </a:effectRef>
+          <a:fontRef idx="minor">
+            <a:schemeClr val="lt1"/>
+          </a:fontRef>
+        </p:style>
+        <p:txBody>
+          <a:bodyPr rtlCol="0" anchor="ctr"/>
+          <a:lstStyle/>
+          <a:p/>
+        </p:txBody>
+      </p:sp>
+      <p:sp>
+        <p:nvSpPr>
+          <p:cNvPr id="132" name="s13_130"/>
+          <p:cNvSpPr/>
+          <p:nvPr/>
+        </p:nvSpPr>
+        <p:spPr>
+          <a:xfrm>
+            <a:off x="9258300" y="6304788"/>
+            <a:ext cx="82296" cy="82296"/>
+          </a:xfrm>
+          <a:prstGeom prst="ellipse">
+            <a:avLst/>
+          </a:prstGeom>
+          <a:solidFill>
+            <a:srgbClr val="2A3F63"/>
+          </a:solidFill>
+          <a:ln>
+            <a:noFill/>
+          </a:ln>
+          <a:effectLst/>
+        </p:spPr>
+        <p:style>
+          <a:lnRef idx="1">
+            <a:schemeClr val="accent1"/>
+          </a:lnRef>
+          <a:fillRef idx="3">
+            <a:schemeClr val="accent1"/>
+          </a:fillRef>
+          <a:effectRef idx="2">
+            <a:schemeClr val="accent1"/>
+          </a:effectRef>
+          <a:fontRef idx="minor">
+            <a:schemeClr val="lt1"/>
+          </a:fontRef>
+        </p:style>
+        <p:txBody>
+          <a:bodyPr rtlCol="0" anchor="ctr"/>
+          <a:lstStyle/>
+          <a:p/>
+        </p:txBody>
+      </p:sp>
+      <p:sp>
+        <p:nvSpPr>
+          <p:cNvPr id="133" name="s13_131"/>
+          <p:cNvSpPr txBox="1"/>
+          <p:nvPr/>
+        </p:nvSpPr>
+        <p:spPr>
+          <a:xfrm>
+            <a:off x="10488167" y="6254496"/>
+            <a:ext cx="1371600" cy="182880"/>
+          </a:xfrm>
+          <a:prstGeom prst="rect">
+            <a:avLst/>
+          </a:prstGeom>
+          <a:noFill/>
+        </p:spPr>
+        <p:txBody>
+          <a:bodyPr wrap="square" lIns="0" rIns="0" tIns="0" bIns="0" anchor="ctr">
+            <a:spAutoFit/>
+          </a:bodyPr>
+          <a:lstStyle/>
+          <a:p>
+            <a:pPr algn="l">
+              <a:lnSpc>
+                <a:spcPct val="100000"/>
+              </a:lnSpc>
+              <a:spcBef>
+                <a:spcPts val="0"/>
+              </a:spcBef>
+              <a:spcAft>
+                <a:spcPts val="0"/>
+              </a:spcAft>
+            </a:pPr>
+            <a:r>
+              <a:rPr sz="800" b="0" i="0">
+                <a:solidFill>
+                  <a:srgbClr val="FFB531"/>
+                </a:solidFill>
+                <a:latin typeface="Consolas"/>
+              </a:rPr>
+              <a:t>1 de 8</a:t>
+            </a:r>
+          </a:p>
+        </p:txBody>
+      </p:sp>
+    </p:spTree>
+  </p:cSld>
+  <p:clrMapOvr>
+    <a:masterClrMapping/>
+  </p:clrMapOvr>
 </p:sld>
 </file>
 
@@ -31554,7 +37839,7 @@
                 </a:solidFill>
                 <a:latin typeface="Consolas"/>
               </a:rPr>
-              <a:t>205 arquivos  ·  690 ligações  ·  medido no branch por grafo_repo.py</a:t>
+              <a:t>205 arquivos  ·  700 ligações  ·  medido no branch por grafo_repo.py</a:t>
             </a:r>
           </a:p>
         </p:txBody>
@@ -32646,7 +38931,7 @@
                 </a:solidFill>
                 <a:latin typeface="Consolas"/>
               </a:rPr>
-              <a:t>205 arquivos  ·  690 ligações  ·  medido no branch por grafo_repo.py</a:t>
+              <a:t>205 arquivos  ·  700 ligações  ·  medido no branch por grafo_repo.py</a:t>
             </a:r>
           </a:p>
         </p:txBody>
@@ -32659,7 +38944,7 @@
         </p:nvSpPr>
         <p:spPr>
           <a:xfrm>
-            <a:off x="2946411" y="4024372"/>
+            <a:off x="3032275" y="3979405"/>
             <a:ext cx="182880" cy="182880"/>
           </a:xfrm>
           <a:prstGeom prst="ellipse">
@@ -32707,7 +38992,7 @@
         </p:nvSpPr>
         <p:spPr>
           <a:xfrm>
-            <a:off x="2786391" y="3864352"/>
+            <a:off x="2872255" y="3819385"/>
             <a:ext cx="502920" cy="502920"/>
           </a:xfrm>
           <a:prstGeom prst="ellipse">
@@ -33853,7 +40138,7 @@
                 </a:solidFill>
                 <a:latin typeface="Consolas"/>
               </a:rPr>
-              <a:t>205 arquivos  ·  690 ligações  ·  medido no branch por grafo_repo.py</a:t>
+              <a:t>205 arquivos  ·  700 ligações  ·  medido no branch por grafo_repo.py</a:t>
             </a:r>
           </a:p>
         </p:txBody>
@@ -33866,7 +40151,7 @@
         </p:nvSpPr>
         <p:spPr>
           <a:xfrm>
-            <a:off x="2946411" y="4024372"/>
+            <a:off x="3032275" y="3979405"/>
             <a:ext cx="182880" cy="182880"/>
           </a:xfrm>
           <a:prstGeom prst="ellipse">
@@ -33913,9 +40198,9 @@
           <p:nvPr/>
         </p:nvCxnSpPr>
         <p:spPr>
-          <a:xfrm flipH="1">
-            <a:off x="1926259" y="4115812"/>
-            <a:ext cx="1111592" cy="715243"/>
+          <a:xfrm flipV="1">
+            <a:off x="3123715" y="2966173"/>
+            <a:ext cx="1452894" cy="1104672"/>
           </a:xfrm>
           <a:prstGeom prst="line">
             <a:avLst/>
@@ -33951,7 +40236,7 @@
         </p:nvSpPr>
         <p:spPr>
           <a:xfrm>
-            <a:off x="1834819" y="4739615"/>
+            <a:off x="4485169" y="2874733"/>
             <a:ext cx="182880" cy="182880"/>
           </a:xfrm>
           <a:prstGeom prst="ellipse">
@@ -33999,7 +40284,7 @@
         </p:nvSpPr>
         <p:spPr>
           <a:xfrm>
-            <a:off x="1674799" y="4579595"/>
+            <a:off x="4325149" y="2714713"/>
             <a:ext cx="502920" cy="502920"/>
           </a:xfrm>
           <a:prstGeom prst="ellipse">
@@ -35199,7 +41484,7 @@
                 </a:solidFill>
                 <a:latin typeface="Consolas"/>
               </a:rPr>
-              <a:t>205 arquivos  ·  690 ligações  ·  medido no branch por grafo_repo.py</a:t>
+              <a:t>205 arquivos  ·  700 ligações  ·  medido no branch por grafo_repo.py</a:t>
             </a:r>
           </a:p>
         </p:txBody>
@@ -35212,7 +41497,7 @@
         </p:nvSpPr>
         <p:spPr>
           <a:xfrm>
-            <a:off x="2946411" y="4024372"/>
+            <a:off x="3032275" y="3979405"/>
             <a:ext cx="182880" cy="182880"/>
           </a:xfrm>
           <a:prstGeom prst="ellipse">
@@ -35259,9 +41544,9 @@
           <p:nvPr/>
         </p:nvCxnSpPr>
         <p:spPr>
-          <a:xfrm flipH="1">
-            <a:off x="1926259" y="4115812"/>
-            <a:ext cx="1111592" cy="715243"/>
+          <a:xfrm flipV="1">
+            <a:off x="3123715" y="2966173"/>
+            <a:ext cx="1452894" cy="1104672"/>
           </a:xfrm>
           <a:prstGeom prst="line">
             <a:avLst/>
@@ -35297,7 +41582,7 @@
         </p:nvSpPr>
         <p:spPr>
           <a:xfrm>
-            <a:off x="1834819" y="4739615"/>
+            <a:off x="4485169" y="2874733"/>
             <a:ext cx="182880" cy="182880"/>
           </a:xfrm>
           <a:prstGeom prst="ellipse">
@@ -35344,9 +41629,9 @@
           <p:nvPr/>
         </p:nvCxnSpPr>
         <p:spPr>
-          <a:xfrm flipV="1">
-            <a:off x="1926259" y="3779288"/>
-            <a:ext cx="17743" cy="1051767"/>
+          <a:xfrm flipH="1">
+            <a:off x="4229439" y="2966173"/>
+            <a:ext cx="347170" cy="1402079"/>
           </a:xfrm>
           <a:prstGeom prst="line">
             <a:avLst/>
@@ -35382,7 +41667,7 @@
         </p:nvSpPr>
         <p:spPr>
           <a:xfrm>
-            <a:off x="1852562" y="3687848"/>
+            <a:off x="4137999" y="4276812"/>
             <a:ext cx="182880" cy="182880"/>
           </a:xfrm>
           <a:prstGeom prst="ellipse">
@@ -35430,7 +41715,7 @@
         </p:nvSpPr>
         <p:spPr>
           <a:xfrm>
-            <a:off x="1692542" y="3527828"/>
+            <a:off x="3977979" y="4116792"/>
             <a:ext cx="502920" cy="502920"/>
           </a:xfrm>
           <a:prstGeom prst="ellipse">
@@ -36684,7 +42969,7 @@
                 </a:solidFill>
                 <a:latin typeface="Consolas"/>
               </a:rPr>
-              <a:t>205 arquivos  ·  690 ligações  ·  medido no branch por grafo_repo.py</a:t>
+              <a:t>205 arquivos  ·  700 ligações  ·  medido no branch por grafo_repo.py</a:t>
             </a:r>
           </a:p>
         </p:txBody>
@@ -36697,7 +42982,7 @@
         </p:nvSpPr>
         <p:spPr>
           <a:xfrm>
-            <a:off x="2946411" y="4024372"/>
+            <a:off x="3032275" y="3979405"/>
             <a:ext cx="182880" cy="182880"/>
           </a:xfrm>
           <a:prstGeom prst="ellipse">
@@ -36744,9 +43029,9 @@
           <p:nvPr/>
         </p:nvCxnSpPr>
         <p:spPr>
-          <a:xfrm flipH="1">
-            <a:off x="1926259" y="4115812"/>
-            <a:ext cx="1111592" cy="715243"/>
+          <a:xfrm flipV="1">
+            <a:off x="3123715" y="2966173"/>
+            <a:ext cx="1452894" cy="1104672"/>
           </a:xfrm>
           <a:prstGeom prst="line">
             <a:avLst/>
@@ -36782,7 +43067,7 @@
         </p:nvSpPr>
         <p:spPr>
           <a:xfrm>
-            <a:off x="1834819" y="4739615"/>
+            <a:off x="4485169" y="2874733"/>
             <a:ext cx="182880" cy="182880"/>
           </a:xfrm>
           <a:prstGeom prst="ellipse">
@@ -36829,9 +43114,9 @@
           <p:nvPr/>
         </p:nvCxnSpPr>
         <p:spPr>
-          <a:xfrm flipV="1">
-            <a:off x="1926259" y="3779288"/>
-            <a:ext cx="17743" cy="1051767"/>
+          <a:xfrm flipH="1">
+            <a:off x="4229439" y="2966173"/>
+            <a:ext cx="347170" cy="1402079"/>
           </a:xfrm>
           <a:prstGeom prst="line">
             <a:avLst/>
@@ -36867,7 +43152,7 @@
         </p:nvSpPr>
         <p:spPr>
           <a:xfrm>
-            <a:off x="1852562" y="3687848"/>
+            <a:off x="4137999" y="4276812"/>
             <a:ext cx="182880" cy="182880"/>
           </a:xfrm>
           <a:prstGeom prst="ellipse">
@@ -36914,9 +43199,9 @@
           <p:nvPr/>
         </p:nvCxnSpPr>
         <p:spPr>
-          <a:xfrm>
-            <a:off x="1944002" y="3779288"/>
-            <a:ext cx="865626" cy="224418"/>
+          <a:xfrm flipH="1" flipV="1">
+            <a:off x="3322795" y="3741475"/>
+            <a:ext cx="906644" cy="626777"/>
           </a:xfrm>
           <a:prstGeom prst="line">
             <a:avLst/>
@@ -36952,7 +43237,7 @@
         </p:nvSpPr>
         <p:spPr>
           <a:xfrm>
-            <a:off x="2718188" y="3912266"/>
+            <a:off x="3231355" y="3650035"/>
             <a:ext cx="182880" cy="182880"/>
           </a:xfrm>
           <a:prstGeom prst="ellipse">
@@ -37000,7 +43285,7 @@
         </p:nvSpPr>
         <p:spPr>
           <a:xfrm>
-            <a:off x="2558168" y="3752246"/>
+            <a:off x="3071335" y="3490015"/>
             <a:ext cx="502920" cy="502920"/>
           </a:xfrm>
           <a:prstGeom prst="ellipse">
@@ -38308,7 +44593,7 @@
                 </a:solidFill>
                 <a:latin typeface="Consolas"/>
               </a:rPr>
-              <a:t>205 arquivos  ·  690 ligações  ·  medido no branch por grafo_repo.py</a:t>
+              <a:t>205 arquivos  ·  700 ligações  ·  medido no branch por grafo_repo.py</a:t>
             </a:r>
           </a:p>
         </p:txBody>
@@ -38321,7 +44606,7 @@
         </p:nvSpPr>
         <p:spPr>
           <a:xfrm>
-            <a:off x="2946411" y="4024372"/>
+            <a:off x="3032275" y="3979405"/>
             <a:ext cx="182880" cy="182880"/>
           </a:xfrm>
           <a:prstGeom prst="ellipse">
@@ -38368,9 +44653,9 @@
           <p:nvPr/>
         </p:nvCxnSpPr>
         <p:spPr>
-          <a:xfrm flipH="1">
-            <a:off x="1926259" y="4115812"/>
-            <a:ext cx="1111592" cy="715243"/>
+          <a:xfrm flipV="1">
+            <a:off x="3123715" y="2966173"/>
+            <a:ext cx="1452894" cy="1104672"/>
           </a:xfrm>
           <a:prstGeom prst="line">
             <a:avLst/>
@@ -38406,7 +44691,7 @@
         </p:nvSpPr>
         <p:spPr>
           <a:xfrm>
-            <a:off x="1834819" y="4739615"/>
+            <a:off x="4485169" y="2874733"/>
             <a:ext cx="182880" cy="182880"/>
           </a:xfrm>
           <a:prstGeom prst="ellipse">
@@ -38453,9 +44738,9 @@
           <p:nvPr/>
         </p:nvCxnSpPr>
         <p:spPr>
-          <a:xfrm flipV="1">
-            <a:off x="1926259" y="3779288"/>
-            <a:ext cx="17743" cy="1051767"/>
+          <a:xfrm flipH="1">
+            <a:off x="4229439" y="2966173"/>
+            <a:ext cx="347170" cy="1402079"/>
           </a:xfrm>
           <a:prstGeom prst="line">
             <a:avLst/>
@@ -38491,7 +44776,7 @@
         </p:nvSpPr>
         <p:spPr>
           <a:xfrm>
-            <a:off x="1852562" y="3687848"/>
+            <a:off x="4137999" y="4276812"/>
             <a:ext cx="182880" cy="182880"/>
           </a:xfrm>
           <a:prstGeom prst="ellipse">
@@ -38538,9 +44823,9 @@
           <p:nvPr/>
         </p:nvCxnSpPr>
         <p:spPr>
-          <a:xfrm>
-            <a:off x="1944002" y="3779288"/>
-            <a:ext cx="865626" cy="224418"/>
+          <a:xfrm flipH="1" flipV="1">
+            <a:off x="3322795" y="3741475"/>
+            <a:ext cx="906644" cy="626777"/>
           </a:xfrm>
           <a:prstGeom prst="line">
             <a:avLst/>
@@ -38576,7 +44861,7 @@
         </p:nvSpPr>
         <p:spPr>
           <a:xfrm>
-            <a:off x="2718188" y="3912266"/>
+            <a:off x="3231355" y="3650035"/>
             <a:ext cx="182880" cy="182880"/>
           </a:xfrm>
           <a:prstGeom prst="ellipse">
@@ -38624,8 +44909,8 @@
         </p:nvCxnSpPr>
         <p:spPr>
           <a:xfrm>
-            <a:off x="2809628" y="4003706"/>
-            <a:ext cx="481523" cy="295403"/>
+            <a:off x="3322795" y="3741475"/>
+            <a:ext cx="135298" cy="506725"/>
           </a:xfrm>
           <a:prstGeom prst="line">
             <a:avLst/>
@@ -38661,7 +44946,7 @@
         </p:nvSpPr>
         <p:spPr>
           <a:xfrm>
-            <a:off x="3199711" y="4207669"/>
+            <a:off x="3366653" y="4156760"/>
             <a:ext cx="182880" cy="182880"/>
           </a:xfrm>
           <a:prstGeom prst="ellipse">
@@ -38709,7 +44994,7 @@
         </p:nvSpPr>
         <p:spPr>
           <a:xfrm>
-            <a:off x="3039691" y="4047649"/>
+            <a:off x="3206633" y="3996740"/>
             <a:ext cx="502920" cy="502920"/>
           </a:xfrm>
           <a:prstGeom prst="ellipse">

--- a/Final/Slides_novos.pptx
+++ b/Final/Slides_novos.pptx
@@ -1008,7 +1008,7 @@
           <a:lstStyle/>
           <a:p>
             <a:r>
-              <a:t>Números da página 5 do relatório (corte de 15/08, 91 sessões dos três LOGs) — Uteis/analises/Metricas_p5.md. VR de Uteis/analises/Premissa_tendencia.md. Peneira: GRUPOS do slide 8 da semi.</a:t>
+              <a:t>Gráficos da página 5 do relatório (Uteis/graficos/p5_*.png, graficos_p5.py; corte de 15/08, 91 sessões dos três LOGs). Esforço: 31/54/15 % das sessões e 25/71/4 % dos tokens. Erros: 145, 88 % pegos na própria sessão. Peneira: GRUPOS do slide 8 da semi. Uma que caiu: momentum do sinal, VR 0,97–1,18 (Premissa_tendencia.md).</a:t>
             </a:r>
           </a:p>
         </p:txBody>
@@ -7153,7 +7153,7 @@
                 </a:solidFill>
                 <a:latin typeface="Consolas"/>
               </a:rPr>
-              <a:t>205 arquivos  ·  700 ligações  ·  medido no branch por grafo_repo.py</a:t>
+              <a:t>205 arquivos  ·  695 ligações  ·  medido no branch por grafo_repo.py</a:t>
             </a:r>
           </a:p>
         </p:txBody>
@@ -7166,7 +7166,7 @@
         </p:nvSpPr>
         <p:spPr>
           <a:xfrm>
-            <a:off x="3032275" y="3979405"/>
+            <a:off x="2903101" y="4043871"/>
             <a:ext cx="182880" cy="182880"/>
           </a:xfrm>
           <a:prstGeom prst="ellipse">
@@ -7214,8 +7214,8 @@
         </p:nvCxnSpPr>
         <p:spPr>
           <a:xfrm flipV="1">
-            <a:off x="3123715" y="2966173"/>
-            <a:ext cx="1452894" cy="1104672"/>
+            <a:off x="2994541" y="3411134"/>
+            <a:ext cx="1630177" cy="724177"/>
           </a:xfrm>
           <a:prstGeom prst="line">
             <a:avLst/>
@@ -7251,7 +7251,7 @@
         </p:nvSpPr>
         <p:spPr>
           <a:xfrm>
-            <a:off x="4485169" y="2874733"/>
+            <a:off x="4533278" y="3319694"/>
             <a:ext cx="182880" cy="182880"/>
           </a:xfrm>
           <a:prstGeom prst="ellipse">
@@ -7299,8 +7299,8 @@
         </p:nvCxnSpPr>
         <p:spPr>
           <a:xfrm flipH="1">
-            <a:off x="4229439" y="2966173"/>
-            <a:ext cx="347170" cy="1402079"/>
+            <a:off x="4121220" y="3411134"/>
+            <a:ext cx="503498" cy="1210191"/>
           </a:xfrm>
           <a:prstGeom prst="line">
             <a:avLst/>
@@ -7336,7 +7336,7 @@
         </p:nvSpPr>
         <p:spPr>
           <a:xfrm>
-            <a:off x="4137999" y="4276812"/>
+            <a:off x="4029780" y="4529885"/>
             <a:ext cx="182880" cy="182880"/>
           </a:xfrm>
           <a:prstGeom prst="ellipse">
@@ -7384,8 +7384,8 @@
         </p:nvCxnSpPr>
         <p:spPr>
           <a:xfrm flipH="1" flipV="1">
-            <a:off x="3322795" y="3741475"/>
-            <a:ext cx="906644" cy="626777"/>
+            <a:off x="3041969" y="3917674"/>
+            <a:ext cx="1079251" cy="703651"/>
           </a:xfrm>
           <a:prstGeom prst="line">
             <a:avLst/>
@@ -7421,7 +7421,7 @@
         </p:nvSpPr>
         <p:spPr>
           <a:xfrm>
-            <a:off x="3231355" y="3650035"/>
+            <a:off x="2950529" y="3826234"/>
             <a:ext cx="182880" cy="182880"/>
           </a:xfrm>
           <a:prstGeom prst="ellipse">
@@ -7469,8 +7469,8 @@
         </p:nvCxnSpPr>
         <p:spPr>
           <a:xfrm>
-            <a:off x="3322795" y="3741475"/>
-            <a:ext cx="135298" cy="506725"/>
+            <a:off x="3041969" y="3917674"/>
+            <a:ext cx="304176" cy="446538"/>
           </a:xfrm>
           <a:prstGeom prst="line">
             <a:avLst/>
@@ -7506,7 +7506,7 @@
         </p:nvSpPr>
         <p:spPr>
           <a:xfrm>
-            <a:off x="3366653" y="4156760"/>
+            <a:off x="3254705" y="4272772"/>
             <a:ext cx="182880" cy="182880"/>
           </a:xfrm>
           <a:prstGeom prst="ellipse">
@@ -7553,9 +7553,9 @@
           <p:nvPr/>
         </p:nvCxnSpPr>
         <p:spPr>
-          <a:xfrm flipH="1" flipV="1">
-            <a:off x="3415287" y="3111280"/>
-            <a:ext cx="42806" cy="1136920"/>
+          <a:xfrm flipV="1">
+            <a:off x="3346145" y="3247232"/>
+            <a:ext cx="469866" cy="1116980"/>
           </a:xfrm>
           <a:prstGeom prst="line">
             <a:avLst/>
@@ -7591,7 +7591,7 @@
         </p:nvSpPr>
         <p:spPr>
           <a:xfrm>
-            <a:off x="3323847" y="3019840"/>
+            <a:off x="3724571" y="3155792"/>
             <a:ext cx="182880" cy="182880"/>
           </a:xfrm>
           <a:prstGeom prst="ellipse">
@@ -7639,7 +7639,7 @@
         </p:nvSpPr>
         <p:spPr>
           <a:xfrm>
-            <a:off x="3163827" y="2859820"/>
+            <a:off x="3564551" y="2995772"/>
             <a:ext cx="502920" cy="502920"/>
           </a:xfrm>
           <a:prstGeom prst="ellipse">
@@ -9055,7 +9055,7 @@
                 </a:solidFill>
                 <a:latin typeface="Consolas"/>
               </a:rPr>
-              <a:t>205 arquivos  ·  700 ligações  ·  medido no branch por grafo_repo.py</a:t>
+              <a:t>205 arquivos  ·  695 ligações  ·  medido no branch por grafo_repo.py</a:t>
             </a:r>
           </a:p>
         </p:txBody>
@@ -9068,7 +9068,7 @@
         </p:nvSpPr>
         <p:spPr>
           <a:xfrm>
-            <a:off x="3032275" y="3979405"/>
+            <a:off x="2903101" y="4043871"/>
             <a:ext cx="182880" cy="182880"/>
           </a:xfrm>
           <a:prstGeom prst="ellipse">
@@ -9116,8 +9116,8 @@
         </p:nvCxnSpPr>
         <p:spPr>
           <a:xfrm flipV="1">
-            <a:off x="3123715" y="2966173"/>
-            <a:ext cx="1452894" cy="1104672"/>
+            <a:off x="2994541" y="3411134"/>
+            <a:ext cx="1630177" cy="724177"/>
           </a:xfrm>
           <a:prstGeom prst="line">
             <a:avLst/>
@@ -9153,7 +9153,7 @@
         </p:nvSpPr>
         <p:spPr>
           <a:xfrm>
-            <a:off x="4485169" y="2874733"/>
+            <a:off x="4533278" y="3319694"/>
             <a:ext cx="182880" cy="182880"/>
           </a:xfrm>
           <a:prstGeom prst="ellipse">
@@ -9201,8 +9201,8 @@
         </p:nvCxnSpPr>
         <p:spPr>
           <a:xfrm flipH="1">
-            <a:off x="4229439" y="2966173"/>
-            <a:ext cx="347170" cy="1402079"/>
+            <a:off x="4121220" y="3411134"/>
+            <a:ext cx="503498" cy="1210191"/>
           </a:xfrm>
           <a:prstGeom prst="line">
             <a:avLst/>
@@ -9238,7 +9238,7 @@
         </p:nvSpPr>
         <p:spPr>
           <a:xfrm>
-            <a:off x="4137999" y="4276812"/>
+            <a:off x="4029780" y="4529885"/>
             <a:ext cx="182880" cy="182880"/>
           </a:xfrm>
           <a:prstGeom prst="ellipse">
@@ -9286,8 +9286,8 @@
         </p:nvCxnSpPr>
         <p:spPr>
           <a:xfrm flipH="1" flipV="1">
-            <a:off x="3322795" y="3741475"/>
-            <a:ext cx="906644" cy="626777"/>
+            <a:off x="3041969" y="3917674"/>
+            <a:ext cx="1079251" cy="703651"/>
           </a:xfrm>
           <a:prstGeom prst="line">
             <a:avLst/>
@@ -9323,7 +9323,7 @@
         </p:nvSpPr>
         <p:spPr>
           <a:xfrm>
-            <a:off x="3231355" y="3650035"/>
+            <a:off x="2950529" y="3826234"/>
             <a:ext cx="182880" cy="182880"/>
           </a:xfrm>
           <a:prstGeom prst="ellipse">
@@ -9371,8 +9371,8 @@
         </p:nvCxnSpPr>
         <p:spPr>
           <a:xfrm>
-            <a:off x="3322795" y="3741475"/>
-            <a:ext cx="135298" cy="506725"/>
+            <a:off x="3041969" y="3917674"/>
+            <a:ext cx="304176" cy="446538"/>
           </a:xfrm>
           <a:prstGeom prst="line">
             <a:avLst/>
@@ -9408,7 +9408,7 @@
         </p:nvSpPr>
         <p:spPr>
           <a:xfrm>
-            <a:off x="3366653" y="4156760"/>
+            <a:off x="3254705" y="4272772"/>
             <a:ext cx="182880" cy="182880"/>
           </a:xfrm>
           <a:prstGeom prst="ellipse">
@@ -9455,9 +9455,9 @@
           <p:nvPr/>
         </p:nvCxnSpPr>
         <p:spPr>
-          <a:xfrm flipH="1" flipV="1">
-            <a:off x="3415287" y="3111280"/>
-            <a:ext cx="42806" cy="1136920"/>
+          <a:xfrm flipV="1">
+            <a:off x="3346145" y="3247232"/>
+            <a:ext cx="469866" cy="1116980"/>
           </a:xfrm>
           <a:prstGeom prst="line">
             <a:avLst/>
@@ -9493,7 +9493,7 @@
         </p:nvSpPr>
         <p:spPr>
           <a:xfrm>
-            <a:off x="3323847" y="3019840"/>
+            <a:off x="3724571" y="3155792"/>
             <a:ext cx="182880" cy="182880"/>
           </a:xfrm>
           <a:prstGeom prst="ellipse">
@@ -9541,8 +9541,8 @@
         </p:nvCxnSpPr>
         <p:spPr>
           <a:xfrm flipH="1">
-            <a:off x="2500956" y="3111280"/>
-            <a:ext cx="914331" cy="395045"/>
+            <a:off x="2763967" y="3247232"/>
+            <a:ext cx="1052044" cy="187749"/>
           </a:xfrm>
           <a:prstGeom prst="line">
             <a:avLst/>
@@ -9578,7 +9578,7 @@
         </p:nvSpPr>
         <p:spPr>
           <a:xfrm>
-            <a:off x="2409516" y="3414885"/>
+            <a:off x="2672527" y="3343541"/>
             <a:ext cx="182880" cy="182880"/>
           </a:xfrm>
           <a:prstGeom prst="ellipse">
@@ -9626,7 +9626,7 @@
         </p:nvSpPr>
         <p:spPr>
           <a:xfrm>
-            <a:off x="2249496" y="3254865"/>
+            <a:off x="2512507" y="3183521"/>
             <a:ext cx="502920" cy="502920"/>
           </a:xfrm>
           <a:prstGeom prst="ellipse">
@@ -11096,7 +11096,7 @@
                 </a:solidFill>
                 <a:latin typeface="Consolas"/>
               </a:rPr>
-              <a:t>205 arquivos  ·  700 ligações  ·  medido no branch por grafo_repo.py</a:t>
+              <a:t>205 arquivos  ·  695 ligações  ·  medido no branch por grafo_repo.py</a:t>
             </a:r>
           </a:p>
         </p:txBody>
@@ -11109,7 +11109,7 @@
         </p:nvSpPr>
         <p:spPr>
           <a:xfrm>
-            <a:off x="3032275" y="3979405"/>
+            <a:off x="2903101" y="4043871"/>
             <a:ext cx="182880" cy="182880"/>
           </a:xfrm>
           <a:prstGeom prst="ellipse">
@@ -11157,8 +11157,8 @@
         </p:nvCxnSpPr>
         <p:spPr>
           <a:xfrm flipV="1">
-            <a:off x="3123715" y="2966173"/>
-            <a:ext cx="1452894" cy="1104672"/>
+            <a:off x="2994541" y="3411134"/>
+            <a:ext cx="1630177" cy="724177"/>
           </a:xfrm>
           <a:prstGeom prst="line">
             <a:avLst/>
@@ -11194,7 +11194,7 @@
         </p:nvSpPr>
         <p:spPr>
           <a:xfrm>
-            <a:off x="4485169" y="2874733"/>
+            <a:off x="4533278" y="3319694"/>
             <a:ext cx="182880" cy="182880"/>
           </a:xfrm>
           <a:prstGeom prst="ellipse">
@@ -11242,8 +11242,8 @@
         </p:nvCxnSpPr>
         <p:spPr>
           <a:xfrm flipH="1">
-            <a:off x="4229439" y="2966173"/>
-            <a:ext cx="347170" cy="1402079"/>
+            <a:off x="4121220" y="3411134"/>
+            <a:ext cx="503498" cy="1210191"/>
           </a:xfrm>
           <a:prstGeom prst="line">
             <a:avLst/>
@@ -11279,7 +11279,7 @@
         </p:nvSpPr>
         <p:spPr>
           <a:xfrm>
-            <a:off x="4137999" y="4276812"/>
+            <a:off x="4029780" y="4529885"/>
             <a:ext cx="182880" cy="182880"/>
           </a:xfrm>
           <a:prstGeom prst="ellipse">
@@ -11327,8 +11327,8 @@
         </p:nvCxnSpPr>
         <p:spPr>
           <a:xfrm flipH="1" flipV="1">
-            <a:off x="3322795" y="3741475"/>
-            <a:ext cx="906644" cy="626777"/>
+            <a:off x="3041969" y="3917674"/>
+            <a:ext cx="1079251" cy="703651"/>
           </a:xfrm>
           <a:prstGeom prst="line">
             <a:avLst/>
@@ -11364,7 +11364,7 @@
         </p:nvSpPr>
         <p:spPr>
           <a:xfrm>
-            <a:off x="3231355" y="3650035"/>
+            <a:off x="2950529" y="3826234"/>
             <a:ext cx="182880" cy="182880"/>
           </a:xfrm>
           <a:prstGeom prst="ellipse">
@@ -11412,8 +11412,8 @@
         </p:nvCxnSpPr>
         <p:spPr>
           <a:xfrm>
-            <a:off x="3322795" y="3741475"/>
-            <a:ext cx="135298" cy="506725"/>
+            <a:off x="3041969" y="3917674"/>
+            <a:ext cx="304176" cy="446538"/>
           </a:xfrm>
           <a:prstGeom prst="line">
             <a:avLst/>
@@ -11449,7 +11449,7 @@
         </p:nvSpPr>
         <p:spPr>
           <a:xfrm>
-            <a:off x="3366653" y="4156760"/>
+            <a:off x="3254705" y="4272772"/>
             <a:ext cx="182880" cy="182880"/>
           </a:xfrm>
           <a:prstGeom prst="ellipse">
@@ -11496,9 +11496,9 @@
           <p:nvPr/>
         </p:nvCxnSpPr>
         <p:spPr>
-          <a:xfrm flipH="1" flipV="1">
-            <a:off x="3415287" y="3111280"/>
-            <a:ext cx="42806" cy="1136920"/>
+          <a:xfrm flipV="1">
+            <a:off x="3346145" y="3247232"/>
+            <a:ext cx="469866" cy="1116980"/>
           </a:xfrm>
           <a:prstGeom prst="line">
             <a:avLst/>
@@ -11534,7 +11534,7 @@
         </p:nvSpPr>
         <p:spPr>
           <a:xfrm>
-            <a:off x="3323847" y="3019840"/>
+            <a:off x="3724571" y="3155792"/>
             <a:ext cx="182880" cy="182880"/>
           </a:xfrm>
           <a:prstGeom prst="ellipse">
@@ -11582,8 +11582,8 @@
         </p:nvCxnSpPr>
         <p:spPr>
           <a:xfrm flipH="1">
-            <a:off x="2500956" y="3111280"/>
-            <a:ext cx="914331" cy="395045"/>
+            <a:off x="2763967" y="3247232"/>
+            <a:ext cx="1052044" cy="187749"/>
           </a:xfrm>
           <a:prstGeom prst="line">
             <a:avLst/>
@@ -11619,7 +11619,7 @@
         </p:nvSpPr>
         <p:spPr>
           <a:xfrm>
-            <a:off x="2409516" y="3414885"/>
+            <a:off x="2672527" y="3343541"/>
             <a:ext cx="182880" cy="182880"/>
           </a:xfrm>
           <a:prstGeom prst="ellipse">
@@ -11667,8 +11667,8 @@
         </p:nvCxnSpPr>
         <p:spPr>
           <a:xfrm>
-            <a:off x="2500956" y="3506325"/>
-            <a:ext cx="992426" cy="334916"/>
+            <a:off x="2763967" y="3434981"/>
+            <a:ext cx="604072" cy="522461"/>
           </a:xfrm>
           <a:prstGeom prst="line">
             <a:avLst/>
@@ -11704,7 +11704,7 @@
         </p:nvSpPr>
         <p:spPr>
           <a:xfrm>
-            <a:off x="3401942" y="3749801"/>
+            <a:off x="3276599" y="3866002"/>
             <a:ext cx="182880" cy="182880"/>
           </a:xfrm>
           <a:prstGeom prst="ellipse">
@@ -11752,7 +11752,7 @@
         </p:nvSpPr>
         <p:spPr>
           <a:xfrm>
-            <a:off x="3241922" y="3589781"/>
+            <a:off x="3116579" y="3705982"/>
             <a:ext cx="502920" cy="502920"/>
           </a:xfrm>
           <a:prstGeom prst="ellipse">
@@ -13276,7 +13276,7 @@
                 </a:solidFill>
                 <a:latin typeface="Consolas"/>
               </a:rPr>
-              <a:t>205 arquivos  ·  700 ligações  ·  medido no branch por grafo_repo.py</a:t>
+              <a:t>205 arquivos  ·  695 ligações  ·  medido no branch por grafo_repo.py</a:t>
             </a:r>
           </a:p>
         </p:txBody>
@@ -13289,7 +13289,7 @@
         </p:nvSpPr>
         <p:spPr>
           <a:xfrm>
-            <a:off x="3032275" y="3979405"/>
+            <a:off x="2903101" y="4043871"/>
             <a:ext cx="182880" cy="182880"/>
           </a:xfrm>
           <a:prstGeom prst="ellipse">
@@ -13337,8 +13337,8 @@
         </p:nvCxnSpPr>
         <p:spPr>
           <a:xfrm flipV="1">
-            <a:off x="3123715" y="2966173"/>
-            <a:ext cx="1452894" cy="1104672"/>
+            <a:off x="2994541" y="3411134"/>
+            <a:ext cx="1630177" cy="724177"/>
           </a:xfrm>
           <a:prstGeom prst="line">
             <a:avLst/>
@@ -13374,7 +13374,7 @@
         </p:nvSpPr>
         <p:spPr>
           <a:xfrm>
-            <a:off x="4485169" y="2874733"/>
+            <a:off x="4533278" y="3319694"/>
             <a:ext cx="182880" cy="182880"/>
           </a:xfrm>
           <a:prstGeom prst="ellipse">
@@ -13422,8 +13422,8 @@
         </p:nvCxnSpPr>
         <p:spPr>
           <a:xfrm flipH="1">
-            <a:off x="4229439" y="2966173"/>
-            <a:ext cx="347170" cy="1402079"/>
+            <a:off x="4121220" y="3411134"/>
+            <a:ext cx="503498" cy="1210191"/>
           </a:xfrm>
           <a:prstGeom prst="line">
             <a:avLst/>
@@ -13459,7 +13459,7 @@
         </p:nvSpPr>
         <p:spPr>
           <a:xfrm>
-            <a:off x="4137999" y="4276812"/>
+            <a:off x="4029780" y="4529885"/>
             <a:ext cx="182880" cy="182880"/>
           </a:xfrm>
           <a:prstGeom prst="ellipse">
@@ -13507,8 +13507,8 @@
         </p:nvCxnSpPr>
         <p:spPr>
           <a:xfrm flipH="1" flipV="1">
-            <a:off x="3322795" y="3741475"/>
-            <a:ext cx="906644" cy="626777"/>
+            <a:off x="3041969" y="3917674"/>
+            <a:ext cx="1079251" cy="703651"/>
           </a:xfrm>
           <a:prstGeom prst="line">
             <a:avLst/>
@@ -13544,7 +13544,7 @@
         </p:nvSpPr>
         <p:spPr>
           <a:xfrm>
-            <a:off x="3231355" y="3650035"/>
+            <a:off x="2950529" y="3826234"/>
             <a:ext cx="182880" cy="182880"/>
           </a:xfrm>
           <a:prstGeom prst="ellipse">
@@ -13592,8 +13592,8 @@
         </p:nvCxnSpPr>
         <p:spPr>
           <a:xfrm>
-            <a:off x="3322795" y="3741475"/>
-            <a:ext cx="135298" cy="506725"/>
+            <a:off x="3041969" y="3917674"/>
+            <a:ext cx="304176" cy="446538"/>
           </a:xfrm>
           <a:prstGeom prst="line">
             <a:avLst/>
@@ -13629,7 +13629,7 @@
         </p:nvSpPr>
         <p:spPr>
           <a:xfrm>
-            <a:off x="3366653" y="4156760"/>
+            <a:off x="3254705" y="4272772"/>
             <a:ext cx="182880" cy="182880"/>
           </a:xfrm>
           <a:prstGeom prst="ellipse">
@@ -13676,9 +13676,9 @@
           <p:nvPr/>
         </p:nvCxnSpPr>
         <p:spPr>
-          <a:xfrm flipH="1" flipV="1">
-            <a:off x="3415287" y="3111280"/>
-            <a:ext cx="42806" cy="1136920"/>
+          <a:xfrm flipV="1">
+            <a:off x="3346145" y="3247232"/>
+            <a:ext cx="469866" cy="1116980"/>
           </a:xfrm>
           <a:prstGeom prst="line">
             <a:avLst/>
@@ -13714,7 +13714,7 @@
         </p:nvSpPr>
         <p:spPr>
           <a:xfrm>
-            <a:off x="3323847" y="3019840"/>
+            <a:off x="3724571" y="3155792"/>
             <a:ext cx="182880" cy="182880"/>
           </a:xfrm>
           <a:prstGeom prst="ellipse">
@@ -13762,8 +13762,8 @@
         </p:nvCxnSpPr>
         <p:spPr>
           <a:xfrm flipH="1">
-            <a:off x="2500956" y="3111280"/>
-            <a:ext cx="914331" cy="395045"/>
+            <a:off x="2763967" y="3247232"/>
+            <a:ext cx="1052044" cy="187749"/>
           </a:xfrm>
           <a:prstGeom prst="line">
             <a:avLst/>
@@ -13799,7 +13799,7 @@
         </p:nvSpPr>
         <p:spPr>
           <a:xfrm>
-            <a:off x="2409516" y="3414885"/>
+            <a:off x="2672527" y="3343541"/>
             <a:ext cx="182880" cy="182880"/>
           </a:xfrm>
           <a:prstGeom prst="ellipse">
@@ -13847,8 +13847,8 @@
         </p:nvCxnSpPr>
         <p:spPr>
           <a:xfrm>
-            <a:off x="2500956" y="3506325"/>
-            <a:ext cx="992426" cy="334916"/>
+            <a:off x="2763967" y="3434981"/>
+            <a:ext cx="604072" cy="522461"/>
           </a:xfrm>
           <a:prstGeom prst="line">
             <a:avLst/>
@@ -13884,7 +13884,7 @@
         </p:nvSpPr>
         <p:spPr>
           <a:xfrm>
-            <a:off x="3401942" y="3749801"/>
+            <a:off x="3276599" y="3866002"/>
             <a:ext cx="182880" cy="182880"/>
           </a:xfrm>
           <a:prstGeom prst="ellipse">
@@ -13932,8 +13932,8 @@
         </p:nvCxnSpPr>
         <p:spPr>
           <a:xfrm flipH="1" flipV="1">
-            <a:off x="2452158" y="3068098"/>
-            <a:ext cx="1041224" cy="773143"/>
+            <a:off x="2886755" y="2895055"/>
+            <a:ext cx="481284" cy="1062387"/>
           </a:xfrm>
           <a:prstGeom prst="line">
             <a:avLst/>
@@ -13969,7 +13969,7 @@
         </p:nvSpPr>
         <p:spPr>
           <a:xfrm>
-            <a:off x="2360718" y="2976658"/>
+            <a:off x="2795315" y="2803615"/>
             <a:ext cx="182880" cy="182880"/>
           </a:xfrm>
           <a:prstGeom prst="ellipse">
@@ -14017,7 +14017,7 @@
         </p:nvSpPr>
         <p:spPr>
           <a:xfrm>
-            <a:off x="2200698" y="2816638"/>
+            <a:off x="2635295" y="2643595"/>
             <a:ext cx="502920" cy="502920"/>
           </a:xfrm>
           <a:prstGeom prst="ellipse">
@@ -15595,7 +15595,7 @@
                 </a:solidFill>
                 <a:latin typeface="Consolas"/>
               </a:rPr>
-              <a:t>205 arquivos  ·  700 ligações  ·  medido no branch por grafo_repo.py</a:t>
+              <a:t>205 arquivos  ·  695 ligações  ·  medido no branch por grafo_repo.py</a:t>
             </a:r>
           </a:p>
         </p:txBody>
@@ -15608,7 +15608,7 @@
         </p:nvSpPr>
         <p:spPr>
           <a:xfrm>
-            <a:off x="3032275" y="3979405"/>
+            <a:off x="2903101" y="4043871"/>
             <a:ext cx="182880" cy="182880"/>
           </a:xfrm>
           <a:prstGeom prst="ellipse">
@@ -15656,8 +15656,8 @@
         </p:nvCxnSpPr>
         <p:spPr>
           <a:xfrm flipV="1">
-            <a:off x="3123715" y="2966173"/>
-            <a:ext cx="1452894" cy="1104672"/>
+            <a:off x="2994541" y="3411134"/>
+            <a:ext cx="1630177" cy="724177"/>
           </a:xfrm>
           <a:prstGeom prst="line">
             <a:avLst/>
@@ -15693,7 +15693,7 @@
         </p:nvSpPr>
         <p:spPr>
           <a:xfrm>
-            <a:off x="4485169" y="2874733"/>
+            <a:off x="4533278" y="3319694"/>
             <a:ext cx="182880" cy="182880"/>
           </a:xfrm>
           <a:prstGeom prst="ellipse">
@@ -15741,8 +15741,8 @@
         </p:nvCxnSpPr>
         <p:spPr>
           <a:xfrm flipH="1">
-            <a:off x="4229439" y="2966173"/>
-            <a:ext cx="347170" cy="1402079"/>
+            <a:off x="4121220" y="3411134"/>
+            <a:ext cx="503498" cy="1210191"/>
           </a:xfrm>
           <a:prstGeom prst="line">
             <a:avLst/>
@@ -15778,7 +15778,7 @@
         </p:nvSpPr>
         <p:spPr>
           <a:xfrm>
-            <a:off x="4137999" y="4276812"/>
+            <a:off x="4029780" y="4529885"/>
             <a:ext cx="182880" cy="182880"/>
           </a:xfrm>
           <a:prstGeom prst="ellipse">
@@ -15826,8 +15826,8 @@
         </p:nvCxnSpPr>
         <p:spPr>
           <a:xfrm flipH="1" flipV="1">
-            <a:off x="3322795" y="3741475"/>
-            <a:ext cx="906644" cy="626777"/>
+            <a:off x="3041969" y="3917674"/>
+            <a:ext cx="1079251" cy="703651"/>
           </a:xfrm>
           <a:prstGeom prst="line">
             <a:avLst/>
@@ -15863,7 +15863,7 @@
         </p:nvSpPr>
         <p:spPr>
           <a:xfrm>
-            <a:off x="3231355" y="3650035"/>
+            <a:off x="2950529" y="3826234"/>
             <a:ext cx="182880" cy="182880"/>
           </a:xfrm>
           <a:prstGeom prst="ellipse">
@@ -15911,8 +15911,8 @@
         </p:nvCxnSpPr>
         <p:spPr>
           <a:xfrm>
-            <a:off x="3322795" y="3741475"/>
-            <a:ext cx="135298" cy="506725"/>
+            <a:off x="3041969" y="3917674"/>
+            <a:ext cx="304176" cy="446538"/>
           </a:xfrm>
           <a:prstGeom prst="line">
             <a:avLst/>
@@ -15948,7 +15948,7 @@
         </p:nvSpPr>
         <p:spPr>
           <a:xfrm>
-            <a:off x="3366653" y="4156760"/>
+            <a:off x="3254705" y="4272772"/>
             <a:ext cx="182880" cy="182880"/>
           </a:xfrm>
           <a:prstGeom prst="ellipse">
@@ -15995,9 +15995,9 @@
           <p:nvPr/>
         </p:nvCxnSpPr>
         <p:spPr>
-          <a:xfrm flipH="1" flipV="1">
-            <a:off x="3415287" y="3111280"/>
-            <a:ext cx="42806" cy="1136920"/>
+          <a:xfrm flipV="1">
+            <a:off x="3346145" y="3247232"/>
+            <a:ext cx="469866" cy="1116980"/>
           </a:xfrm>
           <a:prstGeom prst="line">
             <a:avLst/>
@@ -16033,7 +16033,7 @@
         </p:nvSpPr>
         <p:spPr>
           <a:xfrm>
-            <a:off x="3323847" y="3019840"/>
+            <a:off x="3724571" y="3155792"/>
             <a:ext cx="182880" cy="182880"/>
           </a:xfrm>
           <a:prstGeom prst="ellipse">
@@ -16081,8 +16081,8 @@
         </p:nvCxnSpPr>
         <p:spPr>
           <a:xfrm flipH="1">
-            <a:off x="2500956" y="3111280"/>
-            <a:ext cx="914331" cy="395045"/>
+            <a:off x="2763967" y="3247232"/>
+            <a:ext cx="1052044" cy="187749"/>
           </a:xfrm>
           <a:prstGeom prst="line">
             <a:avLst/>
@@ -16118,7 +16118,7 @@
         </p:nvSpPr>
         <p:spPr>
           <a:xfrm>
-            <a:off x="2409516" y="3414885"/>
+            <a:off x="2672527" y="3343541"/>
             <a:ext cx="182880" cy="182880"/>
           </a:xfrm>
           <a:prstGeom prst="ellipse">
@@ -16166,8 +16166,8 @@
         </p:nvCxnSpPr>
         <p:spPr>
           <a:xfrm>
-            <a:off x="2500956" y="3506325"/>
-            <a:ext cx="992426" cy="334916"/>
+            <a:off x="2763967" y="3434981"/>
+            <a:ext cx="604072" cy="522461"/>
           </a:xfrm>
           <a:prstGeom prst="line">
             <a:avLst/>
@@ -16203,7 +16203,7 @@
         </p:nvSpPr>
         <p:spPr>
           <a:xfrm>
-            <a:off x="3401942" y="3749801"/>
+            <a:off x="3276599" y="3866002"/>
             <a:ext cx="182880" cy="182880"/>
           </a:xfrm>
           <a:prstGeom prst="ellipse">
@@ -16251,8 +16251,8 @@
         </p:nvCxnSpPr>
         <p:spPr>
           <a:xfrm flipH="1" flipV="1">
-            <a:off x="2452158" y="3068098"/>
-            <a:ext cx="1041224" cy="773143"/>
+            <a:off x="2886755" y="2895055"/>
+            <a:ext cx="481284" cy="1062387"/>
           </a:xfrm>
           <a:prstGeom prst="line">
             <a:avLst/>
@@ -16288,7 +16288,7 @@
         </p:nvSpPr>
         <p:spPr>
           <a:xfrm>
-            <a:off x="2360718" y="2976658"/>
+            <a:off x="2795315" y="2803615"/>
             <a:ext cx="182880" cy="182880"/>
           </a:xfrm>
           <a:prstGeom prst="ellipse">
@@ -16336,8 +16336,8 @@
         </p:nvCxnSpPr>
         <p:spPr>
           <a:xfrm>
-            <a:off x="2452158" y="3068098"/>
-            <a:ext cx="403729" cy="793720"/>
+            <a:off x="2886755" y="2895055"/>
+            <a:ext cx="118463" cy="581094"/>
           </a:xfrm>
           <a:prstGeom prst="line">
             <a:avLst/>
@@ -16373,7 +16373,7 @@
         </p:nvSpPr>
         <p:spPr>
           <a:xfrm>
-            <a:off x="2764447" y="3770378"/>
+            <a:off x="2913778" y="3384709"/>
             <a:ext cx="182880" cy="182880"/>
           </a:xfrm>
           <a:prstGeom prst="ellipse">
@@ -16421,7 +16421,7 @@
         </p:nvSpPr>
         <p:spPr>
           <a:xfrm>
-            <a:off x="2604427" y="3610358"/>
+            <a:off x="2753758" y="3224689"/>
             <a:ext cx="502920" cy="502920"/>
           </a:xfrm>
           <a:prstGeom prst="ellipse">
@@ -18053,7 +18053,7 @@
                 </a:solidFill>
                 <a:latin typeface="Consolas"/>
               </a:rPr>
-              <a:t>205 arquivos  ·  700 ligações  ·  medido no branch por grafo_repo.py</a:t>
+              <a:t>205 arquivos  ·  695 ligações  ·  medido no branch por grafo_repo.py</a:t>
             </a:r>
           </a:p>
         </p:txBody>
@@ -18066,7 +18066,7 @@
         </p:nvSpPr>
         <p:spPr>
           <a:xfrm>
-            <a:off x="3032275" y="3979405"/>
+            <a:off x="2903101" y="4043871"/>
             <a:ext cx="182880" cy="182880"/>
           </a:xfrm>
           <a:prstGeom prst="ellipse">
@@ -18114,8 +18114,8 @@
         </p:nvCxnSpPr>
         <p:spPr>
           <a:xfrm flipV="1">
-            <a:off x="3123715" y="2966173"/>
-            <a:ext cx="1452894" cy="1104672"/>
+            <a:off x="2994541" y="3411134"/>
+            <a:ext cx="1630177" cy="724177"/>
           </a:xfrm>
           <a:prstGeom prst="line">
             <a:avLst/>
@@ -18151,7 +18151,7 @@
         </p:nvSpPr>
         <p:spPr>
           <a:xfrm>
-            <a:off x="4485169" y="2874733"/>
+            <a:off x="4533278" y="3319694"/>
             <a:ext cx="182880" cy="182880"/>
           </a:xfrm>
           <a:prstGeom prst="ellipse">
@@ -18199,8 +18199,8 @@
         </p:nvCxnSpPr>
         <p:spPr>
           <a:xfrm flipH="1">
-            <a:off x="4229439" y="2966173"/>
-            <a:ext cx="347170" cy="1402079"/>
+            <a:off x="4121220" y="3411134"/>
+            <a:ext cx="503498" cy="1210191"/>
           </a:xfrm>
           <a:prstGeom prst="line">
             <a:avLst/>
@@ -18236,7 +18236,7 @@
         </p:nvSpPr>
         <p:spPr>
           <a:xfrm>
-            <a:off x="4137999" y="4276812"/>
+            <a:off x="4029780" y="4529885"/>
             <a:ext cx="182880" cy="182880"/>
           </a:xfrm>
           <a:prstGeom prst="ellipse">
@@ -18284,8 +18284,8 @@
         </p:nvCxnSpPr>
         <p:spPr>
           <a:xfrm flipH="1" flipV="1">
-            <a:off x="3322795" y="3741475"/>
-            <a:ext cx="906644" cy="626777"/>
+            <a:off x="3041969" y="3917674"/>
+            <a:ext cx="1079251" cy="703651"/>
           </a:xfrm>
           <a:prstGeom prst="line">
             <a:avLst/>
@@ -18321,7 +18321,7 @@
         </p:nvSpPr>
         <p:spPr>
           <a:xfrm>
-            <a:off x="3231355" y="3650035"/>
+            <a:off x="2950529" y="3826234"/>
             <a:ext cx="182880" cy="182880"/>
           </a:xfrm>
           <a:prstGeom prst="ellipse">
@@ -18369,8 +18369,8 @@
         </p:nvCxnSpPr>
         <p:spPr>
           <a:xfrm>
-            <a:off x="3322795" y="3741475"/>
-            <a:ext cx="135298" cy="506725"/>
+            <a:off x="3041969" y="3917674"/>
+            <a:ext cx="304176" cy="446538"/>
           </a:xfrm>
           <a:prstGeom prst="line">
             <a:avLst/>
@@ -18406,7 +18406,7 @@
         </p:nvSpPr>
         <p:spPr>
           <a:xfrm>
-            <a:off x="3366653" y="4156760"/>
+            <a:off x="3254705" y="4272772"/>
             <a:ext cx="182880" cy="182880"/>
           </a:xfrm>
           <a:prstGeom prst="ellipse">
@@ -18453,9 +18453,9 @@
           <p:nvPr/>
         </p:nvCxnSpPr>
         <p:spPr>
-          <a:xfrm flipH="1" flipV="1">
-            <a:off x="3415287" y="3111280"/>
-            <a:ext cx="42806" cy="1136920"/>
+          <a:xfrm flipV="1">
+            <a:off x="3346145" y="3247232"/>
+            <a:ext cx="469866" cy="1116980"/>
           </a:xfrm>
           <a:prstGeom prst="line">
             <a:avLst/>
@@ -18491,7 +18491,7 @@
         </p:nvSpPr>
         <p:spPr>
           <a:xfrm>
-            <a:off x="3323847" y="3019840"/>
+            <a:off x="3724571" y="3155792"/>
             <a:ext cx="182880" cy="182880"/>
           </a:xfrm>
           <a:prstGeom prst="ellipse">
@@ -18539,8 +18539,8 @@
         </p:nvCxnSpPr>
         <p:spPr>
           <a:xfrm flipH="1">
-            <a:off x="2500956" y="3111280"/>
-            <a:ext cx="914331" cy="395045"/>
+            <a:off x="2763967" y="3247232"/>
+            <a:ext cx="1052044" cy="187749"/>
           </a:xfrm>
           <a:prstGeom prst="line">
             <a:avLst/>
@@ -18576,7 +18576,7 @@
         </p:nvSpPr>
         <p:spPr>
           <a:xfrm>
-            <a:off x="2409516" y="3414885"/>
+            <a:off x="2672527" y="3343541"/>
             <a:ext cx="182880" cy="182880"/>
           </a:xfrm>
           <a:prstGeom prst="ellipse">
@@ -18624,8 +18624,8 @@
         </p:nvCxnSpPr>
         <p:spPr>
           <a:xfrm>
-            <a:off x="2500956" y="3506325"/>
-            <a:ext cx="992426" cy="334916"/>
+            <a:off x="2763967" y="3434981"/>
+            <a:ext cx="604072" cy="522461"/>
           </a:xfrm>
           <a:prstGeom prst="line">
             <a:avLst/>
@@ -18661,7 +18661,7 @@
         </p:nvSpPr>
         <p:spPr>
           <a:xfrm>
-            <a:off x="3401942" y="3749801"/>
+            <a:off x="3276599" y="3866002"/>
             <a:ext cx="182880" cy="182880"/>
           </a:xfrm>
           <a:prstGeom prst="ellipse">
@@ -18709,8 +18709,8 @@
         </p:nvCxnSpPr>
         <p:spPr>
           <a:xfrm flipH="1" flipV="1">
-            <a:off x="2452158" y="3068098"/>
-            <a:ext cx="1041224" cy="773143"/>
+            <a:off x="2886755" y="2895055"/>
+            <a:ext cx="481284" cy="1062387"/>
           </a:xfrm>
           <a:prstGeom prst="line">
             <a:avLst/>
@@ -18746,7 +18746,7 @@
         </p:nvSpPr>
         <p:spPr>
           <a:xfrm>
-            <a:off x="2360718" y="2976658"/>
+            <a:off x="2795315" y="2803615"/>
             <a:ext cx="182880" cy="182880"/>
           </a:xfrm>
           <a:prstGeom prst="ellipse">
@@ -18794,8 +18794,8 @@
         </p:nvCxnSpPr>
         <p:spPr>
           <a:xfrm>
-            <a:off x="2452158" y="3068098"/>
-            <a:ext cx="403729" cy="793720"/>
+            <a:off x="2886755" y="2895055"/>
+            <a:ext cx="118463" cy="581094"/>
           </a:xfrm>
           <a:prstGeom prst="line">
             <a:avLst/>
@@ -18831,7 +18831,7 @@
         </p:nvSpPr>
         <p:spPr>
           <a:xfrm>
-            <a:off x="2764447" y="3770378"/>
+            <a:off x="2913778" y="3384709"/>
             <a:ext cx="182880" cy="182880"/>
           </a:xfrm>
           <a:prstGeom prst="ellipse">
@@ -18878,9 +18878,9 @@
           <p:nvPr/>
         </p:nvCxnSpPr>
         <p:spPr>
-          <a:xfrm>
-            <a:off x="2855887" y="3861818"/>
-            <a:ext cx="267397" cy="1591998"/>
+          <a:xfrm flipH="1">
+            <a:off x="2506262" y="3476149"/>
+            <a:ext cx="498956" cy="1858954"/>
           </a:xfrm>
           <a:prstGeom prst="line">
             <a:avLst/>
@@ -18916,7 +18916,7 @@
         </p:nvSpPr>
         <p:spPr>
           <a:xfrm>
-            <a:off x="3031844" y="5362376"/>
+            <a:off x="2414822" y="5243663"/>
             <a:ext cx="182880" cy="182880"/>
           </a:xfrm>
           <a:prstGeom prst="ellipse">
@@ -18964,7 +18964,7 @@
         </p:nvSpPr>
         <p:spPr>
           <a:xfrm>
-            <a:off x="2871824" y="5202356"/>
+            <a:off x="2254802" y="5083643"/>
             <a:ext cx="502920" cy="502920"/>
           </a:xfrm>
           <a:prstGeom prst="ellipse">
@@ -20650,7 +20650,7 @@
                 </a:solidFill>
                 <a:latin typeface="Consolas"/>
               </a:rPr>
-              <a:t>205 arquivos  ·  700 ligações  ·  medido no branch por grafo_repo.py</a:t>
+              <a:t>205 arquivos  ·  695 ligações  ·  medido no branch por grafo_repo.py</a:t>
             </a:r>
           </a:p>
         </p:txBody>
@@ -20663,7 +20663,7 @@
         </p:nvSpPr>
         <p:spPr>
           <a:xfrm>
-            <a:off x="3032275" y="3979405"/>
+            <a:off x="2903101" y="4043871"/>
             <a:ext cx="182880" cy="182880"/>
           </a:xfrm>
           <a:prstGeom prst="ellipse">
@@ -20711,8 +20711,8 @@
         </p:nvCxnSpPr>
         <p:spPr>
           <a:xfrm flipV="1">
-            <a:off x="3123715" y="2966173"/>
-            <a:ext cx="1452894" cy="1104672"/>
+            <a:off x="2994541" y="3411134"/>
+            <a:ext cx="1630177" cy="724177"/>
           </a:xfrm>
           <a:prstGeom prst="line">
             <a:avLst/>
@@ -20748,7 +20748,7 @@
         </p:nvSpPr>
         <p:spPr>
           <a:xfrm>
-            <a:off x="4485169" y="2874733"/>
+            <a:off x="4533278" y="3319694"/>
             <a:ext cx="182880" cy="182880"/>
           </a:xfrm>
           <a:prstGeom prst="ellipse">
@@ -20796,8 +20796,8 @@
         </p:nvCxnSpPr>
         <p:spPr>
           <a:xfrm flipH="1">
-            <a:off x="4229439" y="2966173"/>
-            <a:ext cx="347170" cy="1402079"/>
+            <a:off x="4121220" y="3411134"/>
+            <a:ext cx="503498" cy="1210191"/>
           </a:xfrm>
           <a:prstGeom prst="line">
             <a:avLst/>
@@ -20833,7 +20833,7 @@
         </p:nvSpPr>
         <p:spPr>
           <a:xfrm>
-            <a:off x="4137999" y="4276812"/>
+            <a:off x="4029780" y="4529885"/>
             <a:ext cx="182880" cy="182880"/>
           </a:xfrm>
           <a:prstGeom prst="ellipse">
@@ -20881,8 +20881,8 @@
         </p:nvCxnSpPr>
         <p:spPr>
           <a:xfrm flipH="1" flipV="1">
-            <a:off x="3322795" y="3741475"/>
-            <a:ext cx="906644" cy="626777"/>
+            <a:off x="3041969" y="3917674"/>
+            <a:ext cx="1079251" cy="703651"/>
           </a:xfrm>
           <a:prstGeom prst="line">
             <a:avLst/>
@@ -20918,7 +20918,7 @@
         </p:nvSpPr>
         <p:spPr>
           <a:xfrm>
-            <a:off x="3231355" y="3650035"/>
+            <a:off x="2950529" y="3826234"/>
             <a:ext cx="182880" cy="182880"/>
           </a:xfrm>
           <a:prstGeom prst="ellipse">
@@ -20966,8 +20966,8 @@
         </p:nvCxnSpPr>
         <p:spPr>
           <a:xfrm>
-            <a:off x="3322795" y="3741475"/>
-            <a:ext cx="135298" cy="506725"/>
+            <a:off x="3041969" y="3917674"/>
+            <a:ext cx="304176" cy="446538"/>
           </a:xfrm>
           <a:prstGeom prst="line">
             <a:avLst/>
@@ -21003,7 +21003,7 @@
         </p:nvSpPr>
         <p:spPr>
           <a:xfrm>
-            <a:off x="3366653" y="4156760"/>
+            <a:off x="3254705" y="4272772"/>
             <a:ext cx="182880" cy="182880"/>
           </a:xfrm>
           <a:prstGeom prst="ellipse">
@@ -21050,9 +21050,9 @@
           <p:nvPr/>
         </p:nvCxnSpPr>
         <p:spPr>
-          <a:xfrm flipH="1" flipV="1">
-            <a:off x="3415287" y="3111280"/>
-            <a:ext cx="42806" cy="1136920"/>
+          <a:xfrm flipV="1">
+            <a:off x="3346145" y="3247232"/>
+            <a:ext cx="469866" cy="1116980"/>
           </a:xfrm>
           <a:prstGeom prst="line">
             <a:avLst/>
@@ -21088,7 +21088,7 @@
         </p:nvSpPr>
         <p:spPr>
           <a:xfrm>
-            <a:off x="3323847" y="3019840"/>
+            <a:off x="3724571" y="3155792"/>
             <a:ext cx="182880" cy="182880"/>
           </a:xfrm>
           <a:prstGeom prst="ellipse">
@@ -21136,8 +21136,8 @@
         </p:nvCxnSpPr>
         <p:spPr>
           <a:xfrm flipH="1">
-            <a:off x="2500956" y="3111280"/>
-            <a:ext cx="914331" cy="395045"/>
+            <a:off x="2763967" y="3247232"/>
+            <a:ext cx="1052044" cy="187749"/>
           </a:xfrm>
           <a:prstGeom prst="line">
             <a:avLst/>
@@ -21173,7 +21173,7 @@
         </p:nvSpPr>
         <p:spPr>
           <a:xfrm>
-            <a:off x="2409516" y="3414885"/>
+            <a:off x="2672527" y="3343541"/>
             <a:ext cx="182880" cy="182880"/>
           </a:xfrm>
           <a:prstGeom prst="ellipse">
@@ -21221,8 +21221,8 @@
         </p:nvCxnSpPr>
         <p:spPr>
           <a:xfrm>
-            <a:off x="2500956" y="3506325"/>
-            <a:ext cx="992426" cy="334916"/>
+            <a:off x="2763967" y="3434981"/>
+            <a:ext cx="604072" cy="522461"/>
           </a:xfrm>
           <a:prstGeom prst="line">
             <a:avLst/>
@@ -21258,7 +21258,7 @@
         </p:nvSpPr>
         <p:spPr>
           <a:xfrm>
-            <a:off x="3401942" y="3749801"/>
+            <a:off x="3276599" y="3866002"/>
             <a:ext cx="182880" cy="182880"/>
           </a:xfrm>
           <a:prstGeom prst="ellipse">
@@ -21306,8 +21306,8 @@
         </p:nvCxnSpPr>
         <p:spPr>
           <a:xfrm flipH="1" flipV="1">
-            <a:off x="2452158" y="3068098"/>
-            <a:ext cx="1041224" cy="773143"/>
+            <a:off x="2886755" y="2895055"/>
+            <a:ext cx="481284" cy="1062387"/>
           </a:xfrm>
           <a:prstGeom prst="line">
             <a:avLst/>
@@ -21343,7 +21343,7 @@
         </p:nvSpPr>
         <p:spPr>
           <a:xfrm>
-            <a:off x="2360718" y="2976658"/>
+            <a:off x="2795315" y="2803615"/>
             <a:ext cx="182880" cy="182880"/>
           </a:xfrm>
           <a:prstGeom prst="ellipse">
@@ -21391,8 +21391,8 @@
         </p:nvCxnSpPr>
         <p:spPr>
           <a:xfrm>
-            <a:off x="2452158" y="3068098"/>
-            <a:ext cx="403729" cy="793720"/>
+            <a:off x="2886755" y="2895055"/>
+            <a:ext cx="118463" cy="581094"/>
           </a:xfrm>
           <a:prstGeom prst="line">
             <a:avLst/>
@@ -21428,7 +21428,7 @@
         </p:nvSpPr>
         <p:spPr>
           <a:xfrm>
-            <a:off x="2764447" y="3770378"/>
+            <a:off x="2913778" y="3384709"/>
             <a:ext cx="182880" cy="182880"/>
           </a:xfrm>
           <a:prstGeom prst="ellipse">
@@ -21475,9 +21475,9 @@
           <p:nvPr/>
         </p:nvCxnSpPr>
         <p:spPr>
-          <a:xfrm>
-            <a:off x="2855887" y="3861818"/>
-            <a:ext cx="267397" cy="1591998"/>
+          <a:xfrm flipH="1">
+            <a:off x="2506262" y="3476149"/>
+            <a:ext cx="498956" cy="1858954"/>
           </a:xfrm>
           <a:prstGeom prst="line">
             <a:avLst/>
@@ -21513,7 +21513,7 @@
         </p:nvSpPr>
         <p:spPr>
           <a:xfrm>
-            <a:off x="3031844" y="5362376"/>
+            <a:off x="2414822" y="5243663"/>
             <a:ext cx="182880" cy="182880"/>
           </a:xfrm>
           <a:prstGeom prst="ellipse">
@@ -23153,8 +23153,8 @@
         </p:nvSpPr>
         <p:spPr>
           <a:xfrm>
-            <a:off x="731520" y="1554480"/>
-            <a:ext cx="1245870" cy="896112"/>
+            <a:off x="731520" y="1481328"/>
+            <a:ext cx="2599182" cy="786384"/>
           </a:xfrm>
           <a:prstGeom prst="roundRect">
             <a:avLst>
@@ -23215,8 +23215,8 @@
         </p:nvSpPr>
         <p:spPr>
           <a:xfrm>
-            <a:off x="877824" y="1609344"/>
-            <a:ext cx="971550" cy="457200"/>
+            <a:off x="932688" y="1517904"/>
+            <a:ext cx="1371600" cy="548640"/>
           </a:xfrm>
           <a:prstGeom prst="rect">
             <a:avLst/>
@@ -23224,7 +23224,7 @@
           <a:noFill/>
         </p:spPr>
         <p:txBody>
-          <a:bodyPr wrap="square" lIns="0" rIns="0" tIns="0" bIns="0" anchor="t">
+          <a:bodyPr wrap="square" lIns="0" rIns="0" tIns="0" bIns="0" anchor="ctr">
             <a:spAutoFit/>
           </a:bodyPr>
           <a:lstStyle/>
@@ -23241,7 +23241,7 @@
               </a:spcAft>
             </a:pPr>
             <a:r>
-              <a:rPr sz="2600" b="0" i="0">
+              <a:rPr sz="3000" b="0" i="0">
                 <a:solidFill>
                   <a:srgbClr val="FFB531"/>
                 </a:solidFill>
@@ -23260,8 +23260,8 @@
         </p:nvSpPr>
         <p:spPr>
           <a:xfrm>
-            <a:off x="877824" y="2048256"/>
-            <a:ext cx="971550" cy="182880"/>
+            <a:off x="1965960" y="1591056"/>
+            <a:ext cx="1227581" cy="274320"/>
           </a:xfrm>
           <a:prstGeom prst="rect">
             <a:avLst/>
@@ -23269,7 +23269,7 @@
           <a:noFill/>
         </p:spPr>
         <p:txBody>
-          <a:bodyPr wrap="none" lIns="0" rIns="0" tIns="0" bIns="0" anchor="t">
+          <a:bodyPr wrap="none" lIns="0" rIns="0" tIns="0" bIns="0" anchor="ctr">
             <a:spAutoFit/>
           </a:bodyPr>
           <a:lstStyle/>
@@ -23286,7 +23286,7 @@
               </a:spcAft>
             </a:pPr>
             <a:r>
-              <a:rPr sz="650" b="1" i="0" spc="40">
+              <a:rPr sz="750" b="1" i="0" spc="60">
                 <a:solidFill>
                   <a:srgbClr val="F5F7FB"/>
                 </a:solidFill>
@@ -23305,8 +23305,8 @@
         </p:nvSpPr>
         <p:spPr>
           <a:xfrm>
-            <a:off x="877824" y="2212848"/>
-            <a:ext cx="971550" cy="182880"/>
+            <a:off x="1965960" y="1847088"/>
+            <a:ext cx="1227581" cy="274320"/>
           </a:xfrm>
           <a:prstGeom prst="rect">
             <a:avLst/>
@@ -23314,7 +23314,7 @@
           <a:noFill/>
         </p:spPr>
         <p:txBody>
-          <a:bodyPr wrap="none" lIns="0" rIns="0" tIns="0" bIns="0" anchor="t">
+          <a:bodyPr wrap="none" lIns="0" rIns="0" tIns="0" bIns="0" anchor="ctr">
             <a:spAutoFit/>
           </a:bodyPr>
           <a:lstStyle/>
@@ -23331,7 +23331,7 @@
               </a:spcAft>
             </a:pPr>
             <a:r>
-              <a:rPr sz="750" b="0" i="0">
+              <a:rPr sz="850" b="0" i="0">
                 <a:solidFill>
                   <a:srgbClr val="8395B5"/>
                 </a:solidFill>
@@ -23350,8 +23350,8 @@
         </p:nvSpPr>
         <p:spPr>
           <a:xfrm>
-            <a:off x="2068830" y="1554480"/>
-            <a:ext cx="1245870" cy="896112"/>
+            <a:off x="3440430" y="1481328"/>
+            <a:ext cx="2599182" cy="786384"/>
           </a:xfrm>
           <a:prstGeom prst="roundRect">
             <a:avLst>
@@ -23412,8 +23412,8 @@
         </p:nvSpPr>
         <p:spPr>
           <a:xfrm>
-            <a:off x="2215134" y="1609344"/>
-            <a:ext cx="971550" cy="457200"/>
+            <a:off x="3641598" y="1517904"/>
+            <a:ext cx="1371600" cy="548640"/>
           </a:xfrm>
           <a:prstGeom prst="rect">
             <a:avLst/>
@@ -23421,7 +23421,7 @@
           <a:noFill/>
         </p:spPr>
         <p:txBody>
-          <a:bodyPr wrap="square" lIns="0" rIns="0" tIns="0" bIns="0" anchor="t">
+          <a:bodyPr wrap="square" lIns="0" rIns="0" tIns="0" bIns="0" anchor="ctr">
             <a:spAutoFit/>
           </a:bodyPr>
           <a:lstStyle/>
@@ -23438,7 +23438,7 @@
               </a:spcAft>
             </a:pPr>
             <a:r>
-              <a:rPr sz="2600" b="0" i="0">
+              <a:rPr sz="3000" b="0" i="0">
                 <a:solidFill>
                   <a:srgbClr val="FFB531"/>
                 </a:solidFill>
@@ -23457,8 +23457,8 @@
         </p:nvSpPr>
         <p:spPr>
           <a:xfrm>
-            <a:off x="2215134" y="2048256"/>
-            <a:ext cx="971550" cy="182880"/>
+            <a:off x="4674870" y="1591056"/>
+            <a:ext cx="1227581" cy="274320"/>
           </a:xfrm>
           <a:prstGeom prst="rect">
             <a:avLst/>
@@ -23466,7 +23466,7 @@
           <a:noFill/>
         </p:spPr>
         <p:txBody>
-          <a:bodyPr wrap="none" lIns="0" rIns="0" tIns="0" bIns="0" anchor="t">
+          <a:bodyPr wrap="none" lIns="0" rIns="0" tIns="0" bIns="0" anchor="ctr">
             <a:spAutoFit/>
           </a:bodyPr>
           <a:lstStyle/>
@@ -23483,7 +23483,7 @@
               </a:spcAft>
             </a:pPr>
             <a:r>
-              <a:rPr sz="650" b="1" i="0" spc="40">
+              <a:rPr sz="750" b="1" i="0" spc="60">
                 <a:solidFill>
                   <a:srgbClr val="F5F7FB"/>
                 </a:solidFill>
@@ -23502,8 +23502,8 @@
         </p:nvSpPr>
         <p:spPr>
           <a:xfrm>
-            <a:off x="2215134" y="2212848"/>
-            <a:ext cx="971550" cy="182880"/>
+            <a:off x="4674870" y="1847088"/>
+            <a:ext cx="1227581" cy="274320"/>
           </a:xfrm>
           <a:prstGeom prst="rect">
             <a:avLst/>
@@ -23511,7 +23511,7 @@
           <a:noFill/>
         </p:spPr>
         <p:txBody>
-          <a:bodyPr wrap="none" lIns="0" rIns="0" tIns="0" bIns="0" anchor="t">
+          <a:bodyPr wrap="none" lIns="0" rIns="0" tIns="0" bIns="0" anchor="ctr">
             <a:spAutoFit/>
           </a:bodyPr>
           <a:lstStyle/>
@@ -23528,7 +23528,7 @@
               </a:spcAft>
             </a:pPr>
             <a:r>
-              <a:rPr sz="750" b="0" i="0">
+              <a:rPr sz="850" b="0" i="0">
                 <a:solidFill>
                   <a:srgbClr val="8395B5"/>
                 </a:solidFill>
@@ -23547,8 +23547,8 @@
         </p:nvSpPr>
         <p:spPr>
           <a:xfrm>
-            <a:off x="3406140" y="1554480"/>
-            <a:ext cx="1245870" cy="896112"/>
+            <a:off x="6149340" y="1481328"/>
+            <a:ext cx="2599182" cy="786384"/>
           </a:xfrm>
           <a:prstGeom prst="roundRect">
             <a:avLst>
@@ -23609,8 +23609,8 @@
         </p:nvSpPr>
         <p:spPr>
           <a:xfrm>
-            <a:off x="3552444" y="1609344"/>
-            <a:ext cx="971550" cy="457200"/>
+            <a:off x="6350507" y="1517904"/>
+            <a:ext cx="1371600" cy="548640"/>
           </a:xfrm>
           <a:prstGeom prst="rect">
             <a:avLst/>
@@ -23618,7 +23618,7 @@
           <a:noFill/>
         </p:spPr>
         <p:txBody>
-          <a:bodyPr wrap="square" lIns="0" rIns="0" tIns="0" bIns="0" anchor="t">
+          <a:bodyPr wrap="square" lIns="0" rIns="0" tIns="0" bIns="0" anchor="ctr">
             <a:spAutoFit/>
           </a:bodyPr>
           <a:lstStyle/>
@@ -23635,7 +23635,7 @@
               </a:spcAft>
             </a:pPr>
             <a:r>
-              <a:rPr sz="2600" b="0" i="0">
+              <a:rPr sz="3000" b="0" i="0">
                 <a:solidFill>
                   <a:srgbClr val="FFB531"/>
                 </a:solidFill>
@@ -23654,8 +23654,8 @@
         </p:nvSpPr>
         <p:spPr>
           <a:xfrm>
-            <a:off x="3552444" y="2048256"/>
-            <a:ext cx="971550" cy="182880"/>
+            <a:off x="7383779" y="1591056"/>
+            <a:ext cx="1227581" cy="274320"/>
           </a:xfrm>
           <a:prstGeom prst="rect">
             <a:avLst/>
@@ -23663,7 +23663,7 @@
           <a:noFill/>
         </p:spPr>
         <p:txBody>
-          <a:bodyPr wrap="none" lIns="0" rIns="0" tIns="0" bIns="0" anchor="t">
+          <a:bodyPr wrap="none" lIns="0" rIns="0" tIns="0" bIns="0" anchor="ctr">
             <a:spAutoFit/>
           </a:bodyPr>
           <a:lstStyle/>
@@ -23680,7 +23680,7 @@
               </a:spcAft>
             </a:pPr>
             <a:r>
-              <a:rPr sz="650" b="1" i="0" spc="40">
+              <a:rPr sz="750" b="1" i="0" spc="60">
                 <a:solidFill>
                   <a:srgbClr val="F5F7FB"/>
                 </a:solidFill>
@@ -23699,8 +23699,8 @@
         </p:nvSpPr>
         <p:spPr>
           <a:xfrm>
-            <a:off x="3552444" y="2212848"/>
-            <a:ext cx="971550" cy="182880"/>
+            <a:off x="7383779" y="1847088"/>
+            <a:ext cx="1227581" cy="274320"/>
           </a:xfrm>
           <a:prstGeom prst="rect">
             <a:avLst/>
@@ -23708,7 +23708,7 @@
           <a:noFill/>
         </p:spPr>
         <p:txBody>
-          <a:bodyPr wrap="none" lIns="0" rIns="0" tIns="0" bIns="0" anchor="t">
+          <a:bodyPr wrap="none" lIns="0" rIns="0" tIns="0" bIns="0" anchor="ctr">
             <a:spAutoFit/>
           </a:bodyPr>
           <a:lstStyle/>
@@ -23725,7 +23725,7 @@
               </a:spcAft>
             </a:pPr>
             <a:r>
-              <a:rPr sz="750" b="0" i="0">
+              <a:rPr sz="850" b="0" i="0">
                 <a:solidFill>
                   <a:srgbClr val="8395B5"/>
                 </a:solidFill>
@@ -23744,8 +23744,8 @@
         </p:nvSpPr>
         <p:spPr>
           <a:xfrm>
-            <a:off x="4743450" y="1554480"/>
-            <a:ext cx="1245870" cy="896112"/>
+            <a:off x="8858250" y="1481328"/>
+            <a:ext cx="2599182" cy="786384"/>
           </a:xfrm>
           <a:prstGeom prst="roundRect">
             <a:avLst>
@@ -23806,8 +23806,8 @@
         </p:nvSpPr>
         <p:spPr>
           <a:xfrm>
-            <a:off x="4889754" y="1609344"/>
-            <a:ext cx="971550" cy="457200"/>
+            <a:off x="9059418" y="1517904"/>
+            <a:ext cx="1371600" cy="548640"/>
           </a:xfrm>
           <a:prstGeom prst="rect">
             <a:avLst/>
@@ -23815,7 +23815,7 @@
           <a:noFill/>
         </p:spPr>
         <p:txBody>
-          <a:bodyPr wrap="square" lIns="0" rIns="0" tIns="0" bIns="0" anchor="t">
+          <a:bodyPr wrap="square" lIns="0" rIns="0" tIns="0" bIns="0" anchor="ctr">
             <a:spAutoFit/>
           </a:bodyPr>
           <a:lstStyle/>
@@ -23832,7 +23832,7 @@
               </a:spcAft>
             </a:pPr>
             <a:r>
-              <a:rPr sz="2600" b="0" i="0">
+              <a:rPr sz="3000" b="0" i="0">
                 <a:solidFill>
                   <a:srgbClr val="FFB531"/>
                 </a:solidFill>
@@ -23851,8 +23851,8 @@
         </p:nvSpPr>
         <p:spPr>
           <a:xfrm>
-            <a:off x="4889754" y="2048256"/>
-            <a:ext cx="971550" cy="182880"/>
+            <a:off x="10092690" y="1591056"/>
+            <a:ext cx="1227581" cy="274320"/>
           </a:xfrm>
           <a:prstGeom prst="rect">
             <a:avLst/>
@@ -23860,7 +23860,7 @@
           <a:noFill/>
         </p:spPr>
         <p:txBody>
-          <a:bodyPr wrap="none" lIns="0" rIns="0" tIns="0" bIns="0" anchor="t">
+          <a:bodyPr wrap="none" lIns="0" rIns="0" tIns="0" bIns="0" anchor="ctr">
             <a:spAutoFit/>
           </a:bodyPr>
           <a:lstStyle/>
@@ -23877,7 +23877,7 @@
               </a:spcAft>
             </a:pPr>
             <a:r>
-              <a:rPr sz="650" b="1" i="0" spc="40">
+              <a:rPr sz="750" b="1" i="0" spc="60">
                 <a:solidFill>
                   <a:srgbClr val="F5F7FB"/>
                 </a:solidFill>
@@ -23896,8 +23896,8 @@
         </p:nvSpPr>
         <p:spPr>
           <a:xfrm>
-            <a:off x="4889754" y="2212848"/>
-            <a:ext cx="971550" cy="182880"/>
+            <a:off x="10092690" y="1847088"/>
+            <a:ext cx="1227581" cy="274320"/>
           </a:xfrm>
           <a:prstGeom prst="rect">
             <a:avLst/>
@@ -23905,7 +23905,7 @@
           <a:noFill/>
         </p:spPr>
         <p:txBody>
-          <a:bodyPr wrap="none" lIns="0" rIns="0" tIns="0" bIns="0" anchor="t">
+          <a:bodyPr wrap="none" lIns="0" rIns="0" tIns="0" bIns="0" anchor="ctr">
             <a:spAutoFit/>
           </a:bodyPr>
           <a:lstStyle/>
@@ -23922,7 +23922,7 @@
               </a:spcAft>
             </a:pPr>
             <a:r>
-              <a:rPr sz="750" b="0" i="0">
+              <a:rPr sz="850" b="0" i="0">
                 <a:solidFill>
                   <a:srgbClr val="8395B5"/>
                 </a:solidFill>
@@ -23941,8 +23941,8 @@
         </p:nvSpPr>
         <p:spPr>
           <a:xfrm>
-            <a:off x="731520" y="2633472"/>
-            <a:ext cx="5257800" cy="182880"/>
+            <a:off x="731520" y="2432304"/>
+            <a:ext cx="5669280" cy="182880"/>
           </a:xfrm>
           <a:prstGeom prst="rect">
             <a:avLst/>
@@ -23973,21 +23973,45 @@
                 </a:solidFill>
                 <a:latin typeface="Consolas"/>
               </a:rPr>
-              <a:t>ONDE FOI O ESFORÇO</a:t>
-            </a:r>
-          </a:p>
-        </p:txBody>
-      </p:sp>
-      <p:sp>
-        <p:nvSpPr>
-          <p:cNvPr id="30" name="s13_28"/>
+              <a:t>CONTEXTO POR DIA  ·  DECISÕES ACUMULADAS</a:t>
+            </a:r>
+          </a:p>
+        </p:txBody>
+      </p:sp>
+      <p:pic>
+        <p:nvPicPr>
+          <p:cNvPr id="30" name="s13_28" descr="p5_timeline.png"/>
+          <p:cNvPicPr>
+            <a:picLocks noChangeAspect="1"/>
+          </p:cNvPicPr>
+          <p:nvPr/>
+        </p:nvPicPr>
+        <p:blipFill>
+          <a:blip r:embed="rId2"/>
+          <a:stretch>
+            <a:fillRect/>
+          </a:stretch>
+        </p:blipFill>
+        <p:spPr>
+          <a:xfrm>
+            <a:off x="731520" y="2651760"/>
+            <a:ext cx="5715000" cy="2395334"/>
+          </a:xfrm>
+          <a:prstGeom prst="rect">
+            <a:avLst/>
+          </a:prstGeom>
+        </p:spPr>
+      </p:pic>
+      <p:sp>
+        <p:nvSpPr>
+          <p:cNvPr id="31" name="s13_29"/>
           <p:cNvSpPr txBox="1"/>
           <p:nvPr/>
         </p:nvSpPr>
         <p:spPr>
           <a:xfrm>
-            <a:off x="731520" y="2880360"/>
-            <a:ext cx="822960" cy="219456"/>
+            <a:off x="6793992" y="2432304"/>
+            <a:ext cx="4663440" cy="182880"/>
           </a:xfrm>
           <a:prstGeom prst="rect">
             <a:avLst/>
@@ -23995,7 +24019,7 @@
           <a:noFill/>
         </p:spPr>
         <p:txBody>
-          <a:bodyPr wrap="square" lIns="0" rIns="0" tIns="0" bIns="0" anchor="ctr">
+          <a:bodyPr wrap="square" lIns="0" rIns="0" tIns="0" bIns="0" anchor="t">
             <a:spAutoFit/>
           </a:bodyPr>
           <a:lstStyle/>
@@ -24012,6 +24036,120 @@
               </a:spcAft>
             </a:pPr>
             <a:r>
+              <a:rPr sz="900" b="1" i="0" spc="180">
+                <a:solidFill>
+                  <a:srgbClr val="FFB531"/>
+                </a:solidFill>
+                <a:latin typeface="Consolas"/>
+              </a:rPr>
+              <a:t>145 ERROS DA IA  ·  QUEM PEGOU</a:t>
+            </a:r>
+          </a:p>
+        </p:txBody>
+      </p:sp>
+      <p:pic>
+        <p:nvPicPr>
+          <p:cNvPr id="32" name="s13_30" descr="p5_erros.png"/>
+          <p:cNvPicPr>
+            <a:picLocks noChangeAspect="1"/>
+          </p:cNvPicPr>
+          <p:nvPr/>
+        </p:nvPicPr>
+        <p:blipFill>
+          <a:blip r:embed="rId3"/>
+          <a:stretch>
+            <a:fillRect/>
+          </a:stretch>
+        </p:blipFill>
+        <p:spPr>
+          <a:xfrm>
+            <a:off x="6793992" y="2670048"/>
+            <a:ext cx="4663440" cy="2238174"/>
+          </a:xfrm>
+          <a:prstGeom prst="rect">
+            <a:avLst/>
+          </a:prstGeom>
+        </p:spPr>
+      </p:pic>
+      <p:sp>
+        <p:nvSpPr>
+          <p:cNvPr id="33" name="s13_31"/>
+          <p:cNvSpPr txBox="1"/>
+          <p:nvPr/>
+        </p:nvSpPr>
+        <p:spPr>
+          <a:xfrm>
+            <a:off x="731520" y="5120640"/>
+            <a:ext cx="5669280" cy="182880"/>
+          </a:xfrm>
+          <a:prstGeom prst="rect">
+            <a:avLst/>
+          </a:prstGeom>
+          <a:noFill/>
+        </p:spPr>
+        <p:txBody>
+          <a:bodyPr wrap="square" lIns="0" rIns="0" tIns="0" bIns="0" anchor="t">
+            <a:spAutoFit/>
+          </a:bodyPr>
+          <a:lstStyle/>
+          <a:p>
+            <a:pPr algn="l">
+              <a:lnSpc>
+                <a:spcPct val="100000"/>
+              </a:lnSpc>
+              <a:spcBef>
+                <a:spcPts val="0"/>
+              </a:spcBef>
+              <a:spcAft>
+                <a:spcPts val="0"/>
+              </a:spcAft>
+            </a:pPr>
+            <a:r>
+              <a:rPr sz="900" b="1" i="0" spc="180">
+                <a:solidFill>
+                  <a:srgbClr val="FFB531"/>
+                </a:solidFill>
+                <a:latin typeface="Consolas"/>
+              </a:rPr>
+              <a:t>ONDE FOI O ESFORÇO</a:t>
+            </a:r>
+          </a:p>
+        </p:txBody>
+      </p:sp>
+      <p:sp>
+        <p:nvSpPr>
+          <p:cNvPr id="34" name="s13_32"/>
+          <p:cNvSpPr txBox="1"/>
+          <p:nvPr/>
+        </p:nvSpPr>
+        <p:spPr>
+          <a:xfrm>
+            <a:off x="731520" y="5376672"/>
+            <a:ext cx="822960" cy="219456"/>
+          </a:xfrm>
+          <a:prstGeom prst="rect">
+            <a:avLst/>
+          </a:prstGeom>
+          <a:noFill/>
+        </p:spPr>
+        <p:txBody>
+          <a:bodyPr wrap="square" lIns="0" rIns="0" tIns="0" bIns="0" anchor="ctr">
+            <a:spAutoFit/>
+          </a:bodyPr>
+          <a:lstStyle/>
+          <a:p>
+            <a:pPr algn="l">
+              <a:lnSpc>
+                <a:spcPct val="100000"/>
+              </a:lnSpc>
+              <a:spcBef>
+                <a:spcPts val="0"/>
+              </a:spcBef>
+              <a:spcAft>
+                <a:spcPts val="0"/>
+              </a:spcAft>
+            </a:pPr>
+            <a:r>
               <a:rPr sz="850" b="0" i="0">
                 <a:solidFill>
                   <a:srgbClr val="8395B5"/>
@@ -24025,14 +24163,14 @@
       </p:sp>
       <p:sp>
         <p:nvSpPr>
-          <p:cNvPr id="31" name="s13_29"/>
+          <p:cNvPr id="35" name="s13_33"/>
           <p:cNvSpPr/>
           <p:nvPr/>
         </p:nvSpPr>
         <p:spPr>
           <a:xfrm>
-            <a:off x="1600200" y="2880360"/>
-            <a:ext cx="1350498" cy="219456"/>
+            <a:off x="1600200" y="5376672"/>
+            <a:ext cx="1491175" cy="219456"/>
           </a:xfrm>
           <a:prstGeom prst="rect">
             <a:avLst/>
@@ -24069,14 +24207,14 @@
       </p:sp>
       <p:sp>
         <p:nvSpPr>
-          <p:cNvPr id="32" name="s13_30"/>
+          <p:cNvPr id="36" name="s13_34"/>
           <p:cNvSpPr txBox="1"/>
           <p:nvPr/>
         </p:nvSpPr>
         <p:spPr>
           <a:xfrm>
-            <a:off x="1600200" y="2880360"/>
-            <a:ext cx="1350498" cy="219456"/>
+            <a:off x="1600200" y="5376672"/>
+            <a:ext cx="1491175" cy="219456"/>
           </a:xfrm>
           <a:prstGeom prst="rect">
             <a:avLst/>
@@ -24114,14 +24252,14 @@
       </p:sp>
       <p:sp>
         <p:nvSpPr>
-          <p:cNvPr id="33" name="s13_31"/>
+          <p:cNvPr id="37" name="s13_35"/>
           <p:cNvSpPr/>
           <p:nvPr/>
         </p:nvSpPr>
         <p:spPr>
           <a:xfrm>
-            <a:off x="2950698" y="2880360"/>
-            <a:ext cx="2363372" cy="219456"/>
+            <a:off x="3091375" y="5376672"/>
+            <a:ext cx="2609556" cy="219456"/>
           </a:xfrm>
           <a:prstGeom prst="rect">
             <a:avLst/>
@@ -24158,14 +24296,14 @@
       </p:sp>
       <p:sp>
         <p:nvSpPr>
-          <p:cNvPr id="34" name="s13_32"/>
+          <p:cNvPr id="38" name="s13_36"/>
           <p:cNvSpPr txBox="1"/>
           <p:nvPr/>
         </p:nvSpPr>
         <p:spPr>
           <a:xfrm>
-            <a:off x="2950698" y="2880360"/>
-            <a:ext cx="2363372" cy="219456"/>
+            <a:off x="3091375" y="5376672"/>
+            <a:ext cx="2609556" cy="219456"/>
           </a:xfrm>
           <a:prstGeom prst="rect">
             <a:avLst/>
@@ -24203,14 +24341,14 @@
       </p:sp>
       <p:sp>
         <p:nvSpPr>
-          <p:cNvPr id="35" name="s13_33"/>
+          <p:cNvPr id="39" name="s13_37"/>
           <p:cNvSpPr/>
           <p:nvPr/>
         </p:nvSpPr>
         <p:spPr>
           <a:xfrm>
-            <a:off x="5314070" y="2880360"/>
-            <a:ext cx="675249" cy="219456"/>
+            <a:off x="5700932" y="5376672"/>
+            <a:ext cx="745587" cy="219456"/>
           </a:xfrm>
           <a:prstGeom prst="rect">
             <a:avLst/>
@@ -24247,14 +24385,14 @@
       </p:sp>
       <p:sp>
         <p:nvSpPr>
-          <p:cNvPr id="36" name="s13_34"/>
+          <p:cNvPr id="40" name="s13_38"/>
           <p:cNvSpPr txBox="1"/>
           <p:nvPr/>
         </p:nvSpPr>
         <p:spPr>
           <a:xfrm>
-            <a:off x="5314070" y="2880360"/>
-            <a:ext cx="675249" cy="219456"/>
+            <a:off x="5700932" y="5376672"/>
+            <a:ext cx="745587" cy="219456"/>
           </a:xfrm>
           <a:prstGeom prst="rect">
             <a:avLst/>
@@ -24292,13 +24430,13 @@
       </p:sp>
       <p:sp>
         <p:nvSpPr>
-          <p:cNvPr id="37" name="s13_35"/>
+          <p:cNvPr id="41" name="s13_39"/>
           <p:cNvSpPr txBox="1"/>
           <p:nvPr/>
         </p:nvSpPr>
         <p:spPr>
           <a:xfrm>
-            <a:off x="731520" y="3209544"/>
+            <a:off x="731520" y="5687568"/>
             <a:ext cx="822960" cy="219456"/>
           </a:xfrm>
           <a:prstGeom prst="rect">
@@ -24337,14 +24475,14 @@
       </p:sp>
       <p:sp>
         <p:nvSpPr>
-          <p:cNvPr id="38" name="s13_36"/>
+          <p:cNvPr id="42" name="s13_40"/>
           <p:cNvSpPr/>
           <p:nvPr/>
         </p:nvSpPr>
         <p:spPr>
           <a:xfrm>
-            <a:off x="1600200" y="3209544"/>
-            <a:ext cx="1083937" cy="219456"/>
+            <a:off x="1600200" y="5687568"/>
+            <a:ext cx="1196847" cy="219456"/>
           </a:xfrm>
           <a:prstGeom prst="rect">
             <a:avLst/>
@@ -24381,14 +24519,14 @@
       </p:sp>
       <p:sp>
         <p:nvSpPr>
-          <p:cNvPr id="39" name="s13_37"/>
+          <p:cNvPr id="43" name="s13_41"/>
           <p:cNvSpPr txBox="1"/>
           <p:nvPr/>
         </p:nvSpPr>
         <p:spPr>
           <a:xfrm>
-            <a:off x="1600200" y="3209544"/>
-            <a:ext cx="1083937" cy="219456"/>
+            <a:off x="1600200" y="5687568"/>
+            <a:ext cx="1196847" cy="219456"/>
           </a:xfrm>
           <a:prstGeom prst="rect">
             <a:avLst/>
@@ -24426,14 +24564,14 @@
       </p:sp>
       <p:sp>
         <p:nvSpPr>
-          <p:cNvPr id="40" name="s13_38"/>
+          <p:cNvPr id="44" name="s13_42"/>
           <p:cNvSpPr/>
           <p:nvPr/>
         </p:nvSpPr>
         <p:spPr>
           <a:xfrm>
-            <a:off x="2684137" y="3209544"/>
-            <a:ext cx="3128987" cy="219456"/>
+            <a:off x="2797047" y="5687568"/>
+            <a:ext cx="3454923" cy="219456"/>
           </a:xfrm>
           <a:prstGeom prst="rect">
             <a:avLst/>
@@ -24470,14 +24608,14 @@
       </p:sp>
       <p:sp>
         <p:nvSpPr>
-          <p:cNvPr id="41" name="s13_39"/>
+          <p:cNvPr id="45" name="s13_43"/>
           <p:cNvSpPr txBox="1"/>
           <p:nvPr/>
         </p:nvSpPr>
         <p:spPr>
           <a:xfrm>
-            <a:off x="2684137" y="3209544"/>
-            <a:ext cx="3128987" cy="219456"/>
+            <a:off x="2797047" y="5687568"/>
+            <a:ext cx="3454923" cy="219456"/>
           </a:xfrm>
           <a:prstGeom prst="rect">
             <a:avLst/>
@@ -24515,14 +24653,14 @@
       </p:sp>
       <p:sp>
         <p:nvSpPr>
-          <p:cNvPr id="42" name="s13_40"/>
+          <p:cNvPr id="46" name="s13_44"/>
           <p:cNvSpPr/>
           <p:nvPr/>
         </p:nvSpPr>
         <p:spPr>
           <a:xfrm>
-            <a:off x="5813124" y="3209544"/>
-            <a:ext cx="176195" cy="219456"/>
+            <a:off x="6251970" y="5687568"/>
+            <a:ext cx="194549" cy="219456"/>
           </a:xfrm>
           <a:prstGeom prst="rect">
             <a:avLst/>
@@ -24559,13 +24697,13 @@
       </p:sp>
       <p:sp>
         <p:nvSpPr>
-          <p:cNvPr id="43" name="s13_41"/>
+          <p:cNvPr id="47" name="s13_45"/>
           <p:cNvSpPr/>
           <p:nvPr/>
         </p:nvSpPr>
         <p:spPr>
           <a:xfrm>
-            <a:off x="1604772" y="3607308"/>
+            <a:off x="1604772" y="6094476"/>
             <a:ext cx="100584" cy="100584"/>
           </a:xfrm>
           <a:prstGeom prst="ellipse">
@@ -24601,13 +24739,13 @@
       </p:sp>
       <p:sp>
         <p:nvSpPr>
-          <p:cNvPr id="44" name="s13_42"/>
+          <p:cNvPr id="48" name="s13_46"/>
           <p:cNvSpPr txBox="1"/>
           <p:nvPr/>
         </p:nvSpPr>
         <p:spPr>
           <a:xfrm>
-            <a:off x="1773936" y="3566160"/>
+            <a:off x="1773936" y="6053328"/>
             <a:ext cx="2194560" cy="182880"/>
           </a:xfrm>
           <a:prstGeom prst="rect">
@@ -24646,13 +24784,13 @@
       </p:sp>
       <p:sp>
         <p:nvSpPr>
-          <p:cNvPr id="45" name="s13_43"/>
+          <p:cNvPr id="49" name="s13_47"/>
           <p:cNvSpPr/>
           <p:nvPr/>
         </p:nvSpPr>
         <p:spPr>
           <a:xfrm>
-            <a:off x="2963570" y="3607308"/>
+            <a:off x="2963570" y="6094476"/>
             <a:ext cx="100584" cy="100584"/>
           </a:xfrm>
           <a:prstGeom prst="ellipse">
@@ -24688,13 +24826,13 @@
       </p:sp>
       <p:sp>
         <p:nvSpPr>
-          <p:cNvPr id="46" name="s13_44"/>
+          <p:cNvPr id="50" name="s13_48"/>
           <p:cNvSpPr txBox="1"/>
           <p:nvPr/>
         </p:nvSpPr>
         <p:spPr>
           <a:xfrm>
-            <a:off x="3132734" y="3566160"/>
+            <a:off x="3132734" y="6053328"/>
             <a:ext cx="2194560" cy="182880"/>
           </a:xfrm>
           <a:prstGeom prst="rect">
@@ -24733,13 +24871,13 @@
       </p:sp>
       <p:sp>
         <p:nvSpPr>
-          <p:cNvPr id="47" name="s13_45"/>
+          <p:cNvPr id="51" name="s13_49"/>
           <p:cNvSpPr/>
           <p:nvPr/>
         </p:nvSpPr>
         <p:spPr>
           <a:xfrm>
-            <a:off x="4265676" y="3607308"/>
+            <a:off x="4265676" y="6094476"/>
             <a:ext cx="100584" cy="100584"/>
           </a:xfrm>
           <a:prstGeom prst="ellipse">
@@ -24775,13 +24913,13 @@
       </p:sp>
       <p:sp>
         <p:nvSpPr>
-          <p:cNvPr id="48" name="s13_46"/>
+          <p:cNvPr id="52" name="s13_50"/>
           <p:cNvSpPr txBox="1"/>
           <p:nvPr/>
         </p:nvSpPr>
         <p:spPr>
           <a:xfrm>
-            <a:off x="4434840" y="3566160"/>
+            <a:off x="4434840" y="6053328"/>
             <a:ext cx="2194560" cy="182880"/>
           </a:xfrm>
           <a:prstGeom prst="rect">
@@ -24820,14 +24958,14 @@
       </p:sp>
       <p:sp>
         <p:nvSpPr>
-          <p:cNvPr id="49" name="s13_47"/>
+          <p:cNvPr id="53" name="s13_51"/>
           <p:cNvSpPr txBox="1"/>
           <p:nvPr/>
         </p:nvSpPr>
         <p:spPr>
           <a:xfrm>
-            <a:off x="731520" y="3913632"/>
-            <a:ext cx="5257800" cy="182880"/>
+            <a:off x="6793992" y="5120640"/>
+            <a:ext cx="4663440" cy="182880"/>
           </a:xfrm>
           <a:prstGeom prst="rect">
             <a:avLst/>
@@ -24858,65 +24996,21 @@
                 </a:solidFill>
                 <a:latin typeface="Consolas"/>
               </a:rPr>
-              <a:t>145 ERROS DA IA  ·  QUEM PEGOU</a:t>
-            </a:r>
-          </a:p>
-        </p:txBody>
-      </p:sp>
-      <p:sp>
-        <p:nvSpPr>
-          <p:cNvPr id="50" name="s13_48"/>
-          <p:cNvSpPr/>
-          <p:nvPr/>
-        </p:nvSpPr>
-        <p:spPr>
-          <a:xfrm>
-            <a:off x="731520" y="4160520"/>
-            <a:ext cx="1813034" cy="237744"/>
-          </a:xfrm>
-          <a:prstGeom prst="rect">
-            <a:avLst/>
-          </a:prstGeom>
-          <a:solidFill>
-            <a:srgbClr val="2FD3B0"/>
-          </a:solidFill>
-          <a:ln w="9525">
-            <a:solidFill>
-              <a:srgbClr val="0A1325"/>
-            </a:solidFill>
-          </a:ln>
-          <a:effectLst/>
-        </p:spPr>
-        <p:style>
-          <a:lnRef idx="1">
-            <a:schemeClr val="accent1"/>
-          </a:lnRef>
-          <a:fillRef idx="3">
-            <a:schemeClr val="accent1"/>
-          </a:fillRef>
-          <a:effectRef idx="2">
-            <a:schemeClr val="accent1"/>
-          </a:effectRef>
-          <a:fontRef idx="minor">
-            <a:schemeClr val="lt1"/>
-          </a:fontRef>
-        </p:style>
-        <p:txBody>
-          <a:bodyPr rtlCol="0" anchor="ctr"/>
-          <a:lstStyle/>
-          <a:p/>
-        </p:txBody>
-      </p:sp>
-      <p:sp>
-        <p:nvSpPr>
-          <p:cNvPr id="51" name="s13_49"/>
+              <a:t>PESQUISA  ·  31 HIPÓTESES MEDIDAS, 7 ENTRARAM</a:t>
+            </a:r>
+          </a:p>
+        </p:txBody>
+      </p:sp>
+      <p:sp>
+        <p:nvSpPr>
+          <p:cNvPr id="54" name="s13_52"/>
           <p:cNvSpPr txBox="1"/>
           <p:nvPr/>
         </p:nvSpPr>
         <p:spPr>
           <a:xfrm>
-            <a:off x="731520" y="4160520"/>
-            <a:ext cx="1813034" cy="237744"/>
+            <a:off x="6793992" y="5376672"/>
+            <a:ext cx="1554480" cy="182880"/>
           </a:xfrm>
           <a:prstGeom prst="rect">
             <a:avLst/>
@@ -24924,361 +25018,7 @@
           <a:noFill/>
         </p:spPr>
         <p:txBody>
-          <a:bodyPr wrap="none" lIns="0" rIns="0" tIns="0" bIns="0" anchor="ctr">
-            <a:spAutoFit/>
-          </a:bodyPr>
-          <a:lstStyle/>
-          <a:p>
-            <a:pPr algn="ctr">
-              <a:lnSpc>
-                <a:spcPct val="100000"/>
-              </a:lnSpc>
-              <a:spcBef>
-                <a:spcPts val="0"/>
-              </a:spcBef>
-              <a:spcAft>
-                <a:spcPts val="0"/>
-              </a:spcAft>
-            </a:pPr>
-            <a:r>
-              <a:rPr sz="850" b="1" i="0">
-                <a:solidFill>
-                  <a:srgbClr val="0A1325"/>
-                </a:solidFill>
-                <a:latin typeface="Consolas"/>
-              </a:rPr>
-              <a:t>50</a:t>
-            </a:r>
-          </a:p>
-        </p:txBody>
-      </p:sp>
-      <p:sp>
-        <p:nvSpPr>
-          <p:cNvPr id="52" name="s13_50"/>
-          <p:cNvSpPr/>
-          <p:nvPr/>
-        </p:nvSpPr>
-        <p:spPr>
-          <a:xfrm>
-            <a:off x="2544554" y="4160520"/>
-            <a:ext cx="1667991" cy="237744"/>
-          </a:xfrm>
-          <a:prstGeom prst="rect">
-            <a:avLst/>
-          </a:prstGeom>
-          <a:solidFill>
-            <a:srgbClr val="4F8EF7"/>
-          </a:solidFill>
-          <a:ln w="9525">
-            <a:solidFill>
-              <a:srgbClr val="0A1325"/>
-            </a:solidFill>
-          </a:ln>
-          <a:effectLst/>
-        </p:spPr>
-        <p:style>
-          <a:lnRef idx="1">
-            <a:schemeClr val="accent1"/>
-          </a:lnRef>
-          <a:fillRef idx="3">
-            <a:schemeClr val="accent1"/>
-          </a:fillRef>
-          <a:effectRef idx="2">
-            <a:schemeClr val="accent1"/>
-          </a:effectRef>
-          <a:fontRef idx="minor">
-            <a:schemeClr val="lt1"/>
-          </a:fontRef>
-        </p:style>
-        <p:txBody>
-          <a:bodyPr rtlCol="0" anchor="ctr"/>
-          <a:lstStyle/>
-          <a:p/>
-        </p:txBody>
-      </p:sp>
-      <p:sp>
-        <p:nvSpPr>
-          <p:cNvPr id="53" name="s13_51"/>
-          <p:cNvSpPr txBox="1"/>
-          <p:nvPr/>
-        </p:nvSpPr>
-        <p:spPr>
-          <a:xfrm>
-            <a:off x="2544554" y="4160520"/>
-            <a:ext cx="1667991" cy="237744"/>
-          </a:xfrm>
-          <a:prstGeom prst="rect">
-            <a:avLst/>
-          </a:prstGeom>
-          <a:noFill/>
-        </p:spPr>
-        <p:txBody>
-          <a:bodyPr wrap="none" lIns="0" rIns="0" tIns="0" bIns="0" anchor="ctr">
-            <a:spAutoFit/>
-          </a:bodyPr>
-          <a:lstStyle/>
-          <a:p>
-            <a:pPr algn="ctr">
-              <a:lnSpc>
-                <a:spcPct val="100000"/>
-              </a:lnSpc>
-              <a:spcBef>
-                <a:spcPts val="0"/>
-              </a:spcBef>
-              <a:spcAft>
-                <a:spcPts val="0"/>
-              </a:spcAft>
-            </a:pPr>
-            <a:r>
-              <a:rPr sz="850" b="1" i="0">
-                <a:solidFill>
-                  <a:srgbClr val="0A1325"/>
-                </a:solidFill>
-                <a:latin typeface="Consolas"/>
-              </a:rPr>
-              <a:t>46</a:t>
-            </a:r>
-          </a:p>
-        </p:txBody>
-      </p:sp>
-      <p:sp>
-        <p:nvSpPr>
-          <p:cNvPr id="54" name="s13_52"/>
-          <p:cNvSpPr/>
-          <p:nvPr/>
-        </p:nvSpPr>
-        <p:spPr>
-          <a:xfrm>
-            <a:off x="4212546" y="4160520"/>
-            <a:ext cx="1160342" cy="237744"/>
-          </a:xfrm>
-          <a:prstGeom prst="rect">
-            <a:avLst/>
-          </a:prstGeom>
-          <a:solidFill>
-            <a:srgbClr val="FFB531"/>
-          </a:solidFill>
-          <a:ln w="9525">
-            <a:solidFill>
-              <a:srgbClr val="0A1325"/>
-            </a:solidFill>
-          </a:ln>
-          <a:effectLst/>
-        </p:spPr>
-        <p:style>
-          <a:lnRef idx="1">
-            <a:schemeClr val="accent1"/>
-          </a:lnRef>
-          <a:fillRef idx="3">
-            <a:schemeClr val="accent1"/>
-          </a:fillRef>
-          <a:effectRef idx="2">
-            <a:schemeClr val="accent1"/>
-          </a:effectRef>
-          <a:fontRef idx="minor">
-            <a:schemeClr val="lt1"/>
-          </a:fontRef>
-        </p:style>
-        <p:txBody>
-          <a:bodyPr rtlCol="0" anchor="ctr"/>
-          <a:lstStyle/>
-          <a:p/>
-        </p:txBody>
-      </p:sp>
-      <p:sp>
-        <p:nvSpPr>
-          <p:cNvPr id="55" name="s13_53"/>
-          <p:cNvSpPr txBox="1"/>
-          <p:nvPr/>
-        </p:nvSpPr>
-        <p:spPr>
-          <a:xfrm>
-            <a:off x="4212546" y="4160520"/>
-            <a:ext cx="1160342" cy="237744"/>
-          </a:xfrm>
-          <a:prstGeom prst="rect">
-            <a:avLst/>
-          </a:prstGeom>
-          <a:noFill/>
-        </p:spPr>
-        <p:txBody>
-          <a:bodyPr wrap="none" lIns="0" rIns="0" tIns="0" bIns="0" anchor="ctr">
-            <a:spAutoFit/>
-          </a:bodyPr>
-          <a:lstStyle/>
-          <a:p>
-            <a:pPr algn="ctr">
-              <a:lnSpc>
-                <a:spcPct val="100000"/>
-              </a:lnSpc>
-              <a:spcBef>
-                <a:spcPts val="0"/>
-              </a:spcBef>
-              <a:spcAft>
-                <a:spcPts val="0"/>
-              </a:spcAft>
-            </a:pPr>
-            <a:r>
-              <a:rPr sz="850" b="1" i="0">
-                <a:solidFill>
-                  <a:srgbClr val="0A1325"/>
-                </a:solidFill>
-                <a:latin typeface="Consolas"/>
-              </a:rPr>
-              <a:t>32</a:t>
-            </a:r>
-          </a:p>
-        </p:txBody>
-      </p:sp>
-      <p:sp>
-        <p:nvSpPr>
-          <p:cNvPr id="56" name="s13_54"/>
-          <p:cNvSpPr/>
-          <p:nvPr/>
-        </p:nvSpPr>
-        <p:spPr>
-          <a:xfrm>
-            <a:off x="5372888" y="4160520"/>
-            <a:ext cx="616431" cy="237744"/>
-          </a:xfrm>
-          <a:prstGeom prst="rect">
-            <a:avLst/>
-          </a:prstGeom>
-          <a:solidFill>
-            <a:srgbClr val="C2544D"/>
-          </a:solidFill>
-          <a:ln w="9525">
-            <a:solidFill>
-              <a:srgbClr val="0A1325"/>
-            </a:solidFill>
-          </a:ln>
-          <a:effectLst/>
-        </p:spPr>
-        <p:style>
-          <a:lnRef idx="1">
-            <a:schemeClr val="accent1"/>
-          </a:lnRef>
-          <a:fillRef idx="3">
-            <a:schemeClr val="accent1"/>
-          </a:fillRef>
-          <a:effectRef idx="2">
-            <a:schemeClr val="accent1"/>
-          </a:effectRef>
-          <a:fontRef idx="minor">
-            <a:schemeClr val="lt1"/>
-          </a:fontRef>
-        </p:style>
-        <p:txBody>
-          <a:bodyPr rtlCol="0" anchor="ctr"/>
-          <a:lstStyle/>
-          <a:p/>
-        </p:txBody>
-      </p:sp>
-      <p:sp>
-        <p:nvSpPr>
-          <p:cNvPr id="57" name="s13_55"/>
-          <p:cNvSpPr txBox="1"/>
-          <p:nvPr/>
-        </p:nvSpPr>
-        <p:spPr>
-          <a:xfrm>
-            <a:off x="5372888" y="4160520"/>
-            <a:ext cx="616431" cy="237744"/>
-          </a:xfrm>
-          <a:prstGeom prst="rect">
-            <a:avLst/>
-          </a:prstGeom>
-          <a:noFill/>
-        </p:spPr>
-        <p:txBody>
-          <a:bodyPr wrap="none" lIns="0" rIns="0" tIns="0" bIns="0" anchor="ctr">
-            <a:spAutoFit/>
-          </a:bodyPr>
-          <a:lstStyle/>
-          <a:p>
-            <a:pPr algn="ctr">
-              <a:lnSpc>
-                <a:spcPct val="100000"/>
-              </a:lnSpc>
-              <a:spcBef>
-                <a:spcPts val="0"/>
-              </a:spcBef>
-              <a:spcAft>
-                <a:spcPts val="0"/>
-              </a:spcAft>
-            </a:pPr>
-            <a:r>
-              <a:rPr sz="850" b="1" i="0">
-                <a:solidFill>
-                  <a:srgbClr val="0A1325"/>
-                </a:solidFill>
-                <a:latin typeface="Consolas"/>
-              </a:rPr>
-              <a:t>17</a:t>
-            </a:r>
-          </a:p>
-        </p:txBody>
-      </p:sp>
-      <p:sp>
-        <p:nvSpPr>
-          <p:cNvPr id="58" name="s13_56"/>
-          <p:cNvSpPr/>
-          <p:nvPr/>
-        </p:nvSpPr>
-        <p:spPr>
-          <a:xfrm>
-            <a:off x="736092" y="4503420"/>
-            <a:ext cx="100584" cy="100584"/>
-          </a:xfrm>
-          <a:prstGeom prst="ellipse">
-            <a:avLst/>
-          </a:prstGeom>
-          <a:solidFill>
-            <a:srgbClr val="2FD3B0"/>
-          </a:solidFill>
-          <a:ln>
-            <a:noFill/>
-          </a:ln>
-          <a:effectLst/>
-        </p:spPr>
-        <p:style>
-          <a:lnRef idx="1">
-            <a:schemeClr val="accent1"/>
-          </a:lnRef>
-          <a:fillRef idx="3">
-            <a:schemeClr val="accent1"/>
-          </a:fillRef>
-          <a:effectRef idx="2">
-            <a:schemeClr val="accent1"/>
-          </a:effectRef>
-          <a:fontRef idx="minor">
-            <a:schemeClr val="lt1"/>
-          </a:fontRef>
-        </p:style>
-        <p:txBody>
-          <a:bodyPr rtlCol="0" anchor="ctr"/>
-          <a:lstStyle/>
-          <a:p/>
-        </p:txBody>
-      </p:sp>
-      <p:sp>
-        <p:nvSpPr>
-          <p:cNvPr id="59" name="s13_57"/>
-          <p:cNvSpPr txBox="1"/>
-          <p:nvPr/>
-        </p:nvSpPr>
-        <p:spPr>
-          <a:xfrm>
-            <a:off x="905256" y="4462272"/>
-            <a:ext cx="2194560" cy="182880"/>
-          </a:xfrm>
-          <a:prstGeom prst="rect">
-            <a:avLst/>
-          </a:prstGeom>
-          <a:noFill/>
-        </p:spPr>
-        <p:txBody>
-          <a:bodyPr wrap="none" lIns="0" rIns="0" tIns="0" bIns="0" anchor="ctr">
+          <a:bodyPr wrap="square" lIns="0" rIns="0" tIns="0" bIns="0" anchor="ctr">
             <a:spAutoFit/>
           </a:bodyPr>
           <a:lstStyle/>
@@ -25297,1844 +25037,24 @@
             <a:r>
               <a:rPr sz="850" b="0" i="0">
                 <a:solidFill>
-                  <a:srgbClr val="8395B5"/>
+                  <a:srgbClr val="BAC6DA"/>
                 </a:solidFill>
                 <a:latin typeface="Bahnschrift SemiLight"/>
               </a:rPr>
-              <a:t>execução / teste</a:t>
-            </a:r>
-          </a:p>
-        </p:txBody>
-      </p:sp>
-      <p:sp>
-        <p:nvSpPr>
-          <p:cNvPr id="60" name="s13_58"/>
+              <a:t>13 ideias de sinal</a:t>
+            </a:r>
+          </a:p>
+        </p:txBody>
+      </p:sp>
+      <p:sp>
+        <p:nvSpPr>
+          <p:cNvPr id="55" name="s13_53"/>
           <p:cNvSpPr/>
           <p:nvPr/>
         </p:nvSpPr>
         <p:spPr>
           <a:xfrm>
-            <a:off x="1981504" y="4503420"/>
-            <a:ext cx="100584" cy="100584"/>
-          </a:xfrm>
-          <a:prstGeom prst="ellipse">
-            <a:avLst/>
-          </a:prstGeom>
-          <a:solidFill>
-            <a:srgbClr val="4F8EF7"/>
-          </a:solidFill>
-          <a:ln>
-            <a:noFill/>
-          </a:ln>
-          <a:effectLst/>
-        </p:spPr>
-        <p:style>
-          <a:lnRef idx="1">
-            <a:schemeClr val="accent1"/>
-          </a:lnRef>
-          <a:fillRef idx="3">
-            <a:schemeClr val="accent1"/>
-          </a:fillRef>
-          <a:effectRef idx="2">
-            <a:schemeClr val="accent1"/>
-          </a:effectRef>
-          <a:fontRef idx="minor">
-            <a:schemeClr val="lt1"/>
-          </a:fontRef>
-        </p:style>
-        <p:txBody>
-          <a:bodyPr rtlCol="0" anchor="ctr"/>
-          <a:lstStyle/>
-          <a:p/>
-        </p:txBody>
-      </p:sp>
-      <p:sp>
-        <p:nvSpPr>
-          <p:cNvPr id="61" name="s13_59"/>
-          <p:cNvSpPr txBox="1"/>
-          <p:nvPr/>
-        </p:nvSpPr>
-        <p:spPr>
-          <a:xfrm>
-            <a:off x="2150668" y="4462272"/>
-            <a:ext cx="2194560" cy="182880"/>
-          </a:xfrm>
-          <a:prstGeom prst="rect">
-            <a:avLst/>
-          </a:prstGeom>
-          <a:noFill/>
-        </p:spPr>
-        <p:txBody>
-          <a:bodyPr wrap="none" lIns="0" rIns="0" tIns="0" bIns="0" anchor="ctr">
-            <a:spAutoFit/>
-          </a:bodyPr>
-          <a:lstStyle/>
-          <a:p>
-            <a:pPr algn="l">
-              <a:lnSpc>
-                <a:spcPct val="100000"/>
-              </a:lnSpc>
-              <a:spcBef>
-                <a:spcPts val="0"/>
-              </a:spcBef>
-              <a:spcAft>
-                <a:spcPts val="0"/>
-              </a:spcAft>
-            </a:pPr>
-            <a:r>
-              <a:rPr sz="850" b="0" i="0">
-                <a:solidFill>
-                  <a:srgbClr val="8395B5"/>
-                </a:solidFill>
-                <a:latin typeface="Bahnschrift SemiLight"/>
-              </a:rPr>
-              <a:t>auto-correção na sessão</a:t>
-            </a:r>
-          </a:p>
-        </p:txBody>
-      </p:sp>
-      <p:sp>
-        <p:nvSpPr>
-          <p:cNvPr id="62" name="s13_60"/>
-          <p:cNvSpPr/>
-          <p:nvPr/>
-        </p:nvSpPr>
-        <p:spPr>
-          <a:xfrm>
-            <a:off x="3623767" y="4503420"/>
-            <a:ext cx="100584" cy="100584"/>
-          </a:xfrm>
-          <a:prstGeom prst="ellipse">
-            <a:avLst/>
-          </a:prstGeom>
-          <a:solidFill>
-            <a:srgbClr val="FFB531"/>
-          </a:solidFill>
-          <a:ln>
-            <a:noFill/>
-          </a:ln>
-          <a:effectLst/>
-        </p:spPr>
-        <p:style>
-          <a:lnRef idx="1">
-            <a:schemeClr val="accent1"/>
-          </a:lnRef>
-          <a:fillRef idx="3">
-            <a:schemeClr val="accent1"/>
-          </a:fillRef>
-          <a:effectRef idx="2">
-            <a:schemeClr val="accent1"/>
-          </a:effectRef>
-          <a:fontRef idx="minor">
-            <a:schemeClr val="lt1"/>
-          </a:fontRef>
-        </p:style>
-        <p:txBody>
-          <a:bodyPr rtlCol="0" anchor="ctr"/>
-          <a:lstStyle/>
-          <a:p/>
-        </p:txBody>
-      </p:sp>
-      <p:sp>
-        <p:nvSpPr>
-          <p:cNvPr id="63" name="s13_61"/>
-          <p:cNvSpPr txBox="1"/>
-          <p:nvPr/>
-        </p:nvSpPr>
-        <p:spPr>
-          <a:xfrm>
-            <a:off x="3792931" y="4462272"/>
-            <a:ext cx="2194560" cy="182880"/>
-          </a:xfrm>
-          <a:prstGeom prst="rect">
-            <a:avLst/>
-          </a:prstGeom>
-          <a:noFill/>
-        </p:spPr>
-        <p:txBody>
-          <a:bodyPr wrap="none" lIns="0" rIns="0" tIns="0" bIns="0" anchor="ctr">
-            <a:spAutoFit/>
-          </a:bodyPr>
-          <a:lstStyle/>
-          <a:p>
-            <a:pPr algn="l">
-              <a:lnSpc>
-                <a:spcPct val="100000"/>
-              </a:lnSpc>
-              <a:spcBef>
-                <a:spcPts val="0"/>
-              </a:spcBef>
-              <a:spcAft>
-                <a:spcPts val="0"/>
-              </a:spcAft>
-            </a:pPr>
-            <a:r>
-              <a:rPr sz="850" b="0" i="0">
-                <a:solidFill>
-                  <a:srgbClr val="8395B5"/>
-                </a:solidFill>
-                <a:latin typeface="Bahnschrift SemiLight"/>
-              </a:rPr>
-              <a:t>conferência humana</a:t>
-            </a:r>
-          </a:p>
-        </p:txBody>
-      </p:sp>
-      <p:sp>
-        <p:nvSpPr>
-          <p:cNvPr id="64" name="s13_62"/>
-          <p:cNvSpPr/>
-          <p:nvPr/>
-        </p:nvSpPr>
-        <p:spPr>
-          <a:xfrm>
-            <a:off x="4982565" y="4503420"/>
-            <a:ext cx="100584" cy="100584"/>
-          </a:xfrm>
-          <a:prstGeom prst="ellipse">
-            <a:avLst/>
-          </a:prstGeom>
-          <a:solidFill>
-            <a:srgbClr val="C2544D"/>
-          </a:solidFill>
-          <a:ln>
-            <a:noFill/>
-          </a:ln>
-          <a:effectLst/>
-        </p:spPr>
-        <p:style>
-          <a:lnRef idx="1">
-            <a:schemeClr val="accent1"/>
-          </a:lnRef>
-          <a:fillRef idx="3">
-            <a:schemeClr val="accent1"/>
-          </a:fillRef>
-          <a:effectRef idx="2">
-            <a:schemeClr val="accent1"/>
-          </a:effectRef>
-          <a:fontRef idx="minor">
-            <a:schemeClr val="lt1"/>
-          </a:fontRef>
-        </p:style>
-        <p:txBody>
-          <a:bodyPr rtlCol="0" anchor="ctr"/>
-          <a:lstStyle/>
-          <a:p/>
-        </p:txBody>
-      </p:sp>
-      <p:sp>
-        <p:nvSpPr>
-          <p:cNvPr id="65" name="s13_63"/>
-          <p:cNvSpPr txBox="1"/>
-          <p:nvPr/>
-        </p:nvSpPr>
-        <p:spPr>
-          <a:xfrm>
-            <a:off x="5151729" y="4462272"/>
-            <a:ext cx="2194560" cy="182880"/>
-          </a:xfrm>
-          <a:prstGeom prst="rect">
-            <a:avLst/>
-          </a:prstGeom>
-          <a:noFill/>
-        </p:spPr>
-        <p:txBody>
-          <a:bodyPr wrap="none" lIns="0" rIns="0" tIns="0" bIns="0" anchor="ctr">
-            <a:spAutoFit/>
-          </a:bodyPr>
-          <a:lstStyle/>
-          <a:p>
-            <a:pPr algn="l">
-              <a:lnSpc>
-                <a:spcPct val="100000"/>
-              </a:lnSpc>
-              <a:spcBef>
-                <a:spcPts val="0"/>
-              </a:spcBef>
-              <a:spcAft>
-                <a:spcPts val="0"/>
-              </a:spcAft>
-            </a:pPr>
-            <a:r>
-              <a:rPr sz="850" b="0" i="0">
-                <a:solidFill>
-                  <a:srgbClr val="8395B5"/>
-                </a:solidFill>
-                <a:latin typeface="Bahnschrift SemiLight"/>
-              </a:rPr>
-              <a:t>só pego depois</a:t>
-            </a:r>
-          </a:p>
-        </p:txBody>
-      </p:sp>
-      <p:sp>
-        <p:nvSpPr>
-          <p:cNvPr id="66" name="s13_64"/>
-          <p:cNvSpPr txBox="1"/>
-          <p:nvPr/>
-        </p:nvSpPr>
-        <p:spPr>
-          <a:xfrm>
-            <a:off x="731520" y="4690872"/>
-            <a:ext cx="5257800" cy="365760"/>
-          </a:xfrm>
-          <a:prstGeom prst="rect">
-            <a:avLst/>
-          </a:prstGeom>
-          <a:noFill/>
-        </p:spPr>
-        <p:txBody>
-          <a:bodyPr wrap="square" lIns="0" rIns="0" tIns="0" bIns="0" anchor="t">
-            <a:spAutoFit/>
-          </a:bodyPr>
-          <a:lstStyle/>
-          <a:p>
-            <a:pPr algn="l">
-              <a:lnSpc>
-                <a:spcPct val="115000"/>
-              </a:lnSpc>
-              <a:spcBef>
-                <a:spcPts val="0"/>
-              </a:spcBef>
-              <a:spcAft>
-                <a:spcPts val="0"/>
-              </a:spcAft>
-            </a:pPr>
-            <a:r>
-              <a:rPr sz="950" b="0" i="0">
-                <a:solidFill>
-                  <a:srgbClr val="F5F7FB"/>
-                </a:solidFill>
-                <a:latin typeface="Bahnschrift SemiBold"/>
-              </a:rPr>
-              <a:t>88% pegos na própria sessão. </a:t>
-            </a:r>
-            <a:r>
-              <a:rPr sz="850" b="0" i="0">
-                <a:solidFill>
-                  <a:srgbClr val="8395B5"/>
-                </a:solidFill>
-                <a:latin typeface="Bahnschrift SemiLight"/>
-              </a:rPr>
-              <a:t>72 código quebrado  ·  25 alucinação numérica  ·  13 generalização além do teste  ·  13 texto impreciso ou contraditório  ·  12 premissa herdada  ·  10 escopo ou condução errada</a:t>
-            </a:r>
-          </a:p>
-        </p:txBody>
-      </p:sp>
-      <p:sp>
-        <p:nvSpPr>
-          <p:cNvPr id="67" name="s13_65"/>
-          <p:cNvSpPr txBox="1"/>
-          <p:nvPr/>
-        </p:nvSpPr>
-        <p:spPr>
-          <a:xfrm>
-            <a:off x="731520" y="5138928"/>
-            <a:ext cx="5257800" cy="182880"/>
-          </a:xfrm>
-          <a:prstGeom prst="rect">
-            <a:avLst/>
-          </a:prstGeom>
-          <a:noFill/>
-        </p:spPr>
-        <p:txBody>
-          <a:bodyPr wrap="square" lIns="0" rIns="0" tIns="0" bIns="0" anchor="t">
-            <a:spAutoFit/>
-          </a:bodyPr>
-          <a:lstStyle/>
-          <a:p>
-            <a:pPr algn="l">
-              <a:lnSpc>
-                <a:spcPct val="100000"/>
-              </a:lnSpc>
-              <a:spcBef>
-                <a:spcPts val="0"/>
-              </a:spcBef>
-              <a:spcAft>
-                <a:spcPts val="0"/>
-              </a:spcAft>
-            </a:pPr>
-            <a:r>
-              <a:rPr sz="900" b="1" i="0" spc="180">
-                <a:solidFill>
-                  <a:srgbClr val="FFB531"/>
-                </a:solidFill>
-                <a:latin typeface="Consolas"/>
-              </a:rPr>
-              <a:t>USOS PRÁTICOS  ·  37 TESTES  ·  39 ANÁLISES EM .MD</a:t>
-            </a:r>
-          </a:p>
-        </p:txBody>
-      </p:sp>
-      <p:sp>
-        <p:nvSpPr>
-          <p:cNvPr id="68" name="s13_66"/>
-          <p:cNvSpPr txBox="1"/>
-          <p:nvPr/>
-        </p:nvSpPr>
-        <p:spPr>
-          <a:xfrm>
-            <a:off x="731520" y="5394960"/>
-            <a:ext cx="2537460" cy="228600"/>
-          </a:xfrm>
-          <a:prstGeom prst="rect">
-            <a:avLst/>
-          </a:prstGeom>
-          <a:noFill/>
-        </p:spPr>
-        <p:txBody>
-          <a:bodyPr wrap="none" lIns="0" rIns="0" tIns="0" bIns="0" anchor="ctr">
-            <a:spAutoFit/>
-          </a:bodyPr>
-          <a:lstStyle/>
-          <a:p>
-            <a:pPr algn="l">
-              <a:lnSpc>
-                <a:spcPct val="100000"/>
-              </a:lnSpc>
-              <a:spcBef>
-                <a:spcPts val="0"/>
-              </a:spcBef>
-              <a:spcAft>
-                <a:spcPts val="0"/>
-              </a:spcAft>
-            </a:pPr>
-            <a:r>
-              <a:rPr sz="800" b="1" i="0">
-                <a:solidFill>
-                  <a:srgbClr val="4F8EF7"/>
-                </a:solidFill>
-                <a:latin typeface="Consolas"/>
-              </a:rPr>
-              <a:t>surpresa_fomc.py</a:t>
-            </a:r>
-            <a:r>
-              <a:rPr sz="850" b="0" i="0">
-                <a:solidFill>
-                  <a:srgbClr val="BAC6DA"/>
-                </a:solidFill>
-                <a:latin typeface="Bahnschrift SemiLight"/>
-              </a:rPr>
-              <a:t>  β por event-study, 36 reuniões</a:t>
-            </a:r>
-          </a:p>
-        </p:txBody>
-      </p:sp>
-      <p:sp>
-        <p:nvSpPr>
-          <p:cNvPr id="69" name="s13_67"/>
-          <p:cNvSpPr txBox="1"/>
-          <p:nvPr/>
-        </p:nvSpPr>
-        <p:spPr>
-          <a:xfrm>
-            <a:off x="731520" y="5641848"/>
-            <a:ext cx="2537460" cy="228600"/>
-          </a:xfrm>
-          <a:prstGeom prst="rect">
-            <a:avLst/>
-          </a:prstGeom>
-          <a:noFill/>
-        </p:spPr>
-        <p:txBody>
-          <a:bodyPr wrap="none" lIns="0" rIns="0" tIns="0" bIns="0" anchor="ctr">
-            <a:spAutoFit/>
-          </a:bodyPr>
-          <a:lstStyle/>
-          <a:p>
-            <a:pPr algn="l">
-              <a:lnSpc>
-                <a:spcPct val="100000"/>
-              </a:lnSpc>
-              <a:spcBef>
-                <a:spcPts val="0"/>
-              </a:spcBef>
-              <a:spcAft>
-                <a:spcPts val="0"/>
-              </a:spcAft>
-            </a:pPr>
-            <a:r>
-              <a:rPr sz="800" b="1" i="0">
-                <a:solidFill>
-                  <a:srgbClr val="4F8EF7"/>
-                </a:solidFill>
-                <a:latin typeface="Consolas"/>
-              </a:rPr>
-              <a:t>9 × gate_*.py</a:t>
-            </a:r>
-            <a:r>
-              <a:rPr sz="850" b="0" i="0">
-                <a:solidFill>
-                  <a:srgbClr val="BAC6DA"/>
-                </a:solidFill>
-                <a:latin typeface="Bahnschrift SemiLight"/>
-              </a:rPr>
-              <a:t>  um teste por candidata tática</a:t>
-            </a:r>
-          </a:p>
-        </p:txBody>
-      </p:sp>
-      <p:sp>
-        <p:nvSpPr>
-          <p:cNvPr id="70" name="s13_68"/>
-          <p:cNvSpPr txBox="1"/>
-          <p:nvPr/>
-        </p:nvSpPr>
-        <p:spPr>
-          <a:xfrm>
-            <a:off x="731520" y="5888736"/>
-            <a:ext cx="2537460" cy="228600"/>
-          </a:xfrm>
-          <a:prstGeom prst="rect">
-            <a:avLst/>
-          </a:prstGeom>
-          <a:noFill/>
-        </p:spPr>
-        <p:txBody>
-          <a:bodyPr wrap="none" lIns="0" rIns="0" tIns="0" bIns="0" anchor="ctr">
-            <a:spAutoFit/>
-          </a:bodyPr>
-          <a:lstStyle/>
-          <a:p>
-            <a:pPr algn="l">
-              <a:lnSpc>
-                <a:spcPct val="100000"/>
-              </a:lnSpc>
-              <a:spcBef>
-                <a:spcPts val="0"/>
-              </a:spcBef>
-              <a:spcAft>
-                <a:spcPts val="0"/>
-              </a:spcAft>
-            </a:pPr>
-            <a:r>
-              <a:rPr sz="800" b="1" i="0">
-                <a:solidFill>
-                  <a:srgbClr val="4F8EF7"/>
-                </a:solidFill>
-                <a:latin typeface="Consolas"/>
-              </a:rPr>
-              <a:t>curva_c.py</a:t>
-            </a:r>
-            <a:r>
-              <a:rPr sz="850" b="0" i="0">
-                <a:solidFill>
-                  <a:srgbClr val="BAC6DA"/>
-                </a:solidFill>
-                <a:latin typeface="Bahnschrift SemiLight"/>
-              </a:rPr>
-              <a:t>  varredura da régua do Ω</a:t>
-            </a:r>
-          </a:p>
-        </p:txBody>
-      </p:sp>
-      <p:sp>
-        <p:nvSpPr>
-          <p:cNvPr id="71" name="s13_69"/>
-          <p:cNvSpPr txBox="1"/>
-          <p:nvPr/>
-        </p:nvSpPr>
-        <p:spPr>
-          <a:xfrm>
-            <a:off x="731520" y="6135624"/>
-            <a:ext cx="2537460" cy="228600"/>
-          </a:xfrm>
-          <a:prstGeom prst="rect">
-            <a:avLst/>
-          </a:prstGeom>
-          <a:noFill/>
-        </p:spPr>
-        <p:txBody>
-          <a:bodyPr wrap="none" lIns="0" rIns="0" tIns="0" bIns="0" anchor="ctr">
-            <a:spAutoFit/>
-          </a:bodyPr>
-          <a:lstStyle/>
-          <a:p>
-            <a:pPr algn="l">
-              <a:lnSpc>
-                <a:spcPct val="100000"/>
-              </a:lnSpc>
-              <a:spcBef>
-                <a:spcPts val="0"/>
-              </a:spcBef>
-              <a:spcAft>
-                <a:spcPts val="0"/>
-              </a:spcAft>
-            </a:pPr>
-            <a:r>
-              <a:rPr sz="800" b="1" i="0">
-                <a:solidFill>
-                  <a:srgbClr val="4F8EF7"/>
-                </a:solidFill>
-                <a:latin typeface="Consolas"/>
-              </a:rPr>
-              <a:t>backtest_v1.py</a:t>
-            </a:r>
-            <a:r>
-              <a:rPr sz="850" b="0" i="0">
-                <a:solidFill>
-                  <a:srgbClr val="BAC6DA"/>
-                </a:solidFill>
-                <a:latin typeface="Bahnschrift SemiLight"/>
-              </a:rPr>
-              <a:t>  8 tetos × 374 pregões</a:t>
-            </a:r>
-          </a:p>
-        </p:txBody>
-      </p:sp>
-      <p:sp>
-        <p:nvSpPr>
-          <p:cNvPr id="72" name="s13_70"/>
-          <p:cNvSpPr txBox="1"/>
-          <p:nvPr/>
-        </p:nvSpPr>
-        <p:spPr>
-          <a:xfrm>
-            <a:off x="3406139" y="5394960"/>
-            <a:ext cx="2537460" cy="228600"/>
-          </a:xfrm>
-          <a:prstGeom prst="rect">
-            <a:avLst/>
-          </a:prstGeom>
-          <a:noFill/>
-        </p:spPr>
-        <p:txBody>
-          <a:bodyPr wrap="none" lIns="0" rIns="0" tIns="0" bIns="0" anchor="ctr">
-            <a:spAutoFit/>
-          </a:bodyPr>
-          <a:lstStyle/>
-          <a:p>
-            <a:pPr algn="l">
-              <a:lnSpc>
-                <a:spcPct val="100000"/>
-              </a:lnSpc>
-              <a:spcBef>
-                <a:spcPts val="0"/>
-              </a:spcBef>
-              <a:spcAft>
-                <a:spcPts val="0"/>
-              </a:spcAft>
-            </a:pPr>
-            <a:r>
-              <a:rPr sz="800" b="1" i="0">
-                <a:solidFill>
-                  <a:srgbClr val="4F8EF7"/>
-                </a:solidFill>
-                <a:latin typeface="Consolas"/>
-              </a:rPr>
-              <a:t>download_polymarket_fed.py</a:t>
-            </a:r>
-            <a:r>
-              <a:rPr sz="850" b="0" i="0">
-                <a:solidFill>
-                  <a:srgbClr val="BAC6DA"/>
-                </a:solidFill>
-                <a:latin typeface="Bahnschrift SemiLight"/>
-              </a:rPr>
-              <a:t>  Gamma + CLOB API</a:t>
-            </a:r>
-          </a:p>
-        </p:txBody>
-      </p:sp>
-      <p:sp>
-        <p:nvSpPr>
-          <p:cNvPr id="73" name="s13_71"/>
-          <p:cNvSpPr txBox="1"/>
-          <p:nvPr/>
-        </p:nvSpPr>
-        <p:spPr>
-          <a:xfrm>
-            <a:off x="3406139" y="5641848"/>
-            <a:ext cx="2537460" cy="228600"/>
-          </a:xfrm>
-          <a:prstGeom prst="rect">
-            <a:avLst/>
-          </a:prstGeom>
-          <a:noFill/>
-        </p:spPr>
-        <p:txBody>
-          <a:bodyPr wrap="none" lIns="0" rIns="0" tIns="0" bIns="0" anchor="ctr">
-            <a:spAutoFit/>
-          </a:bodyPr>
-          <a:lstStyle/>
-          <a:p>
-            <a:pPr algn="l">
-              <a:lnSpc>
-                <a:spcPct val="100000"/>
-              </a:lnSpc>
-              <a:spcBef>
-                <a:spcPts val="0"/>
-              </a:spcBef>
-              <a:spcAft>
-                <a:spcPts val="0"/>
-              </a:spcAft>
-            </a:pPr>
-            <a:r>
-              <a:rPr sz="800" b="1" i="0">
-                <a:solidFill>
-                  <a:srgbClr val="4F8EF7"/>
-                </a:solidFill>
-                <a:latin typeface="Consolas"/>
-              </a:rPr>
-              <a:t>graficos_p5.py</a:t>
-            </a:r>
-            <a:r>
-              <a:rPr sz="850" b="0" i="0">
-                <a:solidFill>
-                  <a:srgbClr val="BAC6DA"/>
-                </a:solidFill>
-                <a:latin typeface="Bahnschrift SemiLight"/>
-              </a:rPr>
-              <a:t>  3 LOGs → estes números</a:t>
-            </a:r>
-          </a:p>
-        </p:txBody>
-      </p:sp>
-      <p:sp>
-        <p:nvSpPr>
-          <p:cNvPr id="74" name="s13_72"/>
-          <p:cNvSpPr txBox="1"/>
-          <p:nvPr/>
-        </p:nvSpPr>
-        <p:spPr>
-          <a:xfrm>
-            <a:off x="3406139" y="5888736"/>
-            <a:ext cx="2537460" cy="228600"/>
-          </a:xfrm>
-          <a:prstGeom prst="rect">
-            <a:avLst/>
-          </a:prstGeom>
-          <a:noFill/>
-        </p:spPr>
-        <p:txBody>
-          <a:bodyPr wrap="none" lIns="0" rIns="0" tIns="0" bIns="0" anchor="ctr">
-            <a:spAutoFit/>
-          </a:bodyPr>
-          <a:lstStyle/>
-          <a:p>
-            <a:pPr algn="l">
-              <a:lnSpc>
-                <a:spcPct val="100000"/>
-              </a:lnSpc>
-              <a:spcBef>
-                <a:spcPts val="0"/>
-              </a:spcBef>
-              <a:spcAft>
-                <a:spcPts val="0"/>
-              </a:spcAft>
-            </a:pPr>
-            <a:r>
-              <a:rPr sz="800" b="1" i="0">
-                <a:solidFill>
-                  <a:srgbClr val="4F8EF7"/>
-                </a:solidFill>
-                <a:latin typeface="Consolas"/>
-              </a:rPr>
-              <a:t>grafo_repo.py</a:t>
-            </a:r>
-            <a:r>
-              <a:rPr sz="850" b="0" i="0">
-                <a:solidFill>
-                  <a:srgbClr val="BAC6DA"/>
-                </a:solidFill>
-                <a:latin typeface="Bahnschrift SemiLight"/>
-              </a:rPr>
-              <a:t>  o second brain, medido</a:t>
-            </a:r>
-          </a:p>
-        </p:txBody>
-      </p:sp>
-      <p:sp>
-        <p:nvSpPr>
-          <p:cNvPr id="75" name="s13_73"/>
-          <p:cNvSpPr txBox="1"/>
-          <p:nvPr/>
-        </p:nvSpPr>
-        <p:spPr>
-          <a:xfrm>
-            <a:off x="3406139" y="6135624"/>
-            <a:ext cx="2537460" cy="228600"/>
-          </a:xfrm>
-          <a:prstGeom prst="rect">
-            <a:avLst/>
-          </a:prstGeom>
-          <a:noFill/>
-        </p:spPr>
-        <p:txBody>
-          <a:bodyPr wrap="none" lIns="0" rIns="0" tIns="0" bIns="0" anchor="ctr">
-            <a:spAutoFit/>
-          </a:bodyPr>
-          <a:lstStyle/>
-          <a:p>
-            <a:pPr algn="l">
-              <a:lnSpc>
-                <a:spcPct val="100000"/>
-              </a:lnSpc>
-              <a:spcBef>
-                <a:spcPts val="0"/>
-              </a:spcBef>
-              <a:spcAft>
-                <a:spcPts val="0"/>
-              </a:spcAft>
-            </a:pPr>
-            <a:r>
-              <a:rPr sz="800" b="1" i="0">
-                <a:solidFill>
-                  <a:srgbClr val="4F8EF7"/>
-                </a:solidFill>
-                <a:latin typeface="Consolas"/>
-              </a:rPr>
-              <a:t>slides_*_pptx.py</a:t>
-            </a:r>
-            <a:r>
-              <a:rPr sz="850" b="0" i="0">
-                <a:solidFill>
-                  <a:srgbClr val="BAC6DA"/>
-                </a:solidFill>
-                <a:latin typeface="Bahnschrift SemiLight"/>
-              </a:rPr>
-              <a:t>  este deck, Morph incluso</a:t>
-            </a:r>
-          </a:p>
-        </p:txBody>
-      </p:sp>
-      <p:sp>
-        <p:nvSpPr>
-          <p:cNvPr id="76" name="s13_74"/>
-          <p:cNvSpPr txBox="1"/>
-          <p:nvPr/>
-        </p:nvSpPr>
-        <p:spPr>
-          <a:xfrm>
-            <a:off x="6327648" y="1554480"/>
-            <a:ext cx="5129783" cy="182880"/>
-          </a:xfrm>
-          <a:prstGeom prst="rect">
-            <a:avLst/>
-          </a:prstGeom>
-          <a:noFill/>
-        </p:spPr>
-        <p:txBody>
-          <a:bodyPr wrap="square" lIns="0" rIns="0" tIns="0" bIns="0" anchor="t">
-            <a:spAutoFit/>
-          </a:bodyPr>
-          <a:lstStyle/>
-          <a:p>
-            <a:pPr algn="l">
-              <a:lnSpc>
-                <a:spcPct val="100000"/>
-              </a:lnSpc>
-              <a:spcBef>
-                <a:spcPts val="0"/>
-              </a:spcBef>
-              <a:spcAft>
-                <a:spcPts val="0"/>
-              </a:spcAft>
-            </a:pPr>
-            <a:r>
-              <a:rPr sz="900" b="1" i="0" spc="180">
-                <a:solidFill>
-                  <a:srgbClr val="FFB531"/>
-                </a:solidFill>
-                <a:latin typeface="Consolas"/>
-              </a:rPr>
-              <a:t>PESQUISA  ·  O MÉTODO, TODA VEZ</a:t>
-            </a:r>
-          </a:p>
-        </p:txBody>
-      </p:sp>
-      <p:sp>
-        <p:nvSpPr>
-          <p:cNvPr id="77" name="s13_75"/>
-          <p:cNvSpPr txBox="1"/>
-          <p:nvPr/>
-        </p:nvSpPr>
-        <p:spPr>
-          <a:xfrm>
-            <a:off x="6327648" y="1801368"/>
-            <a:ext cx="5129783" cy="1920240"/>
-          </a:xfrm>
-          <a:prstGeom prst="rect">
-            <a:avLst/>
-          </a:prstGeom>
-          <a:noFill/>
-        </p:spPr>
-        <p:txBody>
-          <a:bodyPr wrap="square" lIns="0" rIns="0" tIns="0" bIns="0" anchor="t">
-            <a:spAutoFit/>
-          </a:bodyPr>
-          <a:lstStyle/>
-          <a:p>
-            <a:pPr algn="l">
-              <a:lnSpc>
-                <a:spcPct val="110000"/>
-              </a:lnSpc>
-              <a:spcBef>
-                <a:spcPts val="0"/>
-              </a:spcBef>
-              <a:spcAft>
-                <a:spcPts val="500"/>
-              </a:spcAft>
-            </a:pPr>
-            <a:r>
-              <a:rPr sz="1050" b="0" i="0">
-                <a:solidFill>
-                  <a:srgbClr val="F5F7FB"/>
-                </a:solidFill>
-                <a:latin typeface="Bahnschrift SemiBold"/>
-              </a:rPr>
-              <a:t>1 · Hipótese escrita antes. </a:t>
-            </a:r>
-            <a:r>
-              <a:rPr sz="1050" b="0" i="0">
-                <a:solidFill>
-                  <a:srgbClr val="BAC6DA"/>
-                </a:solidFill>
-                <a:latin typeface="Bahnschrift SemiLight"/>
-              </a:rPr>
-              <a:t>Entra em Decisoes_pendentes.md com o teste que a derruba e a régua de corte — antes de olhar o dado.</a:t>
-            </a:r>
-          </a:p>
-          <a:p>
-            <a:pPr algn="l">
-              <a:lnSpc>
-                <a:spcPct val="110000"/>
-              </a:lnSpc>
-              <a:spcBef>
-                <a:spcPts val="0"/>
-              </a:spcBef>
-              <a:spcAft>
-                <a:spcPts val="500"/>
-              </a:spcAft>
-            </a:pPr>
-            <a:r>
-              <a:rPr sz="1050" b="0" i="0">
-                <a:solidFill>
-                  <a:srgbClr val="F5F7FB"/>
-                </a:solidFill>
-                <a:latin typeface="Bahnschrift SemiBold"/>
-              </a:rPr>
-              <a:t>2 · Um script por hipótese. </a:t>
-            </a:r>
-            <a:r>
-              <a:rPr sz="1050" b="0" i="0">
-                <a:solidFill>
-                  <a:srgbClr val="BAC6DA"/>
-                </a:solidFill>
-                <a:latin typeface="Bahnschrift SemiLight"/>
-              </a:rPr>
-              <a:t>gate_*.py e premissa_*.py medem no dado; a saída é um .md com os números e o carimbo “mede; não decide”.</a:t>
-            </a:r>
-          </a:p>
-          <a:p>
-            <a:pPr algn="l">
-              <a:lnSpc>
-                <a:spcPct val="110000"/>
-              </a:lnSpc>
-              <a:spcBef>
-                <a:spcPts val="0"/>
-              </a:spcBef>
-              <a:spcAft>
-                <a:spcPts val="500"/>
-              </a:spcAft>
-            </a:pPr>
-            <a:r>
-              <a:rPr sz="1050" b="0" i="0">
-                <a:solidFill>
-                  <a:srgbClr val="F5F7FB"/>
-                </a:solidFill>
-                <a:latin typeface="Bahnschrift SemiBold"/>
-              </a:rPr>
-              <a:t>3 · Régua declarada, não ajustada. </a:t>
-            </a:r>
-            <a:r>
-              <a:rPr sz="1050" b="0" i="0">
-                <a:solidFill>
-                  <a:srgbClr val="BAC6DA"/>
-                </a:solidFill>
-                <a:latin typeface="Bahnschrift SemiLight"/>
-              </a:rPr>
-              <a:t>|t| ≥ 2, sinal coerente com a literatura, janela expansiva sem lookahead. Passa no dado, não no retorno.</a:t>
-            </a:r>
-          </a:p>
-          <a:p>
-            <a:pPr algn="l">
-              <a:lnSpc>
-                <a:spcPct val="110000"/>
-              </a:lnSpc>
-              <a:spcBef>
-                <a:spcPts val="0"/>
-              </a:spcBef>
-              <a:spcAft>
-                <a:spcPts val="500"/>
-              </a:spcAft>
-            </a:pPr>
-            <a:r>
-              <a:rPr sz="1050" b="0" i="0">
-                <a:solidFill>
-                  <a:srgbClr val="F5F7FB"/>
-                </a:solidFill>
-                <a:latin typeface="Bahnschrift SemiBold"/>
-              </a:rPr>
-              <a:t>4 · Humano fecha; o que caiu fica. </a:t>
-            </a:r>
-            <a:r>
-              <a:rPr sz="1050" b="0" i="0">
-                <a:solidFill>
-                  <a:srgbClr val="BAC6DA"/>
-                </a:solidFill>
-                <a:latin typeface="Bahnschrift SemiLight"/>
-              </a:rPr>
-              <a:t>A IA nunca fecha decisão. Cada reprovação continua no repositório, com número — e a banca pode conferir.</a:t>
-            </a:r>
-          </a:p>
-        </p:txBody>
-      </p:sp>
-      <p:sp>
-        <p:nvSpPr>
-          <p:cNvPr id="78" name="s13_76"/>
-          <p:cNvSpPr/>
-          <p:nvPr/>
-        </p:nvSpPr>
-        <p:spPr>
-          <a:xfrm>
-            <a:off x="6327648" y="3858768"/>
-            <a:ext cx="5129783" cy="1371600"/>
-          </a:xfrm>
-          <a:prstGeom prst="roundRect">
-            <a:avLst>
-              <a:gd name="adj" fmla="val 4000"/>
-            </a:avLst>
-          </a:prstGeom>
-          <a:gradFill rotWithShape="1">
-            <a:gsLst>
-              <a:gs pos="0">
-                <a:srgbClr val="182946"/>
-              </a:gs>
-              <a:gs pos="100000">
-                <a:srgbClr val="0F182B"/>
-              </a:gs>
-            </a:gsLst>
-            <a:lin ang="5400000" scaled="0"/>
-          </a:gradFill>
-          <a:ln w="9525">
-            <a:gradFill rotWithShape="1">
-              <a:gsLst>
-                <a:gs pos="0">
-                  <a:srgbClr val="35507A"/>
-                </a:gs>
-                <a:gs pos="100000">
-                  <a:srgbClr val="22345A"/>
-                </a:gs>
-              </a:gsLst>
-              <a:lin ang="5400000" scaled="0"/>
-            </a:gradFill>
-          </a:ln>
-          <a:effectLst/>
-        </p:spPr>
-        <p:style>
-          <a:lnRef idx="1">
-            <a:schemeClr val="accent1"/>
-          </a:lnRef>
-          <a:fillRef idx="3">
-            <a:schemeClr val="accent1"/>
-          </a:fillRef>
-          <a:effectRef idx="2">
-            <a:schemeClr val="accent1"/>
-          </a:effectRef>
-          <a:fontRef idx="minor">
-            <a:schemeClr val="lt1"/>
-          </a:fontRef>
-        </p:style>
-        <p:txBody>
-          <a:bodyPr rtlCol="0" anchor="ctr"/>
-          <a:lstStyle/>
-          <a:p/>
-        </p:txBody>
-      </p:sp>
-      <p:sp>
-        <p:nvSpPr>
-          <p:cNvPr id="79" name="s13_77"/>
-          <p:cNvSpPr txBox="1"/>
-          <p:nvPr/>
-        </p:nvSpPr>
-        <p:spPr>
-          <a:xfrm>
-            <a:off x="6547104" y="4005072"/>
-            <a:ext cx="4764023" cy="182880"/>
-          </a:xfrm>
-          <a:prstGeom prst="rect">
-            <a:avLst/>
-          </a:prstGeom>
-          <a:noFill/>
-        </p:spPr>
-        <p:txBody>
-          <a:bodyPr wrap="square" lIns="0" rIns="0" tIns="0" bIns="0" anchor="t">
-            <a:spAutoFit/>
-          </a:bodyPr>
-          <a:lstStyle/>
-          <a:p>
-            <a:pPr algn="l">
-              <a:lnSpc>
-                <a:spcPct val="100000"/>
-              </a:lnSpc>
-              <a:spcBef>
-                <a:spcPts val="0"/>
-              </a:spcBef>
-              <a:spcAft>
-                <a:spcPts val="0"/>
-              </a:spcAft>
-            </a:pPr>
-            <a:r>
-              <a:rPr sz="900" b="1" i="0" spc="180">
-                <a:solidFill>
-                  <a:srgbClr val="FFB531"/>
-                </a:solidFill>
-                <a:latin typeface="Consolas"/>
-              </a:rPr>
-              <a:t>UMA QUE CAIU  ·  MOMENTUM DO SINAL</a:t>
-            </a:r>
-          </a:p>
-        </p:txBody>
-      </p:sp>
-      <p:sp>
-        <p:nvSpPr>
-          <p:cNvPr id="80" name="s13_78"/>
-          <p:cNvSpPr txBox="1"/>
-          <p:nvPr/>
-        </p:nvSpPr>
-        <p:spPr>
-          <a:xfrm>
-            <a:off x="6547104" y="4242816"/>
-            <a:ext cx="4690871" cy="457200"/>
-          </a:xfrm>
-          <a:prstGeom prst="rect">
-            <a:avLst/>
-          </a:prstGeom>
-          <a:noFill/>
-        </p:spPr>
-        <p:txBody>
-          <a:bodyPr wrap="square" lIns="0" rIns="0" tIns="0" bIns="0" anchor="t">
-            <a:spAutoFit/>
-          </a:bodyPr>
-          <a:lstStyle/>
-          <a:p>
-            <a:pPr algn="l">
-              <a:lnSpc>
-                <a:spcPct val="110000"/>
-              </a:lnSpc>
-              <a:spcBef>
-                <a:spcPts val="0"/>
-              </a:spcBef>
-              <a:spcAft>
-                <a:spcPts val="0"/>
-              </a:spcAft>
-            </a:pPr>
-            <a:r>
-              <a:rPr sz="950" b="0" i="0">
-                <a:solidFill>
-                  <a:srgbClr val="F5F7FB"/>
-                </a:solidFill>
-                <a:latin typeface="Bahnschrift SemiBold"/>
-              </a:rPr>
-              <a:t>Tese: </a:t>
-            </a:r>
-            <a:r>
-              <a:rPr sz="950" b="0" i="0">
-                <a:solidFill>
-                  <a:srgbClr val="BAC6DA"/>
-                </a:solidFill>
-                <a:latin typeface="Bahnschrift SemiLight"/>
-              </a:rPr>
-              <a:t>se a probabilidade subiu hoje, continua subindo amanhã — daria uma sleeve de tendência. Teste: variance ratio dos incrementos, VR = 1 é passeio aleatório.</a:t>
-            </a:r>
-          </a:p>
-        </p:txBody>
-      </p:sp>
-      <p:sp>
-        <p:nvSpPr>
-          <p:cNvPr id="81" name="s13_79"/>
-          <p:cNvSpPr txBox="1"/>
-          <p:nvPr/>
-        </p:nvSpPr>
-        <p:spPr>
-          <a:xfrm>
-            <a:off x="6547104" y="4645152"/>
-            <a:ext cx="781811" cy="182880"/>
-          </a:xfrm>
-          <a:prstGeom prst="rect">
-            <a:avLst/>
-          </a:prstGeom>
-          <a:noFill/>
-        </p:spPr>
-        <p:txBody>
-          <a:bodyPr wrap="square" lIns="0" rIns="0" tIns="0" bIns="0" anchor="t">
-            <a:spAutoFit/>
-          </a:bodyPr>
-          <a:lstStyle/>
-          <a:p>
-            <a:pPr algn="ctr">
-              <a:lnSpc>
-                <a:spcPct val="100000"/>
-              </a:lnSpc>
-              <a:spcBef>
-                <a:spcPts val="0"/>
-              </a:spcBef>
-              <a:spcAft>
-                <a:spcPts val="0"/>
-              </a:spcAft>
-            </a:pPr>
-            <a:r>
-              <a:rPr sz="750" b="0" i="0">
-                <a:solidFill>
-                  <a:srgbClr val="8395B5"/>
-                </a:solidFill>
-                <a:latin typeface="Consolas"/>
-              </a:rPr>
-              <a:t>k=1</a:t>
-            </a:r>
-          </a:p>
-        </p:txBody>
-      </p:sp>
-      <p:sp>
-        <p:nvSpPr>
-          <p:cNvPr id="82" name="s13_80"/>
-          <p:cNvSpPr txBox="1"/>
-          <p:nvPr/>
-        </p:nvSpPr>
-        <p:spPr>
-          <a:xfrm>
-            <a:off x="6547104" y="4791456"/>
-            <a:ext cx="781811" cy="256032"/>
-          </a:xfrm>
-          <a:prstGeom prst="rect">
-            <a:avLst/>
-          </a:prstGeom>
-          <a:noFill/>
-        </p:spPr>
-        <p:txBody>
-          <a:bodyPr wrap="square" lIns="0" rIns="0" tIns="0" bIns="0" anchor="t">
-            <a:spAutoFit/>
-          </a:bodyPr>
-          <a:lstStyle/>
-          <a:p>
-            <a:pPr algn="ctr">
-              <a:lnSpc>
-                <a:spcPct val="100000"/>
-              </a:lnSpc>
-              <a:spcBef>
-                <a:spcPts val="0"/>
-              </a:spcBef>
-              <a:spcAft>
-                <a:spcPts val="0"/>
-              </a:spcAft>
-            </a:pPr>
-            <a:r>
-              <a:rPr sz="1500" b="0" i="0">
-                <a:solidFill>
-                  <a:srgbClr val="FFB531"/>
-                </a:solidFill>
-                <a:latin typeface="Bahnschrift SemiBold Condensed"/>
-              </a:rPr>
-              <a:t>1,00</a:t>
-            </a:r>
-          </a:p>
-        </p:txBody>
-      </p:sp>
-      <p:sp>
-        <p:nvSpPr>
-          <p:cNvPr id="83" name="s13_81"/>
-          <p:cNvSpPr txBox="1"/>
-          <p:nvPr/>
-        </p:nvSpPr>
-        <p:spPr>
-          <a:xfrm>
-            <a:off x="7328916" y="4645152"/>
-            <a:ext cx="781811" cy="182880"/>
-          </a:xfrm>
-          <a:prstGeom prst="rect">
-            <a:avLst/>
-          </a:prstGeom>
-          <a:noFill/>
-        </p:spPr>
-        <p:txBody>
-          <a:bodyPr wrap="square" lIns="0" rIns="0" tIns="0" bIns="0" anchor="t">
-            <a:spAutoFit/>
-          </a:bodyPr>
-          <a:lstStyle/>
-          <a:p>
-            <a:pPr algn="ctr">
-              <a:lnSpc>
-                <a:spcPct val="100000"/>
-              </a:lnSpc>
-              <a:spcBef>
-                <a:spcPts val="0"/>
-              </a:spcBef>
-              <a:spcAft>
-                <a:spcPts val="0"/>
-              </a:spcAft>
-            </a:pPr>
-            <a:r>
-              <a:rPr sz="750" b="0" i="0">
-                <a:solidFill>
-                  <a:srgbClr val="8395B5"/>
-                </a:solidFill>
-                <a:latin typeface="Consolas"/>
-              </a:rPr>
-              <a:t>k=2</a:t>
-            </a:r>
-          </a:p>
-        </p:txBody>
-      </p:sp>
-      <p:sp>
-        <p:nvSpPr>
-          <p:cNvPr id="84" name="s13_82"/>
-          <p:cNvSpPr txBox="1"/>
-          <p:nvPr/>
-        </p:nvSpPr>
-        <p:spPr>
-          <a:xfrm>
-            <a:off x="7328916" y="4791456"/>
-            <a:ext cx="781811" cy="256032"/>
-          </a:xfrm>
-          <a:prstGeom prst="rect">
-            <a:avLst/>
-          </a:prstGeom>
-          <a:noFill/>
-        </p:spPr>
-        <p:txBody>
-          <a:bodyPr wrap="square" lIns="0" rIns="0" tIns="0" bIns="0" anchor="t">
-            <a:spAutoFit/>
-          </a:bodyPr>
-          <a:lstStyle/>
-          <a:p>
-            <a:pPr algn="ctr">
-              <a:lnSpc>
-                <a:spcPct val="100000"/>
-              </a:lnSpc>
-              <a:spcBef>
-                <a:spcPts val="0"/>
-              </a:spcBef>
-              <a:spcAft>
-                <a:spcPts val="0"/>
-              </a:spcAft>
-            </a:pPr>
-            <a:r>
-              <a:rPr sz="1500" b="0" i="0">
-                <a:solidFill>
-                  <a:srgbClr val="FFB531"/>
-                </a:solidFill>
-                <a:latin typeface="Bahnschrift SemiBold Condensed"/>
-              </a:rPr>
-              <a:t>1,05</a:t>
-            </a:r>
-          </a:p>
-        </p:txBody>
-      </p:sp>
-      <p:sp>
-        <p:nvSpPr>
-          <p:cNvPr id="85" name="s13_83"/>
-          <p:cNvSpPr txBox="1"/>
-          <p:nvPr/>
-        </p:nvSpPr>
-        <p:spPr>
-          <a:xfrm>
-            <a:off x="8110727" y="4645152"/>
-            <a:ext cx="781811" cy="182880"/>
-          </a:xfrm>
-          <a:prstGeom prst="rect">
-            <a:avLst/>
-          </a:prstGeom>
-          <a:noFill/>
-        </p:spPr>
-        <p:txBody>
-          <a:bodyPr wrap="square" lIns="0" rIns="0" tIns="0" bIns="0" anchor="t">
-            <a:spAutoFit/>
-          </a:bodyPr>
-          <a:lstStyle/>
-          <a:p>
-            <a:pPr algn="ctr">
-              <a:lnSpc>
-                <a:spcPct val="100000"/>
-              </a:lnSpc>
-              <a:spcBef>
-                <a:spcPts val="0"/>
-              </a:spcBef>
-              <a:spcAft>
-                <a:spcPts val="0"/>
-              </a:spcAft>
-            </a:pPr>
-            <a:r>
-              <a:rPr sz="750" b="0" i="0">
-                <a:solidFill>
-                  <a:srgbClr val="8395B5"/>
-                </a:solidFill>
-                <a:latin typeface="Consolas"/>
-              </a:rPr>
-              <a:t>k=3</a:t>
-            </a:r>
-          </a:p>
-        </p:txBody>
-      </p:sp>
-      <p:sp>
-        <p:nvSpPr>
-          <p:cNvPr id="86" name="s13_84"/>
-          <p:cNvSpPr txBox="1"/>
-          <p:nvPr/>
-        </p:nvSpPr>
-        <p:spPr>
-          <a:xfrm>
-            <a:off x="8110727" y="4791456"/>
-            <a:ext cx="781811" cy="256032"/>
-          </a:xfrm>
-          <a:prstGeom prst="rect">
-            <a:avLst/>
-          </a:prstGeom>
-          <a:noFill/>
-        </p:spPr>
-        <p:txBody>
-          <a:bodyPr wrap="square" lIns="0" rIns="0" tIns="0" bIns="0" anchor="t">
-            <a:spAutoFit/>
-          </a:bodyPr>
-          <a:lstStyle/>
-          <a:p>
-            <a:pPr algn="ctr">
-              <a:lnSpc>
-                <a:spcPct val="100000"/>
-              </a:lnSpc>
-              <a:spcBef>
-                <a:spcPts val="0"/>
-              </a:spcBef>
-              <a:spcAft>
-                <a:spcPts val="0"/>
-              </a:spcAft>
-            </a:pPr>
-            <a:r>
-              <a:rPr sz="1500" b="0" i="0">
-                <a:solidFill>
-                  <a:srgbClr val="FFB531"/>
-                </a:solidFill>
-                <a:latin typeface="Bahnschrift SemiBold Condensed"/>
-              </a:rPr>
-              <a:t>1,12</a:t>
-            </a:r>
-          </a:p>
-        </p:txBody>
-      </p:sp>
-      <p:sp>
-        <p:nvSpPr>
-          <p:cNvPr id="87" name="s13_85"/>
-          <p:cNvSpPr txBox="1"/>
-          <p:nvPr/>
-        </p:nvSpPr>
-        <p:spPr>
-          <a:xfrm>
-            <a:off x="8892540" y="4645152"/>
-            <a:ext cx="781811" cy="182880"/>
-          </a:xfrm>
-          <a:prstGeom prst="rect">
-            <a:avLst/>
-          </a:prstGeom>
-          <a:noFill/>
-        </p:spPr>
-        <p:txBody>
-          <a:bodyPr wrap="square" lIns="0" rIns="0" tIns="0" bIns="0" anchor="t">
-            <a:spAutoFit/>
-          </a:bodyPr>
-          <a:lstStyle/>
-          <a:p>
-            <a:pPr algn="ctr">
-              <a:lnSpc>
-                <a:spcPct val="100000"/>
-              </a:lnSpc>
-              <a:spcBef>
-                <a:spcPts val="0"/>
-              </a:spcBef>
-              <a:spcAft>
-                <a:spcPts val="0"/>
-              </a:spcAft>
-            </a:pPr>
-            <a:r>
-              <a:rPr sz="750" b="0" i="0">
-                <a:solidFill>
-                  <a:srgbClr val="8395B5"/>
-                </a:solidFill>
-                <a:latin typeface="Consolas"/>
-              </a:rPr>
-              <a:t>k=5</a:t>
-            </a:r>
-          </a:p>
-        </p:txBody>
-      </p:sp>
-      <p:sp>
-        <p:nvSpPr>
-          <p:cNvPr id="88" name="s13_86"/>
-          <p:cNvSpPr txBox="1"/>
-          <p:nvPr/>
-        </p:nvSpPr>
-        <p:spPr>
-          <a:xfrm>
-            <a:off x="8892540" y="4791456"/>
-            <a:ext cx="781811" cy="256032"/>
-          </a:xfrm>
-          <a:prstGeom prst="rect">
-            <a:avLst/>
-          </a:prstGeom>
-          <a:noFill/>
-        </p:spPr>
-        <p:txBody>
-          <a:bodyPr wrap="square" lIns="0" rIns="0" tIns="0" bIns="0" anchor="t">
-            <a:spAutoFit/>
-          </a:bodyPr>
-          <a:lstStyle/>
-          <a:p>
-            <a:pPr algn="ctr">
-              <a:lnSpc>
-                <a:spcPct val="100000"/>
-              </a:lnSpc>
-              <a:spcBef>
-                <a:spcPts val="0"/>
-              </a:spcBef>
-              <a:spcAft>
-                <a:spcPts val="0"/>
-              </a:spcAft>
-            </a:pPr>
-            <a:r>
-              <a:rPr sz="1500" b="0" i="0">
-                <a:solidFill>
-                  <a:srgbClr val="FFB531"/>
-                </a:solidFill>
-                <a:latin typeface="Bahnschrift SemiBold Condensed"/>
-              </a:rPr>
-              <a:t>1,11</a:t>
-            </a:r>
-          </a:p>
-        </p:txBody>
-      </p:sp>
-      <p:sp>
-        <p:nvSpPr>
-          <p:cNvPr id="89" name="s13_87"/>
-          <p:cNvSpPr txBox="1"/>
-          <p:nvPr/>
-        </p:nvSpPr>
-        <p:spPr>
-          <a:xfrm>
-            <a:off x="9674352" y="4645152"/>
-            <a:ext cx="781811" cy="182880"/>
-          </a:xfrm>
-          <a:prstGeom prst="rect">
-            <a:avLst/>
-          </a:prstGeom>
-          <a:noFill/>
-        </p:spPr>
-        <p:txBody>
-          <a:bodyPr wrap="square" lIns="0" rIns="0" tIns="0" bIns="0" anchor="t">
-            <a:spAutoFit/>
-          </a:bodyPr>
-          <a:lstStyle/>
-          <a:p>
-            <a:pPr algn="ctr">
-              <a:lnSpc>
-                <a:spcPct val="100000"/>
-              </a:lnSpc>
-              <a:spcBef>
-                <a:spcPts val="0"/>
-              </a:spcBef>
-              <a:spcAft>
-                <a:spcPts val="0"/>
-              </a:spcAft>
-            </a:pPr>
-            <a:r>
-              <a:rPr sz="750" b="0" i="0">
-                <a:solidFill>
-                  <a:srgbClr val="8395B5"/>
-                </a:solidFill>
-                <a:latin typeface="Consolas"/>
-              </a:rPr>
-              <a:t>k=10</a:t>
-            </a:r>
-          </a:p>
-        </p:txBody>
-      </p:sp>
-      <p:sp>
-        <p:nvSpPr>
-          <p:cNvPr id="90" name="s13_88"/>
-          <p:cNvSpPr txBox="1"/>
-          <p:nvPr/>
-        </p:nvSpPr>
-        <p:spPr>
-          <a:xfrm>
-            <a:off x="9674352" y="4791456"/>
-            <a:ext cx="781811" cy="256032"/>
-          </a:xfrm>
-          <a:prstGeom prst="rect">
-            <a:avLst/>
-          </a:prstGeom>
-          <a:noFill/>
-        </p:spPr>
-        <p:txBody>
-          <a:bodyPr wrap="square" lIns="0" rIns="0" tIns="0" bIns="0" anchor="t">
-            <a:spAutoFit/>
-          </a:bodyPr>
-          <a:lstStyle/>
-          <a:p>
-            <a:pPr algn="ctr">
-              <a:lnSpc>
-                <a:spcPct val="100000"/>
-              </a:lnSpc>
-              <a:spcBef>
-                <a:spcPts val="0"/>
-              </a:spcBef>
-              <a:spcAft>
-                <a:spcPts val="0"/>
-              </a:spcAft>
-            </a:pPr>
-            <a:r>
-              <a:rPr sz="1500" b="0" i="0">
-                <a:solidFill>
-                  <a:srgbClr val="FFB531"/>
-                </a:solidFill>
-                <a:latin typeface="Bahnschrift SemiBold Condensed"/>
-              </a:rPr>
-              <a:t>1,18</a:t>
-            </a:r>
-          </a:p>
-        </p:txBody>
-      </p:sp>
-      <p:sp>
-        <p:nvSpPr>
-          <p:cNvPr id="91" name="s13_89"/>
-          <p:cNvSpPr txBox="1"/>
-          <p:nvPr/>
-        </p:nvSpPr>
-        <p:spPr>
-          <a:xfrm>
-            <a:off x="10456163" y="4645152"/>
-            <a:ext cx="781811" cy="182880"/>
-          </a:xfrm>
-          <a:prstGeom prst="rect">
-            <a:avLst/>
-          </a:prstGeom>
-          <a:noFill/>
-        </p:spPr>
-        <p:txBody>
-          <a:bodyPr wrap="square" lIns="0" rIns="0" tIns="0" bIns="0" anchor="t">
-            <a:spAutoFit/>
-          </a:bodyPr>
-          <a:lstStyle/>
-          <a:p>
-            <a:pPr algn="ctr">
-              <a:lnSpc>
-                <a:spcPct val="100000"/>
-              </a:lnSpc>
-              <a:spcBef>
-                <a:spcPts val="0"/>
-              </a:spcBef>
-              <a:spcAft>
-                <a:spcPts val="0"/>
-              </a:spcAft>
-            </a:pPr>
-            <a:r>
-              <a:rPr sz="750" b="0" i="0">
-                <a:solidFill>
-                  <a:srgbClr val="8395B5"/>
-                </a:solidFill>
-                <a:latin typeface="Consolas"/>
-              </a:rPr>
-              <a:t>k=20</a:t>
-            </a:r>
-          </a:p>
-        </p:txBody>
-      </p:sp>
-      <p:sp>
-        <p:nvSpPr>
-          <p:cNvPr id="92" name="s13_90"/>
-          <p:cNvSpPr txBox="1"/>
-          <p:nvPr/>
-        </p:nvSpPr>
-        <p:spPr>
-          <a:xfrm>
-            <a:off x="10456163" y="4791456"/>
-            <a:ext cx="781811" cy="256032"/>
-          </a:xfrm>
-          <a:prstGeom prst="rect">
-            <a:avLst/>
-          </a:prstGeom>
-          <a:noFill/>
-        </p:spPr>
-        <p:txBody>
-          <a:bodyPr wrap="square" lIns="0" rIns="0" tIns="0" bIns="0" anchor="t">
-            <a:spAutoFit/>
-          </a:bodyPr>
-          <a:lstStyle/>
-          <a:p>
-            <a:pPr algn="ctr">
-              <a:lnSpc>
-                <a:spcPct val="100000"/>
-              </a:lnSpc>
-              <a:spcBef>
-                <a:spcPts val="0"/>
-              </a:spcBef>
-              <a:spcAft>
-                <a:spcPts val="0"/>
-              </a:spcAft>
-            </a:pPr>
-            <a:r>
-              <a:rPr sz="1500" b="0" i="0">
-                <a:solidFill>
-                  <a:srgbClr val="FFB531"/>
-                </a:solidFill>
-                <a:latin typeface="Bahnschrift SemiBold Condensed"/>
-              </a:rPr>
-              <a:t>0,97</a:t>
-            </a:r>
-          </a:p>
-        </p:txBody>
-      </p:sp>
-      <p:sp>
-        <p:nvSpPr>
-          <p:cNvPr id="93" name="s13_91"/>
-          <p:cNvSpPr txBox="1"/>
-          <p:nvPr/>
-        </p:nvSpPr>
-        <p:spPr>
-          <a:xfrm>
-            <a:off x="6547104" y="5029200"/>
-            <a:ext cx="4690871" cy="182880"/>
-          </a:xfrm>
-          <a:prstGeom prst="rect">
-            <a:avLst/>
-          </a:prstGeom>
-          <a:noFill/>
-        </p:spPr>
-        <p:txBody>
-          <a:bodyPr wrap="none" lIns="0" rIns="0" tIns="0" bIns="0" anchor="t">
-            <a:spAutoFit/>
-          </a:bodyPr>
-          <a:lstStyle/>
-          <a:p>
-            <a:pPr algn="l">
-              <a:lnSpc>
-                <a:spcPct val="100000"/>
-              </a:lnSpc>
-              <a:spcBef>
-                <a:spcPts val="0"/>
-              </a:spcBef>
-              <a:spcAft>
-                <a:spcPts val="0"/>
-              </a:spcAft>
-            </a:pPr>
-            <a:r>
-              <a:rPr sz="850" b="0" i="0">
-                <a:solidFill>
-                  <a:srgbClr val="8395B5"/>
-                </a:solidFill>
-                <a:latin typeface="Bahnschrift SemiLight"/>
-              </a:rPr>
-              <a:t>colado em 1 e nenhum |t| ≥ 2 nos seis horizontes: a sleeve não entrou (Premissa_tendencia.md).</a:t>
-            </a:r>
-          </a:p>
-        </p:txBody>
-      </p:sp>
-      <p:sp>
-        <p:nvSpPr>
-          <p:cNvPr id="94" name="s13_92"/>
-          <p:cNvSpPr txBox="1"/>
-          <p:nvPr/>
-        </p:nvSpPr>
-        <p:spPr>
-          <a:xfrm>
-            <a:off x="6327648" y="5413248"/>
-            <a:ext cx="5129783" cy="182880"/>
-          </a:xfrm>
-          <a:prstGeom prst="rect">
-            <a:avLst/>
-          </a:prstGeom>
-          <a:noFill/>
-        </p:spPr>
-        <p:txBody>
-          <a:bodyPr wrap="square" lIns="0" rIns="0" tIns="0" bIns="0" anchor="t">
-            <a:spAutoFit/>
-          </a:bodyPr>
-          <a:lstStyle/>
-          <a:p>
-            <a:pPr algn="l">
-              <a:lnSpc>
-                <a:spcPct val="100000"/>
-              </a:lnSpc>
-              <a:spcBef>
-                <a:spcPts val="0"/>
-              </a:spcBef>
-              <a:spcAft>
-                <a:spcPts val="0"/>
-              </a:spcAft>
-            </a:pPr>
-            <a:r>
-              <a:rPr sz="900" b="1" i="0" spc="180">
-                <a:solidFill>
-                  <a:srgbClr val="FFB531"/>
-                </a:solidFill>
-                <a:latin typeface="Consolas"/>
-              </a:rPr>
-              <a:t>A PENEIRA  ·  31 HIPÓTESES MEDIDAS, 7 ENTRARAM</a:t>
-            </a:r>
-          </a:p>
-        </p:txBody>
-      </p:sp>
-      <p:sp>
-        <p:nvSpPr>
-          <p:cNvPr id="95" name="s13_93"/>
-          <p:cNvSpPr txBox="1"/>
-          <p:nvPr/>
-        </p:nvSpPr>
-        <p:spPr>
-          <a:xfrm>
-            <a:off x="6327648" y="5650992"/>
-            <a:ext cx="1600200" cy="182880"/>
-          </a:xfrm>
-          <a:prstGeom prst="rect">
-            <a:avLst/>
-          </a:prstGeom>
-          <a:noFill/>
-        </p:spPr>
-        <p:txBody>
-          <a:bodyPr wrap="square" lIns="0" rIns="0" tIns="0" bIns="0" anchor="ctr">
-            <a:spAutoFit/>
-          </a:bodyPr>
-          <a:lstStyle/>
-          <a:p>
-            <a:pPr algn="l">
-              <a:lnSpc>
-                <a:spcPct val="100000"/>
-              </a:lnSpc>
-              <a:spcBef>
-                <a:spcPts val="0"/>
-              </a:spcBef>
-              <a:spcAft>
-                <a:spcPts val="0"/>
-              </a:spcAft>
-            </a:pPr>
-            <a:r>
-              <a:rPr sz="850" b="0" i="0">
-                <a:solidFill>
-                  <a:srgbClr val="BAC6DA"/>
-                </a:solidFill>
-                <a:latin typeface="Bahnschrift SemiLight"/>
-              </a:rPr>
-              <a:t>13 ideias de sinal</a:t>
-            </a:r>
-          </a:p>
-        </p:txBody>
-      </p:sp>
-      <p:sp>
-        <p:nvSpPr>
-          <p:cNvPr id="96" name="s13_94"/>
-          <p:cNvSpPr/>
-          <p:nvPr/>
-        </p:nvSpPr>
-        <p:spPr>
-          <a:xfrm>
-            <a:off x="7978140" y="5701284"/>
+            <a:off x="8398764" y="5426964"/>
             <a:ext cx="82296" cy="82296"/>
           </a:xfrm>
           <a:prstGeom prst="ellipse">
@@ -27170,13 +25090,13 @@
       </p:sp>
       <p:sp>
         <p:nvSpPr>
-          <p:cNvPr id="97" name="s13_95"/>
+          <p:cNvPr id="56" name="s13_54"/>
           <p:cNvSpPr/>
           <p:nvPr/>
         </p:nvSpPr>
         <p:spPr>
           <a:xfrm>
-            <a:off x="8161019" y="5701284"/>
+            <a:off x="8581644" y="5426964"/>
             <a:ext cx="82296" cy="82296"/>
           </a:xfrm>
           <a:prstGeom prst="ellipse">
@@ -27212,13 +25132,13 @@
       </p:sp>
       <p:sp>
         <p:nvSpPr>
-          <p:cNvPr id="98" name="s13_96"/>
+          <p:cNvPr id="57" name="s13_55"/>
           <p:cNvSpPr/>
           <p:nvPr/>
         </p:nvSpPr>
         <p:spPr>
           <a:xfrm>
-            <a:off x="8343900" y="5701284"/>
+            <a:off x="8764524" y="5426964"/>
             <a:ext cx="82296" cy="82296"/>
           </a:xfrm>
           <a:prstGeom prst="ellipse">
@@ -27254,13 +25174,13 @@
       </p:sp>
       <p:sp>
         <p:nvSpPr>
-          <p:cNvPr id="99" name="s13_97"/>
+          <p:cNvPr id="58" name="s13_56"/>
           <p:cNvSpPr/>
           <p:nvPr/>
         </p:nvSpPr>
         <p:spPr>
           <a:xfrm>
-            <a:off x="8526780" y="5701284"/>
+            <a:off x="8947404" y="5426964"/>
             <a:ext cx="82296" cy="82296"/>
           </a:xfrm>
           <a:prstGeom prst="ellipse">
@@ -27296,13 +25216,13 @@
       </p:sp>
       <p:sp>
         <p:nvSpPr>
-          <p:cNvPr id="100" name="s13_98"/>
+          <p:cNvPr id="59" name="s13_57"/>
           <p:cNvSpPr/>
           <p:nvPr/>
         </p:nvSpPr>
         <p:spPr>
           <a:xfrm>
-            <a:off x="8709660" y="5701284"/>
+            <a:off x="9130284" y="5426964"/>
             <a:ext cx="82296" cy="82296"/>
           </a:xfrm>
           <a:prstGeom prst="ellipse">
@@ -27338,13 +25258,13 @@
       </p:sp>
       <p:sp>
         <p:nvSpPr>
-          <p:cNvPr id="101" name="s13_99"/>
+          <p:cNvPr id="60" name="s13_58"/>
           <p:cNvSpPr/>
           <p:nvPr/>
         </p:nvSpPr>
         <p:spPr>
           <a:xfrm>
-            <a:off x="8892540" y="5701284"/>
+            <a:off x="9313164" y="5426964"/>
             <a:ext cx="82296" cy="82296"/>
           </a:xfrm>
           <a:prstGeom prst="ellipse">
@@ -27380,14 +25300,14 @@
       </p:sp>
       <p:sp>
         <p:nvSpPr>
-          <p:cNvPr id="102" name="s13_100"/>
+          <p:cNvPr id="61" name="s13_59"/>
           <p:cNvSpPr/>
           <p:nvPr/>
         </p:nvSpPr>
         <p:spPr>
           <a:xfrm>
-            <a:off x="9061703" y="5687568"/>
-            <a:ext cx="109728" cy="109728"/>
+            <a:off x="9477756" y="5408676"/>
+            <a:ext cx="118872" cy="118872"/>
           </a:xfrm>
           <a:prstGeom prst="ellipse">
             <a:avLst/>
@@ -27428,13 +25348,13 @@
       </p:sp>
       <p:sp>
         <p:nvSpPr>
-          <p:cNvPr id="103" name="s13_101"/>
+          <p:cNvPr id="62" name="s13_60"/>
           <p:cNvSpPr/>
           <p:nvPr/>
         </p:nvSpPr>
         <p:spPr>
           <a:xfrm>
-            <a:off x="9258300" y="5701284"/>
+            <a:off x="9678924" y="5426964"/>
             <a:ext cx="82296" cy="82296"/>
           </a:xfrm>
           <a:prstGeom prst="ellipse">
@@ -27470,13 +25390,13 @@
       </p:sp>
       <p:sp>
         <p:nvSpPr>
-          <p:cNvPr id="104" name="s13_102"/>
+          <p:cNvPr id="63" name="s13_61"/>
           <p:cNvSpPr/>
           <p:nvPr/>
         </p:nvSpPr>
         <p:spPr>
           <a:xfrm>
-            <a:off x="9441180" y="5701284"/>
+            <a:off x="9861804" y="5426964"/>
             <a:ext cx="82296" cy="82296"/>
           </a:xfrm>
           <a:prstGeom prst="ellipse">
@@ -27512,13 +25432,13 @@
       </p:sp>
       <p:sp>
         <p:nvSpPr>
-          <p:cNvPr id="105" name="s13_103"/>
+          <p:cNvPr id="64" name="s13_62"/>
           <p:cNvSpPr/>
           <p:nvPr/>
         </p:nvSpPr>
         <p:spPr>
           <a:xfrm>
-            <a:off x="9624060" y="5701284"/>
+            <a:off x="10044684" y="5426964"/>
             <a:ext cx="82296" cy="82296"/>
           </a:xfrm>
           <a:prstGeom prst="ellipse">
@@ -27554,13 +25474,13 @@
       </p:sp>
       <p:sp>
         <p:nvSpPr>
-          <p:cNvPr id="106" name="s13_104"/>
+          <p:cNvPr id="65" name="s13_63"/>
           <p:cNvSpPr/>
           <p:nvPr/>
         </p:nvSpPr>
         <p:spPr>
           <a:xfrm>
-            <a:off x="9806940" y="5701284"/>
+            <a:off x="10227564" y="5426964"/>
             <a:ext cx="82296" cy="82296"/>
           </a:xfrm>
           <a:prstGeom prst="ellipse">
@@ -27596,13 +25516,13 @@
       </p:sp>
       <p:sp>
         <p:nvSpPr>
-          <p:cNvPr id="107" name="s13_105"/>
+          <p:cNvPr id="66" name="s13_64"/>
           <p:cNvSpPr/>
           <p:nvPr/>
         </p:nvSpPr>
         <p:spPr>
           <a:xfrm>
-            <a:off x="9989819" y="5701284"/>
+            <a:off x="10410444" y="5426964"/>
             <a:ext cx="82296" cy="82296"/>
           </a:xfrm>
           <a:prstGeom prst="ellipse">
@@ -27638,13 +25558,13 @@
       </p:sp>
       <p:sp>
         <p:nvSpPr>
-          <p:cNvPr id="108" name="s13_106"/>
+          <p:cNvPr id="67" name="s13_65"/>
           <p:cNvSpPr/>
           <p:nvPr/>
         </p:nvSpPr>
         <p:spPr>
           <a:xfrm>
-            <a:off x="10172700" y="5701284"/>
+            <a:off x="10593324" y="5426964"/>
             <a:ext cx="82296" cy="82296"/>
           </a:xfrm>
           <a:prstGeom prst="ellipse">
@@ -27680,14 +25600,14 @@
       </p:sp>
       <p:sp>
         <p:nvSpPr>
-          <p:cNvPr id="109" name="s13_107"/>
+          <p:cNvPr id="68" name="s13_66"/>
           <p:cNvSpPr txBox="1"/>
           <p:nvPr/>
         </p:nvSpPr>
         <p:spPr>
           <a:xfrm>
-            <a:off x="10488167" y="5650992"/>
-            <a:ext cx="1371600" cy="182880"/>
+            <a:off x="10908792" y="5376672"/>
+            <a:ext cx="1097280" cy="182880"/>
           </a:xfrm>
           <a:prstGeom prst="rect">
             <a:avLst/>
@@ -27725,14 +25645,14 @@
       </p:sp>
       <p:sp>
         <p:nvSpPr>
-          <p:cNvPr id="110" name="s13_108"/>
+          <p:cNvPr id="69" name="s13_67"/>
           <p:cNvSpPr txBox="1"/>
           <p:nvPr/>
         </p:nvSpPr>
         <p:spPr>
           <a:xfrm>
-            <a:off x="6327648" y="5852160"/>
-            <a:ext cx="1600200" cy="182880"/>
+            <a:off x="6793992" y="5605272"/>
+            <a:ext cx="1554480" cy="182880"/>
           </a:xfrm>
           <a:prstGeom prst="rect">
             <a:avLst/>
@@ -27770,13 +25690,13 @@
       </p:sp>
       <p:sp>
         <p:nvSpPr>
-          <p:cNvPr id="111" name="s13_109"/>
+          <p:cNvPr id="70" name="s13_68"/>
           <p:cNvSpPr/>
           <p:nvPr/>
         </p:nvSpPr>
         <p:spPr>
           <a:xfrm>
-            <a:off x="7978140" y="5902452"/>
+            <a:off x="8398764" y="5655564"/>
             <a:ext cx="82296" cy="82296"/>
           </a:xfrm>
           <a:prstGeom prst="ellipse">
@@ -27812,14 +25732,14 @@
       </p:sp>
       <p:sp>
         <p:nvSpPr>
-          <p:cNvPr id="112" name="s13_110"/>
+          <p:cNvPr id="71" name="s13_69"/>
           <p:cNvSpPr/>
           <p:nvPr/>
         </p:nvSpPr>
         <p:spPr>
           <a:xfrm>
-            <a:off x="8147303" y="5888736"/>
-            <a:ext cx="109728" cy="109728"/>
+            <a:off x="8563356" y="5637276"/>
+            <a:ext cx="118872" cy="118872"/>
           </a:xfrm>
           <a:prstGeom prst="ellipse">
             <a:avLst/>
@@ -27860,14 +25780,14 @@
       </p:sp>
       <p:sp>
         <p:nvSpPr>
-          <p:cNvPr id="113" name="s13_111"/>
+          <p:cNvPr id="72" name="s13_70"/>
           <p:cNvSpPr/>
           <p:nvPr/>
         </p:nvSpPr>
         <p:spPr>
           <a:xfrm>
-            <a:off x="8330183" y="5888736"/>
-            <a:ext cx="109728" cy="109728"/>
+            <a:off x="8746236" y="5637276"/>
+            <a:ext cx="118872" cy="118872"/>
           </a:xfrm>
           <a:prstGeom prst="ellipse">
             <a:avLst/>
@@ -27908,13 +25828,13 @@
       </p:sp>
       <p:sp>
         <p:nvSpPr>
-          <p:cNvPr id="114" name="s13_112"/>
+          <p:cNvPr id="73" name="s13_71"/>
           <p:cNvSpPr/>
           <p:nvPr/>
         </p:nvSpPr>
         <p:spPr>
           <a:xfrm>
-            <a:off x="8526780" y="5902452"/>
+            <a:off x="8947404" y="5655564"/>
             <a:ext cx="82296" cy="82296"/>
           </a:xfrm>
           <a:prstGeom prst="ellipse">
@@ -27950,14 +25870,14 @@
       </p:sp>
       <p:sp>
         <p:nvSpPr>
-          <p:cNvPr id="115" name="s13_113"/>
+          <p:cNvPr id="74" name="s13_72"/>
           <p:cNvSpPr txBox="1"/>
           <p:nvPr/>
         </p:nvSpPr>
         <p:spPr>
           <a:xfrm>
-            <a:off x="10488167" y="5852160"/>
-            <a:ext cx="1371600" cy="182880"/>
+            <a:off x="10908792" y="5605272"/>
+            <a:ext cx="1097280" cy="182880"/>
           </a:xfrm>
           <a:prstGeom prst="rect">
             <a:avLst/>
@@ -27995,14 +25915,14 @@
       </p:sp>
       <p:sp>
         <p:nvSpPr>
-          <p:cNvPr id="116" name="s13_114"/>
+          <p:cNvPr id="75" name="s13_73"/>
           <p:cNvSpPr txBox="1"/>
           <p:nvPr/>
         </p:nvSpPr>
         <p:spPr>
           <a:xfrm>
-            <a:off x="6327648" y="6053328"/>
-            <a:ext cx="1600200" cy="182880"/>
+            <a:off x="6793992" y="5833872"/>
+            <a:ext cx="1554480" cy="182880"/>
           </a:xfrm>
           <a:prstGeom prst="rect">
             <a:avLst/>
@@ -28040,13 +25960,13 @@
       </p:sp>
       <p:sp>
         <p:nvSpPr>
-          <p:cNvPr id="117" name="s13_115"/>
+          <p:cNvPr id="76" name="s13_74"/>
           <p:cNvSpPr/>
           <p:nvPr/>
         </p:nvSpPr>
         <p:spPr>
           <a:xfrm>
-            <a:off x="7978140" y="6103620"/>
+            <a:off x="8398764" y="5884164"/>
             <a:ext cx="82296" cy="82296"/>
           </a:xfrm>
           <a:prstGeom prst="ellipse">
@@ -28082,14 +26002,14 @@
       </p:sp>
       <p:sp>
         <p:nvSpPr>
-          <p:cNvPr id="118" name="s13_116"/>
+          <p:cNvPr id="77" name="s13_75"/>
           <p:cNvSpPr/>
           <p:nvPr/>
         </p:nvSpPr>
         <p:spPr>
           <a:xfrm>
-            <a:off x="8147303" y="6089904"/>
-            <a:ext cx="109728" cy="109728"/>
+            <a:off x="8563356" y="5865876"/>
+            <a:ext cx="118872" cy="118872"/>
           </a:xfrm>
           <a:prstGeom prst="ellipse">
             <a:avLst/>
@@ -28130,14 +26050,14 @@
       </p:sp>
       <p:sp>
         <p:nvSpPr>
-          <p:cNvPr id="119" name="s13_117"/>
+          <p:cNvPr id="78" name="s13_76"/>
           <p:cNvSpPr/>
           <p:nvPr/>
         </p:nvSpPr>
         <p:spPr>
           <a:xfrm>
-            <a:off x="8330183" y="6089904"/>
-            <a:ext cx="109728" cy="109728"/>
+            <a:off x="8746236" y="5865876"/>
+            <a:ext cx="118872" cy="118872"/>
           </a:xfrm>
           <a:prstGeom prst="ellipse">
             <a:avLst/>
@@ -28178,14 +26098,14 @@
       </p:sp>
       <p:sp>
         <p:nvSpPr>
-          <p:cNvPr id="120" name="s13_118"/>
+          <p:cNvPr id="79" name="s13_77"/>
           <p:cNvSpPr/>
           <p:nvPr/>
         </p:nvSpPr>
         <p:spPr>
           <a:xfrm>
-            <a:off x="8513063" y="6089904"/>
-            <a:ext cx="109728" cy="109728"/>
+            <a:off x="8929116" y="5865876"/>
+            <a:ext cx="118872" cy="118872"/>
           </a:xfrm>
           <a:prstGeom prst="ellipse">
             <a:avLst/>
@@ -28226,13 +26146,13 @@
       </p:sp>
       <p:sp>
         <p:nvSpPr>
-          <p:cNvPr id="121" name="s13_119"/>
+          <p:cNvPr id="80" name="s13_78"/>
           <p:cNvSpPr/>
           <p:nvPr/>
         </p:nvSpPr>
         <p:spPr>
           <a:xfrm>
-            <a:off x="8709660" y="6103620"/>
+            <a:off x="9130284" y="5884164"/>
             <a:ext cx="82296" cy="82296"/>
           </a:xfrm>
           <a:prstGeom prst="ellipse">
@@ -28268,13 +26188,13 @@
       </p:sp>
       <p:sp>
         <p:nvSpPr>
-          <p:cNvPr id="122" name="s13_120"/>
+          <p:cNvPr id="81" name="s13_79"/>
           <p:cNvSpPr/>
           <p:nvPr/>
         </p:nvSpPr>
         <p:spPr>
           <a:xfrm>
-            <a:off x="8892540" y="6103620"/>
+            <a:off x="9313164" y="5884164"/>
             <a:ext cx="82296" cy="82296"/>
           </a:xfrm>
           <a:prstGeom prst="ellipse">
@@ -28310,14 +26230,14 @@
       </p:sp>
       <p:sp>
         <p:nvSpPr>
-          <p:cNvPr id="123" name="s13_121"/>
+          <p:cNvPr id="82" name="s13_80"/>
           <p:cNvSpPr txBox="1"/>
           <p:nvPr/>
         </p:nvSpPr>
         <p:spPr>
           <a:xfrm>
-            <a:off x="10488167" y="6053328"/>
-            <a:ext cx="1371600" cy="182880"/>
+            <a:off x="10908792" y="5833872"/>
+            <a:ext cx="1097280" cy="182880"/>
           </a:xfrm>
           <a:prstGeom prst="rect">
             <a:avLst/>
@@ -28355,14 +26275,14 @@
       </p:sp>
       <p:sp>
         <p:nvSpPr>
-          <p:cNvPr id="124" name="s13_122"/>
+          <p:cNvPr id="83" name="s13_81"/>
           <p:cNvSpPr txBox="1"/>
           <p:nvPr/>
         </p:nvSpPr>
         <p:spPr>
           <a:xfrm>
-            <a:off x="6327648" y="6254496"/>
-            <a:ext cx="1600200" cy="182880"/>
+            <a:off x="6793992" y="6062472"/>
+            <a:ext cx="1554480" cy="182880"/>
           </a:xfrm>
           <a:prstGeom prst="rect">
             <a:avLst/>
@@ -28400,13 +26320,13 @@
       </p:sp>
       <p:sp>
         <p:nvSpPr>
-          <p:cNvPr id="125" name="s13_123"/>
+          <p:cNvPr id="84" name="s13_82"/>
           <p:cNvSpPr/>
           <p:nvPr/>
         </p:nvSpPr>
         <p:spPr>
           <a:xfrm>
-            <a:off x="7978140" y="6304788"/>
+            <a:off x="8398764" y="6112764"/>
             <a:ext cx="82296" cy="82296"/>
           </a:xfrm>
           <a:prstGeom prst="ellipse">
@@ -28442,13 +26362,13 @@
       </p:sp>
       <p:sp>
         <p:nvSpPr>
-          <p:cNvPr id="126" name="s13_124"/>
+          <p:cNvPr id="85" name="s13_83"/>
           <p:cNvSpPr/>
           <p:nvPr/>
         </p:nvSpPr>
         <p:spPr>
           <a:xfrm>
-            <a:off x="8161019" y="6304788"/>
+            <a:off x="8581644" y="6112764"/>
             <a:ext cx="82296" cy="82296"/>
           </a:xfrm>
           <a:prstGeom prst="ellipse">
@@ -28484,13 +26404,13 @@
       </p:sp>
       <p:sp>
         <p:nvSpPr>
-          <p:cNvPr id="127" name="s13_125"/>
+          <p:cNvPr id="86" name="s13_84"/>
           <p:cNvSpPr/>
           <p:nvPr/>
         </p:nvSpPr>
         <p:spPr>
           <a:xfrm>
-            <a:off x="8343900" y="6304788"/>
+            <a:off x="8764524" y="6112764"/>
             <a:ext cx="82296" cy="82296"/>
           </a:xfrm>
           <a:prstGeom prst="ellipse">
@@ -28526,14 +26446,14 @@
       </p:sp>
       <p:sp>
         <p:nvSpPr>
-          <p:cNvPr id="128" name="s13_126"/>
+          <p:cNvPr id="87" name="s13_85"/>
           <p:cNvSpPr/>
           <p:nvPr/>
         </p:nvSpPr>
         <p:spPr>
           <a:xfrm>
-            <a:off x="8513063" y="6291072"/>
-            <a:ext cx="109728" cy="109728"/>
+            <a:off x="8929116" y="6094476"/>
+            <a:ext cx="118872" cy="118872"/>
           </a:xfrm>
           <a:prstGeom prst="ellipse">
             <a:avLst/>
@@ -28574,13 +26494,13 @@
       </p:sp>
       <p:sp>
         <p:nvSpPr>
-          <p:cNvPr id="129" name="s13_127"/>
+          <p:cNvPr id="88" name="s13_86"/>
           <p:cNvSpPr/>
           <p:nvPr/>
         </p:nvSpPr>
         <p:spPr>
           <a:xfrm>
-            <a:off x="8709660" y="6304788"/>
+            <a:off x="9130284" y="6112764"/>
             <a:ext cx="82296" cy="82296"/>
           </a:xfrm>
           <a:prstGeom prst="ellipse">
@@ -28616,13 +26536,13 @@
       </p:sp>
       <p:sp>
         <p:nvSpPr>
-          <p:cNvPr id="130" name="s13_128"/>
+          <p:cNvPr id="89" name="s13_87"/>
           <p:cNvSpPr/>
           <p:nvPr/>
         </p:nvSpPr>
         <p:spPr>
           <a:xfrm>
-            <a:off x="8892540" y="6304788"/>
+            <a:off x="9313164" y="6112764"/>
             <a:ext cx="82296" cy="82296"/>
           </a:xfrm>
           <a:prstGeom prst="ellipse">
@@ -28658,13 +26578,13 @@
       </p:sp>
       <p:sp>
         <p:nvSpPr>
-          <p:cNvPr id="131" name="s13_129"/>
+          <p:cNvPr id="90" name="s13_88"/>
           <p:cNvSpPr/>
           <p:nvPr/>
         </p:nvSpPr>
         <p:spPr>
           <a:xfrm>
-            <a:off x="9075419" y="6304788"/>
+            <a:off x="9496044" y="6112764"/>
             <a:ext cx="82296" cy="82296"/>
           </a:xfrm>
           <a:prstGeom prst="ellipse">
@@ -28700,13 +26620,13 @@
       </p:sp>
       <p:sp>
         <p:nvSpPr>
-          <p:cNvPr id="132" name="s13_130"/>
+          <p:cNvPr id="91" name="s13_89"/>
           <p:cNvSpPr/>
           <p:nvPr/>
         </p:nvSpPr>
         <p:spPr>
           <a:xfrm>
-            <a:off x="9258300" y="6304788"/>
+            <a:off x="9678924" y="6112764"/>
             <a:ext cx="82296" cy="82296"/>
           </a:xfrm>
           <a:prstGeom prst="ellipse">
@@ -28742,14 +26662,14 @@
       </p:sp>
       <p:sp>
         <p:nvSpPr>
-          <p:cNvPr id="133" name="s13_131"/>
+          <p:cNvPr id="92" name="s13_90"/>
           <p:cNvSpPr txBox="1"/>
           <p:nvPr/>
         </p:nvSpPr>
         <p:spPr>
           <a:xfrm>
-            <a:off x="10488167" y="6254496"/>
-            <a:ext cx="1371600" cy="182880"/>
+            <a:off x="10908792" y="6062472"/>
+            <a:ext cx="1097280" cy="182880"/>
           </a:xfrm>
           <a:prstGeom prst="rect">
             <a:avLst/>
@@ -37839,7 +35759,7 @@
                 </a:solidFill>
                 <a:latin typeface="Consolas"/>
               </a:rPr>
-              <a:t>205 arquivos  ·  700 ligações  ·  medido no branch por grafo_repo.py</a:t>
+              <a:t>205 arquivos  ·  695 ligações  ·  medido no branch por grafo_repo.py</a:t>
             </a:r>
           </a:p>
         </p:txBody>
@@ -38931,7 +36851,7 @@
                 </a:solidFill>
                 <a:latin typeface="Consolas"/>
               </a:rPr>
-              <a:t>205 arquivos  ·  700 ligações  ·  medido no branch por grafo_repo.py</a:t>
+              <a:t>205 arquivos  ·  695 ligações  ·  medido no branch por grafo_repo.py</a:t>
             </a:r>
           </a:p>
         </p:txBody>
@@ -38944,7 +36864,7 @@
         </p:nvSpPr>
         <p:spPr>
           <a:xfrm>
-            <a:off x="3032275" y="3979405"/>
+            <a:off x="2903101" y="4043871"/>
             <a:ext cx="182880" cy="182880"/>
           </a:xfrm>
           <a:prstGeom prst="ellipse">
@@ -38992,7 +36912,7 @@
         </p:nvSpPr>
         <p:spPr>
           <a:xfrm>
-            <a:off x="2872255" y="3819385"/>
+            <a:off x="2743081" y="3883851"/>
             <a:ext cx="502920" cy="502920"/>
           </a:xfrm>
           <a:prstGeom prst="ellipse">
@@ -40138,7 +38058,7 @@
                 </a:solidFill>
                 <a:latin typeface="Consolas"/>
               </a:rPr>
-              <a:t>205 arquivos  ·  700 ligações  ·  medido no branch por grafo_repo.py</a:t>
+              <a:t>205 arquivos  ·  695 ligações  ·  medido no branch por grafo_repo.py</a:t>
             </a:r>
           </a:p>
         </p:txBody>
@@ -40151,7 +38071,7 @@
         </p:nvSpPr>
         <p:spPr>
           <a:xfrm>
-            <a:off x="3032275" y="3979405"/>
+            <a:off x="2903101" y="4043871"/>
             <a:ext cx="182880" cy="182880"/>
           </a:xfrm>
           <a:prstGeom prst="ellipse">
@@ -40199,8 +38119,8 @@
         </p:nvCxnSpPr>
         <p:spPr>
           <a:xfrm flipV="1">
-            <a:off x="3123715" y="2966173"/>
-            <a:ext cx="1452894" cy="1104672"/>
+            <a:off x="2994541" y="3411134"/>
+            <a:ext cx="1630177" cy="724177"/>
           </a:xfrm>
           <a:prstGeom prst="line">
             <a:avLst/>
@@ -40236,7 +38156,7 @@
         </p:nvSpPr>
         <p:spPr>
           <a:xfrm>
-            <a:off x="4485169" y="2874733"/>
+            <a:off x="4533278" y="3319694"/>
             <a:ext cx="182880" cy="182880"/>
           </a:xfrm>
           <a:prstGeom prst="ellipse">
@@ -40284,7 +38204,7 @@
         </p:nvSpPr>
         <p:spPr>
           <a:xfrm>
-            <a:off x="4325149" y="2714713"/>
+            <a:off x="4373258" y="3159674"/>
             <a:ext cx="502920" cy="502920"/>
           </a:xfrm>
           <a:prstGeom prst="ellipse">
@@ -41484,7 +39404,7 @@
                 </a:solidFill>
                 <a:latin typeface="Consolas"/>
               </a:rPr>
-              <a:t>205 arquivos  ·  700 ligações  ·  medido no branch por grafo_repo.py</a:t>
+              <a:t>205 arquivos  ·  695 ligações  ·  medido no branch por grafo_repo.py</a:t>
             </a:r>
           </a:p>
         </p:txBody>
@@ -41497,7 +39417,7 @@
         </p:nvSpPr>
         <p:spPr>
           <a:xfrm>
-            <a:off x="3032275" y="3979405"/>
+            <a:off x="2903101" y="4043871"/>
             <a:ext cx="182880" cy="182880"/>
           </a:xfrm>
           <a:prstGeom prst="ellipse">
@@ -41545,8 +39465,8 @@
         </p:nvCxnSpPr>
         <p:spPr>
           <a:xfrm flipV="1">
-            <a:off x="3123715" y="2966173"/>
-            <a:ext cx="1452894" cy="1104672"/>
+            <a:off x="2994541" y="3411134"/>
+            <a:ext cx="1630177" cy="724177"/>
           </a:xfrm>
           <a:prstGeom prst="line">
             <a:avLst/>
@@ -41582,7 +39502,7 @@
         </p:nvSpPr>
         <p:spPr>
           <a:xfrm>
-            <a:off x="4485169" y="2874733"/>
+            <a:off x="4533278" y="3319694"/>
             <a:ext cx="182880" cy="182880"/>
           </a:xfrm>
           <a:prstGeom prst="ellipse">
@@ -41630,8 +39550,8 @@
         </p:nvCxnSpPr>
         <p:spPr>
           <a:xfrm flipH="1">
-            <a:off x="4229439" y="2966173"/>
-            <a:ext cx="347170" cy="1402079"/>
+            <a:off x="4121220" y="3411134"/>
+            <a:ext cx="503498" cy="1210191"/>
           </a:xfrm>
           <a:prstGeom prst="line">
             <a:avLst/>
@@ -41667,7 +39587,7 @@
         </p:nvSpPr>
         <p:spPr>
           <a:xfrm>
-            <a:off x="4137999" y="4276812"/>
+            <a:off x="4029780" y="4529885"/>
             <a:ext cx="182880" cy="182880"/>
           </a:xfrm>
           <a:prstGeom prst="ellipse">
@@ -41715,7 +39635,7 @@
         </p:nvSpPr>
         <p:spPr>
           <a:xfrm>
-            <a:off x="3977979" y="4116792"/>
+            <a:off x="3869760" y="4369865"/>
             <a:ext cx="502920" cy="502920"/>
           </a:xfrm>
           <a:prstGeom prst="ellipse">
@@ -42969,7 +40889,7 @@
                 </a:solidFill>
                 <a:latin typeface="Consolas"/>
               </a:rPr>
-              <a:t>205 arquivos  ·  700 ligações  ·  medido no branch por grafo_repo.py</a:t>
+              <a:t>205 arquivos  ·  695 ligações  ·  medido no branch por grafo_repo.py</a:t>
             </a:r>
           </a:p>
         </p:txBody>
@@ -42982,7 +40902,7 @@
         </p:nvSpPr>
         <p:spPr>
           <a:xfrm>
-            <a:off x="3032275" y="3979405"/>
+            <a:off x="2903101" y="4043871"/>
             <a:ext cx="182880" cy="182880"/>
           </a:xfrm>
           <a:prstGeom prst="ellipse">
@@ -43030,8 +40950,8 @@
         </p:nvCxnSpPr>
         <p:spPr>
           <a:xfrm flipV="1">
-            <a:off x="3123715" y="2966173"/>
-            <a:ext cx="1452894" cy="1104672"/>
+            <a:off x="2994541" y="3411134"/>
+            <a:ext cx="1630177" cy="724177"/>
           </a:xfrm>
           <a:prstGeom prst="line">
             <a:avLst/>
@@ -43067,7 +40987,7 @@
         </p:nvSpPr>
         <p:spPr>
           <a:xfrm>
-            <a:off x="4485169" y="2874733"/>
+            <a:off x="4533278" y="3319694"/>
             <a:ext cx="182880" cy="182880"/>
           </a:xfrm>
           <a:prstGeom prst="ellipse">
@@ -43115,8 +41035,8 @@
         </p:nvCxnSpPr>
         <p:spPr>
           <a:xfrm flipH="1">
-            <a:off x="4229439" y="2966173"/>
-            <a:ext cx="347170" cy="1402079"/>
+            <a:off x="4121220" y="3411134"/>
+            <a:ext cx="503498" cy="1210191"/>
           </a:xfrm>
           <a:prstGeom prst="line">
             <a:avLst/>
@@ -43152,7 +41072,7 @@
         </p:nvSpPr>
         <p:spPr>
           <a:xfrm>
-            <a:off x="4137999" y="4276812"/>
+            <a:off x="4029780" y="4529885"/>
             <a:ext cx="182880" cy="182880"/>
           </a:xfrm>
           <a:prstGeom prst="ellipse">
@@ -43200,8 +41120,8 @@
         </p:nvCxnSpPr>
         <p:spPr>
           <a:xfrm flipH="1" flipV="1">
-            <a:off x="3322795" y="3741475"/>
-            <a:ext cx="906644" cy="626777"/>
+            <a:off x="3041969" y="3917674"/>
+            <a:ext cx="1079251" cy="703651"/>
           </a:xfrm>
           <a:prstGeom prst="line">
             <a:avLst/>
@@ -43237,7 +41157,7 @@
         </p:nvSpPr>
         <p:spPr>
           <a:xfrm>
-            <a:off x="3231355" y="3650035"/>
+            <a:off x="2950529" y="3826234"/>
             <a:ext cx="182880" cy="182880"/>
           </a:xfrm>
           <a:prstGeom prst="ellipse">
@@ -43285,7 +41205,7 @@
         </p:nvSpPr>
         <p:spPr>
           <a:xfrm>
-            <a:off x="3071335" y="3490015"/>
+            <a:off x="2790509" y="3666214"/>
             <a:ext cx="502920" cy="502920"/>
           </a:xfrm>
           <a:prstGeom prst="ellipse">
@@ -44593,7 +42513,7 @@
                 </a:solidFill>
                 <a:latin typeface="Consolas"/>
               </a:rPr>
-              <a:t>205 arquivos  ·  700 ligações  ·  medido no branch por grafo_repo.py</a:t>
+              <a:t>205 arquivos  ·  695 ligações  ·  medido no branch por grafo_repo.py</a:t>
             </a:r>
           </a:p>
         </p:txBody>
@@ -44606,7 +42526,7 @@
         </p:nvSpPr>
         <p:spPr>
           <a:xfrm>
-            <a:off x="3032275" y="3979405"/>
+            <a:off x="2903101" y="4043871"/>
             <a:ext cx="182880" cy="182880"/>
           </a:xfrm>
           <a:prstGeom prst="ellipse">
@@ -44654,8 +42574,8 @@
         </p:nvCxnSpPr>
         <p:spPr>
           <a:xfrm flipV="1">
-            <a:off x="3123715" y="2966173"/>
-            <a:ext cx="1452894" cy="1104672"/>
+            <a:off x="2994541" y="3411134"/>
+            <a:ext cx="1630177" cy="724177"/>
           </a:xfrm>
           <a:prstGeom prst="line">
             <a:avLst/>
@@ -44691,7 +42611,7 @@
         </p:nvSpPr>
         <p:spPr>
           <a:xfrm>
-            <a:off x="4485169" y="2874733"/>
+            <a:off x="4533278" y="3319694"/>
             <a:ext cx="182880" cy="182880"/>
           </a:xfrm>
           <a:prstGeom prst="ellipse">
@@ -44739,8 +42659,8 @@
         </p:nvCxnSpPr>
         <p:spPr>
           <a:xfrm flipH="1">
-            <a:off x="4229439" y="2966173"/>
-            <a:ext cx="347170" cy="1402079"/>
+            <a:off x="4121220" y="3411134"/>
+            <a:ext cx="503498" cy="1210191"/>
           </a:xfrm>
           <a:prstGeom prst="line">
             <a:avLst/>
@@ -44776,7 +42696,7 @@
         </p:nvSpPr>
         <p:spPr>
           <a:xfrm>
-            <a:off x="4137999" y="4276812"/>
+            <a:off x="4029780" y="4529885"/>
             <a:ext cx="182880" cy="182880"/>
           </a:xfrm>
           <a:prstGeom prst="ellipse">
@@ -44824,8 +42744,8 @@
         </p:nvCxnSpPr>
         <p:spPr>
           <a:xfrm flipH="1" flipV="1">
-            <a:off x="3322795" y="3741475"/>
-            <a:ext cx="906644" cy="626777"/>
+            <a:off x="3041969" y="3917674"/>
+            <a:ext cx="1079251" cy="703651"/>
           </a:xfrm>
           <a:prstGeom prst="line">
             <a:avLst/>
@@ -44861,7 +42781,7 @@
         </p:nvSpPr>
         <p:spPr>
           <a:xfrm>
-            <a:off x="3231355" y="3650035"/>
+            <a:off x="2950529" y="3826234"/>
             <a:ext cx="182880" cy="182880"/>
           </a:xfrm>
           <a:prstGeom prst="ellipse">
@@ -44909,8 +42829,8 @@
         </p:nvCxnSpPr>
         <p:spPr>
           <a:xfrm>
-            <a:off x="3322795" y="3741475"/>
-            <a:ext cx="135298" cy="506725"/>
+            <a:off x="3041969" y="3917674"/>
+            <a:ext cx="304176" cy="446538"/>
           </a:xfrm>
           <a:prstGeom prst="line">
             <a:avLst/>
@@ -44946,7 +42866,7 @@
         </p:nvSpPr>
         <p:spPr>
           <a:xfrm>
-            <a:off x="3366653" y="4156760"/>
+            <a:off x="3254705" y="4272772"/>
             <a:ext cx="182880" cy="182880"/>
           </a:xfrm>
           <a:prstGeom prst="ellipse">
@@ -44994,7 +42914,7 @@
         </p:nvSpPr>
         <p:spPr>
           <a:xfrm>
-            <a:off x="3206633" y="3996740"/>
+            <a:off x="3094685" y="4112752"/>
             <a:ext cx="502920" cy="502920"/>
           </a:xfrm>
           <a:prstGeom prst="ellipse">

--- a/Final/Slides_novos.pptx
+++ b/Final/Slides_novos.pptx
@@ -22,6 +22,10 @@
     <p:sldId id="270" r:id="rId22"/>
     <p:sldId id="271" r:id="rId23"/>
     <p:sldId id="272" r:id="rId24"/>
+    <p:sldId id="273" r:id="rId25"/>
+    <p:sldId id="274" r:id="rId26"/>
+    <p:sldId id="275" r:id="rId27"/>
+    <p:sldId id="276" r:id="rId28"/>
   </p:sldIdLst>
   <p:sldSz cx="12192000" cy="6858000" type="screen4x3"/>
   <p:notesSz cx="6858000" cy="9144000"/>
@@ -1033,6 +1037,216 @@
 </p:notes>
 </file>
 
+<file path=ppt/notesSlides/notesSlide17.xml><?xml version="1.0" encoding="utf-8"?>
+<p:notes xmlns:a="http://schemas.openxmlformats.org/drawingml/2006/main" xmlns:p="http://schemas.openxmlformats.org/presentationml/2006/main" xmlns:r="http://schemas.openxmlformats.org/officeDocument/2006/relationships">
+  <p:cSld>
+    <p:spTree>
+      <p:nvGrpSpPr>
+        <p:cNvPr id="1" name=""/>
+        <p:cNvGrpSpPr/>
+        <p:nvPr/>
+      </p:nvGrpSpPr>
+      <p:grpSpPr>
+        <a:xfrm>
+          <a:off x="0" y="0"/>
+          <a:ext cx="0" cy="0"/>
+          <a:chOff x="0" y="0"/>
+          <a:chExt cx="0" cy="0"/>
+        </a:xfrm>
+      </p:grpSpPr>
+      <p:sp>
+        <p:nvSpPr>
+          <p:cNvPr id="2" name="Slide Image Placeholder 1"/>
+          <p:cNvSpPr>
+            <a:spLocks noGrp="1"/>
+          </p:cNvSpPr>
+          <p:nvPr>
+            <p:ph type="sldImg" idx="2"/>
+          </p:nvPr>
+        </p:nvSpPr>
+        <p:spPr/>
+      </p:sp>
+      <p:sp>
+        <p:nvSpPr>
+          <p:cNvPr id="3" name="Notes Placeholder 2"/>
+          <p:cNvSpPr>
+            <a:spLocks noGrp="1"/>
+          </p:cNvSpPr>
+          <p:nvPr>
+            <p:ph type="body" idx="3" sz="quarter"/>
+          </p:nvPr>
+        </p:nvSpPr>
+        <p:spPr/>
+        <p:txBody>
+          <a:bodyPr/>
+          <a:lstStyle/>
+          <a:p>
+            <a:r>
+              <a:t>Fonte: scripts/estudo_polymarket.py → Uteis/analises/Metricas_estudo.md; guia de leitura em Final/estudo/Guia_slide16.md. Amostra = todo o dado macro do repo (FOMC 76 faixas/18 reuniões, CPI 74 faixas/12 meses), sem exclusão. Brier 0,043 [0,022; 0,067]; calibração b = 1,04 (p = 0,15); FF = proxy DTB3−DFF corrigido do viés (cru: 8,9 bps), DM p = 0,002; 17/17 no desfecho modal. Terceira informação, se pedirem: o movimento do preço não é sinal (VR(5) = 0,78 &lt; 1, Δp com t ≈ 0) — por isso usamos o nível, não o Δp. Detalhe nos apêndices A1–A3.</a:t>
+            </a:r>
+          </a:p>
+        </p:txBody>
+      </p:sp>
+      <p:sp>
+        <p:nvSpPr>
+          <p:cNvPr id="4" name="Slide Number Placeholder 3"/>
+          <p:cNvSpPr>
+            <a:spLocks noGrp="1"/>
+          </p:cNvSpPr>
+          <p:nvPr>
+            <p:ph type="sldNum" idx="5" sz="quarter"/>
+          </p:nvPr>
+        </p:nvSpPr>
+        <p:spPr/>
+      </p:sp>
+    </p:spTree>
+  </p:cSld>
+  <p:clrMapOvr>
+    <a:masterClrMapping/>
+  </p:clrMapOvr>
+</p:notes>
+</file>
+
+<file path=ppt/notesSlides/notesSlide18.xml><?xml version="1.0" encoding="utf-8"?>
+<p:notes xmlns:a="http://schemas.openxmlformats.org/drawingml/2006/main" xmlns:p="http://schemas.openxmlformats.org/presentationml/2006/main" xmlns:r="http://schemas.openxmlformats.org/officeDocument/2006/relationships">
+  <p:cSld>
+    <p:spTree>
+      <p:nvGrpSpPr>
+        <p:cNvPr id="1" name=""/>
+        <p:cNvGrpSpPr/>
+        <p:nvPr/>
+      </p:nvGrpSpPr>
+      <p:grpSpPr>
+        <a:xfrm>
+          <a:off x="0" y="0"/>
+          <a:ext cx="0" cy="0"/>
+          <a:chOff x="0" y="0"/>
+          <a:chExt cx="0" cy="0"/>
+        </a:xfrm>
+      </p:grpSpPr>
+      <p:sp>
+        <p:nvSpPr>
+          <p:cNvPr id="2" name="Slide Image Placeholder 1"/>
+          <p:cNvSpPr>
+            <a:spLocks noGrp="1"/>
+          </p:cNvSpPr>
+          <p:nvPr>
+            <p:ph type="sldImg" idx="2"/>
+          </p:nvPr>
+        </p:nvSpPr>
+        <p:spPr/>
+      </p:sp>
+      <p:sp>
+        <p:nvSpPr>
+          <p:cNvPr id="3" name="Notes Placeholder 2"/>
+          <p:cNvSpPr>
+            <a:spLocks noGrp="1"/>
+          </p:cNvSpPr>
+          <p:nvPr>
+            <p:ph type="body" idx="3" sz="quarter"/>
+          </p:nvPr>
+        </p:nvSpPr>
+        <p:spPr/>
+        <p:txBody>
+          <a:bodyPr/>
+          <a:lstStyle/>
+          <a:p>
+            <a:r>
+              <a:t>Tabela: Uteis/dados/estudo/brier_horizonte.csv (IC por bootstrap de evento). BSS = 1 − Brier/Brier da uniforme (1/K por faixa): 0,73 pooled na véspera; FOMC 0,96, CPI 0,42. A 60 dias o FOMC ainda tem BSS 0,67.</a:t>
+            </a:r>
+          </a:p>
+        </p:txBody>
+      </p:sp>
+      <p:sp>
+        <p:nvSpPr>
+          <p:cNvPr id="4" name="Slide Number Placeholder 3"/>
+          <p:cNvSpPr>
+            <a:spLocks noGrp="1"/>
+          </p:cNvSpPr>
+          <p:nvPr>
+            <p:ph type="sldNum" idx="5" sz="quarter"/>
+          </p:nvPr>
+        </p:nvSpPr>
+        <p:spPr/>
+      </p:sp>
+    </p:spTree>
+  </p:cSld>
+  <p:clrMapOvr>
+    <a:masterClrMapping/>
+  </p:clrMapOvr>
+</p:notes>
+</file>
+
+<file path=ppt/notesSlides/notesSlide19.xml><?xml version="1.0" encoding="utf-8"?>
+<p:notes xmlns:a="http://schemas.openxmlformats.org/drawingml/2006/main" xmlns:p="http://schemas.openxmlformats.org/presentationml/2006/main" xmlns:r="http://schemas.openxmlformats.org/officeDocument/2006/relationships">
+  <p:cSld>
+    <p:spTree>
+      <p:nvGrpSpPr>
+        <p:cNvPr id="1" name=""/>
+        <p:cNvGrpSpPr/>
+        <p:nvPr/>
+      </p:nvGrpSpPr>
+      <p:grpSpPr>
+        <a:xfrm>
+          <a:off x="0" y="0"/>
+          <a:ext cx="0" cy="0"/>
+          <a:chOff x="0" y="0"/>
+          <a:chExt cx="0" cy="0"/>
+        </a:xfrm>
+      </p:grpSpPr>
+      <p:sp>
+        <p:nvSpPr>
+          <p:cNvPr id="2" name="Slide Image Placeholder 1"/>
+          <p:cNvSpPr>
+            <a:spLocks noGrp="1"/>
+          </p:cNvSpPr>
+          <p:nvPr>
+            <p:ph type="sldImg" idx="2"/>
+          </p:nvPr>
+        </p:nvSpPr>
+        <p:spPr/>
+      </p:sp>
+      <p:sp>
+        <p:nvSpPr>
+          <p:cNvPr id="3" name="Notes Placeholder 2"/>
+          <p:cNvSpPr>
+            <a:spLocks noGrp="1"/>
+          </p:cNvSpPr>
+          <p:nvPr>
+            <p:ph type="body" idx="3" sz="quarter"/>
+          </p:nvPr>
+        </p:nvSpPr>
+        <p:spPr/>
+        <p:txBody>
+          <a:bodyPr/>
+          <a:lstStyle/>
+          <a:p>
+            <a:r>
+              <a:t>Tabelas: Uteis/dados/estudo/fomc_vs_ff.csv, encompassing.csv, leadlag_*.csv. DM com correção HLN; n = 17-18 reuniões por horizonte. A 60 dias a vantagem some (p = 0,76). Granger com Newey-West: t = 1,8 (poly → FF) e 1,9 (FF → poly).</a:t>
+            </a:r>
+          </a:p>
+        </p:txBody>
+      </p:sp>
+      <p:sp>
+        <p:nvSpPr>
+          <p:cNvPr id="4" name="Slide Number Placeholder 3"/>
+          <p:cNvSpPr>
+            <a:spLocks noGrp="1"/>
+          </p:cNvSpPr>
+          <p:nvPr>
+            <p:ph type="sldNum" idx="5" sz="quarter"/>
+          </p:nvPr>
+        </p:nvSpPr>
+        <p:spPr/>
+      </p:sp>
+    </p:spTree>
+  </p:cSld>
+  <p:clrMapOvr>
+    <a:masterClrMapping/>
+  </p:clrMapOvr>
+</p:notes>
+</file>
+
 <file path=ppt/notesSlides/notesSlide2.xml><?xml version="1.0" encoding="utf-8"?>
 <p:notes xmlns:a="http://schemas.openxmlformats.org/drawingml/2006/main" xmlns:p="http://schemas.openxmlformats.org/presentationml/2006/main" xmlns:r="http://schemas.openxmlformats.org/officeDocument/2006/relationships">
   <p:cSld>
@@ -1079,6 +1293,76 @@
           <a:p>
             <a:r>
               <a:t>2025-09-16: E_poly = -26.9 bps · juros (DTB3 − DFF) = -42.0 bps · surpresa bruta +15.1 · líquida +9.1 bps · 1 pregão até a reunião.</a:t>
+            </a:r>
+          </a:p>
+        </p:txBody>
+      </p:sp>
+      <p:sp>
+        <p:nvSpPr>
+          <p:cNvPr id="4" name="Slide Number Placeholder 3"/>
+          <p:cNvSpPr>
+            <a:spLocks noGrp="1"/>
+          </p:cNvSpPr>
+          <p:nvPr>
+            <p:ph type="sldNum" idx="5" sz="quarter"/>
+          </p:nvPr>
+        </p:nvSpPr>
+        <p:spPr/>
+      </p:sp>
+    </p:spTree>
+  </p:cSld>
+  <p:clrMapOvr>
+    <a:masterClrMapping/>
+  </p:clrMapOvr>
+</p:notes>
+</file>
+
+<file path=ppt/notesSlides/notesSlide20.xml><?xml version="1.0" encoding="utf-8"?>
+<p:notes xmlns:a="http://schemas.openxmlformats.org/drawingml/2006/main" xmlns:p="http://schemas.openxmlformats.org/presentationml/2006/main" xmlns:r="http://schemas.openxmlformats.org/officeDocument/2006/relationships">
+  <p:cSld>
+    <p:spTree>
+      <p:nvGrpSpPr>
+        <p:cNvPr id="1" name=""/>
+        <p:cNvGrpSpPr/>
+        <p:nvPr/>
+      </p:nvGrpSpPr>
+      <p:grpSpPr>
+        <a:xfrm>
+          <a:off x="0" y="0"/>
+          <a:ext cx="0" cy="0"/>
+          <a:chOff x="0" y="0"/>
+          <a:chExt cx="0" cy="0"/>
+        </a:xfrm>
+      </p:grpSpPr>
+      <p:sp>
+        <p:nvSpPr>
+          <p:cNvPr id="2" name="Slide Image Placeholder 1"/>
+          <p:cNvSpPr>
+            <a:spLocks noGrp="1"/>
+          </p:cNvSpPr>
+          <p:nvPr>
+            <p:ph type="sldImg" idx="2"/>
+          </p:nvPr>
+        </p:nvSpPr>
+        <p:spPr/>
+      </p:sp>
+      <p:sp>
+        <p:nvSpPr>
+          <p:cNvPr id="3" name="Notes Placeholder 2"/>
+          <p:cNvSpPr>
+            <a:spLocks noGrp="1"/>
+          </p:cNvSpPr>
+          <p:nvPr>
+            <p:ph type="body" idx="3" sz="quarter"/>
+          </p:nvPr>
+        </p:nvSpPr>
+        <p:spPr/>
+        <p:txBody>
+          <a:bodyPr/>
+          <a:lstStyle/>
+          <a:p>
+            <a:r>
+              <a:t>Tabelas: Uteis/dados/estudo/event_study.csv e martingale.csv. FOMC n = 17; a surpresa-FF corrigida explica mais (R² médio 0,19 vs 0,08) porque carrega o caminho de 3 meses, não porque o Polymarket erre. CPI: R² ≈ 0 para as duas. VR(5) por família: FOMC 0,78, CPI 0,72, payrolls 0,43 — nenhuma &gt; 1.</a:t>
             </a:r>
           </a:p>
         </p:txBody>
@@ -7153,7 +7437,7 @@
                 </a:solidFill>
                 <a:latin typeface="Consolas"/>
               </a:rPr>
-              <a:t>205 arquivos  ·  695 ligações  ·  medido no branch por grafo_repo.py</a:t>
+              <a:t>209 arquivos  ·  719 ligações  ·  medido no branch por grafo_repo.py</a:t>
             </a:r>
           </a:p>
         </p:txBody>
@@ -7166,7 +7450,7 @@
         </p:nvSpPr>
         <p:spPr>
           <a:xfrm>
-            <a:off x="2903101" y="4043871"/>
+            <a:off x="2690320" y="3888827"/>
             <a:ext cx="182880" cy="182880"/>
           </a:xfrm>
           <a:prstGeom prst="ellipse">
@@ -7213,9 +7497,9 @@
           <p:nvPr/>
         </p:nvCxnSpPr>
         <p:spPr>
-          <a:xfrm flipV="1">
-            <a:off x="2994541" y="3411134"/>
-            <a:ext cx="1630177" cy="724177"/>
+          <a:xfrm flipH="1" flipV="1">
+            <a:off x="1701063" y="2877907"/>
+            <a:ext cx="1080697" cy="1102360"/>
           </a:xfrm>
           <a:prstGeom prst="line">
             <a:avLst/>
@@ -7251,7 +7535,7 @@
         </p:nvSpPr>
         <p:spPr>
           <a:xfrm>
-            <a:off x="4533278" y="3319694"/>
+            <a:off x="1609623" y="2786467"/>
             <a:ext cx="182880" cy="182880"/>
           </a:xfrm>
           <a:prstGeom prst="ellipse">
@@ -7299,8 +7583,8 @@
         </p:nvCxnSpPr>
         <p:spPr>
           <a:xfrm flipH="1">
-            <a:off x="4121220" y="3411134"/>
-            <a:ext cx="503498" cy="1210191"/>
+            <a:off x="1634220" y="2877907"/>
+            <a:ext cx="66843" cy="990028"/>
           </a:xfrm>
           <a:prstGeom prst="line">
             <a:avLst/>
@@ -7336,7 +7620,7 @@
         </p:nvSpPr>
         <p:spPr>
           <a:xfrm>
-            <a:off x="4029780" y="4529885"/>
+            <a:off x="1542780" y="3776495"/>
             <a:ext cx="182880" cy="182880"/>
           </a:xfrm>
           <a:prstGeom prst="ellipse">
@@ -7383,9 +7667,9 @@
           <p:nvPr/>
         </p:nvCxnSpPr>
         <p:spPr>
-          <a:xfrm flipH="1" flipV="1">
-            <a:off x="3041969" y="3917674"/>
-            <a:ext cx="1079251" cy="703651"/>
+          <a:xfrm flipV="1">
+            <a:off x="1634220" y="3571236"/>
+            <a:ext cx="764055" cy="296699"/>
           </a:xfrm>
           <a:prstGeom prst="line">
             <a:avLst/>
@@ -7421,7 +7705,7 @@
         </p:nvSpPr>
         <p:spPr>
           <a:xfrm>
-            <a:off x="2950529" y="3826234"/>
+            <a:off x="2306835" y="3479796"/>
             <a:ext cx="182880" cy="182880"/>
           </a:xfrm>
           <a:prstGeom prst="ellipse">
@@ -7469,8 +7753,8 @@
         </p:nvCxnSpPr>
         <p:spPr>
           <a:xfrm>
-            <a:off x="3041969" y="3917674"/>
-            <a:ext cx="304176" cy="446538"/>
+            <a:off x="2398275" y="3571236"/>
+            <a:ext cx="64738" cy="638276"/>
           </a:xfrm>
           <a:prstGeom prst="line">
             <a:avLst/>
@@ -7506,7 +7790,7 @@
         </p:nvSpPr>
         <p:spPr>
           <a:xfrm>
-            <a:off x="3254705" y="4272772"/>
+            <a:off x="2371573" y="4118072"/>
             <a:ext cx="182880" cy="182880"/>
           </a:xfrm>
           <a:prstGeom prst="ellipse">
@@ -7553,9 +7837,9 @@
           <p:nvPr/>
         </p:nvCxnSpPr>
         <p:spPr>
-          <a:xfrm flipV="1">
-            <a:off x="3346145" y="3247232"/>
-            <a:ext cx="469866" cy="1116980"/>
+          <a:xfrm flipH="1" flipV="1">
+            <a:off x="1998661" y="3397918"/>
+            <a:ext cx="464352" cy="811594"/>
           </a:xfrm>
           <a:prstGeom prst="line">
             <a:avLst/>
@@ -7591,7 +7875,7 @@
         </p:nvSpPr>
         <p:spPr>
           <a:xfrm>
-            <a:off x="3724571" y="3155792"/>
+            <a:off x="1907221" y="3306478"/>
             <a:ext cx="182880" cy="182880"/>
           </a:xfrm>
           <a:prstGeom prst="ellipse">
@@ -7639,7 +7923,7 @@
         </p:nvSpPr>
         <p:spPr>
           <a:xfrm>
-            <a:off x="3564551" y="2995772"/>
+            <a:off x="1747201" y="3146458"/>
             <a:ext cx="502920" cy="502920"/>
           </a:xfrm>
           <a:prstGeom prst="ellipse">
@@ -9055,7 +9339,7 @@
                 </a:solidFill>
                 <a:latin typeface="Consolas"/>
               </a:rPr>
-              <a:t>205 arquivos  ·  695 ligações  ·  medido no branch por grafo_repo.py</a:t>
+              <a:t>209 arquivos  ·  719 ligações  ·  medido no branch por grafo_repo.py</a:t>
             </a:r>
           </a:p>
         </p:txBody>
@@ -9068,7 +9352,7 @@
         </p:nvSpPr>
         <p:spPr>
           <a:xfrm>
-            <a:off x="2903101" y="4043871"/>
+            <a:off x="2690320" y="3888827"/>
             <a:ext cx="182880" cy="182880"/>
           </a:xfrm>
           <a:prstGeom prst="ellipse">
@@ -9115,9 +9399,9 @@
           <p:nvPr/>
         </p:nvCxnSpPr>
         <p:spPr>
-          <a:xfrm flipV="1">
-            <a:off x="2994541" y="3411134"/>
-            <a:ext cx="1630177" cy="724177"/>
+          <a:xfrm flipH="1" flipV="1">
+            <a:off x="1701063" y="2877907"/>
+            <a:ext cx="1080697" cy="1102360"/>
           </a:xfrm>
           <a:prstGeom prst="line">
             <a:avLst/>
@@ -9153,7 +9437,7 @@
         </p:nvSpPr>
         <p:spPr>
           <a:xfrm>
-            <a:off x="4533278" y="3319694"/>
+            <a:off x="1609623" y="2786467"/>
             <a:ext cx="182880" cy="182880"/>
           </a:xfrm>
           <a:prstGeom prst="ellipse">
@@ -9201,8 +9485,8 @@
         </p:nvCxnSpPr>
         <p:spPr>
           <a:xfrm flipH="1">
-            <a:off x="4121220" y="3411134"/>
-            <a:ext cx="503498" cy="1210191"/>
+            <a:off x="1634220" y="2877907"/>
+            <a:ext cx="66843" cy="990028"/>
           </a:xfrm>
           <a:prstGeom prst="line">
             <a:avLst/>
@@ -9238,7 +9522,7 @@
         </p:nvSpPr>
         <p:spPr>
           <a:xfrm>
-            <a:off x="4029780" y="4529885"/>
+            <a:off x="1542780" y="3776495"/>
             <a:ext cx="182880" cy="182880"/>
           </a:xfrm>
           <a:prstGeom prst="ellipse">
@@ -9285,9 +9569,9 @@
           <p:nvPr/>
         </p:nvCxnSpPr>
         <p:spPr>
-          <a:xfrm flipH="1" flipV="1">
-            <a:off x="3041969" y="3917674"/>
-            <a:ext cx="1079251" cy="703651"/>
+          <a:xfrm flipV="1">
+            <a:off x="1634220" y="3571236"/>
+            <a:ext cx="764055" cy="296699"/>
           </a:xfrm>
           <a:prstGeom prst="line">
             <a:avLst/>
@@ -9323,7 +9607,7 @@
         </p:nvSpPr>
         <p:spPr>
           <a:xfrm>
-            <a:off x="2950529" y="3826234"/>
+            <a:off x="2306835" y="3479796"/>
             <a:ext cx="182880" cy="182880"/>
           </a:xfrm>
           <a:prstGeom prst="ellipse">
@@ -9371,8 +9655,8 @@
         </p:nvCxnSpPr>
         <p:spPr>
           <a:xfrm>
-            <a:off x="3041969" y="3917674"/>
-            <a:ext cx="304176" cy="446538"/>
+            <a:off x="2398275" y="3571236"/>
+            <a:ext cx="64738" cy="638276"/>
           </a:xfrm>
           <a:prstGeom prst="line">
             <a:avLst/>
@@ -9408,7 +9692,7 @@
         </p:nvSpPr>
         <p:spPr>
           <a:xfrm>
-            <a:off x="3254705" y="4272772"/>
+            <a:off x="2371573" y="4118072"/>
             <a:ext cx="182880" cy="182880"/>
           </a:xfrm>
           <a:prstGeom prst="ellipse">
@@ -9455,9 +9739,9 @@
           <p:nvPr/>
         </p:nvCxnSpPr>
         <p:spPr>
-          <a:xfrm flipV="1">
-            <a:off x="3346145" y="3247232"/>
-            <a:ext cx="469866" cy="1116980"/>
+          <a:xfrm flipH="1" flipV="1">
+            <a:off x="1998661" y="3397918"/>
+            <a:ext cx="464352" cy="811594"/>
           </a:xfrm>
           <a:prstGeom prst="line">
             <a:avLst/>
@@ -9493,7 +9777,7 @@
         </p:nvSpPr>
         <p:spPr>
           <a:xfrm>
-            <a:off x="3724571" y="3155792"/>
+            <a:off x="1907221" y="3306478"/>
             <a:ext cx="182880" cy="182880"/>
           </a:xfrm>
           <a:prstGeom prst="ellipse">
@@ -9540,9 +9824,9 @@
           <p:nvPr/>
         </p:nvCxnSpPr>
         <p:spPr>
-          <a:xfrm flipH="1">
-            <a:off x="2763967" y="3247232"/>
-            <a:ext cx="1052044" cy="187749"/>
+          <a:xfrm>
+            <a:off x="1998661" y="3397918"/>
+            <a:ext cx="1489538" cy="94890"/>
           </a:xfrm>
           <a:prstGeom prst="line">
             <a:avLst/>
@@ -9578,7 +9862,7 @@
         </p:nvSpPr>
         <p:spPr>
           <a:xfrm>
-            <a:off x="2672527" y="3343541"/>
+            <a:off x="3396759" y="3401368"/>
             <a:ext cx="182880" cy="182880"/>
           </a:xfrm>
           <a:prstGeom prst="ellipse">
@@ -9626,7 +9910,7 @@
         </p:nvSpPr>
         <p:spPr>
           <a:xfrm>
-            <a:off x="2512507" y="3183521"/>
+            <a:off x="3236739" y="3241348"/>
             <a:ext cx="502920" cy="502920"/>
           </a:xfrm>
           <a:prstGeom prst="ellipse">
@@ -11096,7 +11380,7 @@
                 </a:solidFill>
                 <a:latin typeface="Consolas"/>
               </a:rPr>
-              <a:t>205 arquivos  ·  695 ligações  ·  medido no branch por grafo_repo.py</a:t>
+              <a:t>209 arquivos  ·  719 ligações  ·  medido no branch por grafo_repo.py</a:t>
             </a:r>
           </a:p>
         </p:txBody>
@@ -11109,7 +11393,7 @@
         </p:nvSpPr>
         <p:spPr>
           <a:xfrm>
-            <a:off x="2903101" y="4043871"/>
+            <a:off x="2690320" y="3888827"/>
             <a:ext cx="182880" cy="182880"/>
           </a:xfrm>
           <a:prstGeom prst="ellipse">
@@ -11156,9 +11440,9 @@
           <p:nvPr/>
         </p:nvCxnSpPr>
         <p:spPr>
-          <a:xfrm flipV="1">
-            <a:off x="2994541" y="3411134"/>
-            <a:ext cx="1630177" cy="724177"/>
+          <a:xfrm flipH="1" flipV="1">
+            <a:off x="1701063" y="2877907"/>
+            <a:ext cx="1080697" cy="1102360"/>
           </a:xfrm>
           <a:prstGeom prst="line">
             <a:avLst/>
@@ -11194,7 +11478,7 @@
         </p:nvSpPr>
         <p:spPr>
           <a:xfrm>
-            <a:off x="4533278" y="3319694"/>
+            <a:off x="1609623" y="2786467"/>
             <a:ext cx="182880" cy="182880"/>
           </a:xfrm>
           <a:prstGeom prst="ellipse">
@@ -11242,8 +11526,8 @@
         </p:nvCxnSpPr>
         <p:spPr>
           <a:xfrm flipH="1">
-            <a:off x="4121220" y="3411134"/>
-            <a:ext cx="503498" cy="1210191"/>
+            <a:off x="1634220" y="2877907"/>
+            <a:ext cx="66843" cy="990028"/>
           </a:xfrm>
           <a:prstGeom prst="line">
             <a:avLst/>
@@ -11279,7 +11563,7 @@
         </p:nvSpPr>
         <p:spPr>
           <a:xfrm>
-            <a:off x="4029780" y="4529885"/>
+            <a:off x="1542780" y="3776495"/>
             <a:ext cx="182880" cy="182880"/>
           </a:xfrm>
           <a:prstGeom prst="ellipse">
@@ -11326,9 +11610,9 @@
           <p:nvPr/>
         </p:nvCxnSpPr>
         <p:spPr>
-          <a:xfrm flipH="1" flipV="1">
-            <a:off x="3041969" y="3917674"/>
-            <a:ext cx="1079251" cy="703651"/>
+          <a:xfrm flipV="1">
+            <a:off x="1634220" y="3571236"/>
+            <a:ext cx="764055" cy="296699"/>
           </a:xfrm>
           <a:prstGeom prst="line">
             <a:avLst/>
@@ -11364,7 +11648,7 @@
         </p:nvSpPr>
         <p:spPr>
           <a:xfrm>
-            <a:off x="2950529" y="3826234"/>
+            <a:off x="2306835" y="3479796"/>
             <a:ext cx="182880" cy="182880"/>
           </a:xfrm>
           <a:prstGeom prst="ellipse">
@@ -11412,8 +11696,8 @@
         </p:nvCxnSpPr>
         <p:spPr>
           <a:xfrm>
-            <a:off x="3041969" y="3917674"/>
-            <a:ext cx="304176" cy="446538"/>
+            <a:off x="2398275" y="3571236"/>
+            <a:ext cx="64738" cy="638276"/>
           </a:xfrm>
           <a:prstGeom prst="line">
             <a:avLst/>
@@ -11449,7 +11733,7 @@
         </p:nvSpPr>
         <p:spPr>
           <a:xfrm>
-            <a:off x="3254705" y="4272772"/>
+            <a:off x="2371573" y="4118072"/>
             <a:ext cx="182880" cy="182880"/>
           </a:xfrm>
           <a:prstGeom prst="ellipse">
@@ -11496,9 +11780,9 @@
           <p:nvPr/>
         </p:nvCxnSpPr>
         <p:spPr>
-          <a:xfrm flipV="1">
-            <a:off x="3346145" y="3247232"/>
-            <a:ext cx="469866" cy="1116980"/>
+          <a:xfrm flipH="1" flipV="1">
+            <a:off x="1998661" y="3397918"/>
+            <a:ext cx="464352" cy="811594"/>
           </a:xfrm>
           <a:prstGeom prst="line">
             <a:avLst/>
@@ -11534,7 +11818,7 @@
         </p:nvSpPr>
         <p:spPr>
           <a:xfrm>
-            <a:off x="3724571" y="3155792"/>
+            <a:off x="1907221" y="3306478"/>
             <a:ext cx="182880" cy="182880"/>
           </a:xfrm>
           <a:prstGeom prst="ellipse">
@@ -11581,9 +11865,9 @@
           <p:nvPr/>
         </p:nvCxnSpPr>
         <p:spPr>
-          <a:xfrm flipH="1">
-            <a:off x="2763967" y="3247232"/>
-            <a:ext cx="1052044" cy="187749"/>
+          <a:xfrm>
+            <a:off x="1998661" y="3397918"/>
+            <a:ext cx="1489538" cy="94890"/>
           </a:xfrm>
           <a:prstGeom prst="line">
             <a:avLst/>
@@ -11619,7 +11903,7 @@
         </p:nvSpPr>
         <p:spPr>
           <a:xfrm>
-            <a:off x="2672527" y="3343541"/>
+            <a:off x="3396759" y="3401368"/>
             <a:ext cx="182880" cy="182880"/>
           </a:xfrm>
           <a:prstGeom prst="ellipse">
@@ -11666,9 +11950,9 @@
           <p:nvPr/>
         </p:nvCxnSpPr>
         <p:spPr>
-          <a:xfrm>
-            <a:off x="2763967" y="3434981"/>
-            <a:ext cx="604072" cy="522461"/>
+          <a:xfrm flipH="1">
+            <a:off x="2315891" y="3492808"/>
+            <a:ext cx="1172308" cy="337708"/>
           </a:xfrm>
           <a:prstGeom prst="line">
             <a:avLst/>
@@ -11704,7 +11988,7 @@
         </p:nvSpPr>
         <p:spPr>
           <a:xfrm>
-            <a:off x="3276599" y="3866002"/>
+            <a:off x="2224451" y="3739076"/>
             <a:ext cx="182880" cy="182880"/>
           </a:xfrm>
           <a:prstGeom prst="ellipse">
@@ -11752,7 +12036,7 @@
         </p:nvSpPr>
         <p:spPr>
           <a:xfrm>
-            <a:off x="3116579" y="3705982"/>
+            <a:off x="2064431" y="3579056"/>
             <a:ext cx="502920" cy="502920"/>
           </a:xfrm>
           <a:prstGeom prst="ellipse">
@@ -13276,7 +13560,7 @@
                 </a:solidFill>
                 <a:latin typeface="Consolas"/>
               </a:rPr>
-              <a:t>205 arquivos  ·  695 ligações  ·  medido no branch por grafo_repo.py</a:t>
+              <a:t>209 arquivos  ·  719 ligações  ·  medido no branch por grafo_repo.py</a:t>
             </a:r>
           </a:p>
         </p:txBody>
@@ -13289,7 +13573,7 @@
         </p:nvSpPr>
         <p:spPr>
           <a:xfrm>
-            <a:off x="2903101" y="4043871"/>
+            <a:off x="2690320" y="3888827"/>
             <a:ext cx="182880" cy="182880"/>
           </a:xfrm>
           <a:prstGeom prst="ellipse">
@@ -13336,9 +13620,9 @@
           <p:nvPr/>
         </p:nvCxnSpPr>
         <p:spPr>
-          <a:xfrm flipV="1">
-            <a:off x="2994541" y="3411134"/>
-            <a:ext cx="1630177" cy="724177"/>
+          <a:xfrm flipH="1" flipV="1">
+            <a:off x="1701063" y="2877907"/>
+            <a:ext cx="1080697" cy="1102360"/>
           </a:xfrm>
           <a:prstGeom prst="line">
             <a:avLst/>
@@ -13374,7 +13658,7 @@
         </p:nvSpPr>
         <p:spPr>
           <a:xfrm>
-            <a:off x="4533278" y="3319694"/>
+            <a:off x="1609623" y="2786467"/>
             <a:ext cx="182880" cy="182880"/>
           </a:xfrm>
           <a:prstGeom prst="ellipse">
@@ -13422,8 +13706,8 @@
         </p:nvCxnSpPr>
         <p:spPr>
           <a:xfrm flipH="1">
-            <a:off x="4121220" y="3411134"/>
-            <a:ext cx="503498" cy="1210191"/>
+            <a:off x="1634220" y="2877907"/>
+            <a:ext cx="66843" cy="990028"/>
           </a:xfrm>
           <a:prstGeom prst="line">
             <a:avLst/>
@@ -13459,7 +13743,7 @@
         </p:nvSpPr>
         <p:spPr>
           <a:xfrm>
-            <a:off x="4029780" y="4529885"/>
+            <a:off x="1542780" y="3776495"/>
             <a:ext cx="182880" cy="182880"/>
           </a:xfrm>
           <a:prstGeom prst="ellipse">
@@ -13506,9 +13790,9 @@
           <p:nvPr/>
         </p:nvCxnSpPr>
         <p:spPr>
-          <a:xfrm flipH="1" flipV="1">
-            <a:off x="3041969" y="3917674"/>
-            <a:ext cx="1079251" cy="703651"/>
+          <a:xfrm flipV="1">
+            <a:off x="1634220" y="3571236"/>
+            <a:ext cx="764055" cy="296699"/>
           </a:xfrm>
           <a:prstGeom prst="line">
             <a:avLst/>
@@ -13544,7 +13828,7 @@
         </p:nvSpPr>
         <p:spPr>
           <a:xfrm>
-            <a:off x="2950529" y="3826234"/>
+            <a:off x="2306835" y="3479796"/>
             <a:ext cx="182880" cy="182880"/>
           </a:xfrm>
           <a:prstGeom prst="ellipse">
@@ -13592,8 +13876,8 @@
         </p:nvCxnSpPr>
         <p:spPr>
           <a:xfrm>
-            <a:off x="3041969" y="3917674"/>
-            <a:ext cx="304176" cy="446538"/>
+            <a:off x="2398275" y="3571236"/>
+            <a:ext cx="64738" cy="638276"/>
           </a:xfrm>
           <a:prstGeom prst="line">
             <a:avLst/>
@@ -13629,7 +13913,7 @@
         </p:nvSpPr>
         <p:spPr>
           <a:xfrm>
-            <a:off x="3254705" y="4272772"/>
+            <a:off x="2371573" y="4118072"/>
             <a:ext cx="182880" cy="182880"/>
           </a:xfrm>
           <a:prstGeom prst="ellipse">
@@ -13676,9 +13960,9 @@
           <p:nvPr/>
         </p:nvCxnSpPr>
         <p:spPr>
-          <a:xfrm flipV="1">
-            <a:off x="3346145" y="3247232"/>
-            <a:ext cx="469866" cy="1116980"/>
+          <a:xfrm flipH="1" flipV="1">
+            <a:off x="1998661" y="3397918"/>
+            <a:ext cx="464352" cy="811594"/>
           </a:xfrm>
           <a:prstGeom prst="line">
             <a:avLst/>
@@ -13714,7 +13998,7 @@
         </p:nvSpPr>
         <p:spPr>
           <a:xfrm>
-            <a:off x="3724571" y="3155792"/>
+            <a:off x="1907221" y="3306478"/>
             <a:ext cx="182880" cy="182880"/>
           </a:xfrm>
           <a:prstGeom prst="ellipse">
@@ -13761,9 +14045,9 @@
           <p:nvPr/>
         </p:nvCxnSpPr>
         <p:spPr>
-          <a:xfrm flipH="1">
-            <a:off x="2763967" y="3247232"/>
-            <a:ext cx="1052044" cy="187749"/>
+          <a:xfrm>
+            <a:off x="1998661" y="3397918"/>
+            <a:ext cx="1489538" cy="94890"/>
           </a:xfrm>
           <a:prstGeom prst="line">
             <a:avLst/>
@@ -13799,7 +14083,7 @@
         </p:nvSpPr>
         <p:spPr>
           <a:xfrm>
-            <a:off x="2672527" y="3343541"/>
+            <a:off x="3396759" y="3401368"/>
             <a:ext cx="182880" cy="182880"/>
           </a:xfrm>
           <a:prstGeom prst="ellipse">
@@ -13846,9 +14130,9 @@
           <p:nvPr/>
         </p:nvCxnSpPr>
         <p:spPr>
-          <a:xfrm>
-            <a:off x="2763967" y="3434981"/>
-            <a:ext cx="604072" cy="522461"/>
+          <a:xfrm flipH="1">
+            <a:off x="2315891" y="3492808"/>
+            <a:ext cx="1172308" cy="337708"/>
           </a:xfrm>
           <a:prstGeom prst="line">
             <a:avLst/>
@@ -13884,7 +14168,7 @@
         </p:nvSpPr>
         <p:spPr>
           <a:xfrm>
-            <a:off x="3276599" y="3866002"/>
+            <a:off x="2224451" y="3739076"/>
             <a:ext cx="182880" cy="182880"/>
           </a:xfrm>
           <a:prstGeom prst="ellipse">
@@ -13931,9 +14215,9 @@
           <p:nvPr/>
         </p:nvCxnSpPr>
         <p:spPr>
-          <a:xfrm flipH="1" flipV="1">
-            <a:off x="2886755" y="2895055"/>
-            <a:ext cx="481284" cy="1062387"/>
+          <a:xfrm flipV="1">
+            <a:off x="2315891" y="2848077"/>
+            <a:ext cx="337499" cy="982439"/>
           </a:xfrm>
           <a:prstGeom prst="line">
             <a:avLst/>
@@ -13969,7 +14253,7 @@
         </p:nvSpPr>
         <p:spPr>
           <a:xfrm>
-            <a:off x="2795315" y="2803615"/>
+            <a:off x="2561950" y="2756637"/>
             <a:ext cx="182880" cy="182880"/>
           </a:xfrm>
           <a:prstGeom prst="ellipse">
@@ -14017,7 +14301,7 @@
         </p:nvSpPr>
         <p:spPr>
           <a:xfrm>
-            <a:off x="2635295" y="2643595"/>
+            <a:off x="2401930" y="2596617"/>
             <a:ext cx="502920" cy="502920"/>
           </a:xfrm>
           <a:prstGeom prst="ellipse">
@@ -15595,7 +15879,7 @@
                 </a:solidFill>
                 <a:latin typeface="Consolas"/>
               </a:rPr>
-              <a:t>205 arquivos  ·  695 ligações  ·  medido no branch por grafo_repo.py</a:t>
+              <a:t>209 arquivos  ·  719 ligações  ·  medido no branch por grafo_repo.py</a:t>
             </a:r>
           </a:p>
         </p:txBody>
@@ -15608,7 +15892,7 @@
         </p:nvSpPr>
         <p:spPr>
           <a:xfrm>
-            <a:off x="2903101" y="4043871"/>
+            <a:off x="2690320" y="3888827"/>
             <a:ext cx="182880" cy="182880"/>
           </a:xfrm>
           <a:prstGeom prst="ellipse">
@@ -15655,9 +15939,9 @@
           <p:nvPr/>
         </p:nvCxnSpPr>
         <p:spPr>
-          <a:xfrm flipV="1">
-            <a:off x="2994541" y="3411134"/>
-            <a:ext cx="1630177" cy="724177"/>
+          <a:xfrm flipH="1" flipV="1">
+            <a:off x="1701063" y="2877907"/>
+            <a:ext cx="1080697" cy="1102360"/>
           </a:xfrm>
           <a:prstGeom prst="line">
             <a:avLst/>
@@ -15693,7 +15977,7 @@
         </p:nvSpPr>
         <p:spPr>
           <a:xfrm>
-            <a:off x="4533278" y="3319694"/>
+            <a:off x="1609623" y="2786467"/>
             <a:ext cx="182880" cy="182880"/>
           </a:xfrm>
           <a:prstGeom prst="ellipse">
@@ -15741,8 +16025,8 @@
         </p:nvCxnSpPr>
         <p:spPr>
           <a:xfrm flipH="1">
-            <a:off x="4121220" y="3411134"/>
-            <a:ext cx="503498" cy="1210191"/>
+            <a:off x="1634220" y="2877907"/>
+            <a:ext cx="66843" cy="990028"/>
           </a:xfrm>
           <a:prstGeom prst="line">
             <a:avLst/>
@@ -15778,7 +16062,7 @@
         </p:nvSpPr>
         <p:spPr>
           <a:xfrm>
-            <a:off x="4029780" y="4529885"/>
+            <a:off x="1542780" y="3776495"/>
             <a:ext cx="182880" cy="182880"/>
           </a:xfrm>
           <a:prstGeom prst="ellipse">
@@ -15825,9 +16109,9 @@
           <p:nvPr/>
         </p:nvCxnSpPr>
         <p:spPr>
-          <a:xfrm flipH="1" flipV="1">
-            <a:off x="3041969" y="3917674"/>
-            <a:ext cx="1079251" cy="703651"/>
+          <a:xfrm flipV="1">
+            <a:off x="1634220" y="3571236"/>
+            <a:ext cx="764055" cy="296699"/>
           </a:xfrm>
           <a:prstGeom prst="line">
             <a:avLst/>
@@ -15863,7 +16147,7 @@
         </p:nvSpPr>
         <p:spPr>
           <a:xfrm>
-            <a:off x="2950529" y="3826234"/>
+            <a:off x="2306835" y="3479796"/>
             <a:ext cx="182880" cy="182880"/>
           </a:xfrm>
           <a:prstGeom prst="ellipse">
@@ -15911,8 +16195,8 @@
         </p:nvCxnSpPr>
         <p:spPr>
           <a:xfrm>
-            <a:off x="3041969" y="3917674"/>
-            <a:ext cx="304176" cy="446538"/>
+            <a:off x="2398275" y="3571236"/>
+            <a:ext cx="64738" cy="638276"/>
           </a:xfrm>
           <a:prstGeom prst="line">
             <a:avLst/>
@@ -15948,7 +16232,7 @@
         </p:nvSpPr>
         <p:spPr>
           <a:xfrm>
-            <a:off x="3254705" y="4272772"/>
+            <a:off x="2371573" y="4118072"/>
             <a:ext cx="182880" cy="182880"/>
           </a:xfrm>
           <a:prstGeom prst="ellipse">
@@ -15995,9 +16279,9 @@
           <p:nvPr/>
         </p:nvCxnSpPr>
         <p:spPr>
-          <a:xfrm flipV="1">
-            <a:off x="3346145" y="3247232"/>
-            <a:ext cx="469866" cy="1116980"/>
+          <a:xfrm flipH="1" flipV="1">
+            <a:off x="1998661" y="3397918"/>
+            <a:ext cx="464352" cy="811594"/>
           </a:xfrm>
           <a:prstGeom prst="line">
             <a:avLst/>
@@ -16033,7 +16317,7 @@
         </p:nvSpPr>
         <p:spPr>
           <a:xfrm>
-            <a:off x="3724571" y="3155792"/>
+            <a:off x="1907221" y="3306478"/>
             <a:ext cx="182880" cy="182880"/>
           </a:xfrm>
           <a:prstGeom prst="ellipse">
@@ -16080,9 +16364,9 @@
           <p:nvPr/>
         </p:nvCxnSpPr>
         <p:spPr>
-          <a:xfrm flipH="1">
-            <a:off x="2763967" y="3247232"/>
-            <a:ext cx="1052044" cy="187749"/>
+          <a:xfrm>
+            <a:off x="1998661" y="3397918"/>
+            <a:ext cx="1489538" cy="94890"/>
           </a:xfrm>
           <a:prstGeom prst="line">
             <a:avLst/>
@@ -16118,7 +16402,7 @@
         </p:nvSpPr>
         <p:spPr>
           <a:xfrm>
-            <a:off x="2672527" y="3343541"/>
+            <a:off x="3396759" y="3401368"/>
             <a:ext cx="182880" cy="182880"/>
           </a:xfrm>
           <a:prstGeom prst="ellipse">
@@ -16165,9 +16449,9 @@
           <p:nvPr/>
         </p:nvCxnSpPr>
         <p:spPr>
-          <a:xfrm>
-            <a:off x="2763967" y="3434981"/>
-            <a:ext cx="604072" cy="522461"/>
+          <a:xfrm flipH="1">
+            <a:off x="2315891" y="3492808"/>
+            <a:ext cx="1172308" cy="337708"/>
           </a:xfrm>
           <a:prstGeom prst="line">
             <a:avLst/>
@@ -16203,7 +16487,7 @@
         </p:nvSpPr>
         <p:spPr>
           <a:xfrm>
-            <a:off x="3276599" y="3866002"/>
+            <a:off x="2224451" y="3739076"/>
             <a:ext cx="182880" cy="182880"/>
           </a:xfrm>
           <a:prstGeom prst="ellipse">
@@ -16250,9 +16534,9 @@
           <p:nvPr/>
         </p:nvCxnSpPr>
         <p:spPr>
-          <a:xfrm flipH="1" flipV="1">
-            <a:off x="2886755" y="2895055"/>
-            <a:ext cx="481284" cy="1062387"/>
+          <a:xfrm flipV="1">
+            <a:off x="2315891" y="2848077"/>
+            <a:ext cx="337499" cy="982439"/>
           </a:xfrm>
           <a:prstGeom prst="line">
             <a:avLst/>
@@ -16288,7 +16572,7 @@
         </p:nvSpPr>
         <p:spPr>
           <a:xfrm>
-            <a:off x="2795315" y="2803615"/>
+            <a:off x="2561950" y="2756637"/>
             <a:ext cx="182880" cy="182880"/>
           </a:xfrm>
           <a:prstGeom prst="ellipse">
@@ -16336,8 +16620,8 @@
         </p:nvCxnSpPr>
         <p:spPr>
           <a:xfrm>
-            <a:off x="2886755" y="2895055"/>
-            <a:ext cx="118463" cy="581094"/>
+            <a:off x="2653390" y="2848077"/>
+            <a:ext cx="290913" cy="839565"/>
           </a:xfrm>
           <a:prstGeom prst="line">
             <a:avLst/>
@@ -16373,7 +16657,7 @@
         </p:nvSpPr>
         <p:spPr>
           <a:xfrm>
-            <a:off x="2913778" y="3384709"/>
+            <a:off x="2852863" y="3596202"/>
             <a:ext cx="182880" cy="182880"/>
           </a:xfrm>
           <a:prstGeom prst="ellipse">
@@ -16421,7 +16705,7 @@
         </p:nvSpPr>
         <p:spPr>
           <a:xfrm>
-            <a:off x="2753758" y="3224689"/>
+            <a:off x="2692843" y="3436182"/>
             <a:ext cx="502920" cy="502920"/>
           </a:xfrm>
           <a:prstGeom prst="ellipse">
@@ -18053,7 +18337,7 @@
                 </a:solidFill>
                 <a:latin typeface="Consolas"/>
               </a:rPr>
-              <a:t>205 arquivos  ·  695 ligações  ·  medido no branch por grafo_repo.py</a:t>
+              <a:t>209 arquivos  ·  719 ligações  ·  medido no branch por grafo_repo.py</a:t>
             </a:r>
           </a:p>
         </p:txBody>
@@ -18066,7 +18350,7 @@
         </p:nvSpPr>
         <p:spPr>
           <a:xfrm>
-            <a:off x="2903101" y="4043871"/>
+            <a:off x="2690320" y="3888827"/>
             <a:ext cx="182880" cy="182880"/>
           </a:xfrm>
           <a:prstGeom prst="ellipse">
@@ -18113,9 +18397,9 @@
           <p:nvPr/>
         </p:nvCxnSpPr>
         <p:spPr>
-          <a:xfrm flipV="1">
-            <a:off x="2994541" y="3411134"/>
-            <a:ext cx="1630177" cy="724177"/>
+          <a:xfrm flipH="1" flipV="1">
+            <a:off x="1701063" y="2877907"/>
+            <a:ext cx="1080697" cy="1102360"/>
           </a:xfrm>
           <a:prstGeom prst="line">
             <a:avLst/>
@@ -18151,7 +18435,7 @@
         </p:nvSpPr>
         <p:spPr>
           <a:xfrm>
-            <a:off x="4533278" y="3319694"/>
+            <a:off x="1609623" y="2786467"/>
             <a:ext cx="182880" cy="182880"/>
           </a:xfrm>
           <a:prstGeom prst="ellipse">
@@ -18199,8 +18483,8 @@
         </p:nvCxnSpPr>
         <p:spPr>
           <a:xfrm flipH="1">
-            <a:off x="4121220" y="3411134"/>
-            <a:ext cx="503498" cy="1210191"/>
+            <a:off x="1634220" y="2877907"/>
+            <a:ext cx="66843" cy="990028"/>
           </a:xfrm>
           <a:prstGeom prst="line">
             <a:avLst/>
@@ -18236,7 +18520,7 @@
         </p:nvSpPr>
         <p:spPr>
           <a:xfrm>
-            <a:off x="4029780" y="4529885"/>
+            <a:off x="1542780" y="3776495"/>
             <a:ext cx="182880" cy="182880"/>
           </a:xfrm>
           <a:prstGeom prst="ellipse">
@@ -18283,9 +18567,9 @@
           <p:nvPr/>
         </p:nvCxnSpPr>
         <p:spPr>
-          <a:xfrm flipH="1" flipV="1">
-            <a:off x="3041969" y="3917674"/>
-            <a:ext cx="1079251" cy="703651"/>
+          <a:xfrm flipV="1">
+            <a:off x="1634220" y="3571236"/>
+            <a:ext cx="764055" cy="296699"/>
           </a:xfrm>
           <a:prstGeom prst="line">
             <a:avLst/>
@@ -18321,7 +18605,7 @@
         </p:nvSpPr>
         <p:spPr>
           <a:xfrm>
-            <a:off x="2950529" y="3826234"/>
+            <a:off x="2306835" y="3479796"/>
             <a:ext cx="182880" cy="182880"/>
           </a:xfrm>
           <a:prstGeom prst="ellipse">
@@ -18369,8 +18653,8 @@
         </p:nvCxnSpPr>
         <p:spPr>
           <a:xfrm>
-            <a:off x="3041969" y="3917674"/>
-            <a:ext cx="304176" cy="446538"/>
+            <a:off x="2398275" y="3571236"/>
+            <a:ext cx="64738" cy="638276"/>
           </a:xfrm>
           <a:prstGeom prst="line">
             <a:avLst/>
@@ -18406,7 +18690,7 @@
         </p:nvSpPr>
         <p:spPr>
           <a:xfrm>
-            <a:off x="3254705" y="4272772"/>
+            <a:off x="2371573" y="4118072"/>
             <a:ext cx="182880" cy="182880"/>
           </a:xfrm>
           <a:prstGeom prst="ellipse">
@@ -18453,9 +18737,9 @@
           <p:nvPr/>
         </p:nvCxnSpPr>
         <p:spPr>
-          <a:xfrm flipV="1">
-            <a:off x="3346145" y="3247232"/>
-            <a:ext cx="469866" cy="1116980"/>
+          <a:xfrm flipH="1" flipV="1">
+            <a:off x="1998661" y="3397918"/>
+            <a:ext cx="464352" cy="811594"/>
           </a:xfrm>
           <a:prstGeom prst="line">
             <a:avLst/>
@@ -18491,7 +18775,7 @@
         </p:nvSpPr>
         <p:spPr>
           <a:xfrm>
-            <a:off x="3724571" y="3155792"/>
+            <a:off x="1907221" y="3306478"/>
             <a:ext cx="182880" cy="182880"/>
           </a:xfrm>
           <a:prstGeom prst="ellipse">
@@ -18538,9 +18822,9 @@
           <p:nvPr/>
         </p:nvCxnSpPr>
         <p:spPr>
-          <a:xfrm flipH="1">
-            <a:off x="2763967" y="3247232"/>
-            <a:ext cx="1052044" cy="187749"/>
+          <a:xfrm>
+            <a:off x="1998661" y="3397918"/>
+            <a:ext cx="1489538" cy="94890"/>
           </a:xfrm>
           <a:prstGeom prst="line">
             <a:avLst/>
@@ -18576,7 +18860,7 @@
         </p:nvSpPr>
         <p:spPr>
           <a:xfrm>
-            <a:off x="2672527" y="3343541"/>
+            <a:off x="3396759" y="3401368"/>
             <a:ext cx="182880" cy="182880"/>
           </a:xfrm>
           <a:prstGeom prst="ellipse">
@@ -18623,9 +18907,9 @@
           <p:nvPr/>
         </p:nvCxnSpPr>
         <p:spPr>
-          <a:xfrm>
-            <a:off x="2763967" y="3434981"/>
-            <a:ext cx="604072" cy="522461"/>
+          <a:xfrm flipH="1">
+            <a:off x="2315891" y="3492808"/>
+            <a:ext cx="1172308" cy="337708"/>
           </a:xfrm>
           <a:prstGeom prst="line">
             <a:avLst/>
@@ -18661,7 +18945,7 @@
         </p:nvSpPr>
         <p:spPr>
           <a:xfrm>
-            <a:off x="3276599" y="3866002"/>
+            <a:off x="2224451" y="3739076"/>
             <a:ext cx="182880" cy="182880"/>
           </a:xfrm>
           <a:prstGeom prst="ellipse">
@@ -18708,9 +18992,9 @@
           <p:nvPr/>
         </p:nvCxnSpPr>
         <p:spPr>
-          <a:xfrm flipH="1" flipV="1">
-            <a:off x="2886755" y="2895055"/>
-            <a:ext cx="481284" cy="1062387"/>
+          <a:xfrm flipV="1">
+            <a:off x="2315891" y="2848077"/>
+            <a:ext cx="337499" cy="982439"/>
           </a:xfrm>
           <a:prstGeom prst="line">
             <a:avLst/>
@@ -18746,7 +19030,7 @@
         </p:nvSpPr>
         <p:spPr>
           <a:xfrm>
-            <a:off x="2795315" y="2803615"/>
+            <a:off x="2561950" y="2756637"/>
             <a:ext cx="182880" cy="182880"/>
           </a:xfrm>
           <a:prstGeom prst="ellipse">
@@ -18794,8 +19078,8 @@
         </p:nvCxnSpPr>
         <p:spPr>
           <a:xfrm>
-            <a:off x="2886755" y="2895055"/>
-            <a:ext cx="118463" cy="581094"/>
+            <a:off x="2653390" y="2848077"/>
+            <a:ext cx="290913" cy="839565"/>
           </a:xfrm>
           <a:prstGeom prst="line">
             <a:avLst/>
@@ -18831,7 +19115,7 @@
         </p:nvSpPr>
         <p:spPr>
           <a:xfrm>
-            <a:off x="2913778" y="3384709"/>
+            <a:off x="2852863" y="3596202"/>
             <a:ext cx="182880" cy="182880"/>
           </a:xfrm>
           <a:prstGeom prst="ellipse">
@@ -18878,9 +19162,9 @@
           <p:nvPr/>
         </p:nvCxnSpPr>
         <p:spPr>
-          <a:xfrm flipH="1">
-            <a:off x="2506262" y="3476149"/>
-            <a:ext cx="498956" cy="1858954"/>
+          <a:xfrm>
+            <a:off x="2944303" y="3687642"/>
+            <a:ext cx="998310" cy="1479946"/>
           </a:xfrm>
           <a:prstGeom prst="line">
             <a:avLst/>
@@ -18916,7 +19200,7 @@
         </p:nvSpPr>
         <p:spPr>
           <a:xfrm>
-            <a:off x="2414822" y="5243663"/>
+            <a:off x="3851173" y="5076148"/>
             <a:ext cx="182880" cy="182880"/>
           </a:xfrm>
           <a:prstGeom prst="ellipse">
@@ -18964,7 +19248,7 @@
         </p:nvSpPr>
         <p:spPr>
           <a:xfrm>
-            <a:off x="2254802" y="5083643"/>
+            <a:off x="3691153" y="4916128"/>
             <a:ext cx="502920" cy="502920"/>
           </a:xfrm>
           <a:prstGeom prst="ellipse">
@@ -20650,7 +20934,7 @@
                 </a:solidFill>
                 <a:latin typeface="Consolas"/>
               </a:rPr>
-              <a:t>205 arquivos  ·  695 ligações  ·  medido no branch por grafo_repo.py</a:t>
+              <a:t>209 arquivos  ·  719 ligações  ·  medido no branch por grafo_repo.py</a:t>
             </a:r>
           </a:p>
         </p:txBody>
@@ -20663,7 +20947,7 @@
         </p:nvSpPr>
         <p:spPr>
           <a:xfrm>
-            <a:off x="2903101" y="4043871"/>
+            <a:off x="2690320" y="3888827"/>
             <a:ext cx="182880" cy="182880"/>
           </a:xfrm>
           <a:prstGeom prst="ellipse">
@@ -20710,9 +20994,9 @@
           <p:nvPr/>
         </p:nvCxnSpPr>
         <p:spPr>
-          <a:xfrm flipV="1">
-            <a:off x="2994541" y="3411134"/>
-            <a:ext cx="1630177" cy="724177"/>
+          <a:xfrm flipH="1" flipV="1">
+            <a:off x="1701063" y="2877907"/>
+            <a:ext cx="1080697" cy="1102360"/>
           </a:xfrm>
           <a:prstGeom prst="line">
             <a:avLst/>
@@ -20748,7 +21032,7 @@
         </p:nvSpPr>
         <p:spPr>
           <a:xfrm>
-            <a:off x="4533278" y="3319694"/>
+            <a:off x="1609623" y="2786467"/>
             <a:ext cx="182880" cy="182880"/>
           </a:xfrm>
           <a:prstGeom prst="ellipse">
@@ -20796,8 +21080,8 @@
         </p:nvCxnSpPr>
         <p:spPr>
           <a:xfrm flipH="1">
-            <a:off x="4121220" y="3411134"/>
-            <a:ext cx="503498" cy="1210191"/>
+            <a:off x="1634220" y="2877907"/>
+            <a:ext cx="66843" cy="990028"/>
           </a:xfrm>
           <a:prstGeom prst="line">
             <a:avLst/>
@@ -20833,7 +21117,7 @@
         </p:nvSpPr>
         <p:spPr>
           <a:xfrm>
-            <a:off x="4029780" y="4529885"/>
+            <a:off x="1542780" y="3776495"/>
             <a:ext cx="182880" cy="182880"/>
           </a:xfrm>
           <a:prstGeom prst="ellipse">
@@ -20880,9 +21164,9 @@
           <p:nvPr/>
         </p:nvCxnSpPr>
         <p:spPr>
-          <a:xfrm flipH="1" flipV="1">
-            <a:off x="3041969" y="3917674"/>
-            <a:ext cx="1079251" cy="703651"/>
+          <a:xfrm flipV="1">
+            <a:off x="1634220" y="3571236"/>
+            <a:ext cx="764055" cy="296699"/>
           </a:xfrm>
           <a:prstGeom prst="line">
             <a:avLst/>
@@ -20918,7 +21202,7 @@
         </p:nvSpPr>
         <p:spPr>
           <a:xfrm>
-            <a:off x="2950529" y="3826234"/>
+            <a:off x="2306835" y="3479796"/>
             <a:ext cx="182880" cy="182880"/>
           </a:xfrm>
           <a:prstGeom prst="ellipse">
@@ -20966,8 +21250,8 @@
         </p:nvCxnSpPr>
         <p:spPr>
           <a:xfrm>
-            <a:off x="3041969" y="3917674"/>
-            <a:ext cx="304176" cy="446538"/>
+            <a:off x="2398275" y="3571236"/>
+            <a:ext cx="64738" cy="638276"/>
           </a:xfrm>
           <a:prstGeom prst="line">
             <a:avLst/>
@@ -21003,7 +21287,7 @@
         </p:nvSpPr>
         <p:spPr>
           <a:xfrm>
-            <a:off x="3254705" y="4272772"/>
+            <a:off x="2371573" y="4118072"/>
             <a:ext cx="182880" cy="182880"/>
           </a:xfrm>
           <a:prstGeom prst="ellipse">
@@ -21050,9 +21334,9 @@
           <p:nvPr/>
         </p:nvCxnSpPr>
         <p:spPr>
-          <a:xfrm flipV="1">
-            <a:off x="3346145" y="3247232"/>
-            <a:ext cx="469866" cy="1116980"/>
+          <a:xfrm flipH="1" flipV="1">
+            <a:off x="1998661" y="3397918"/>
+            <a:ext cx="464352" cy="811594"/>
           </a:xfrm>
           <a:prstGeom prst="line">
             <a:avLst/>
@@ -21088,7 +21372,7 @@
         </p:nvSpPr>
         <p:spPr>
           <a:xfrm>
-            <a:off x="3724571" y="3155792"/>
+            <a:off x="1907221" y="3306478"/>
             <a:ext cx="182880" cy="182880"/>
           </a:xfrm>
           <a:prstGeom prst="ellipse">
@@ -21135,9 +21419,9 @@
           <p:nvPr/>
         </p:nvCxnSpPr>
         <p:spPr>
-          <a:xfrm flipH="1">
-            <a:off x="2763967" y="3247232"/>
-            <a:ext cx="1052044" cy="187749"/>
+          <a:xfrm>
+            <a:off x="1998661" y="3397918"/>
+            <a:ext cx="1489538" cy="94890"/>
           </a:xfrm>
           <a:prstGeom prst="line">
             <a:avLst/>
@@ -21173,7 +21457,7 @@
         </p:nvSpPr>
         <p:spPr>
           <a:xfrm>
-            <a:off x="2672527" y="3343541"/>
+            <a:off x="3396759" y="3401368"/>
             <a:ext cx="182880" cy="182880"/>
           </a:xfrm>
           <a:prstGeom prst="ellipse">
@@ -21220,9 +21504,9 @@
           <p:nvPr/>
         </p:nvCxnSpPr>
         <p:spPr>
-          <a:xfrm>
-            <a:off x="2763967" y="3434981"/>
-            <a:ext cx="604072" cy="522461"/>
+          <a:xfrm flipH="1">
+            <a:off x="2315891" y="3492808"/>
+            <a:ext cx="1172308" cy="337708"/>
           </a:xfrm>
           <a:prstGeom prst="line">
             <a:avLst/>
@@ -21258,7 +21542,7 @@
         </p:nvSpPr>
         <p:spPr>
           <a:xfrm>
-            <a:off x="3276599" y="3866002"/>
+            <a:off x="2224451" y="3739076"/>
             <a:ext cx="182880" cy="182880"/>
           </a:xfrm>
           <a:prstGeom prst="ellipse">
@@ -21305,9 +21589,9 @@
           <p:nvPr/>
         </p:nvCxnSpPr>
         <p:spPr>
-          <a:xfrm flipH="1" flipV="1">
-            <a:off x="2886755" y="2895055"/>
-            <a:ext cx="481284" cy="1062387"/>
+          <a:xfrm flipV="1">
+            <a:off x="2315891" y="2848077"/>
+            <a:ext cx="337499" cy="982439"/>
           </a:xfrm>
           <a:prstGeom prst="line">
             <a:avLst/>
@@ -21343,7 +21627,7 @@
         </p:nvSpPr>
         <p:spPr>
           <a:xfrm>
-            <a:off x="2795315" y="2803615"/>
+            <a:off x="2561950" y="2756637"/>
             <a:ext cx="182880" cy="182880"/>
           </a:xfrm>
           <a:prstGeom prst="ellipse">
@@ -21391,8 +21675,8 @@
         </p:nvCxnSpPr>
         <p:spPr>
           <a:xfrm>
-            <a:off x="2886755" y="2895055"/>
-            <a:ext cx="118463" cy="581094"/>
+            <a:off x="2653390" y="2848077"/>
+            <a:ext cx="290913" cy="839565"/>
           </a:xfrm>
           <a:prstGeom prst="line">
             <a:avLst/>
@@ -21428,7 +21712,7 @@
         </p:nvSpPr>
         <p:spPr>
           <a:xfrm>
-            <a:off x="2913778" y="3384709"/>
+            <a:off x="2852863" y="3596202"/>
             <a:ext cx="182880" cy="182880"/>
           </a:xfrm>
           <a:prstGeom prst="ellipse">
@@ -21475,9 +21759,9 @@
           <p:nvPr/>
         </p:nvCxnSpPr>
         <p:spPr>
-          <a:xfrm flipH="1">
-            <a:off x="2506262" y="3476149"/>
-            <a:ext cx="498956" cy="1858954"/>
+          <a:xfrm>
+            <a:off x="2944303" y="3687642"/>
+            <a:ext cx="998310" cy="1479946"/>
           </a:xfrm>
           <a:prstGeom prst="line">
             <a:avLst/>
@@ -21513,7 +21797,7 @@
         </p:nvSpPr>
         <p:spPr>
           <a:xfrm>
-            <a:off x="2414822" y="5243663"/>
+            <a:off x="3851173" y="5076148"/>
             <a:ext cx="182880" cy="182880"/>
           </a:xfrm>
           <a:prstGeom prst="ellipse">
@@ -26713,6 +26997,2017 @@
 </p:sld>
 </file>
 
+<file path=ppt/slides/slide18.xml><?xml version="1.0" encoding="utf-8"?>
+<p:sld xmlns:a="http://schemas.openxmlformats.org/drawingml/2006/main" xmlns:p="http://schemas.openxmlformats.org/presentationml/2006/main" xmlns:r="http://schemas.openxmlformats.org/officeDocument/2006/relationships">
+  <p:cSld>
+    <p:bg>
+      <p:bgPr>
+        <a:gradFill rotWithShape="1">
+          <a:gsLst>
+            <a:gs pos="0">
+              <a:srgbClr val="10203A"/>
+            </a:gs>
+            <a:gs pos="55000">
+              <a:srgbClr val="0A1325"/>
+            </a:gs>
+            <a:gs pos="100000">
+              <a:srgbClr val="04070E"/>
+            </a:gs>
+          </a:gsLst>
+          <a:path path="circle">
+            <a:fillToRect l="38000" r="62000" b="100000"/>
+          </a:path>
+        </a:gradFill>
+        <a:effectLst/>
+      </p:bgPr>
+    </p:bg>
+    <p:spTree>
+      <p:nvGrpSpPr>
+        <p:cNvPr id="1" name=""/>
+        <p:cNvGrpSpPr/>
+        <p:nvPr/>
+      </p:nvGrpSpPr>
+      <p:grpSpPr/>
+      <p:sp>
+        <p:nvSpPr>
+          <p:cNvPr id="2" name="!!glow_tl"/>
+          <p:cNvSpPr/>
+          <p:nvPr/>
+        </p:nvSpPr>
+        <p:spPr>
+          <a:xfrm>
+            <a:off x="-2600000" y="-2200000"/>
+            <a:ext cx="7000000" cy="5200000"/>
+          </a:xfrm>
+          <a:prstGeom prst="ellipse">
+            <a:avLst/>
+          </a:prstGeom>
+          <a:gradFill rotWithShape="1">
+            <a:gsLst>
+              <a:gs pos="0">
+                <a:srgbClr val="4F8EF7">
+                  <a:alpha val="10000"/>
+                </a:srgbClr>
+              </a:gs>
+              <a:gs pos="45000">
+                <a:srgbClr val="4F8EF7">
+                  <a:alpha val="4000"/>
+                </a:srgbClr>
+              </a:gs>
+              <a:gs pos="80000">
+                <a:srgbClr val="4F8EF7">
+                  <a:alpha val="1000"/>
+                </a:srgbClr>
+              </a:gs>
+              <a:gs pos="100000">
+                <a:srgbClr val="4F8EF7">
+                  <a:alpha val="0"/>
+                </a:srgbClr>
+              </a:gs>
+            </a:gsLst>
+            <a:path path="circle">
+              <a:fillToRect l="50000" t="50000" r="50000" b="50000"/>
+            </a:path>
+          </a:gradFill>
+          <a:ln>
+            <a:noFill/>
+          </a:ln>
+        </p:spPr>
+        <p:style>
+          <a:lnRef idx="1">
+            <a:schemeClr val="accent1"/>
+          </a:lnRef>
+          <a:fillRef idx="3">
+            <a:schemeClr val="accent1"/>
+          </a:fillRef>
+          <a:effectRef idx="2">
+            <a:schemeClr val="accent1"/>
+          </a:effectRef>
+          <a:fontRef idx="minor">
+            <a:schemeClr val="lt1"/>
+          </a:fontRef>
+        </p:style>
+        <p:txBody>
+          <a:bodyPr rtlCol="0" anchor="ctr"/>
+          <a:lstStyle/>
+          <a:p/>
+        </p:txBody>
+      </p:sp>
+      <p:sp>
+        <p:nvSpPr>
+          <p:cNvPr id="3" name="!!glow_br"/>
+          <p:cNvSpPr/>
+          <p:nvPr/>
+        </p:nvSpPr>
+        <p:spPr>
+          <a:xfrm>
+            <a:off x="8200000" y="4600000"/>
+            <a:ext cx="7000000" cy="5200000"/>
+          </a:xfrm>
+          <a:prstGeom prst="ellipse">
+            <a:avLst/>
+          </a:prstGeom>
+          <a:gradFill rotWithShape="1">
+            <a:gsLst>
+              <a:gs pos="0">
+                <a:srgbClr val="FFB531">
+                  <a:alpha val="7000"/>
+                </a:srgbClr>
+              </a:gs>
+              <a:gs pos="45000">
+                <a:srgbClr val="FFB531">
+                  <a:alpha val="2800"/>
+                </a:srgbClr>
+              </a:gs>
+              <a:gs pos="80000">
+                <a:srgbClr val="FFB531">
+                  <a:alpha val="1000"/>
+                </a:srgbClr>
+              </a:gs>
+              <a:gs pos="100000">
+                <a:srgbClr val="FFB531">
+                  <a:alpha val="0"/>
+                </a:srgbClr>
+              </a:gs>
+            </a:gsLst>
+            <a:path path="circle">
+              <a:fillToRect l="50000" t="50000" r="50000" b="50000"/>
+            </a:path>
+          </a:gradFill>
+          <a:ln>
+            <a:noFill/>
+          </a:ln>
+        </p:spPr>
+        <p:style>
+          <a:lnRef idx="1">
+            <a:schemeClr val="accent1"/>
+          </a:lnRef>
+          <a:fillRef idx="3">
+            <a:schemeClr val="accent1"/>
+          </a:fillRef>
+          <a:effectRef idx="2">
+            <a:schemeClr val="accent1"/>
+          </a:effectRef>
+          <a:fontRef idx="minor">
+            <a:schemeClr val="lt1"/>
+          </a:fontRef>
+        </p:style>
+        <p:txBody>
+          <a:bodyPr rtlCol="0" anchor="ctr"/>
+          <a:lstStyle/>
+          <a:p/>
+        </p:txBody>
+      </p:sp>
+      <p:sp>
+        <p:nvSpPr>
+          <p:cNvPr id="4" name="!!ghost"/>
+          <p:cNvSpPr txBox="1"/>
+          <p:nvPr/>
+        </p:nvSpPr>
+        <p:spPr>
+          <a:xfrm>
+            <a:off x="6900062" y="-230428"/>
+            <a:ext cx="4949647" cy="1999792"/>
+          </a:xfrm>
+          <a:prstGeom prst="rect">
+            <a:avLst/>
+          </a:prstGeom>
+          <a:noFill/>
+        </p:spPr>
+        <p:txBody>
+          <a:bodyPr wrap="none" lIns="0" rIns="0" tIns="0" bIns="0" anchor="t">
+            <a:spAutoFit/>
+          </a:bodyPr>
+          <a:lstStyle/>
+          <a:p>
+            <a:pPr algn="r">
+              <a:lnSpc>
+                <a:spcPct val="100000"/>
+              </a:lnSpc>
+              <a:spcBef>
+                <a:spcPts val="0"/>
+              </a:spcBef>
+              <a:spcAft>
+                <a:spcPts val="0"/>
+              </a:spcAft>
+            </a:pPr>
+            <a:r>
+              <a:rPr sz="15000" b="0" i="0">
+                <a:solidFill>
+                  <a:srgbClr val="101A2E"/>
+                </a:solidFill>
+                <a:latin typeface="Bahnschrift SemiBold Condensed"/>
+              </a:rPr>
+              <a:t>16</a:t>
+            </a:r>
+          </a:p>
+        </p:txBody>
+      </p:sp>
+      <p:sp>
+        <p:nvSpPr>
+          <p:cNvPr id="5" name="!!tick"/>
+          <p:cNvSpPr/>
+          <p:nvPr/>
+        </p:nvSpPr>
+        <p:spPr>
+          <a:xfrm>
+            <a:off x="603504" y="446024"/>
+            <a:ext cx="45720" cy="164592"/>
+          </a:xfrm>
+          <a:prstGeom prst="rect">
+            <a:avLst/>
+          </a:prstGeom>
+          <a:solidFill>
+            <a:srgbClr val="FFB531"/>
+          </a:solidFill>
+          <a:ln>
+            <a:noFill/>
+          </a:ln>
+        </p:spPr>
+        <p:style>
+          <a:lnRef idx="1">
+            <a:schemeClr val="accent1"/>
+          </a:lnRef>
+          <a:fillRef idx="3">
+            <a:schemeClr val="accent1"/>
+          </a:fillRef>
+          <a:effectRef idx="2">
+            <a:schemeClr val="accent1"/>
+          </a:effectRef>
+          <a:fontRef idx="minor">
+            <a:schemeClr val="lt1"/>
+          </a:fontRef>
+        </p:style>
+        <p:txBody>
+          <a:bodyPr rtlCol="0" anchor="ctr"/>
+          <a:lstStyle/>
+          <a:p>
+            <a:pPr algn="ctr"/>
+          </a:p>
+        </p:txBody>
+      </p:sp>
+      <p:sp>
+        <p:nvSpPr>
+          <p:cNvPr id="6" name="s16_4"/>
+          <p:cNvSpPr txBox="1"/>
+          <p:nvPr/>
+        </p:nvSpPr>
+        <p:spPr>
+          <a:xfrm>
+            <a:off x="731520" y="427024"/>
+            <a:ext cx="7315200" cy="202996"/>
+          </a:xfrm>
+          <a:prstGeom prst="rect">
+            <a:avLst/>
+          </a:prstGeom>
+          <a:noFill/>
+        </p:spPr>
+        <p:txBody>
+          <a:bodyPr wrap="square" lIns="0" rIns="0" tIns="0" bIns="0" anchor="ctr">
+            <a:spAutoFit/>
+          </a:bodyPr>
+          <a:lstStyle/>
+          <a:p>
+            <a:pPr algn="l">
+              <a:lnSpc>
+                <a:spcPct val="100000"/>
+              </a:lnSpc>
+              <a:spcBef>
+                <a:spcPts val="0"/>
+              </a:spcBef>
+              <a:spcAft>
+                <a:spcPts val="0"/>
+              </a:spcAft>
+            </a:pPr>
+            <a:r>
+              <a:rPr sz="1200" b="1" i="0" spc="300">
+                <a:solidFill>
+                  <a:srgbClr val="FFB531"/>
+                </a:solidFill>
+                <a:latin typeface="Consolas"/>
+              </a:rPr>
+              <a:t>KAIROS</a:t>
+            </a:r>
+            <a:r>
+              <a:rPr sz="1100" b="0" i="0" spc="72">
+                <a:solidFill>
+                  <a:srgbClr val="8395B5"/>
+                </a:solidFill>
+                <a:latin typeface="Consolas"/>
+              </a:rPr>
+              <a:t>   O Polymarket como fonte de dados</a:t>
+            </a:r>
+          </a:p>
+        </p:txBody>
+      </p:sp>
+      <p:sp>
+        <p:nvSpPr>
+          <p:cNvPr id="7" name="s16_5"/>
+          <p:cNvSpPr txBox="1"/>
+          <p:nvPr/>
+        </p:nvSpPr>
+        <p:spPr>
+          <a:xfrm>
+            <a:off x="0" y="467258"/>
+            <a:ext cx="11457432" cy="152704"/>
+          </a:xfrm>
+          <a:prstGeom prst="rect">
+            <a:avLst/>
+          </a:prstGeom>
+          <a:noFill/>
+        </p:spPr>
+        <p:txBody>
+          <a:bodyPr wrap="square" lIns="0" rIns="0" tIns="0" bIns="0" anchor="ctr">
+            <a:spAutoFit/>
+          </a:bodyPr>
+          <a:lstStyle/>
+          <a:p>
+            <a:pPr algn="r">
+              <a:lnSpc>
+                <a:spcPct val="100000"/>
+              </a:lnSpc>
+              <a:spcBef>
+                <a:spcPts val="0"/>
+              </a:spcBef>
+              <a:spcAft>
+                <a:spcPts val="0"/>
+              </a:spcAft>
+            </a:pPr>
+            <a:r>
+              <a:rPr sz="900" b="0" i="0" spc="45">
+                <a:solidFill>
+                  <a:srgbClr val="8395B5"/>
+                </a:solidFill>
+                <a:latin typeface="Consolas"/>
+              </a:rPr>
+              <a:t>16</a:t>
+            </a:r>
+          </a:p>
+        </p:txBody>
+      </p:sp>
+      <p:cxnSp>
+        <p:nvCxnSpPr>
+          <p:cNvPr id="8" name="s16_6"/>
+          <p:cNvCxnSpPr/>
+          <p:nvPr/>
+        </p:nvCxnSpPr>
+        <p:spPr>
+          <a:xfrm>
+            <a:off x="731520" y="705002"/>
+            <a:ext cx="10725912" cy="0"/>
+          </a:xfrm>
+          <a:prstGeom prst="line">
+            <a:avLst/>
+          </a:prstGeom>
+          <a:ln w="12700">
+            <a:gradFill rotWithShape="1">
+              <a:gsLst>
+                <a:gs pos="0">
+                  <a:srgbClr val="FFB531"/>
+                </a:gs>
+                <a:gs pos="30000">
+                  <a:srgbClr val="2A3F63"/>
+                </a:gs>
+                <a:gs pos="100000">
+                  <a:srgbClr val="2A3F63">
+                    <a:alpha val="30000"/>
+                  </a:srgbClr>
+                </a:gs>
+              </a:gsLst>
+              <a:lin ang="0" scaled="0"/>
+            </a:gradFill>
+          </a:ln>
+        </p:spPr>
+        <p:style>
+          <a:lnRef idx="2">
+            <a:schemeClr val="accent1"/>
+          </a:lnRef>
+          <a:fillRef idx="0">
+            <a:schemeClr val="accent1"/>
+          </a:fillRef>
+          <a:effectRef idx="1">
+            <a:schemeClr val="accent1"/>
+          </a:effectRef>
+          <a:fontRef idx="minor">
+            <a:schemeClr val="tx1"/>
+          </a:fontRef>
+        </p:style>
+      </p:cxnSp>
+      <p:sp>
+        <p:nvSpPr>
+          <p:cNvPr id="9" name="s16_7"/>
+          <p:cNvSpPr txBox="1"/>
+          <p:nvPr/>
+        </p:nvSpPr>
+        <p:spPr>
+          <a:xfrm>
+            <a:off x="731520" y="850392"/>
+            <a:ext cx="10725911" cy="640080"/>
+          </a:xfrm>
+          <a:prstGeom prst="rect">
+            <a:avLst/>
+          </a:prstGeom>
+          <a:noFill/>
+        </p:spPr>
+        <p:txBody>
+          <a:bodyPr wrap="square" lIns="0" rIns="0" tIns="0" bIns="0" anchor="t">
+            <a:spAutoFit/>
+          </a:bodyPr>
+          <a:lstStyle/>
+          <a:p>
+            <a:pPr algn="l">
+              <a:lnSpc>
+                <a:spcPct val="100000"/>
+              </a:lnSpc>
+              <a:spcBef>
+                <a:spcPts val="0"/>
+              </a:spcBef>
+              <a:spcAft>
+                <a:spcPts val="0"/>
+              </a:spcAft>
+            </a:pPr>
+            <a:r>
+              <a:rPr sz="2000" b="0" i="0">
+                <a:solidFill>
+                  <a:srgbClr val="F5F7FB"/>
+                </a:solidFill>
+                <a:latin typeface="Bahnschrift SemiBold"/>
+              </a:rPr>
+              <a:t>Calibrado e mais preciso que o mercado de juros.</a:t>
+            </a:r>
+          </a:p>
+        </p:txBody>
+      </p:sp>
+      <p:cxnSp>
+        <p:nvCxnSpPr>
+          <p:cNvPr id="10" name="s16_8"/>
+          <p:cNvCxnSpPr/>
+          <p:nvPr/>
+        </p:nvCxnSpPr>
+        <p:spPr>
+          <a:xfrm>
+            <a:off x="731520" y="6553504"/>
+            <a:ext cx="10725912" cy="0"/>
+          </a:xfrm>
+          <a:prstGeom prst="line">
+            <a:avLst/>
+          </a:prstGeom>
+          <a:ln w="9525">
+            <a:solidFill>
+              <a:srgbClr val="2A3F63"/>
+            </a:solidFill>
+          </a:ln>
+        </p:spPr>
+        <p:style>
+          <a:lnRef idx="2">
+            <a:schemeClr val="accent1"/>
+          </a:lnRef>
+          <a:fillRef idx="0">
+            <a:schemeClr val="accent1"/>
+          </a:fillRef>
+          <a:effectRef idx="1">
+            <a:schemeClr val="accent1"/>
+          </a:effectRef>
+          <a:fontRef idx="minor">
+            <a:schemeClr val="tx1"/>
+          </a:fontRef>
+        </p:style>
+      </p:cxnSp>
+      <p:sp>
+        <p:nvSpPr>
+          <p:cNvPr id="11" name="!!foot_l"/>
+          <p:cNvSpPr txBox="1"/>
+          <p:nvPr/>
+        </p:nvSpPr>
+        <p:spPr>
+          <a:xfrm>
+            <a:off x="731520" y="6653174"/>
+            <a:ext cx="5998464" cy="160020"/>
+          </a:xfrm>
+          <a:prstGeom prst="rect">
+            <a:avLst/>
+          </a:prstGeom>
+          <a:noFill/>
+        </p:spPr>
+        <p:txBody>
+          <a:bodyPr wrap="none" lIns="0" rIns="0" tIns="0" bIns="0" anchor="t">
+            <a:spAutoFit/>
+          </a:bodyPr>
+          <a:lstStyle/>
+          <a:p>
+            <a:pPr algn="l">
+              <a:lnSpc>
+                <a:spcPct val="100000"/>
+              </a:lnSpc>
+              <a:spcBef>
+                <a:spcPts val="0"/>
+              </a:spcBef>
+              <a:spcAft>
+                <a:spcPts val="0"/>
+              </a:spcAft>
+            </a:pPr>
+            <a:r>
+              <a:rPr sz="700" b="0" i="0" spc="120">
+                <a:solidFill>
+                  <a:srgbClr val="58698A"/>
+                </a:solidFill>
+                <a:latin typeface="Consolas"/>
+              </a:rPr>
+              <a:t>ITAÚ QUANT AI CHALLENGE  ·  FINAL 2026</a:t>
+            </a:r>
+          </a:p>
+        </p:txBody>
+      </p:sp>
+      <p:sp>
+        <p:nvSpPr>
+          <p:cNvPr id="12" name="!!foot_r"/>
+          <p:cNvSpPr txBox="1"/>
+          <p:nvPr/>
+        </p:nvSpPr>
+        <p:spPr>
+          <a:xfrm>
+            <a:off x="5457139" y="6653174"/>
+            <a:ext cx="5998464" cy="160020"/>
+          </a:xfrm>
+          <a:prstGeom prst="rect">
+            <a:avLst/>
+          </a:prstGeom>
+          <a:noFill/>
+        </p:spPr>
+        <p:txBody>
+          <a:bodyPr wrap="none" lIns="0" rIns="0" tIns="0" bIns="0" anchor="t">
+            <a:spAutoFit/>
+          </a:bodyPr>
+          <a:lstStyle/>
+          <a:p>
+            <a:pPr algn="r">
+              <a:lnSpc>
+                <a:spcPct val="100000"/>
+              </a:lnSpc>
+              <a:spcBef>
+                <a:spcPts val="0"/>
+              </a:spcBef>
+              <a:spcAft>
+                <a:spcPts val="0"/>
+              </a:spcAft>
+            </a:pPr>
+            <a:r>
+              <a:rPr sz="700" b="0" i="0" spc="120">
+                <a:solidFill>
+                  <a:srgbClr val="58698A"/>
+                </a:solidFill>
+                <a:latin typeface="Consolas"/>
+              </a:rPr>
+              <a:t>BLACK-LITTERMAN  ×  POLYMARKET</a:t>
+            </a:r>
+          </a:p>
+        </p:txBody>
+      </p:sp>
+      <p:sp>
+        <p:nvSpPr>
+          <p:cNvPr id="13" name="s16_11"/>
+          <p:cNvSpPr txBox="1"/>
+          <p:nvPr/>
+        </p:nvSpPr>
+        <p:spPr>
+          <a:xfrm>
+            <a:off x="731520" y="1417320"/>
+            <a:ext cx="5134355" cy="182880"/>
+          </a:xfrm>
+          <a:prstGeom prst="rect">
+            <a:avLst/>
+          </a:prstGeom>
+          <a:noFill/>
+        </p:spPr>
+        <p:txBody>
+          <a:bodyPr wrap="square" lIns="0" rIns="0" tIns="0" bIns="0" anchor="t">
+            <a:spAutoFit/>
+          </a:bodyPr>
+          <a:lstStyle/>
+          <a:p>
+            <a:pPr algn="l">
+              <a:lnSpc>
+                <a:spcPct val="100000"/>
+              </a:lnSpc>
+              <a:spcBef>
+                <a:spcPts val="0"/>
+              </a:spcBef>
+              <a:spcAft>
+                <a:spcPts val="0"/>
+              </a:spcAft>
+            </a:pPr>
+            <a:r>
+              <a:rPr sz="900" b="1" i="0" spc="180">
+                <a:solidFill>
+                  <a:srgbClr val="FFB531"/>
+                </a:solidFill>
+                <a:latin typeface="Consolas"/>
+              </a:rPr>
+              <a:t>OBSERVAÇÃO 1  ·  CALIBRAÇÃO</a:t>
+            </a:r>
+          </a:p>
+        </p:txBody>
+      </p:sp>
+      <p:sp>
+        <p:nvSpPr>
+          <p:cNvPr id="14" name="s16_12"/>
+          <p:cNvSpPr txBox="1"/>
+          <p:nvPr/>
+        </p:nvSpPr>
+        <p:spPr>
+          <a:xfrm>
+            <a:off x="731520" y="1645920"/>
+            <a:ext cx="5134355" cy="566928"/>
+          </a:xfrm>
+          <a:prstGeom prst="rect">
+            <a:avLst/>
+          </a:prstGeom>
+          <a:noFill/>
+        </p:spPr>
+        <p:txBody>
+          <a:bodyPr wrap="square" lIns="0" rIns="0" tIns="0" bIns="0" anchor="t">
+            <a:spAutoFit/>
+          </a:bodyPr>
+          <a:lstStyle/>
+          <a:p>
+            <a:pPr algn="l">
+              <a:lnSpc>
+                <a:spcPct val="105000"/>
+              </a:lnSpc>
+              <a:spcBef>
+                <a:spcPts val="0"/>
+              </a:spcBef>
+              <a:spcAft>
+                <a:spcPts val="0"/>
+              </a:spcAft>
+            </a:pPr>
+            <a:r>
+              <a:rPr sz="1400" b="0" i="0">
+                <a:solidFill>
+                  <a:srgbClr val="F5F7FB"/>
+                </a:solidFill>
+                <a:latin typeface="Bahnschrift SemiBold"/>
+              </a:rPr>
+              <a:t>Quando o Polymarket diz X %, acontece X % das vezes.</a:t>
+            </a:r>
+          </a:p>
+        </p:txBody>
+      </p:sp>
+      <p:sp>
+        <p:nvSpPr>
+          <p:cNvPr id="15" name="s16_13"/>
+          <p:cNvSpPr txBox="1"/>
+          <p:nvPr/>
+        </p:nvSpPr>
+        <p:spPr>
+          <a:xfrm>
+            <a:off x="731520" y="2212848"/>
+            <a:ext cx="1554480" cy="566928"/>
+          </a:xfrm>
+          <a:prstGeom prst="rect">
+            <a:avLst/>
+          </a:prstGeom>
+          <a:noFill/>
+        </p:spPr>
+        <p:txBody>
+          <a:bodyPr wrap="none" lIns="0" rIns="0" tIns="0" bIns="0" anchor="ctr">
+            <a:spAutoFit/>
+          </a:bodyPr>
+          <a:lstStyle/>
+          <a:p>
+            <a:pPr algn="l">
+              <a:lnSpc>
+                <a:spcPct val="100000"/>
+              </a:lnSpc>
+              <a:spcBef>
+                <a:spcPts val="0"/>
+              </a:spcBef>
+              <a:spcAft>
+                <a:spcPts val="0"/>
+              </a:spcAft>
+            </a:pPr>
+            <a:r>
+              <a:rPr sz="3400" b="0" i="0">
+                <a:solidFill>
+                  <a:srgbClr val="FFB531"/>
+                </a:solidFill>
+                <a:latin typeface="Bahnschrift SemiBold Condensed"/>
+              </a:rPr>
+              <a:t>0,043</a:t>
+            </a:r>
+          </a:p>
+        </p:txBody>
+      </p:sp>
+      <p:sp>
+        <p:nvSpPr>
+          <p:cNvPr id="16" name="s16_14"/>
+          <p:cNvSpPr txBox="1"/>
+          <p:nvPr/>
+        </p:nvSpPr>
+        <p:spPr>
+          <a:xfrm>
+            <a:off x="1874519" y="2258568"/>
+            <a:ext cx="3488435" cy="237744"/>
+          </a:xfrm>
+          <a:prstGeom prst="rect">
+            <a:avLst/>
+          </a:prstGeom>
+          <a:noFill/>
+        </p:spPr>
+        <p:txBody>
+          <a:bodyPr wrap="none" lIns="0" rIns="0" tIns="0" bIns="0" anchor="ctr">
+            <a:spAutoFit/>
+          </a:bodyPr>
+          <a:lstStyle/>
+          <a:p>
+            <a:pPr algn="l">
+              <a:lnSpc>
+                <a:spcPct val="100000"/>
+              </a:lnSpc>
+              <a:spcBef>
+                <a:spcPts val="0"/>
+              </a:spcBef>
+              <a:spcAft>
+                <a:spcPts val="0"/>
+              </a:spcAft>
+            </a:pPr>
+            <a:r>
+              <a:rPr sz="750" b="1" i="0" spc="40">
+                <a:solidFill>
+                  <a:srgbClr val="F5F7FB"/>
+                </a:solidFill>
+                <a:latin typeface="Consolas"/>
+              </a:rPr>
+              <a:t>BRIER NA VÉSPERA</a:t>
+            </a:r>
+          </a:p>
+        </p:txBody>
+      </p:sp>
+      <p:sp>
+        <p:nvSpPr>
+          <p:cNvPr id="17" name="s16_15"/>
+          <p:cNvSpPr txBox="1"/>
+          <p:nvPr/>
+        </p:nvSpPr>
+        <p:spPr>
+          <a:xfrm>
+            <a:off x="1874519" y="2496312"/>
+            <a:ext cx="3488435" cy="237744"/>
+          </a:xfrm>
+          <a:prstGeom prst="rect">
+            <a:avLst/>
+          </a:prstGeom>
+          <a:noFill/>
+        </p:spPr>
+        <p:txBody>
+          <a:bodyPr wrap="none" lIns="0" rIns="0" tIns="0" bIns="0" anchor="ctr">
+            <a:spAutoFit/>
+          </a:bodyPr>
+          <a:lstStyle/>
+          <a:p>
+            <a:pPr algn="l">
+              <a:lnSpc>
+                <a:spcPct val="100000"/>
+              </a:lnSpc>
+              <a:spcBef>
+                <a:spcPts val="0"/>
+              </a:spcBef>
+              <a:spcAft>
+                <a:spcPts val="0"/>
+              </a:spcAft>
+            </a:pPr>
+            <a:r>
+              <a:rPr sz="900" b="0" i="0">
+                <a:solidFill>
+                  <a:srgbClr val="8395B5"/>
+                </a:solidFill>
+                <a:latin typeface="Bahnschrift SemiLight"/>
+              </a:rPr>
+              <a:t>Kalshi a 1 h: 0,045</a:t>
+            </a:r>
+          </a:p>
+        </p:txBody>
+      </p:sp>
+      <p:pic>
+        <p:nvPicPr>
+          <p:cNvPr id="18" name="s16_16" descr="estudo_s0_calibracao.png"/>
+          <p:cNvPicPr>
+            <a:picLocks noChangeAspect="1"/>
+          </p:cNvPicPr>
+          <p:nvPr/>
+        </p:nvPicPr>
+        <p:blipFill>
+          <a:blip r:embed="rId2"/>
+          <a:stretch>
+            <a:fillRect/>
+          </a:stretch>
+        </p:blipFill>
+        <p:spPr>
+          <a:xfrm>
+            <a:off x="731520" y="2852928"/>
+            <a:ext cx="5134355" cy="2616594"/>
+          </a:xfrm>
+          <a:prstGeom prst="rect">
+            <a:avLst/>
+          </a:prstGeom>
+        </p:spPr>
+      </p:pic>
+      <p:sp>
+        <p:nvSpPr>
+          <p:cNvPr id="19" name="s16_17"/>
+          <p:cNvSpPr txBox="1"/>
+          <p:nvPr/>
+        </p:nvSpPr>
+        <p:spPr>
+          <a:xfrm>
+            <a:off x="6323075" y="1417320"/>
+            <a:ext cx="5134355" cy="182880"/>
+          </a:xfrm>
+          <a:prstGeom prst="rect">
+            <a:avLst/>
+          </a:prstGeom>
+          <a:noFill/>
+        </p:spPr>
+        <p:txBody>
+          <a:bodyPr wrap="square" lIns="0" rIns="0" tIns="0" bIns="0" anchor="t">
+            <a:spAutoFit/>
+          </a:bodyPr>
+          <a:lstStyle/>
+          <a:p>
+            <a:pPr algn="l">
+              <a:lnSpc>
+                <a:spcPct val="100000"/>
+              </a:lnSpc>
+              <a:spcBef>
+                <a:spcPts val="0"/>
+              </a:spcBef>
+              <a:spcAft>
+                <a:spcPts val="0"/>
+              </a:spcAft>
+            </a:pPr>
+            <a:r>
+              <a:rPr sz="900" b="1" i="0" spc="180">
+                <a:solidFill>
+                  <a:srgbClr val="FFB531"/>
+                </a:solidFill>
+                <a:latin typeface="Consolas"/>
+              </a:rPr>
+              <a:t>OBSERVAÇÃO 2  ·  DECISÃO DO FED</a:t>
+            </a:r>
+          </a:p>
+        </p:txBody>
+      </p:sp>
+      <p:sp>
+        <p:nvSpPr>
+          <p:cNvPr id="20" name="s16_18"/>
+          <p:cNvSpPr txBox="1"/>
+          <p:nvPr/>
+        </p:nvSpPr>
+        <p:spPr>
+          <a:xfrm>
+            <a:off x="6323075" y="1645920"/>
+            <a:ext cx="5134355" cy="566928"/>
+          </a:xfrm>
+          <a:prstGeom prst="rect">
+            <a:avLst/>
+          </a:prstGeom>
+          <a:noFill/>
+        </p:spPr>
+        <p:txBody>
+          <a:bodyPr wrap="square" lIns="0" rIns="0" tIns="0" bIns="0" anchor="t">
+            <a:spAutoFit/>
+          </a:bodyPr>
+          <a:lstStyle/>
+          <a:p>
+            <a:pPr algn="l">
+              <a:lnSpc>
+                <a:spcPct val="105000"/>
+              </a:lnSpc>
+              <a:spcBef>
+                <a:spcPts val="0"/>
+              </a:spcBef>
+              <a:spcAft>
+                <a:spcPts val="0"/>
+              </a:spcAft>
+            </a:pPr>
+            <a:r>
+              <a:rPr sz="1400" b="0" i="0">
+                <a:solidFill>
+                  <a:srgbClr val="F5F7FB"/>
+                </a:solidFill>
+                <a:latin typeface="Bahnschrift SemiBold"/>
+              </a:rPr>
+              <a:t>Na decisão do Fed, o Polymarket erra 0,9 bps; o mercado de juros, 4,8.</a:t>
+            </a:r>
+          </a:p>
+        </p:txBody>
+      </p:sp>
+      <p:sp>
+        <p:nvSpPr>
+          <p:cNvPr id="21" name="s16_19"/>
+          <p:cNvSpPr txBox="1"/>
+          <p:nvPr/>
+        </p:nvSpPr>
+        <p:spPr>
+          <a:xfrm>
+            <a:off x="6323075" y="2212848"/>
+            <a:ext cx="1554480" cy="566928"/>
+          </a:xfrm>
+          <a:prstGeom prst="rect">
+            <a:avLst/>
+          </a:prstGeom>
+          <a:noFill/>
+        </p:spPr>
+        <p:txBody>
+          <a:bodyPr wrap="none" lIns="0" rIns="0" tIns="0" bIns="0" anchor="ctr">
+            <a:spAutoFit/>
+          </a:bodyPr>
+          <a:lstStyle/>
+          <a:p>
+            <a:pPr algn="l">
+              <a:lnSpc>
+                <a:spcPct val="100000"/>
+              </a:lnSpc>
+              <a:spcBef>
+                <a:spcPts val="0"/>
+              </a:spcBef>
+              <a:spcAft>
+                <a:spcPts val="0"/>
+              </a:spcAft>
+            </a:pPr>
+            <a:r>
+              <a:rPr sz="3400" b="0" i="0">
+                <a:solidFill>
+                  <a:srgbClr val="FFB531"/>
+                </a:solidFill>
+                <a:latin typeface="Bahnschrift SemiBold Condensed"/>
+              </a:rPr>
+              <a:t>0,9 × 4,8</a:t>
+            </a:r>
+          </a:p>
+        </p:txBody>
+      </p:sp>
+      <p:sp>
+        <p:nvSpPr>
+          <p:cNvPr id="22" name="s16_20"/>
+          <p:cNvSpPr txBox="1"/>
+          <p:nvPr/>
+        </p:nvSpPr>
+        <p:spPr>
+          <a:xfrm>
+            <a:off x="7923275" y="2258568"/>
+            <a:ext cx="3488435" cy="237744"/>
+          </a:xfrm>
+          <a:prstGeom prst="rect">
+            <a:avLst/>
+          </a:prstGeom>
+          <a:noFill/>
+        </p:spPr>
+        <p:txBody>
+          <a:bodyPr wrap="none" lIns="0" rIns="0" tIns="0" bIns="0" anchor="ctr">
+            <a:spAutoFit/>
+          </a:bodyPr>
+          <a:lstStyle/>
+          <a:p>
+            <a:pPr algn="l">
+              <a:lnSpc>
+                <a:spcPct val="100000"/>
+              </a:lnSpc>
+              <a:spcBef>
+                <a:spcPts val="0"/>
+              </a:spcBef>
+              <a:spcAft>
+                <a:spcPts val="0"/>
+              </a:spcAft>
+            </a:pPr>
+            <a:r>
+              <a:rPr sz="750" b="1" i="0" spc="40">
+                <a:solidFill>
+                  <a:srgbClr val="F5F7FB"/>
+                </a:solidFill>
+                <a:latin typeface="Consolas"/>
+              </a:rPr>
+              <a:t>BPS DE ERRO NA VÉSPERA</a:t>
+            </a:r>
+          </a:p>
+        </p:txBody>
+      </p:sp>
+      <p:sp>
+        <p:nvSpPr>
+          <p:cNvPr id="23" name="s16_21"/>
+          <p:cNvSpPr txBox="1"/>
+          <p:nvPr/>
+        </p:nvSpPr>
+        <p:spPr>
+          <a:xfrm>
+            <a:off x="7923275" y="2496312"/>
+            <a:ext cx="3488435" cy="237744"/>
+          </a:xfrm>
+          <a:prstGeom prst="rect">
+            <a:avLst/>
+          </a:prstGeom>
+          <a:noFill/>
+        </p:spPr>
+        <p:txBody>
+          <a:bodyPr wrap="none" lIns="0" rIns="0" tIns="0" bIns="0" anchor="ctr">
+            <a:spAutoFit/>
+          </a:bodyPr>
+          <a:lstStyle/>
+          <a:p>
+            <a:pPr algn="l">
+              <a:lnSpc>
+                <a:spcPct val="100000"/>
+              </a:lnSpc>
+              <a:spcBef>
+                <a:spcPts val="0"/>
+              </a:spcBef>
+              <a:spcAft>
+                <a:spcPts val="0"/>
+              </a:spcAft>
+            </a:pPr>
+            <a:r>
+              <a:rPr sz="900" b="0" i="0">
+                <a:solidFill>
+                  <a:srgbClr val="8395B5"/>
+                </a:solidFill>
+                <a:latin typeface="Bahnschrift SemiLight"/>
+              </a:rPr>
+              <a:t>Polymarket × futuro de FF</a:t>
+            </a:r>
+          </a:p>
+        </p:txBody>
+      </p:sp>
+      <p:pic>
+        <p:nvPicPr>
+          <p:cNvPr id="24" name="s16_22" descr="estudo_s2_mae.png"/>
+          <p:cNvPicPr>
+            <a:picLocks noChangeAspect="1"/>
+          </p:cNvPicPr>
+          <p:nvPr/>
+        </p:nvPicPr>
+        <p:blipFill>
+          <a:blip r:embed="rId3"/>
+          <a:stretch>
+            <a:fillRect/>
+          </a:stretch>
+        </p:blipFill>
+        <p:spPr>
+          <a:xfrm>
+            <a:off x="6323075" y="2852928"/>
+            <a:ext cx="5134355" cy="2615335"/>
+          </a:xfrm>
+          <a:prstGeom prst="rect">
+            <a:avLst/>
+          </a:prstGeom>
+        </p:spPr>
+      </p:pic>
+      <p:sp>
+        <p:nvSpPr>
+          <p:cNvPr id="25" name="s16_23"/>
+          <p:cNvSpPr/>
+          <p:nvPr/>
+        </p:nvSpPr>
+        <p:spPr>
+          <a:xfrm>
+            <a:off x="731520" y="5596128"/>
+            <a:ext cx="10725911" cy="658368"/>
+          </a:xfrm>
+          <a:prstGeom prst="roundRect">
+            <a:avLst>
+              <a:gd name="adj" fmla="val 4000"/>
+            </a:avLst>
+          </a:prstGeom>
+          <a:gradFill rotWithShape="1">
+            <a:gsLst>
+              <a:gs pos="0">
+                <a:srgbClr val="182946"/>
+              </a:gs>
+              <a:gs pos="100000">
+                <a:srgbClr val="0F182B"/>
+              </a:gs>
+            </a:gsLst>
+            <a:lin ang="5400000" scaled="0"/>
+          </a:gradFill>
+          <a:ln w="9525">
+            <a:gradFill rotWithShape="1">
+              <a:gsLst>
+                <a:gs pos="0">
+                  <a:srgbClr val="35507A"/>
+                </a:gs>
+                <a:gs pos="100000">
+                  <a:srgbClr val="22345A"/>
+                </a:gs>
+              </a:gsLst>
+              <a:lin ang="5400000" scaled="0"/>
+            </a:gradFill>
+          </a:ln>
+          <a:effectLst/>
+        </p:spPr>
+        <p:style>
+          <a:lnRef idx="1">
+            <a:schemeClr val="accent1"/>
+          </a:lnRef>
+          <a:fillRef idx="3">
+            <a:schemeClr val="accent1"/>
+          </a:fillRef>
+          <a:effectRef idx="2">
+            <a:schemeClr val="accent1"/>
+          </a:effectRef>
+          <a:fontRef idx="minor">
+            <a:schemeClr val="lt1"/>
+          </a:fontRef>
+        </p:style>
+        <p:txBody>
+          <a:bodyPr rtlCol="0" anchor="ctr"/>
+          <a:lstStyle/>
+          <a:p/>
+        </p:txBody>
+      </p:sp>
+      <p:sp>
+        <p:nvSpPr>
+          <p:cNvPr id="26" name="s16_24"/>
+          <p:cNvSpPr txBox="1"/>
+          <p:nvPr/>
+        </p:nvSpPr>
+        <p:spPr>
+          <a:xfrm>
+            <a:off x="960120" y="5650992"/>
+            <a:ext cx="2743200" cy="182880"/>
+          </a:xfrm>
+          <a:prstGeom prst="rect">
+            <a:avLst/>
+          </a:prstGeom>
+          <a:noFill/>
+        </p:spPr>
+        <p:txBody>
+          <a:bodyPr wrap="square" lIns="0" rIns="0" tIns="0" bIns="0" anchor="t">
+            <a:spAutoFit/>
+          </a:bodyPr>
+          <a:lstStyle/>
+          <a:p>
+            <a:pPr algn="l">
+              <a:lnSpc>
+                <a:spcPct val="100000"/>
+              </a:lnSpc>
+              <a:spcBef>
+                <a:spcPts val="0"/>
+              </a:spcBef>
+              <a:spcAft>
+                <a:spcPts val="0"/>
+              </a:spcAft>
+            </a:pPr>
+            <a:r>
+              <a:rPr sz="900" b="1" i="0" spc="180">
+                <a:solidFill>
+                  <a:srgbClr val="2FD3B0"/>
+                </a:solidFill>
+                <a:latin typeface="Consolas"/>
+              </a:rPr>
+              <a:t>CONCLUSÃO</a:t>
+            </a:r>
+          </a:p>
+        </p:txBody>
+      </p:sp>
+      <p:sp>
+        <p:nvSpPr>
+          <p:cNvPr id="27" name="s16_25"/>
+          <p:cNvSpPr txBox="1"/>
+          <p:nvPr/>
+        </p:nvSpPr>
+        <p:spPr>
+          <a:xfrm>
+            <a:off x="960120" y="5824728"/>
+            <a:ext cx="10268711" cy="384048"/>
+          </a:xfrm>
+          <a:prstGeom prst="rect">
+            <a:avLst/>
+          </a:prstGeom>
+          <a:noFill/>
+        </p:spPr>
+        <p:txBody>
+          <a:bodyPr wrap="none" lIns="0" rIns="0" tIns="0" bIns="0" anchor="ctr">
+            <a:spAutoFit/>
+          </a:bodyPr>
+          <a:lstStyle/>
+          <a:p>
+            <a:pPr algn="l">
+              <a:lnSpc>
+                <a:spcPct val="100000"/>
+              </a:lnSpc>
+              <a:spcBef>
+                <a:spcPts val="0"/>
+              </a:spcBef>
+              <a:spcAft>
+                <a:spcPts val="0"/>
+              </a:spcAft>
+            </a:pPr>
+            <a:r>
+              <a:rPr sz="1300" b="0" i="0">
+                <a:solidFill>
+                  <a:srgbClr val="F5F7FB"/>
+                </a:solidFill>
+                <a:latin typeface="Bahnschrift SemiBold"/>
+              </a:rPr>
+              <a:t>É uma probabilidade confiável — e melhor que os juros no que os dois precificam. </a:t>
+            </a:r>
+            <a:r>
+              <a:rPr sz="1300" b="0" i="0">
+                <a:solidFill>
+                  <a:srgbClr val="FFB531"/>
+                </a:solidFill>
+                <a:latin typeface="Bahnschrift SemiBold"/>
+              </a:rPr>
+              <a:t>Por isso ela é a opinião do Black-Litterman.</a:t>
+            </a:r>
+          </a:p>
+        </p:txBody>
+      </p:sp>
+      <p:sp>
+        <p:nvSpPr>
+          <p:cNvPr id="28" name="s16_26"/>
+          <p:cNvSpPr txBox="1"/>
+          <p:nvPr/>
+        </p:nvSpPr>
+        <p:spPr>
+          <a:xfrm>
+            <a:off x="731520" y="6336792"/>
+            <a:ext cx="10725911" cy="146304"/>
+          </a:xfrm>
+          <a:prstGeom prst="rect">
+            <a:avLst/>
+          </a:prstGeom>
+          <a:noFill/>
+        </p:spPr>
+        <p:txBody>
+          <a:bodyPr wrap="none" lIns="0" rIns="0" tIns="0" bIns="0" anchor="t">
+            <a:spAutoFit/>
+          </a:bodyPr>
+          <a:lstStyle/>
+          <a:p>
+            <a:pPr algn="l">
+              <a:lnSpc>
+                <a:spcPct val="100000"/>
+              </a:lnSpc>
+              <a:spcBef>
+                <a:spcPts val="0"/>
+              </a:spcBef>
+              <a:spcAft>
+                <a:spcPts val="0"/>
+              </a:spcAft>
+            </a:pPr>
+            <a:r>
+              <a:rPr sz="750" b="0" i="0">
+                <a:solidFill>
+                  <a:srgbClr val="8395B5"/>
+                </a:solidFill>
+                <a:latin typeface="Consolas"/>
+              </a:rPr>
+              <a:t>150 contratos do Polymarket (Fed e CPI) · 30 eventos · 1416 leituras em 11 horizontes · resolução no FRED · apêndice A1–A3</a:t>
+            </a:r>
+          </a:p>
+        </p:txBody>
+      </p:sp>
+    </p:spTree>
+  </p:cSld>
+  <p:clrMapOvr>
+    <a:masterClrMapping/>
+  </p:clrMapOvr>
+</p:sld>
+</file>
+
+<file path=ppt/slides/slide19.xml><?xml version="1.0" encoding="utf-8"?>
+<p:sld xmlns:a="http://schemas.openxmlformats.org/drawingml/2006/main" xmlns:p="http://schemas.openxmlformats.org/presentationml/2006/main" xmlns:r="http://schemas.openxmlformats.org/officeDocument/2006/relationships">
+  <p:cSld>
+    <p:bg>
+      <p:bgPr>
+        <a:gradFill rotWithShape="1">
+          <a:gsLst>
+            <a:gs pos="0">
+              <a:srgbClr val="10203A"/>
+            </a:gs>
+            <a:gs pos="55000">
+              <a:srgbClr val="0A1325"/>
+            </a:gs>
+            <a:gs pos="100000">
+              <a:srgbClr val="04070E"/>
+            </a:gs>
+          </a:gsLst>
+          <a:path path="circle">
+            <a:fillToRect l="38000" r="62000" b="100000"/>
+          </a:path>
+        </a:gradFill>
+        <a:effectLst/>
+      </p:bgPr>
+    </p:bg>
+    <p:spTree>
+      <p:nvGrpSpPr>
+        <p:cNvPr id="1" name=""/>
+        <p:cNvGrpSpPr/>
+        <p:nvPr/>
+      </p:nvGrpSpPr>
+      <p:grpSpPr/>
+      <p:sp>
+        <p:nvSpPr>
+          <p:cNvPr id="2" name="!!glow_tl"/>
+          <p:cNvSpPr/>
+          <p:nvPr/>
+        </p:nvSpPr>
+        <p:spPr>
+          <a:xfrm>
+            <a:off x="-2600000" y="-2200000"/>
+            <a:ext cx="7000000" cy="5200000"/>
+          </a:xfrm>
+          <a:prstGeom prst="ellipse">
+            <a:avLst/>
+          </a:prstGeom>
+          <a:gradFill rotWithShape="1">
+            <a:gsLst>
+              <a:gs pos="0">
+                <a:srgbClr val="4F8EF7">
+                  <a:alpha val="10000"/>
+                </a:srgbClr>
+              </a:gs>
+              <a:gs pos="45000">
+                <a:srgbClr val="4F8EF7">
+                  <a:alpha val="4000"/>
+                </a:srgbClr>
+              </a:gs>
+              <a:gs pos="80000">
+                <a:srgbClr val="4F8EF7">
+                  <a:alpha val="1000"/>
+                </a:srgbClr>
+              </a:gs>
+              <a:gs pos="100000">
+                <a:srgbClr val="4F8EF7">
+                  <a:alpha val="0"/>
+                </a:srgbClr>
+              </a:gs>
+            </a:gsLst>
+            <a:path path="circle">
+              <a:fillToRect l="50000" t="50000" r="50000" b="50000"/>
+            </a:path>
+          </a:gradFill>
+          <a:ln>
+            <a:noFill/>
+          </a:ln>
+        </p:spPr>
+        <p:style>
+          <a:lnRef idx="1">
+            <a:schemeClr val="accent1"/>
+          </a:lnRef>
+          <a:fillRef idx="3">
+            <a:schemeClr val="accent1"/>
+          </a:fillRef>
+          <a:effectRef idx="2">
+            <a:schemeClr val="accent1"/>
+          </a:effectRef>
+          <a:fontRef idx="minor">
+            <a:schemeClr val="lt1"/>
+          </a:fontRef>
+        </p:style>
+        <p:txBody>
+          <a:bodyPr rtlCol="0" anchor="ctr"/>
+          <a:lstStyle/>
+          <a:p/>
+        </p:txBody>
+      </p:sp>
+      <p:sp>
+        <p:nvSpPr>
+          <p:cNvPr id="3" name="!!glow_br"/>
+          <p:cNvSpPr/>
+          <p:nvPr/>
+        </p:nvSpPr>
+        <p:spPr>
+          <a:xfrm>
+            <a:off x="8200000" y="4600000"/>
+            <a:ext cx="7000000" cy="5200000"/>
+          </a:xfrm>
+          <a:prstGeom prst="ellipse">
+            <a:avLst/>
+          </a:prstGeom>
+          <a:gradFill rotWithShape="1">
+            <a:gsLst>
+              <a:gs pos="0">
+                <a:srgbClr val="FFB531">
+                  <a:alpha val="7000"/>
+                </a:srgbClr>
+              </a:gs>
+              <a:gs pos="45000">
+                <a:srgbClr val="FFB531">
+                  <a:alpha val="2800"/>
+                </a:srgbClr>
+              </a:gs>
+              <a:gs pos="80000">
+                <a:srgbClr val="FFB531">
+                  <a:alpha val="1000"/>
+                </a:srgbClr>
+              </a:gs>
+              <a:gs pos="100000">
+                <a:srgbClr val="FFB531">
+                  <a:alpha val="0"/>
+                </a:srgbClr>
+              </a:gs>
+            </a:gsLst>
+            <a:path path="circle">
+              <a:fillToRect l="50000" t="50000" r="50000" b="50000"/>
+            </a:path>
+          </a:gradFill>
+          <a:ln>
+            <a:noFill/>
+          </a:ln>
+        </p:spPr>
+        <p:style>
+          <a:lnRef idx="1">
+            <a:schemeClr val="accent1"/>
+          </a:lnRef>
+          <a:fillRef idx="3">
+            <a:schemeClr val="accent1"/>
+          </a:fillRef>
+          <a:effectRef idx="2">
+            <a:schemeClr val="accent1"/>
+          </a:effectRef>
+          <a:fontRef idx="minor">
+            <a:schemeClr val="lt1"/>
+          </a:fontRef>
+        </p:style>
+        <p:txBody>
+          <a:bodyPr rtlCol="0" anchor="ctr"/>
+          <a:lstStyle/>
+          <a:p/>
+        </p:txBody>
+      </p:sp>
+      <p:sp>
+        <p:nvSpPr>
+          <p:cNvPr id="4" name="!!ghost"/>
+          <p:cNvSpPr txBox="1"/>
+          <p:nvPr/>
+        </p:nvSpPr>
+        <p:spPr>
+          <a:xfrm>
+            <a:off x="6900062" y="-230428"/>
+            <a:ext cx="4949647" cy="1999792"/>
+          </a:xfrm>
+          <a:prstGeom prst="rect">
+            <a:avLst/>
+          </a:prstGeom>
+          <a:noFill/>
+        </p:spPr>
+        <p:txBody>
+          <a:bodyPr wrap="none" lIns="0" rIns="0" tIns="0" bIns="0" anchor="t">
+            <a:spAutoFit/>
+          </a:bodyPr>
+          <a:lstStyle/>
+          <a:p>
+            <a:pPr algn="r">
+              <a:lnSpc>
+                <a:spcPct val="100000"/>
+              </a:lnSpc>
+              <a:spcBef>
+                <a:spcPts val="0"/>
+              </a:spcBef>
+              <a:spcAft>
+                <a:spcPts val="0"/>
+              </a:spcAft>
+            </a:pPr>
+            <a:r>
+              <a:rPr sz="15000" b="0" i="0">
+                <a:solidFill>
+                  <a:srgbClr val="101A2E"/>
+                </a:solidFill>
+                <a:latin typeface="Bahnschrift SemiBold Condensed"/>
+              </a:rPr>
+              <a:t>A1</a:t>
+            </a:r>
+          </a:p>
+        </p:txBody>
+      </p:sp>
+      <p:sp>
+        <p:nvSpPr>
+          <p:cNvPr id="5" name="!!tick"/>
+          <p:cNvSpPr/>
+          <p:nvPr/>
+        </p:nvSpPr>
+        <p:spPr>
+          <a:xfrm>
+            <a:off x="603504" y="446024"/>
+            <a:ext cx="45720" cy="164592"/>
+          </a:xfrm>
+          <a:prstGeom prst="rect">
+            <a:avLst/>
+          </a:prstGeom>
+          <a:solidFill>
+            <a:srgbClr val="FFB531"/>
+          </a:solidFill>
+          <a:ln>
+            <a:noFill/>
+          </a:ln>
+        </p:spPr>
+        <p:style>
+          <a:lnRef idx="1">
+            <a:schemeClr val="accent1"/>
+          </a:lnRef>
+          <a:fillRef idx="3">
+            <a:schemeClr val="accent1"/>
+          </a:fillRef>
+          <a:effectRef idx="2">
+            <a:schemeClr val="accent1"/>
+          </a:effectRef>
+          <a:fontRef idx="minor">
+            <a:schemeClr val="lt1"/>
+          </a:fontRef>
+        </p:style>
+        <p:txBody>
+          <a:bodyPr rtlCol="0" anchor="ctr"/>
+          <a:lstStyle/>
+          <a:p>
+            <a:pPr algn="ctr"/>
+          </a:p>
+        </p:txBody>
+      </p:sp>
+      <p:sp>
+        <p:nvSpPr>
+          <p:cNvPr id="6" name="sA1_4"/>
+          <p:cNvSpPr txBox="1"/>
+          <p:nvPr/>
+        </p:nvSpPr>
+        <p:spPr>
+          <a:xfrm>
+            <a:off x="731520" y="427024"/>
+            <a:ext cx="7315200" cy="202996"/>
+          </a:xfrm>
+          <a:prstGeom prst="rect">
+            <a:avLst/>
+          </a:prstGeom>
+          <a:noFill/>
+        </p:spPr>
+        <p:txBody>
+          <a:bodyPr wrap="square" lIns="0" rIns="0" tIns="0" bIns="0" anchor="ctr">
+            <a:spAutoFit/>
+          </a:bodyPr>
+          <a:lstStyle/>
+          <a:p>
+            <a:pPr algn="l">
+              <a:lnSpc>
+                <a:spcPct val="100000"/>
+              </a:lnSpc>
+              <a:spcBef>
+                <a:spcPts val="0"/>
+              </a:spcBef>
+              <a:spcAft>
+                <a:spcPts val="0"/>
+              </a:spcAft>
+            </a:pPr>
+            <a:r>
+              <a:rPr sz="1200" b="1" i="0" spc="300">
+                <a:solidFill>
+                  <a:srgbClr val="FFB531"/>
+                </a:solidFill>
+                <a:latin typeface="Consolas"/>
+              </a:rPr>
+              <a:t>KAIROS</a:t>
+            </a:r>
+            <a:r>
+              <a:rPr sz="1100" b="0" i="0" spc="72">
+                <a:solidFill>
+                  <a:srgbClr val="8395B5"/>
+                </a:solidFill>
+                <a:latin typeface="Consolas"/>
+              </a:rPr>
+              <a:t>   Apêndice · acurácia por horizonte</a:t>
+            </a:r>
+          </a:p>
+        </p:txBody>
+      </p:sp>
+      <p:sp>
+        <p:nvSpPr>
+          <p:cNvPr id="7" name="sA1_5"/>
+          <p:cNvSpPr txBox="1"/>
+          <p:nvPr/>
+        </p:nvSpPr>
+        <p:spPr>
+          <a:xfrm>
+            <a:off x="0" y="467258"/>
+            <a:ext cx="11457432" cy="152704"/>
+          </a:xfrm>
+          <a:prstGeom prst="rect">
+            <a:avLst/>
+          </a:prstGeom>
+          <a:noFill/>
+        </p:spPr>
+        <p:txBody>
+          <a:bodyPr wrap="square" lIns="0" rIns="0" tIns="0" bIns="0" anchor="ctr">
+            <a:spAutoFit/>
+          </a:bodyPr>
+          <a:lstStyle/>
+          <a:p>
+            <a:pPr algn="r">
+              <a:lnSpc>
+                <a:spcPct val="100000"/>
+              </a:lnSpc>
+              <a:spcBef>
+                <a:spcPts val="0"/>
+              </a:spcBef>
+              <a:spcAft>
+                <a:spcPts val="0"/>
+              </a:spcAft>
+            </a:pPr>
+            <a:r>
+              <a:rPr sz="900" b="0" i="0" spc="45">
+                <a:solidFill>
+                  <a:srgbClr val="8395B5"/>
+                </a:solidFill>
+                <a:latin typeface="Consolas"/>
+              </a:rPr>
+              <a:t>A1</a:t>
+            </a:r>
+          </a:p>
+        </p:txBody>
+      </p:sp>
+      <p:cxnSp>
+        <p:nvCxnSpPr>
+          <p:cNvPr id="8" name="sA1_6"/>
+          <p:cNvCxnSpPr/>
+          <p:nvPr/>
+        </p:nvCxnSpPr>
+        <p:spPr>
+          <a:xfrm>
+            <a:off x="731520" y="705002"/>
+            <a:ext cx="10725912" cy="0"/>
+          </a:xfrm>
+          <a:prstGeom prst="line">
+            <a:avLst/>
+          </a:prstGeom>
+          <a:ln w="12700">
+            <a:gradFill rotWithShape="1">
+              <a:gsLst>
+                <a:gs pos="0">
+                  <a:srgbClr val="FFB531"/>
+                </a:gs>
+                <a:gs pos="30000">
+                  <a:srgbClr val="2A3F63"/>
+                </a:gs>
+                <a:gs pos="100000">
+                  <a:srgbClr val="2A3F63">
+                    <a:alpha val="30000"/>
+                  </a:srgbClr>
+                </a:gs>
+              </a:gsLst>
+              <a:lin ang="0" scaled="0"/>
+            </a:gradFill>
+          </a:ln>
+        </p:spPr>
+        <p:style>
+          <a:lnRef idx="2">
+            <a:schemeClr val="accent1"/>
+          </a:lnRef>
+          <a:fillRef idx="0">
+            <a:schemeClr val="accent1"/>
+          </a:fillRef>
+          <a:effectRef idx="1">
+            <a:schemeClr val="accent1"/>
+          </a:effectRef>
+          <a:fontRef idx="minor">
+            <a:schemeClr val="tx1"/>
+          </a:fontRef>
+        </p:style>
+      </p:cxnSp>
+      <p:sp>
+        <p:nvSpPr>
+          <p:cNvPr id="9" name="sA1_7"/>
+          <p:cNvSpPr txBox="1"/>
+          <p:nvPr/>
+        </p:nvSpPr>
+        <p:spPr>
+          <a:xfrm>
+            <a:off x="731520" y="850392"/>
+            <a:ext cx="10725911" cy="640080"/>
+          </a:xfrm>
+          <a:prstGeom prst="rect">
+            <a:avLst/>
+          </a:prstGeom>
+          <a:noFill/>
+        </p:spPr>
+        <p:txBody>
+          <a:bodyPr wrap="square" lIns="0" rIns="0" tIns="0" bIns="0" anchor="t">
+            <a:spAutoFit/>
+          </a:bodyPr>
+          <a:lstStyle/>
+          <a:p>
+            <a:pPr algn="l">
+              <a:lnSpc>
+                <a:spcPct val="100000"/>
+              </a:lnSpc>
+              <a:spcBef>
+                <a:spcPts val="0"/>
+              </a:spcBef>
+              <a:spcAft>
+                <a:spcPts val="0"/>
+              </a:spcAft>
+            </a:pPr>
+            <a:r>
+              <a:rPr sz="2000" b="0" i="0">
+                <a:solidFill>
+                  <a:srgbClr val="F5F7FB"/>
+                </a:solidFill>
+                <a:latin typeface="Bahnschrift SemiBold"/>
+              </a:rPr>
+              <a:t>Quanto mais perto do evento, menor o erro — e na véspera está no nível do Kalshi.</a:t>
+            </a:r>
+          </a:p>
+        </p:txBody>
+      </p:sp>
+      <p:cxnSp>
+        <p:nvCxnSpPr>
+          <p:cNvPr id="10" name="sA1_8"/>
+          <p:cNvCxnSpPr/>
+          <p:nvPr/>
+        </p:nvCxnSpPr>
+        <p:spPr>
+          <a:xfrm>
+            <a:off x="731520" y="6553504"/>
+            <a:ext cx="10725912" cy="0"/>
+          </a:xfrm>
+          <a:prstGeom prst="line">
+            <a:avLst/>
+          </a:prstGeom>
+          <a:ln w="9525">
+            <a:solidFill>
+              <a:srgbClr val="2A3F63"/>
+            </a:solidFill>
+          </a:ln>
+        </p:spPr>
+        <p:style>
+          <a:lnRef idx="2">
+            <a:schemeClr val="accent1"/>
+          </a:lnRef>
+          <a:fillRef idx="0">
+            <a:schemeClr val="accent1"/>
+          </a:fillRef>
+          <a:effectRef idx="1">
+            <a:schemeClr val="accent1"/>
+          </a:effectRef>
+          <a:fontRef idx="minor">
+            <a:schemeClr val="tx1"/>
+          </a:fontRef>
+        </p:style>
+      </p:cxnSp>
+      <p:sp>
+        <p:nvSpPr>
+          <p:cNvPr id="11" name="!!foot_l"/>
+          <p:cNvSpPr txBox="1"/>
+          <p:nvPr/>
+        </p:nvSpPr>
+        <p:spPr>
+          <a:xfrm>
+            <a:off x="731520" y="6653174"/>
+            <a:ext cx="5998464" cy="160020"/>
+          </a:xfrm>
+          <a:prstGeom prst="rect">
+            <a:avLst/>
+          </a:prstGeom>
+          <a:noFill/>
+        </p:spPr>
+        <p:txBody>
+          <a:bodyPr wrap="none" lIns="0" rIns="0" tIns="0" bIns="0" anchor="t">
+            <a:spAutoFit/>
+          </a:bodyPr>
+          <a:lstStyle/>
+          <a:p>
+            <a:pPr algn="l">
+              <a:lnSpc>
+                <a:spcPct val="100000"/>
+              </a:lnSpc>
+              <a:spcBef>
+                <a:spcPts val="0"/>
+              </a:spcBef>
+              <a:spcAft>
+                <a:spcPts val="0"/>
+              </a:spcAft>
+            </a:pPr>
+            <a:r>
+              <a:rPr sz="700" b="0" i="0" spc="120">
+                <a:solidFill>
+                  <a:srgbClr val="58698A"/>
+                </a:solidFill>
+                <a:latin typeface="Consolas"/>
+              </a:rPr>
+              <a:t>ITAÚ QUANT AI CHALLENGE  ·  FINAL 2026</a:t>
+            </a:r>
+          </a:p>
+        </p:txBody>
+      </p:sp>
+      <p:sp>
+        <p:nvSpPr>
+          <p:cNvPr id="12" name="!!foot_r"/>
+          <p:cNvSpPr txBox="1"/>
+          <p:nvPr/>
+        </p:nvSpPr>
+        <p:spPr>
+          <a:xfrm>
+            <a:off x="5457139" y="6653174"/>
+            <a:ext cx="5998464" cy="160020"/>
+          </a:xfrm>
+          <a:prstGeom prst="rect">
+            <a:avLst/>
+          </a:prstGeom>
+          <a:noFill/>
+        </p:spPr>
+        <p:txBody>
+          <a:bodyPr wrap="none" lIns="0" rIns="0" tIns="0" bIns="0" anchor="t">
+            <a:spAutoFit/>
+          </a:bodyPr>
+          <a:lstStyle/>
+          <a:p>
+            <a:pPr algn="r">
+              <a:lnSpc>
+                <a:spcPct val="100000"/>
+              </a:lnSpc>
+              <a:spcBef>
+                <a:spcPts val="0"/>
+              </a:spcBef>
+              <a:spcAft>
+                <a:spcPts val="0"/>
+              </a:spcAft>
+            </a:pPr>
+            <a:r>
+              <a:rPr sz="700" b="0" i="0" spc="120">
+                <a:solidFill>
+                  <a:srgbClr val="58698A"/>
+                </a:solidFill>
+                <a:latin typeface="Consolas"/>
+              </a:rPr>
+              <a:t>BLACK-LITTERMAN  ×  POLYMARKET</a:t>
+            </a:r>
+          </a:p>
+        </p:txBody>
+      </p:sp>
+      <p:sp>
+        <p:nvSpPr>
+          <p:cNvPr id="13" name="sA1_11"/>
+          <p:cNvSpPr txBox="1"/>
+          <p:nvPr/>
+        </p:nvSpPr>
+        <p:spPr>
+          <a:xfrm>
+            <a:off x="1705355" y="1417320"/>
+            <a:ext cx="8778240" cy="182880"/>
+          </a:xfrm>
+          <a:prstGeom prst="rect">
+            <a:avLst/>
+          </a:prstGeom>
+          <a:noFill/>
+        </p:spPr>
+        <p:txBody>
+          <a:bodyPr wrap="square" lIns="0" rIns="0" tIns="0" bIns="0" anchor="t">
+            <a:spAutoFit/>
+          </a:bodyPr>
+          <a:lstStyle/>
+          <a:p>
+            <a:pPr algn="l">
+              <a:lnSpc>
+                <a:spcPct val="100000"/>
+              </a:lnSpc>
+              <a:spcBef>
+                <a:spcPts val="0"/>
+              </a:spcBef>
+              <a:spcAft>
+                <a:spcPts val="0"/>
+              </a:spcAft>
+            </a:pPr>
+            <a:r>
+              <a:rPr sz="900" b="1" i="0" spc="180">
+                <a:solidFill>
+                  <a:srgbClr val="FFB531"/>
+                </a:solidFill>
+                <a:latin typeface="Consolas"/>
+              </a:rPr>
+              <a:t>BRIER POR DIAS ANTES DA RESOLUÇÃO  ·  SKILL SOBRE A PMF UNIFORME</a:t>
+            </a:r>
+          </a:p>
+        </p:txBody>
+      </p:sp>
+      <p:pic>
+        <p:nvPicPr>
+          <p:cNvPr id="14" name="sA1_12" descr="estudo_2_brier.png"/>
+          <p:cNvPicPr>
+            <a:picLocks noChangeAspect="1"/>
+          </p:cNvPicPr>
+          <p:nvPr/>
+        </p:nvPicPr>
+        <p:blipFill>
+          <a:blip r:embed="rId2"/>
+          <a:stretch>
+            <a:fillRect/>
+          </a:stretch>
+        </p:blipFill>
+        <p:spPr>
+          <a:xfrm>
+            <a:off x="1705355" y="1645920"/>
+            <a:ext cx="8778240" cy="3666611"/>
+          </a:xfrm>
+          <a:prstGeom prst="rect">
+            <a:avLst/>
+          </a:prstGeom>
+        </p:spPr>
+      </p:pic>
+      <p:sp>
+        <p:nvSpPr>
+          <p:cNvPr id="15" name="sA1_13"/>
+          <p:cNvSpPr txBox="1"/>
+          <p:nvPr/>
+        </p:nvSpPr>
+        <p:spPr>
+          <a:xfrm>
+            <a:off x="731520" y="5532120"/>
+            <a:ext cx="10725911" cy="256032"/>
+          </a:xfrm>
+          <a:prstGeom prst="rect">
+            <a:avLst/>
+          </a:prstGeom>
+          <a:noFill/>
+        </p:spPr>
+        <p:txBody>
+          <a:bodyPr wrap="none" lIns="0" rIns="0" tIns="0" bIns="0" anchor="ctr">
+            <a:spAutoFit/>
+          </a:bodyPr>
+          <a:lstStyle/>
+          <a:p>
+            <a:pPr algn="l">
+              <a:lnSpc>
+                <a:spcPct val="100000"/>
+              </a:lnSpc>
+              <a:spcBef>
+                <a:spcPts val="0"/>
+              </a:spcBef>
+              <a:spcAft>
+                <a:spcPts val="0"/>
+              </a:spcAft>
+            </a:pPr>
+            <a:r>
+              <a:rPr sz="950" b="0" i="0">
+                <a:solidFill>
+                  <a:srgbClr val="BAC6DA"/>
+                </a:solidFill>
+                <a:latin typeface="Bahnschrift SemiLight"/>
+              </a:rPr>
+              <a:t>FOMC: 0,035 a 20 dias → 0,007 na véspera. CPI: 0,092 → 0,078 (é o objeto difícil; ninguém sabe o CPI na véspera).</a:t>
+            </a:r>
+          </a:p>
+        </p:txBody>
+      </p:sp>
+      <p:sp>
+        <p:nvSpPr>
+          <p:cNvPr id="16" name="sA1_14"/>
+          <p:cNvSpPr txBox="1"/>
+          <p:nvPr/>
+        </p:nvSpPr>
+        <p:spPr>
+          <a:xfrm>
+            <a:off x="731520" y="5824728"/>
+            <a:ext cx="10725911" cy="256032"/>
+          </a:xfrm>
+          <a:prstGeom prst="rect">
+            <a:avLst/>
+          </a:prstGeom>
+          <a:noFill/>
+        </p:spPr>
+        <p:txBody>
+          <a:bodyPr wrap="none" lIns="0" rIns="0" tIns="0" bIns="0" anchor="ctr">
+            <a:spAutoFit/>
+          </a:bodyPr>
+          <a:lstStyle/>
+          <a:p>
+            <a:pPr algn="l">
+              <a:lnSpc>
+                <a:spcPct val="100000"/>
+              </a:lnSpc>
+              <a:spcBef>
+                <a:spcPts val="0"/>
+              </a:spcBef>
+              <a:spcAft>
+                <a:spcPts val="0"/>
+              </a:spcAft>
+            </a:pPr>
+            <a:r>
+              <a:rPr sz="950" b="0" i="0">
+                <a:solidFill>
+                  <a:srgbClr val="BAC6DA"/>
+                </a:solidFill>
+                <a:latin typeface="Bahnschrift SemiLight"/>
+              </a:rPr>
+              <a:t>A linha branca (as duas famílias) para em 20 dias porque os mercados de CPI vivem ~30 dias; depois só sobra FOMC.</a:t>
+            </a:r>
+          </a:p>
+        </p:txBody>
+      </p:sp>
+    </p:spTree>
+  </p:cSld>
+  <p:clrMapOvr>
+    <a:masterClrMapping/>
+  </p:clrMapOvr>
+</p:sld>
+</file>
+
 <file path=ppt/slides/slide2.xml><?xml version="1.0" encoding="utf-8"?>
 <p:sld xmlns:a="http://schemas.openxmlformats.org/drawingml/2006/main" xmlns:p="http://schemas.openxmlformats.org/presentationml/2006/main" xmlns:r="http://schemas.openxmlformats.org/officeDocument/2006/relationships">
   <p:cSld>
@@ -30880,6 +33175,1655 @@
                 <a:latin typeface="Consolas"/>
               </a:rPr>
               <a:t>surpresa = o corte que o Polymarket precifica − o que o T-bill de 3 meses embute, líquida do viés do instrumento  ·  apêndices A5 e A6</a:t>
+            </a:r>
+          </a:p>
+        </p:txBody>
+      </p:sp>
+    </p:spTree>
+  </p:cSld>
+  <p:clrMapOvr>
+    <a:masterClrMapping/>
+  </p:clrMapOvr>
+</p:sld>
+</file>
+
+<file path=ppt/slides/slide20.xml><?xml version="1.0" encoding="utf-8"?>
+<p:sld xmlns:a="http://schemas.openxmlformats.org/drawingml/2006/main" xmlns:p="http://schemas.openxmlformats.org/presentationml/2006/main" xmlns:r="http://schemas.openxmlformats.org/officeDocument/2006/relationships">
+  <p:cSld>
+    <p:bg>
+      <p:bgPr>
+        <a:gradFill rotWithShape="1">
+          <a:gsLst>
+            <a:gs pos="0">
+              <a:srgbClr val="10203A"/>
+            </a:gs>
+            <a:gs pos="55000">
+              <a:srgbClr val="0A1325"/>
+            </a:gs>
+            <a:gs pos="100000">
+              <a:srgbClr val="04070E"/>
+            </a:gs>
+          </a:gsLst>
+          <a:path path="circle">
+            <a:fillToRect l="38000" r="62000" b="100000"/>
+          </a:path>
+        </a:gradFill>
+        <a:effectLst/>
+      </p:bgPr>
+    </p:bg>
+    <p:spTree>
+      <p:nvGrpSpPr>
+        <p:cNvPr id="1" name=""/>
+        <p:cNvGrpSpPr/>
+        <p:nvPr/>
+      </p:nvGrpSpPr>
+      <p:grpSpPr/>
+      <p:sp>
+        <p:nvSpPr>
+          <p:cNvPr id="2" name="!!glow_tl"/>
+          <p:cNvSpPr/>
+          <p:nvPr/>
+        </p:nvSpPr>
+        <p:spPr>
+          <a:xfrm>
+            <a:off x="-2600000" y="-2200000"/>
+            <a:ext cx="7000000" cy="5200000"/>
+          </a:xfrm>
+          <a:prstGeom prst="ellipse">
+            <a:avLst/>
+          </a:prstGeom>
+          <a:gradFill rotWithShape="1">
+            <a:gsLst>
+              <a:gs pos="0">
+                <a:srgbClr val="4F8EF7">
+                  <a:alpha val="10000"/>
+                </a:srgbClr>
+              </a:gs>
+              <a:gs pos="45000">
+                <a:srgbClr val="4F8EF7">
+                  <a:alpha val="4000"/>
+                </a:srgbClr>
+              </a:gs>
+              <a:gs pos="80000">
+                <a:srgbClr val="4F8EF7">
+                  <a:alpha val="1000"/>
+                </a:srgbClr>
+              </a:gs>
+              <a:gs pos="100000">
+                <a:srgbClr val="4F8EF7">
+                  <a:alpha val="0"/>
+                </a:srgbClr>
+              </a:gs>
+            </a:gsLst>
+            <a:path path="circle">
+              <a:fillToRect l="50000" t="50000" r="50000" b="50000"/>
+            </a:path>
+          </a:gradFill>
+          <a:ln>
+            <a:noFill/>
+          </a:ln>
+        </p:spPr>
+        <p:style>
+          <a:lnRef idx="1">
+            <a:schemeClr val="accent1"/>
+          </a:lnRef>
+          <a:fillRef idx="3">
+            <a:schemeClr val="accent1"/>
+          </a:fillRef>
+          <a:effectRef idx="2">
+            <a:schemeClr val="accent1"/>
+          </a:effectRef>
+          <a:fontRef idx="minor">
+            <a:schemeClr val="lt1"/>
+          </a:fontRef>
+        </p:style>
+        <p:txBody>
+          <a:bodyPr rtlCol="0" anchor="ctr"/>
+          <a:lstStyle/>
+          <a:p/>
+        </p:txBody>
+      </p:sp>
+      <p:sp>
+        <p:nvSpPr>
+          <p:cNvPr id="3" name="!!glow_br"/>
+          <p:cNvSpPr/>
+          <p:nvPr/>
+        </p:nvSpPr>
+        <p:spPr>
+          <a:xfrm>
+            <a:off x="8200000" y="4600000"/>
+            <a:ext cx="7000000" cy="5200000"/>
+          </a:xfrm>
+          <a:prstGeom prst="ellipse">
+            <a:avLst/>
+          </a:prstGeom>
+          <a:gradFill rotWithShape="1">
+            <a:gsLst>
+              <a:gs pos="0">
+                <a:srgbClr val="FFB531">
+                  <a:alpha val="7000"/>
+                </a:srgbClr>
+              </a:gs>
+              <a:gs pos="45000">
+                <a:srgbClr val="FFB531">
+                  <a:alpha val="2800"/>
+                </a:srgbClr>
+              </a:gs>
+              <a:gs pos="80000">
+                <a:srgbClr val="FFB531">
+                  <a:alpha val="1000"/>
+                </a:srgbClr>
+              </a:gs>
+              <a:gs pos="100000">
+                <a:srgbClr val="FFB531">
+                  <a:alpha val="0"/>
+                </a:srgbClr>
+              </a:gs>
+            </a:gsLst>
+            <a:path path="circle">
+              <a:fillToRect l="50000" t="50000" r="50000" b="50000"/>
+            </a:path>
+          </a:gradFill>
+          <a:ln>
+            <a:noFill/>
+          </a:ln>
+        </p:spPr>
+        <p:style>
+          <a:lnRef idx="1">
+            <a:schemeClr val="accent1"/>
+          </a:lnRef>
+          <a:fillRef idx="3">
+            <a:schemeClr val="accent1"/>
+          </a:fillRef>
+          <a:effectRef idx="2">
+            <a:schemeClr val="accent1"/>
+          </a:effectRef>
+          <a:fontRef idx="minor">
+            <a:schemeClr val="lt1"/>
+          </a:fontRef>
+        </p:style>
+        <p:txBody>
+          <a:bodyPr rtlCol="0" anchor="ctr"/>
+          <a:lstStyle/>
+          <a:p/>
+        </p:txBody>
+      </p:sp>
+      <p:sp>
+        <p:nvSpPr>
+          <p:cNvPr id="4" name="!!ghost"/>
+          <p:cNvSpPr txBox="1"/>
+          <p:nvPr/>
+        </p:nvSpPr>
+        <p:spPr>
+          <a:xfrm>
+            <a:off x="6900062" y="-230428"/>
+            <a:ext cx="4949647" cy="1999792"/>
+          </a:xfrm>
+          <a:prstGeom prst="rect">
+            <a:avLst/>
+          </a:prstGeom>
+          <a:noFill/>
+        </p:spPr>
+        <p:txBody>
+          <a:bodyPr wrap="none" lIns="0" rIns="0" tIns="0" bIns="0" anchor="t">
+            <a:spAutoFit/>
+          </a:bodyPr>
+          <a:lstStyle/>
+          <a:p>
+            <a:pPr algn="r">
+              <a:lnSpc>
+                <a:spcPct val="100000"/>
+              </a:lnSpc>
+              <a:spcBef>
+                <a:spcPts val="0"/>
+              </a:spcBef>
+              <a:spcAft>
+                <a:spcPts val="0"/>
+              </a:spcAft>
+            </a:pPr>
+            <a:r>
+              <a:rPr sz="15000" b="0" i="0">
+                <a:solidFill>
+                  <a:srgbClr val="101A2E"/>
+                </a:solidFill>
+                <a:latin typeface="Bahnschrift SemiBold Condensed"/>
+              </a:rPr>
+              <a:t>A2</a:t>
+            </a:r>
+          </a:p>
+        </p:txBody>
+      </p:sp>
+      <p:sp>
+        <p:nvSpPr>
+          <p:cNvPr id="5" name="!!tick"/>
+          <p:cNvSpPr/>
+          <p:nvPr/>
+        </p:nvSpPr>
+        <p:spPr>
+          <a:xfrm>
+            <a:off x="603504" y="446024"/>
+            <a:ext cx="45720" cy="164592"/>
+          </a:xfrm>
+          <a:prstGeom prst="rect">
+            <a:avLst/>
+          </a:prstGeom>
+          <a:solidFill>
+            <a:srgbClr val="FFB531"/>
+          </a:solidFill>
+          <a:ln>
+            <a:noFill/>
+          </a:ln>
+        </p:spPr>
+        <p:style>
+          <a:lnRef idx="1">
+            <a:schemeClr val="accent1"/>
+          </a:lnRef>
+          <a:fillRef idx="3">
+            <a:schemeClr val="accent1"/>
+          </a:fillRef>
+          <a:effectRef idx="2">
+            <a:schemeClr val="accent1"/>
+          </a:effectRef>
+          <a:fontRef idx="minor">
+            <a:schemeClr val="lt1"/>
+          </a:fontRef>
+        </p:style>
+        <p:txBody>
+          <a:bodyPr rtlCol="0" anchor="ctr"/>
+          <a:lstStyle/>
+          <a:p>
+            <a:pPr algn="ctr"/>
+          </a:p>
+        </p:txBody>
+      </p:sp>
+      <p:sp>
+        <p:nvSpPr>
+          <p:cNvPr id="6" name="sA2_4"/>
+          <p:cNvSpPr txBox="1"/>
+          <p:nvPr/>
+        </p:nvSpPr>
+        <p:spPr>
+          <a:xfrm>
+            <a:off x="731520" y="427024"/>
+            <a:ext cx="7315200" cy="202996"/>
+          </a:xfrm>
+          <a:prstGeom prst="rect">
+            <a:avLst/>
+          </a:prstGeom>
+          <a:noFill/>
+        </p:spPr>
+        <p:txBody>
+          <a:bodyPr wrap="square" lIns="0" rIns="0" tIns="0" bIns="0" anchor="ctr">
+            <a:spAutoFit/>
+          </a:bodyPr>
+          <a:lstStyle/>
+          <a:p>
+            <a:pPr algn="l">
+              <a:lnSpc>
+                <a:spcPct val="100000"/>
+              </a:lnSpc>
+              <a:spcBef>
+                <a:spcPts val="0"/>
+              </a:spcBef>
+              <a:spcAft>
+                <a:spcPts val="0"/>
+              </a:spcAft>
+            </a:pPr>
+            <a:r>
+              <a:rPr sz="1200" b="1" i="0" spc="300">
+                <a:solidFill>
+                  <a:srgbClr val="FFB531"/>
+                </a:solidFill>
+                <a:latin typeface="Consolas"/>
+              </a:rPr>
+              <a:t>KAIROS</a:t>
+            </a:r>
+            <a:r>
+              <a:rPr sz="1100" b="0" i="0" spc="72">
+                <a:solidFill>
+                  <a:srgbClr val="8395B5"/>
+                </a:solidFill>
+                <a:latin typeface="Consolas"/>
+              </a:rPr>
+              <a:t>   Apêndice · Polymarket × mercado de juros</a:t>
+            </a:r>
+          </a:p>
+        </p:txBody>
+      </p:sp>
+      <p:sp>
+        <p:nvSpPr>
+          <p:cNvPr id="7" name="sA2_5"/>
+          <p:cNvSpPr txBox="1"/>
+          <p:nvPr/>
+        </p:nvSpPr>
+        <p:spPr>
+          <a:xfrm>
+            <a:off x="0" y="467258"/>
+            <a:ext cx="11457432" cy="152704"/>
+          </a:xfrm>
+          <a:prstGeom prst="rect">
+            <a:avLst/>
+          </a:prstGeom>
+          <a:noFill/>
+        </p:spPr>
+        <p:txBody>
+          <a:bodyPr wrap="square" lIns="0" rIns="0" tIns="0" bIns="0" anchor="ctr">
+            <a:spAutoFit/>
+          </a:bodyPr>
+          <a:lstStyle/>
+          <a:p>
+            <a:pPr algn="r">
+              <a:lnSpc>
+                <a:spcPct val="100000"/>
+              </a:lnSpc>
+              <a:spcBef>
+                <a:spcPts val="0"/>
+              </a:spcBef>
+              <a:spcAft>
+                <a:spcPts val="0"/>
+              </a:spcAft>
+            </a:pPr>
+            <a:r>
+              <a:rPr sz="900" b="0" i="0" spc="45">
+                <a:solidFill>
+                  <a:srgbClr val="8395B5"/>
+                </a:solidFill>
+                <a:latin typeface="Consolas"/>
+              </a:rPr>
+              <a:t>A2</a:t>
+            </a:r>
+          </a:p>
+        </p:txBody>
+      </p:sp>
+      <p:cxnSp>
+        <p:nvCxnSpPr>
+          <p:cNvPr id="8" name="sA2_6"/>
+          <p:cNvCxnSpPr/>
+          <p:nvPr/>
+        </p:nvCxnSpPr>
+        <p:spPr>
+          <a:xfrm>
+            <a:off x="731520" y="705002"/>
+            <a:ext cx="10725912" cy="0"/>
+          </a:xfrm>
+          <a:prstGeom prst="line">
+            <a:avLst/>
+          </a:prstGeom>
+          <a:ln w="12700">
+            <a:gradFill rotWithShape="1">
+              <a:gsLst>
+                <a:gs pos="0">
+                  <a:srgbClr val="FFB531"/>
+                </a:gs>
+                <a:gs pos="30000">
+                  <a:srgbClr val="2A3F63"/>
+                </a:gs>
+                <a:gs pos="100000">
+                  <a:srgbClr val="2A3F63">
+                    <a:alpha val="30000"/>
+                  </a:srgbClr>
+                </a:gs>
+              </a:gsLst>
+              <a:lin ang="0" scaled="0"/>
+            </a:gradFill>
+          </a:ln>
+        </p:spPr>
+        <p:style>
+          <a:lnRef idx="2">
+            <a:schemeClr val="accent1"/>
+          </a:lnRef>
+          <a:fillRef idx="0">
+            <a:schemeClr val="accent1"/>
+          </a:fillRef>
+          <a:effectRef idx="1">
+            <a:schemeClr val="accent1"/>
+          </a:effectRef>
+          <a:fontRef idx="minor">
+            <a:schemeClr val="tx1"/>
+          </a:fontRef>
+        </p:style>
+      </p:cxnSp>
+      <p:sp>
+        <p:nvSpPr>
+          <p:cNvPr id="9" name="sA2_7"/>
+          <p:cNvSpPr txBox="1"/>
+          <p:nvPr/>
+        </p:nvSpPr>
+        <p:spPr>
+          <a:xfrm>
+            <a:off x="731520" y="850392"/>
+            <a:ext cx="10725911" cy="640080"/>
+          </a:xfrm>
+          <a:prstGeom prst="rect">
+            <a:avLst/>
+          </a:prstGeom>
+          <a:noFill/>
+        </p:spPr>
+        <p:txBody>
+          <a:bodyPr wrap="square" lIns="0" rIns="0" tIns="0" bIns="0" anchor="t">
+            <a:spAutoFit/>
+          </a:bodyPr>
+          <a:lstStyle/>
+          <a:p>
+            <a:pPr algn="l">
+              <a:lnSpc>
+                <a:spcPct val="100000"/>
+              </a:lnSpc>
+              <a:spcBef>
+                <a:spcPts val="0"/>
+              </a:spcBef>
+              <a:spcAft>
+                <a:spcPts val="0"/>
+              </a:spcAft>
+            </a:pPr>
+            <a:r>
+              <a:rPr sz="2000" b="0" i="0">
+                <a:solidFill>
+                  <a:srgbClr val="F5F7FB"/>
+                </a:solidFill>
+                <a:latin typeface="Bahnschrift SemiBold"/>
+              </a:rPr>
+              <a:t>No FOMC, o Polymarket erra menos e o futuro de FF não acrescenta informação.</a:t>
+            </a:r>
+          </a:p>
+        </p:txBody>
+      </p:sp>
+      <p:cxnSp>
+        <p:nvCxnSpPr>
+          <p:cNvPr id="10" name="sA2_8"/>
+          <p:cNvCxnSpPr/>
+          <p:nvPr/>
+        </p:nvCxnSpPr>
+        <p:spPr>
+          <a:xfrm>
+            <a:off x="731520" y="6553504"/>
+            <a:ext cx="10725912" cy="0"/>
+          </a:xfrm>
+          <a:prstGeom prst="line">
+            <a:avLst/>
+          </a:prstGeom>
+          <a:ln w="9525">
+            <a:solidFill>
+              <a:srgbClr val="2A3F63"/>
+            </a:solidFill>
+          </a:ln>
+        </p:spPr>
+        <p:style>
+          <a:lnRef idx="2">
+            <a:schemeClr val="accent1"/>
+          </a:lnRef>
+          <a:fillRef idx="0">
+            <a:schemeClr val="accent1"/>
+          </a:fillRef>
+          <a:effectRef idx="1">
+            <a:schemeClr val="accent1"/>
+          </a:effectRef>
+          <a:fontRef idx="minor">
+            <a:schemeClr val="tx1"/>
+          </a:fontRef>
+        </p:style>
+      </p:cxnSp>
+      <p:sp>
+        <p:nvSpPr>
+          <p:cNvPr id="11" name="!!foot_l"/>
+          <p:cNvSpPr txBox="1"/>
+          <p:nvPr/>
+        </p:nvSpPr>
+        <p:spPr>
+          <a:xfrm>
+            <a:off x="731520" y="6653174"/>
+            <a:ext cx="5998464" cy="160020"/>
+          </a:xfrm>
+          <a:prstGeom prst="rect">
+            <a:avLst/>
+          </a:prstGeom>
+          <a:noFill/>
+        </p:spPr>
+        <p:txBody>
+          <a:bodyPr wrap="none" lIns="0" rIns="0" tIns="0" bIns="0" anchor="t">
+            <a:spAutoFit/>
+          </a:bodyPr>
+          <a:lstStyle/>
+          <a:p>
+            <a:pPr algn="l">
+              <a:lnSpc>
+                <a:spcPct val="100000"/>
+              </a:lnSpc>
+              <a:spcBef>
+                <a:spcPts val="0"/>
+              </a:spcBef>
+              <a:spcAft>
+                <a:spcPts val="0"/>
+              </a:spcAft>
+            </a:pPr>
+            <a:r>
+              <a:rPr sz="700" b="0" i="0" spc="120">
+                <a:solidFill>
+                  <a:srgbClr val="58698A"/>
+                </a:solidFill>
+                <a:latin typeface="Consolas"/>
+              </a:rPr>
+              <a:t>ITAÚ QUANT AI CHALLENGE  ·  FINAL 2026</a:t>
+            </a:r>
+          </a:p>
+        </p:txBody>
+      </p:sp>
+      <p:sp>
+        <p:nvSpPr>
+          <p:cNvPr id="12" name="!!foot_r"/>
+          <p:cNvSpPr txBox="1"/>
+          <p:nvPr/>
+        </p:nvSpPr>
+        <p:spPr>
+          <a:xfrm>
+            <a:off x="5457139" y="6653174"/>
+            <a:ext cx="5998464" cy="160020"/>
+          </a:xfrm>
+          <a:prstGeom prst="rect">
+            <a:avLst/>
+          </a:prstGeom>
+          <a:noFill/>
+        </p:spPr>
+        <p:txBody>
+          <a:bodyPr wrap="none" lIns="0" rIns="0" tIns="0" bIns="0" anchor="t">
+            <a:spAutoFit/>
+          </a:bodyPr>
+          <a:lstStyle/>
+          <a:p>
+            <a:pPr algn="r">
+              <a:lnSpc>
+                <a:spcPct val="100000"/>
+              </a:lnSpc>
+              <a:spcBef>
+                <a:spcPts val="0"/>
+              </a:spcBef>
+              <a:spcAft>
+                <a:spcPts val="0"/>
+              </a:spcAft>
+            </a:pPr>
+            <a:r>
+              <a:rPr sz="700" b="0" i="0" spc="120">
+                <a:solidFill>
+                  <a:srgbClr val="58698A"/>
+                </a:solidFill>
+                <a:latin typeface="Consolas"/>
+              </a:rPr>
+              <a:t>BLACK-LITTERMAN  ×  POLYMARKET</a:t>
+            </a:r>
+          </a:p>
+        </p:txBody>
+      </p:sp>
+      <p:sp>
+        <p:nvSpPr>
+          <p:cNvPr id="13" name="sA2_11"/>
+          <p:cNvSpPr txBox="1"/>
+          <p:nvPr/>
+        </p:nvSpPr>
+        <p:spPr>
+          <a:xfrm>
+            <a:off x="731520" y="1417320"/>
+            <a:ext cx="6583680" cy="182880"/>
+          </a:xfrm>
+          <a:prstGeom prst="rect">
+            <a:avLst/>
+          </a:prstGeom>
+          <a:noFill/>
+        </p:spPr>
+        <p:txBody>
+          <a:bodyPr wrap="square" lIns="0" rIns="0" tIns="0" bIns="0" anchor="t">
+            <a:spAutoFit/>
+          </a:bodyPr>
+          <a:lstStyle/>
+          <a:p>
+            <a:pPr algn="l">
+              <a:lnSpc>
+                <a:spcPct val="100000"/>
+              </a:lnSpc>
+              <a:spcBef>
+                <a:spcPts val="0"/>
+              </a:spcBef>
+              <a:spcAft>
+                <a:spcPts val="0"/>
+              </a:spcAft>
+            </a:pPr>
+            <a:r>
+              <a:rPr sz="900" b="1" i="0" spc="180">
+                <a:solidFill>
+                  <a:srgbClr val="FFB531"/>
+                </a:solidFill>
+                <a:latin typeface="Consolas"/>
+              </a:rPr>
+              <a:t>ERRO DO Δ TAXA E ACERTO DO DESFECHO MODAL, POR HORIZONTE</a:t>
+            </a:r>
+          </a:p>
+        </p:txBody>
+      </p:sp>
+      <p:pic>
+        <p:nvPicPr>
+          <p:cNvPr id="14" name="sA2_12" descr="estudo_3_fomc_ff.png"/>
+          <p:cNvPicPr>
+            <a:picLocks noChangeAspect="1"/>
+          </p:cNvPicPr>
+          <p:nvPr/>
+        </p:nvPicPr>
+        <p:blipFill>
+          <a:blip r:embed="rId2"/>
+          <a:stretch>
+            <a:fillRect/>
+          </a:stretch>
+        </p:blipFill>
+        <p:spPr>
+          <a:xfrm>
+            <a:off x="731520" y="1645920"/>
+            <a:ext cx="6583680" cy="2749958"/>
+          </a:xfrm>
+          <a:prstGeom prst="rect">
+            <a:avLst/>
+          </a:prstGeom>
+        </p:spPr>
+      </p:pic>
+      <p:sp>
+        <p:nvSpPr>
+          <p:cNvPr id="15" name="sA2_13"/>
+          <p:cNvSpPr txBox="1"/>
+          <p:nvPr/>
+        </p:nvSpPr>
+        <p:spPr>
+          <a:xfrm>
+            <a:off x="7589520" y="1417320"/>
+            <a:ext cx="3867911" cy="182880"/>
+          </a:xfrm>
+          <a:prstGeom prst="rect">
+            <a:avLst/>
+          </a:prstGeom>
+          <a:noFill/>
+        </p:spPr>
+        <p:txBody>
+          <a:bodyPr wrap="square" lIns="0" rIns="0" tIns="0" bIns="0" anchor="t">
+            <a:spAutoFit/>
+          </a:bodyPr>
+          <a:lstStyle/>
+          <a:p>
+            <a:pPr algn="l">
+              <a:lnSpc>
+                <a:spcPct val="100000"/>
+              </a:lnSpc>
+              <a:spcBef>
+                <a:spcPts val="0"/>
+              </a:spcBef>
+              <a:spcAft>
+                <a:spcPts val="0"/>
+              </a:spcAft>
+            </a:pPr>
+            <a:r>
+              <a:rPr sz="900" b="1" i="0" spc="180">
+                <a:solidFill>
+                  <a:srgbClr val="FFB531"/>
+                </a:solidFill>
+                <a:latin typeface="Consolas"/>
+              </a:rPr>
+              <a:t>QUEM SE MOVE PRIMEIRO</a:t>
+            </a:r>
+          </a:p>
+        </p:txBody>
+      </p:sp>
+      <p:pic>
+        <p:nvPicPr>
+          <p:cNvPr id="16" name="sA2_14" descr="estudo_4_leadlag.png"/>
+          <p:cNvPicPr>
+            <a:picLocks noChangeAspect="1"/>
+          </p:cNvPicPr>
+          <p:nvPr/>
+        </p:nvPicPr>
+        <p:blipFill>
+          <a:blip r:embed="rId3"/>
+          <a:stretch>
+            <a:fillRect/>
+          </a:stretch>
+        </p:blipFill>
+        <p:spPr>
+          <a:xfrm>
+            <a:off x="7589520" y="1645920"/>
+            <a:ext cx="3867911" cy="2610490"/>
+          </a:xfrm>
+          <a:prstGeom prst="rect">
+            <a:avLst/>
+          </a:prstGeom>
+        </p:spPr>
+      </p:pic>
+      <p:sp>
+        <p:nvSpPr>
+          <p:cNvPr id="17" name="sA2_15"/>
+          <p:cNvSpPr txBox="1"/>
+          <p:nvPr/>
+        </p:nvSpPr>
+        <p:spPr>
+          <a:xfrm>
+            <a:off x="731520" y="4892040"/>
+            <a:ext cx="10725911" cy="256032"/>
+          </a:xfrm>
+          <a:prstGeom prst="rect">
+            <a:avLst/>
+          </a:prstGeom>
+          <a:noFill/>
+        </p:spPr>
+        <p:txBody>
+          <a:bodyPr wrap="none" lIns="0" rIns="0" tIns="0" bIns="0" anchor="ctr">
+            <a:spAutoFit/>
+          </a:bodyPr>
+          <a:lstStyle/>
+          <a:p>
+            <a:pPr algn="l">
+              <a:lnSpc>
+                <a:spcPct val="100000"/>
+              </a:lnSpc>
+              <a:spcBef>
+                <a:spcPts val="0"/>
+              </a:spcBef>
+              <a:spcAft>
+                <a:spcPts val="0"/>
+              </a:spcAft>
+            </a:pPr>
+            <a:r>
+              <a:rPr sz="950" b="0" i="0">
+                <a:solidFill>
+                  <a:srgbClr val="BAC6DA"/>
+                </a:solidFill>
+                <a:latin typeface="Bahnschrift SemiLight"/>
+              </a:rPr>
+              <a:t>Encompassing na véspera:  Δreal = a + 1,14·E_poly -0,06·E_FF   (t = 19,0 e -1,1),</a:t>
+            </a:r>
+          </a:p>
+        </p:txBody>
+      </p:sp>
+      <p:sp>
+        <p:nvSpPr>
+          <p:cNvPr id="18" name="sA2_16"/>
+          <p:cNvSpPr txBox="1"/>
+          <p:nvPr/>
+        </p:nvSpPr>
+        <p:spPr>
+          <a:xfrm>
+            <a:off x="731520" y="5184648"/>
+            <a:ext cx="10725911" cy="256032"/>
+          </a:xfrm>
+          <a:prstGeom prst="rect">
+            <a:avLst/>
+          </a:prstGeom>
+          <a:noFill/>
+        </p:spPr>
+        <p:txBody>
+          <a:bodyPr wrap="none" lIns="0" rIns="0" tIns="0" bIns="0" anchor="ctr">
+            <a:spAutoFit/>
+          </a:bodyPr>
+          <a:lstStyle/>
+          <a:p>
+            <a:pPr algn="l">
+              <a:lnSpc>
+                <a:spcPct val="100000"/>
+              </a:lnSpc>
+              <a:spcBef>
+                <a:spcPts val="0"/>
+              </a:spcBef>
+              <a:spcAft>
+                <a:spcPts val="0"/>
+              </a:spcAft>
+            </a:pPr>
+            <a:r>
+              <a:rPr sz="950" b="0" i="0">
+                <a:solidFill>
+                  <a:srgbClr val="BAC6DA"/>
+                </a:solidFill>
+                <a:latin typeface="Bahnschrift SemiLight"/>
+              </a:rPr>
+              <a:t>Proxy = DTB3 − DFF (sem o contrato ZQ, D12), corrigido do viés pela média expansiva dos erros passados (D12a).</a:t>
+            </a:r>
+          </a:p>
+        </p:txBody>
+      </p:sp>
+      <p:sp>
+        <p:nvSpPr>
+          <p:cNvPr id="19" name="sA2_17"/>
+          <p:cNvSpPr txBox="1"/>
+          <p:nvPr/>
+        </p:nvSpPr>
+        <p:spPr>
+          <a:xfrm>
+            <a:off x="731520" y="5477255"/>
+            <a:ext cx="10725911" cy="256032"/>
+          </a:xfrm>
+          <a:prstGeom prst="rect">
+            <a:avLst/>
+          </a:prstGeom>
+          <a:noFill/>
+        </p:spPr>
+        <p:txBody>
+          <a:bodyPr wrap="none" lIns="0" rIns="0" tIns="0" bIns="0" anchor="ctr">
+            <a:spAutoFit/>
+          </a:bodyPr>
+          <a:lstStyle/>
+          <a:p>
+            <a:pPr algn="l">
+              <a:lnSpc>
+                <a:spcPct val="100000"/>
+              </a:lnSpc>
+              <a:spcBef>
+                <a:spcPts val="0"/>
+              </a:spcBef>
+              <a:spcAft>
+                <a:spcPts val="0"/>
+              </a:spcAft>
+            </a:pPr>
+            <a:r>
+              <a:rPr sz="950" b="0" i="0">
+                <a:solidFill>
+                  <a:srgbClr val="BAC6DA"/>
+                </a:solidFill>
+                <a:latin typeface="Bahnschrift SemiLight"/>
+              </a:rPr>
+              <a:t>Lead-lag: nos lags sem sobreposição de janela (k = +1, −2) a correlação é ≈ 0 — a informação chega aos dois no mesmo pregão.</a:t>
+            </a:r>
+          </a:p>
+        </p:txBody>
+      </p:sp>
+    </p:spTree>
+  </p:cSld>
+  <p:clrMapOvr>
+    <a:masterClrMapping/>
+  </p:clrMapOvr>
+</p:sld>
+</file>
+
+<file path=ppt/slides/slide21.xml><?xml version="1.0" encoding="utf-8"?>
+<p:sld xmlns:a="http://schemas.openxmlformats.org/drawingml/2006/main" xmlns:p="http://schemas.openxmlformats.org/presentationml/2006/main" xmlns:r="http://schemas.openxmlformats.org/officeDocument/2006/relationships">
+  <p:cSld>
+    <p:bg>
+      <p:bgPr>
+        <a:gradFill rotWithShape="1">
+          <a:gsLst>
+            <a:gs pos="0">
+              <a:srgbClr val="10203A"/>
+            </a:gs>
+            <a:gs pos="55000">
+              <a:srgbClr val="0A1325"/>
+            </a:gs>
+            <a:gs pos="100000">
+              <a:srgbClr val="04070E"/>
+            </a:gs>
+          </a:gsLst>
+          <a:path path="circle">
+            <a:fillToRect l="38000" r="62000" b="100000"/>
+          </a:path>
+        </a:gradFill>
+        <a:effectLst/>
+      </p:bgPr>
+    </p:bg>
+    <p:spTree>
+      <p:nvGrpSpPr>
+        <p:cNvPr id="1" name=""/>
+        <p:cNvGrpSpPr/>
+        <p:nvPr/>
+      </p:nvGrpSpPr>
+      <p:grpSpPr/>
+      <p:sp>
+        <p:nvSpPr>
+          <p:cNvPr id="2" name="!!glow_tl"/>
+          <p:cNvSpPr/>
+          <p:nvPr/>
+        </p:nvSpPr>
+        <p:spPr>
+          <a:xfrm>
+            <a:off x="-2600000" y="-2200000"/>
+            <a:ext cx="7000000" cy="5200000"/>
+          </a:xfrm>
+          <a:prstGeom prst="ellipse">
+            <a:avLst/>
+          </a:prstGeom>
+          <a:gradFill rotWithShape="1">
+            <a:gsLst>
+              <a:gs pos="0">
+                <a:srgbClr val="4F8EF7">
+                  <a:alpha val="10000"/>
+                </a:srgbClr>
+              </a:gs>
+              <a:gs pos="45000">
+                <a:srgbClr val="4F8EF7">
+                  <a:alpha val="4000"/>
+                </a:srgbClr>
+              </a:gs>
+              <a:gs pos="80000">
+                <a:srgbClr val="4F8EF7">
+                  <a:alpha val="1000"/>
+                </a:srgbClr>
+              </a:gs>
+              <a:gs pos="100000">
+                <a:srgbClr val="4F8EF7">
+                  <a:alpha val="0"/>
+                </a:srgbClr>
+              </a:gs>
+            </a:gsLst>
+            <a:path path="circle">
+              <a:fillToRect l="50000" t="50000" r="50000" b="50000"/>
+            </a:path>
+          </a:gradFill>
+          <a:ln>
+            <a:noFill/>
+          </a:ln>
+        </p:spPr>
+        <p:style>
+          <a:lnRef idx="1">
+            <a:schemeClr val="accent1"/>
+          </a:lnRef>
+          <a:fillRef idx="3">
+            <a:schemeClr val="accent1"/>
+          </a:fillRef>
+          <a:effectRef idx="2">
+            <a:schemeClr val="accent1"/>
+          </a:effectRef>
+          <a:fontRef idx="minor">
+            <a:schemeClr val="lt1"/>
+          </a:fontRef>
+        </p:style>
+        <p:txBody>
+          <a:bodyPr rtlCol="0" anchor="ctr"/>
+          <a:lstStyle/>
+          <a:p/>
+        </p:txBody>
+      </p:sp>
+      <p:sp>
+        <p:nvSpPr>
+          <p:cNvPr id="3" name="!!glow_br"/>
+          <p:cNvSpPr/>
+          <p:nvPr/>
+        </p:nvSpPr>
+        <p:spPr>
+          <a:xfrm>
+            <a:off x="8200000" y="4600000"/>
+            <a:ext cx="7000000" cy="5200000"/>
+          </a:xfrm>
+          <a:prstGeom prst="ellipse">
+            <a:avLst/>
+          </a:prstGeom>
+          <a:gradFill rotWithShape="1">
+            <a:gsLst>
+              <a:gs pos="0">
+                <a:srgbClr val="FFB531">
+                  <a:alpha val="7000"/>
+                </a:srgbClr>
+              </a:gs>
+              <a:gs pos="45000">
+                <a:srgbClr val="FFB531">
+                  <a:alpha val="2800"/>
+                </a:srgbClr>
+              </a:gs>
+              <a:gs pos="80000">
+                <a:srgbClr val="FFB531">
+                  <a:alpha val="1000"/>
+                </a:srgbClr>
+              </a:gs>
+              <a:gs pos="100000">
+                <a:srgbClr val="FFB531">
+                  <a:alpha val="0"/>
+                </a:srgbClr>
+              </a:gs>
+            </a:gsLst>
+            <a:path path="circle">
+              <a:fillToRect l="50000" t="50000" r="50000" b="50000"/>
+            </a:path>
+          </a:gradFill>
+          <a:ln>
+            <a:noFill/>
+          </a:ln>
+        </p:spPr>
+        <p:style>
+          <a:lnRef idx="1">
+            <a:schemeClr val="accent1"/>
+          </a:lnRef>
+          <a:fillRef idx="3">
+            <a:schemeClr val="accent1"/>
+          </a:fillRef>
+          <a:effectRef idx="2">
+            <a:schemeClr val="accent1"/>
+          </a:effectRef>
+          <a:fontRef idx="minor">
+            <a:schemeClr val="lt1"/>
+          </a:fontRef>
+        </p:style>
+        <p:txBody>
+          <a:bodyPr rtlCol="0" anchor="ctr"/>
+          <a:lstStyle/>
+          <a:p/>
+        </p:txBody>
+      </p:sp>
+      <p:sp>
+        <p:nvSpPr>
+          <p:cNvPr id="4" name="!!ghost"/>
+          <p:cNvSpPr txBox="1"/>
+          <p:nvPr/>
+        </p:nvSpPr>
+        <p:spPr>
+          <a:xfrm>
+            <a:off x="6900062" y="-230428"/>
+            <a:ext cx="4949647" cy="1999792"/>
+          </a:xfrm>
+          <a:prstGeom prst="rect">
+            <a:avLst/>
+          </a:prstGeom>
+          <a:noFill/>
+        </p:spPr>
+        <p:txBody>
+          <a:bodyPr wrap="none" lIns="0" rIns="0" tIns="0" bIns="0" anchor="t">
+            <a:spAutoFit/>
+          </a:bodyPr>
+          <a:lstStyle/>
+          <a:p>
+            <a:pPr algn="r">
+              <a:lnSpc>
+                <a:spcPct val="100000"/>
+              </a:lnSpc>
+              <a:spcBef>
+                <a:spcPts val="0"/>
+              </a:spcBef>
+              <a:spcAft>
+                <a:spcPts val="0"/>
+              </a:spcAft>
+            </a:pPr>
+            <a:r>
+              <a:rPr sz="15000" b="0" i="0">
+                <a:solidFill>
+                  <a:srgbClr val="101A2E"/>
+                </a:solidFill>
+                <a:latin typeface="Bahnschrift SemiBold Condensed"/>
+              </a:rPr>
+              <a:t>A3</a:t>
+            </a:r>
+          </a:p>
+        </p:txBody>
+      </p:sp>
+      <p:sp>
+        <p:nvSpPr>
+          <p:cNvPr id="5" name="!!tick"/>
+          <p:cNvSpPr/>
+          <p:nvPr/>
+        </p:nvSpPr>
+        <p:spPr>
+          <a:xfrm>
+            <a:off x="603504" y="446024"/>
+            <a:ext cx="45720" cy="164592"/>
+          </a:xfrm>
+          <a:prstGeom prst="rect">
+            <a:avLst/>
+          </a:prstGeom>
+          <a:solidFill>
+            <a:srgbClr val="FFB531"/>
+          </a:solidFill>
+          <a:ln>
+            <a:noFill/>
+          </a:ln>
+        </p:spPr>
+        <p:style>
+          <a:lnRef idx="1">
+            <a:schemeClr val="accent1"/>
+          </a:lnRef>
+          <a:fillRef idx="3">
+            <a:schemeClr val="accent1"/>
+          </a:fillRef>
+          <a:effectRef idx="2">
+            <a:schemeClr val="accent1"/>
+          </a:effectRef>
+          <a:fontRef idx="minor">
+            <a:schemeClr val="lt1"/>
+          </a:fontRef>
+        </p:style>
+        <p:txBody>
+          <a:bodyPr rtlCol="0" anchor="ctr"/>
+          <a:lstStyle/>
+          <a:p>
+            <a:pPr algn="ctr"/>
+          </a:p>
+        </p:txBody>
+      </p:sp>
+      <p:sp>
+        <p:nvSpPr>
+          <p:cNvPr id="6" name="sA3_4"/>
+          <p:cNvSpPr txBox="1"/>
+          <p:nvPr/>
+        </p:nvSpPr>
+        <p:spPr>
+          <a:xfrm>
+            <a:off x="731520" y="427024"/>
+            <a:ext cx="7315200" cy="202996"/>
+          </a:xfrm>
+          <a:prstGeom prst="rect">
+            <a:avLst/>
+          </a:prstGeom>
+          <a:noFill/>
+        </p:spPr>
+        <p:txBody>
+          <a:bodyPr wrap="square" lIns="0" rIns="0" tIns="0" bIns="0" anchor="ctr">
+            <a:spAutoFit/>
+          </a:bodyPr>
+          <a:lstStyle/>
+          <a:p>
+            <a:pPr algn="l">
+              <a:lnSpc>
+                <a:spcPct val="100000"/>
+              </a:lnSpc>
+              <a:spcBef>
+                <a:spcPts val="0"/>
+              </a:spcBef>
+              <a:spcAft>
+                <a:spcPts val="0"/>
+              </a:spcAft>
+            </a:pPr>
+            <a:r>
+              <a:rPr sz="1200" b="1" i="0" spc="300">
+                <a:solidFill>
+                  <a:srgbClr val="FFB531"/>
+                </a:solidFill>
+                <a:latin typeface="Consolas"/>
+              </a:rPr>
+              <a:t>KAIROS</a:t>
+            </a:r>
+            <a:r>
+              <a:rPr sz="1100" b="0" i="0" spc="72">
+                <a:solidFill>
+                  <a:srgbClr val="8395B5"/>
+                </a:solidFill>
+                <a:latin typeface="Consolas"/>
+              </a:rPr>
+              <a:t>   Apêndice · onde está o valor</a:t>
+            </a:r>
+          </a:p>
+        </p:txBody>
+      </p:sp>
+      <p:sp>
+        <p:nvSpPr>
+          <p:cNvPr id="7" name="sA3_5"/>
+          <p:cNvSpPr txBox="1"/>
+          <p:nvPr/>
+        </p:nvSpPr>
+        <p:spPr>
+          <a:xfrm>
+            <a:off x="0" y="467258"/>
+            <a:ext cx="11457432" cy="152704"/>
+          </a:xfrm>
+          <a:prstGeom prst="rect">
+            <a:avLst/>
+          </a:prstGeom>
+          <a:noFill/>
+        </p:spPr>
+        <p:txBody>
+          <a:bodyPr wrap="square" lIns="0" rIns="0" tIns="0" bIns="0" anchor="ctr">
+            <a:spAutoFit/>
+          </a:bodyPr>
+          <a:lstStyle/>
+          <a:p>
+            <a:pPr algn="r">
+              <a:lnSpc>
+                <a:spcPct val="100000"/>
+              </a:lnSpc>
+              <a:spcBef>
+                <a:spcPts val="0"/>
+              </a:spcBef>
+              <a:spcAft>
+                <a:spcPts val="0"/>
+              </a:spcAft>
+            </a:pPr>
+            <a:r>
+              <a:rPr sz="900" b="0" i="0" spc="45">
+                <a:solidFill>
+                  <a:srgbClr val="8395B5"/>
+                </a:solidFill>
+                <a:latin typeface="Consolas"/>
+              </a:rPr>
+              <a:t>A3</a:t>
+            </a:r>
+          </a:p>
+        </p:txBody>
+      </p:sp>
+      <p:cxnSp>
+        <p:nvCxnSpPr>
+          <p:cNvPr id="8" name="sA3_6"/>
+          <p:cNvCxnSpPr/>
+          <p:nvPr/>
+        </p:nvCxnSpPr>
+        <p:spPr>
+          <a:xfrm>
+            <a:off x="731520" y="705002"/>
+            <a:ext cx="10725912" cy="0"/>
+          </a:xfrm>
+          <a:prstGeom prst="line">
+            <a:avLst/>
+          </a:prstGeom>
+          <a:ln w="12700">
+            <a:gradFill rotWithShape="1">
+              <a:gsLst>
+                <a:gs pos="0">
+                  <a:srgbClr val="FFB531"/>
+                </a:gs>
+                <a:gs pos="30000">
+                  <a:srgbClr val="2A3F63"/>
+                </a:gs>
+                <a:gs pos="100000">
+                  <a:srgbClr val="2A3F63">
+                    <a:alpha val="30000"/>
+                  </a:srgbClr>
+                </a:gs>
+              </a:gsLst>
+              <a:lin ang="0" scaled="0"/>
+            </a:gradFill>
+          </a:ln>
+        </p:spPr>
+        <p:style>
+          <a:lnRef idx="2">
+            <a:schemeClr val="accent1"/>
+          </a:lnRef>
+          <a:fillRef idx="0">
+            <a:schemeClr val="accent1"/>
+          </a:fillRef>
+          <a:effectRef idx="1">
+            <a:schemeClr val="accent1"/>
+          </a:effectRef>
+          <a:fontRef idx="minor">
+            <a:schemeClr val="tx1"/>
+          </a:fontRef>
+        </p:style>
+      </p:cxnSp>
+      <p:sp>
+        <p:nvSpPr>
+          <p:cNvPr id="9" name="sA3_7"/>
+          <p:cNvSpPr txBox="1"/>
+          <p:nvPr/>
+        </p:nvSpPr>
+        <p:spPr>
+          <a:xfrm>
+            <a:off x="731520" y="850392"/>
+            <a:ext cx="10725911" cy="640080"/>
+          </a:xfrm>
+          <a:prstGeom prst="rect">
+            <a:avLst/>
+          </a:prstGeom>
+          <a:noFill/>
+        </p:spPr>
+        <p:txBody>
+          <a:bodyPr wrap="square" lIns="0" rIns="0" tIns="0" bIns="0" anchor="t">
+            <a:spAutoFit/>
+          </a:bodyPr>
+          <a:lstStyle/>
+          <a:p>
+            <a:pPr algn="l">
+              <a:lnSpc>
+                <a:spcPct val="100000"/>
+              </a:lnSpc>
+              <a:spcBef>
+                <a:spcPts val="0"/>
+              </a:spcBef>
+              <a:spcAft>
+                <a:spcPts val="0"/>
+              </a:spcAft>
+            </a:pPr>
+            <a:r>
+              <a:rPr sz="2000" b="0" i="0">
+                <a:solidFill>
+                  <a:srgbClr val="F5F7FB"/>
+                </a:solidFill>
+                <a:latin typeface="Bahnschrift SemiBold"/>
+              </a:rPr>
+              <a:t>O nível é sinal; o movimento não é — por isso Black-Litterman, e não trading de Δp.</a:t>
+            </a:r>
+          </a:p>
+        </p:txBody>
+      </p:sp>
+      <p:cxnSp>
+        <p:nvCxnSpPr>
+          <p:cNvPr id="10" name="sA3_8"/>
+          <p:cNvCxnSpPr/>
+          <p:nvPr/>
+        </p:nvCxnSpPr>
+        <p:spPr>
+          <a:xfrm>
+            <a:off x="731520" y="6553504"/>
+            <a:ext cx="10725912" cy="0"/>
+          </a:xfrm>
+          <a:prstGeom prst="line">
+            <a:avLst/>
+          </a:prstGeom>
+          <a:ln w="9525">
+            <a:solidFill>
+              <a:srgbClr val="2A3F63"/>
+            </a:solidFill>
+          </a:ln>
+        </p:spPr>
+        <p:style>
+          <a:lnRef idx="2">
+            <a:schemeClr val="accent1"/>
+          </a:lnRef>
+          <a:fillRef idx="0">
+            <a:schemeClr val="accent1"/>
+          </a:fillRef>
+          <a:effectRef idx="1">
+            <a:schemeClr val="accent1"/>
+          </a:effectRef>
+          <a:fontRef idx="minor">
+            <a:schemeClr val="tx1"/>
+          </a:fontRef>
+        </p:style>
+      </p:cxnSp>
+      <p:sp>
+        <p:nvSpPr>
+          <p:cNvPr id="11" name="!!foot_l"/>
+          <p:cNvSpPr txBox="1"/>
+          <p:nvPr/>
+        </p:nvSpPr>
+        <p:spPr>
+          <a:xfrm>
+            <a:off x="731520" y="6653174"/>
+            <a:ext cx="5998464" cy="160020"/>
+          </a:xfrm>
+          <a:prstGeom prst="rect">
+            <a:avLst/>
+          </a:prstGeom>
+          <a:noFill/>
+        </p:spPr>
+        <p:txBody>
+          <a:bodyPr wrap="none" lIns="0" rIns="0" tIns="0" bIns="0" anchor="t">
+            <a:spAutoFit/>
+          </a:bodyPr>
+          <a:lstStyle/>
+          <a:p>
+            <a:pPr algn="l">
+              <a:lnSpc>
+                <a:spcPct val="100000"/>
+              </a:lnSpc>
+              <a:spcBef>
+                <a:spcPts val="0"/>
+              </a:spcBef>
+              <a:spcAft>
+                <a:spcPts val="0"/>
+              </a:spcAft>
+            </a:pPr>
+            <a:r>
+              <a:rPr sz="700" b="0" i="0" spc="120">
+                <a:solidFill>
+                  <a:srgbClr val="58698A"/>
+                </a:solidFill>
+                <a:latin typeface="Consolas"/>
+              </a:rPr>
+              <a:t>ITAÚ QUANT AI CHALLENGE  ·  FINAL 2026</a:t>
+            </a:r>
+          </a:p>
+        </p:txBody>
+      </p:sp>
+      <p:sp>
+        <p:nvSpPr>
+          <p:cNvPr id="12" name="!!foot_r"/>
+          <p:cNvSpPr txBox="1"/>
+          <p:nvPr/>
+        </p:nvSpPr>
+        <p:spPr>
+          <a:xfrm>
+            <a:off x="5457139" y="6653174"/>
+            <a:ext cx="5998464" cy="160020"/>
+          </a:xfrm>
+          <a:prstGeom prst="rect">
+            <a:avLst/>
+          </a:prstGeom>
+          <a:noFill/>
+        </p:spPr>
+        <p:txBody>
+          <a:bodyPr wrap="none" lIns="0" rIns="0" tIns="0" bIns="0" anchor="t">
+            <a:spAutoFit/>
+          </a:bodyPr>
+          <a:lstStyle/>
+          <a:p>
+            <a:pPr algn="r">
+              <a:lnSpc>
+                <a:spcPct val="100000"/>
+              </a:lnSpc>
+              <a:spcBef>
+                <a:spcPts val="0"/>
+              </a:spcBef>
+              <a:spcAft>
+                <a:spcPts val="0"/>
+              </a:spcAft>
+            </a:pPr>
+            <a:r>
+              <a:rPr sz="700" b="0" i="0" spc="120">
+                <a:solidFill>
+                  <a:srgbClr val="58698A"/>
+                </a:solidFill>
+                <a:latin typeface="Consolas"/>
+              </a:rPr>
+              <a:t>BLACK-LITTERMAN  ×  POLYMARKET</a:t>
+            </a:r>
+          </a:p>
+        </p:txBody>
+      </p:sp>
+      <p:sp>
+        <p:nvSpPr>
+          <p:cNvPr id="13" name="sA3_11"/>
+          <p:cNvSpPr txBox="1"/>
+          <p:nvPr/>
+        </p:nvSpPr>
+        <p:spPr>
+          <a:xfrm>
+            <a:off x="731520" y="1417320"/>
+            <a:ext cx="5760720" cy="182880"/>
+          </a:xfrm>
+          <a:prstGeom prst="rect">
+            <a:avLst/>
+          </a:prstGeom>
+          <a:noFill/>
+        </p:spPr>
+        <p:txBody>
+          <a:bodyPr wrap="square" lIns="0" rIns="0" tIns="0" bIns="0" anchor="t">
+            <a:spAutoFit/>
+          </a:bodyPr>
+          <a:lstStyle/>
+          <a:p>
+            <a:pPr algn="l">
+              <a:lnSpc>
+                <a:spcPct val="100000"/>
+              </a:lnSpc>
+              <a:spcBef>
+                <a:spcPts val="0"/>
+              </a:spcBef>
+              <a:spcAft>
+                <a:spcPts val="0"/>
+              </a:spcAft>
+            </a:pPr>
+            <a:r>
+              <a:rPr sz="900" b="1" i="0" spc="180">
+                <a:solidFill>
+                  <a:srgbClr val="FFB531"/>
+                </a:solidFill>
+                <a:latin typeface="Consolas"/>
+              </a:rPr>
+              <a:t>QUAL EXPECTATIVA EXPLICA O RETORNO DO DIA DO FOMC (R², 9 ETFs)</a:t>
+            </a:r>
+          </a:p>
+        </p:txBody>
+      </p:sp>
+      <p:pic>
+        <p:nvPicPr>
+          <p:cNvPr id="14" name="sA3_12" descr="estudo_5_event_study.png"/>
+          <p:cNvPicPr>
+            <a:picLocks noChangeAspect="1"/>
+          </p:cNvPicPr>
+          <p:nvPr/>
+        </p:nvPicPr>
+        <p:blipFill>
+          <a:blip r:embed="rId2"/>
+          <a:stretch>
+            <a:fillRect/>
+          </a:stretch>
+        </p:blipFill>
+        <p:spPr>
+          <a:xfrm>
+            <a:off x="731520" y="1645920"/>
+            <a:ext cx="5760720" cy="2891990"/>
+          </a:xfrm>
+          <a:prstGeom prst="rect">
+            <a:avLst/>
+          </a:prstGeom>
+        </p:spPr>
+      </p:pic>
+      <p:sp>
+        <p:nvSpPr>
+          <p:cNvPr id="15" name="sA3_13"/>
+          <p:cNvSpPr txBox="1"/>
+          <p:nvPr/>
+        </p:nvSpPr>
+        <p:spPr>
+          <a:xfrm>
+            <a:off x="6812279" y="1417320"/>
+            <a:ext cx="4645152" cy="182880"/>
+          </a:xfrm>
+          <a:prstGeom prst="rect">
+            <a:avLst/>
+          </a:prstGeom>
+          <a:noFill/>
+        </p:spPr>
+        <p:txBody>
+          <a:bodyPr wrap="square" lIns="0" rIns="0" tIns="0" bIns="0" anchor="t">
+            <a:spAutoFit/>
+          </a:bodyPr>
+          <a:lstStyle/>
+          <a:p>
+            <a:pPr algn="l">
+              <a:lnSpc>
+                <a:spcPct val="100000"/>
+              </a:lnSpc>
+              <a:spcBef>
+                <a:spcPts val="0"/>
+              </a:spcBef>
+              <a:spcAft>
+                <a:spcPts val="0"/>
+              </a:spcAft>
+            </a:pPr>
+            <a:r>
+              <a:rPr sz="900" b="1" i="0" spc="180">
+                <a:solidFill>
+                  <a:srgbClr val="FFB531"/>
+                </a:solidFill>
+                <a:latin typeface="Consolas"/>
+              </a:rPr>
+              <a:t>PLACAR DO ESTUDO</a:t>
+            </a:r>
+          </a:p>
+        </p:txBody>
+      </p:sp>
+      <p:pic>
+        <p:nvPicPr>
+          <p:cNvPr id="16" name="sA3_14" descr="estudo_6_sintese.png"/>
+          <p:cNvPicPr>
+            <a:picLocks noChangeAspect="1"/>
+          </p:cNvPicPr>
+          <p:nvPr/>
+        </p:nvPicPr>
+        <p:blipFill>
+          <a:blip r:embed="rId3"/>
+          <a:stretch>
+            <a:fillRect/>
+          </a:stretch>
+        </p:blipFill>
+        <p:spPr>
+          <a:xfrm>
+            <a:off x="6812279" y="1645920"/>
+            <a:ext cx="4645152" cy="2845885"/>
+          </a:xfrm>
+          <a:prstGeom prst="rect">
+            <a:avLst/>
+          </a:prstGeom>
+        </p:spPr>
+      </p:pic>
+      <p:sp>
+        <p:nvSpPr>
+          <p:cNvPr id="17" name="sA3_15"/>
+          <p:cNvSpPr txBox="1"/>
+          <p:nvPr/>
+        </p:nvSpPr>
+        <p:spPr>
+          <a:xfrm>
+            <a:off x="731520" y="4892040"/>
+            <a:ext cx="6126480" cy="256032"/>
+          </a:xfrm>
+          <a:prstGeom prst="rect">
+            <a:avLst/>
+          </a:prstGeom>
+          <a:noFill/>
+        </p:spPr>
+        <p:txBody>
+          <a:bodyPr wrap="none" lIns="0" rIns="0" tIns="0" bIns="0" anchor="ctr">
+            <a:spAutoFit/>
+          </a:bodyPr>
+          <a:lstStyle/>
+          <a:p>
+            <a:pPr algn="l">
+              <a:lnSpc>
+                <a:spcPct val="100000"/>
+              </a:lnSpc>
+              <a:spcBef>
+                <a:spcPts val="0"/>
+              </a:spcBef>
+              <a:spcAft>
+                <a:spcPts val="0"/>
+              </a:spcAft>
+            </a:pPr>
+            <a:r>
+              <a:rPr sz="950" b="0" i="0">
+                <a:solidFill>
+                  <a:srgbClr val="BAC6DA"/>
+                </a:solidFill>
+                <a:latin typeface="Bahnschrift SemiLight"/>
+              </a:rPr>
+              <a:t>Na véspera quase não sobra surpresa (MAE 0,9 bps): o que move os ETFs no dia é o caminho da política, não a decisão.</a:t>
+            </a:r>
+          </a:p>
+        </p:txBody>
+      </p:sp>
+      <p:sp>
+        <p:nvSpPr>
+          <p:cNvPr id="18" name="sA3_16"/>
+          <p:cNvSpPr txBox="1"/>
+          <p:nvPr/>
+        </p:nvSpPr>
+        <p:spPr>
+          <a:xfrm>
+            <a:off x="731520" y="5184648"/>
+            <a:ext cx="6126480" cy="256032"/>
+          </a:xfrm>
+          <a:prstGeom prst="rect">
+            <a:avLst/>
+          </a:prstGeom>
+          <a:noFill/>
+        </p:spPr>
+        <p:txBody>
+          <a:bodyPr wrap="none" lIns="0" rIns="0" tIns="0" bIns="0" anchor="ctr">
+            <a:spAutoFit/>
+          </a:bodyPr>
+          <a:lstStyle/>
+          <a:p>
+            <a:pPr algn="l">
+              <a:lnSpc>
+                <a:spcPct val="100000"/>
+              </a:lnSpc>
+              <a:spcBef>
+                <a:spcPts val="0"/>
+              </a:spcBef>
+              <a:spcAft>
+                <a:spcPts val="0"/>
+              </a:spcAft>
+            </a:pPr>
+            <a:r>
+              <a:rPr sz="950" b="0" i="0">
+                <a:solidFill>
+                  <a:srgbClr val="BAC6DA"/>
+                </a:solidFill>
+                <a:latin typeface="Bahnschrift SemiLight"/>
+              </a:rPr>
+              <a:t>Antes do anúncio, Δp não antecipa o retorno (Teste_sinal.md: t ≈ 0 em h = 0, 1, 5); o preço do Polymarket reverte em 12 h (ACF −0,13, VR(5) = 0,78).</a:t>
             </a:r>
           </a:p>
         </p:txBody>
@@ -35759,7 +39703,7 @@
                 </a:solidFill>
                 <a:latin typeface="Consolas"/>
               </a:rPr>
-              <a:t>205 arquivos  ·  695 ligações  ·  medido no branch por grafo_repo.py</a:t>
+              <a:t>209 arquivos  ·  719 ligações  ·  medido no branch por grafo_repo.py</a:t>
             </a:r>
           </a:p>
         </p:txBody>
@@ -36851,7 +40795,7 @@
                 </a:solidFill>
                 <a:latin typeface="Consolas"/>
               </a:rPr>
-              <a:t>205 arquivos  ·  695 ligações  ·  medido no branch por grafo_repo.py</a:t>
+              <a:t>209 arquivos  ·  719 ligações  ·  medido no branch por grafo_repo.py</a:t>
             </a:r>
           </a:p>
         </p:txBody>
@@ -36864,7 +40808,7 @@
         </p:nvSpPr>
         <p:spPr>
           <a:xfrm>
-            <a:off x="2903101" y="4043871"/>
+            <a:off x="2690320" y="3888827"/>
             <a:ext cx="182880" cy="182880"/>
           </a:xfrm>
           <a:prstGeom prst="ellipse">
@@ -36912,7 +40856,7 @@
         </p:nvSpPr>
         <p:spPr>
           <a:xfrm>
-            <a:off x="2743081" y="3883851"/>
+            <a:off x="2530300" y="3728807"/>
             <a:ext cx="502920" cy="502920"/>
           </a:xfrm>
           <a:prstGeom prst="ellipse">
@@ -38058,7 +42002,7 @@
                 </a:solidFill>
                 <a:latin typeface="Consolas"/>
               </a:rPr>
-              <a:t>205 arquivos  ·  695 ligações  ·  medido no branch por grafo_repo.py</a:t>
+              <a:t>209 arquivos  ·  719 ligações  ·  medido no branch por grafo_repo.py</a:t>
             </a:r>
           </a:p>
         </p:txBody>
@@ -38071,7 +42015,7 @@
         </p:nvSpPr>
         <p:spPr>
           <a:xfrm>
-            <a:off x="2903101" y="4043871"/>
+            <a:off x="2690320" y="3888827"/>
             <a:ext cx="182880" cy="182880"/>
           </a:xfrm>
           <a:prstGeom prst="ellipse">
@@ -38118,9 +42062,9 @@
           <p:nvPr/>
         </p:nvCxnSpPr>
         <p:spPr>
-          <a:xfrm flipV="1">
-            <a:off x="2994541" y="3411134"/>
-            <a:ext cx="1630177" cy="724177"/>
+          <a:xfrm flipH="1" flipV="1">
+            <a:off x="1701063" y="2877907"/>
+            <a:ext cx="1080697" cy="1102360"/>
           </a:xfrm>
           <a:prstGeom prst="line">
             <a:avLst/>
@@ -38156,7 +42100,7 @@
         </p:nvSpPr>
         <p:spPr>
           <a:xfrm>
-            <a:off x="4533278" y="3319694"/>
+            <a:off x="1609623" y="2786467"/>
             <a:ext cx="182880" cy="182880"/>
           </a:xfrm>
           <a:prstGeom prst="ellipse">
@@ -38204,7 +42148,7 @@
         </p:nvSpPr>
         <p:spPr>
           <a:xfrm>
-            <a:off x="4373258" y="3159674"/>
+            <a:off x="1449603" y="2626447"/>
             <a:ext cx="502920" cy="502920"/>
           </a:xfrm>
           <a:prstGeom prst="ellipse">
@@ -39404,7 +43348,7 @@
                 </a:solidFill>
                 <a:latin typeface="Consolas"/>
               </a:rPr>
-              <a:t>205 arquivos  ·  695 ligações  ·  medido no branch por grafo_repo.py</a:t>
+              <a:t>209 arquivos  ·  719 ligações  ·  medido no branch por grafo_repo.py</a:t>
             </a:r>
           </a:p>
         </p:txBody>
@@ -39417,7 +43361,7 @@
         </p:nvSpPr>
         <p:spPr>
           <a:xfrm>
-            <a:off x="2903101" y="4043871"/>
+            <a:off x="2690320" y="3888827"/>
             <a:ext cx="182880" cy="182880"/>
           </a:xfrm>
           <a:prstGeom prst="ellipse">
@@ -39464,9 +43408,9 @@
           <p:nvPr/>
         </p:nvCxnSpPr>
         <p:spPr>
-          <a:xfrm flipV="1">
-            <a:off x="2994541" y="3411134"/>
-            <a:ext cx="1630177" cy="724177"/>
+          <a:xfrm flipH="1" flipV="1">
+            <a:off x="1701063" y="2877907"/>
+            <a:ext cx="1080697" cy="1102360"/>
           </a:xfrm>
           <a:prstGeom prst="line">
             <a:avLst/>
@@ -39502,7 +43446,7 @@
         </p:nvSpPr>
         <p:spPr>
           <a:xfrm>
-            <a:off x="4533278" y="3319694"/>
+            <a:off x="1609623" y="2786467"/>
             <a:ext cx="182880" cy="182880"/>
           </a:xfrm>
           <a:prstGeom prst="ellipse">
@@ -39550,8 +43494,8 @@
         </p:nvCxnSpPr>
         <p:spPr>
           <a:xfrm flipH="1">
-            <a:off x="4121220" y="3411134"/>
-            <a:ext cx="503498" cy="1210191"/>
+            <a:off x="1634220" y="2877907"/>
+            <a:ext cx="66843" cy="990028"/>
           </a:xfrm>
           <a:prstGeom prst="line">
             <a:avLst/>
@@ -39587,7 +43531,7 @@
         </p:nvSpPr>
         <p:spPr>
           <a:xfrm>
-            <a:off x="4029780" y="4529885"/>
+            <a:off x="1542780" y="3776495"/>
             <a:ext cx="182880" cy="182880"/>
           </a:xfrm>
           <a:prstGeom prst="ellipse">
@@ -39635,7 +43579,7 @@
         </p:nvSpPr>
         <p:spPr>
           <a:xfrm>
-            <a:off x="3869760" y="4369865"/>
+            <a:off x="1382760" y="3616475"/>
             <a:ext cx="502920" cy="502920"/>
           </a:xfrm>
           <a:prstGeom prst="ellipse">
@@ -40889,7 +44833,7 @@
                 </a:solidFill>
                 <a:latin typeface="Consolas"/>
               </a:rPr>
-              <a:t>205 arquivos  ·  695 ligações  ·  medido no branch por grafo_repo.py</a:t>
+              <a:t>209 arquivos  ·  719 ligações  ·  medido no branch por grafo_repo.py</a:t>
             </a:r>
           </a:p>
         </p:txBody>
@@ -40902,7 +44846,7 @@
         </p:nvSpPr>
         <p:spPr>
           <a:xfrm>
-            <a:off x="2903101" y="4043871"/>
+            <a:off x="2690320" y="3888827"/>
             <a:ext cx="182880" cy="182880"/>
           </a:xfrm>
           <a:prstGeom prst="ellipse">
@@ -40949,9 +44893,9 @@
           <p:nvPr/>
         </p:nvCxnSpPr>
         <p:spPr>
-          <a:xfrm flipV="1">
-            <a:off x="2994541" y="3411134"/>
-            <a:ext cx="1630177" cy="724177"/>
+          <a:xfrm flipH="1" flipV="1">
+            <a:off x="1701063" y="2877907"/>
+            <a:ext cx="1080697" cy="1102360"/>
           </a:xfrm>
           <a:prstGeom prst="line">
             <a:avLst/>
@@ -40987,7 +44931,7 @@
         </p:nvSpPr>
         <p:spPr>
           <a:xfrm>
-            <a:off x="4533278" y="3319694"/>
+            <a:off x="1609623" y="2786467"/>
             <a:ext cx="182880" cy="182880"/>
           </a:xfrm>
           <a:prstGeom prst="ellipse">
@@ -41035,8 +44979,8 @@
         </p:nvCxnSpPr>
         <p:spPr>
           <a:xfrm flipH="1">
-            <a:off x="4121220" y="3411134"/>
-            <a:ext cx="503498" cy="1210191"/>
+            <a:off x="1634220" y="2877907"/>
+            <a:ext cx="66843" cy="990028"/>
           </a:xfrm>
           <a:prstGeom prst="line">
             <a:avLst/>
@@ -41072,7 +45016,7 @@
         </p:nvSpPr>
         <p:spPr>
           <a:xfrm>
-            <a:off x="4029780" y="4529885"/>
+            <a:off x="1542780" y="3776495"/>
             <a:ext cx="182880" cy="182880"/>
           </a:xfrm>
           <a:prstGeom prst="ellipse">
@@ -41119,9 +45063,9 @@
           <p:nvPr/>
         </p:nvCxnSpPr>
         <p:spPr>
-          <a:xfrm flipH="1" flipV="1">
-            <a:off x="3041969" y="3917674"/>
-            <a:ext cx="1079251" cy="703651"/>
+          <a:xfrm flipV="1">
+            <a:off x="1634220" y="3571236"/>
+            <a:ext cx="764055" cy="296699"/>
           </a:xfrm>
           <a:prstGeom prst="line">
             <a:avLst/>
@@ -41157,7 +45101,7 @@
         </p:nvSpPr>
         <p:spPr>
           <a:xfrm>
-            <a:off x="2950529" y="3826234"/>
+            <a:off x="2306835" y="3479796"/>
             <a:ext cx="182880" cy="182880"/>
           </a:xfrm>
           <a:prstGeom prst="ellipse">
@@ -41205,7 +45149,7 @@
         </p:nvSpPr>
         <p:spPr>
           <a:xfrm>
-            <a:off x="2790509" y="3666214"/>
+            <a:off x="2146815" y="3319776"/>
             <a:ext cx="502920" cy="502920"/>
           </a:xfrm>
           <a:prstGeom prst="ellipse">
@@ -42513,7 +46457,7 @@
                 </a:solidFill>
                 <a:latin typeface="Consolas"/>
               </a:rPr>
-              <a:t>205 arquivos  ·  695 ligações  ·  medido no branch por grafo_repo.py</a:t>
+              <a:t>209 arquivos  ·  719 ligações  ·  medido no branch por grafo_repo.py</a:t>
             </a:r>
           </a:p>
         </p:txBody>
@@ -42526,7 +46470,7 @@
         </p:nvSpPr>
         <p:spPr>
           <a:xfrm>
-            <a:off x="2903101" y="4043871"/>
+            <a:off x="2690320" y="3888827"/>
             <a:ext cx="182880" cy="182880"/>
           </a:xfrm>
           <a:prstGeom prst="ellipse">
@@ -42573,9 +46517,9 @@
           <p:nvPr/>
         </p:nvCxnSpPr>
         <p:spPr>
-          <a:xfrm flipV="1">
-            <a:off x="2994541" y="3411134"/>
-            <a:ext cx="1630177" cy="724177"/>
+          <a:xfrm flipH="1" flipV="1">
+            <a:off x="1701063" y="2877907"/>
+            <a:ext cx="1080697" cy="1102360"/>
           </a:xfrm>
           <a:prstGeom prst="line">
             <a:avLst/>
@@ -42611,7 +46555,7 @@
         </p:nvSpPr>
         <p:spPr>
           <a:xfrm>
-            <a:off x="4533278" y="3319694"/>
+            <a:off x="1609623" y="2786467"/>
             <a:ext cx="182880" cy="182880"/>
           </a:xfrm>
           <a:prstGeom prst="ellipse">
@@ -42659,8 +46603,8 @@
         </p:nvCxnSpPr>
         <p:spPr>
           <a:xfrm flipH="1">
-            <a:off x="4121220" y="3411134"/>
-            <a:ext cx="503498" cy="1210191"/>
+            <a:off x="1634220" y="2877907"/>
+            <a:ext cx="66843" cy="990028"/>
           </a:xfrm>
           <a:prstGeom prst="line">
             <a:avLst/>
@@ -42696,7 +46640,7 @@
         </p:nvSpPr>
         <p:spPr>
           <a:xfrm>
-            <a:off x="4029780" y="4529885"/>
+            <a:off x="1542780" y="3776495"/>
             <a:ext cx="182880" cy="182880"/>
           </a:xfrm>
           <a:prstGeom prst="ellipse">
@@ -42743,9 +46687,9 @@
           <p:nvPr/>
         </p:nvCxnSpPr>
         <p:spPr>
-          <a:xfrm flipH="1" flipV="1">
-            <a:off x="3041969" y="3917674"/>
-            <a:ext cx="1079251" cy="703651"/>
+          <a:xfrm flipV="1">
+            <a:off x="1634220" y="3571236"/>
+            <a:ext cx="764055" cy="296699"/>
           </a:xfrm>
           <a:prstGeom prst="line">
             <a:avLst/>
@@ -42781,7 +46725,7 @@
         </p:nvSpPr>
         <p:spPr>
           <a:xfrm>
-            <a:off x="2950529" y="3826234"/>
+            <a:off x="2306835" y="3479796"/>
             <a:ext cx="182880" cy="182880"/>
           </a:xfrm>
           <a:prstGeom prst="ellipse">
@@ -42829,8 +46773,8 @@
         </p:nvCxnSpPr>
         <p:spPr>
           <a:xfrm>
-            <a:off x="3041969" y="3917674"/>
-            <a:ext cx="304176" cy="446538"/>
+            <a:off x="2398275" y="3571236"/>
+            <a:ext cx="64738" cy="638276"/>
           </a:xfrm>
           <a:prstGeom prst="line">
             <a:avLst/>
@@ -42866,7 +46810,7 @@
         </p:nvSpPr>
         <p:spPr>
           <a:xfrm>
-            <a:off x="3254705" y="4272772"/>
+            <a:off x="2371573" y="4118072"/>
             <a:ext cx="182880" cy="182880"/>
           </a:xfrm>
           <a:prstGeom prst="ellipse">
@@ -42914,7 +46858,7 @@
         </p:nvSpPr>
         <p:spPr>
           <a:xfrm>
-            <a:off x="3094685" y="4112752"/>
+            <a:off x="2211553" y="3958052"/>
             <a:ext cx="502920" cy="502920"/>
           </a:xfrm>
           <a:prstGeom prst="ellipse">

--- a/Final/Slides_novos.pptx
+++ b/Final/Slides_novos.pptx
@@ -22105,7 +22105,7 @@
           <a:noFill/>
         </p:spPr>
         <p:txBody>
-          <a:bodyPr wrap="square" lIns="0" rIns="0" tIns="0" bIns="0" anchor="t">
+          <a:bodyPr wrap="square" lIns="0" tIns="0" rIns="0" bIns="0" anchor="t">
             <a:spAutoFit/>
           </a:bodyPr>
           <a:lstStyle/>
@@ -22142,7 +22142,7 @@
           <p:nvPr/>
         </p:nvPicPr>
         <p:blipFill>
-          <a:blip r:embed="rId4"/>
+          <a:blip r:embed="rId3"/>
           <a:stretch>
             <a:fillRect/>
           </a:stretch>
@@ -22174,7 +22174,7 @@
           <a:noFill/>
         </p:spPr>
         <p:txBody>
-          <a:bodyPr wrap="square" lIns="0" rIns="0" tIns="0" bIns="0" anchor="t">
+          <a:bodyPr wrap="square" lIns="0" tIns="0" rIns="0" bIns="0" anchor="t">
             <a:spAutoFit/>
           </a:bodyPr>
           <a:lstStyle/>
@@ -22211,7 +22211,7 @@
           <p:nvPr/>
         </p:nvPicPr>
         <p:blipFill>
-          <a:blip r:embed="rId5"/>
+          <a:blip r:embed="rId4"/>
           <a:stretch>
             <a:fillRect/>
           </a:stretch>
@@ -22285,7 +22285,9 @@
         <p:txBody>
           <a:bodyPr rtlCol="0" anchor="ctr"/>
           <a:lstStyle/>
-          <a:p/>
+          <a:p>
+            <a:endParaRPr/>
+          </a:p>
         </p:txBody>
       </p:sp>
       <p:sp>
@@ -22305,7 +22307,7 @@
           <a:noFill/>
         </p:spPr>
         <p:txBody>
-          <a:bodyPr wrap="square" lIns="0" rIns="0" tIns="0" bIns="0" anchor="ctr">
+          <a:bodyPr wrap="square" lIns="0" tIns="0" rIns="0" bIns="0" anchor="ctr">
             <a:spAutoFit/>
           </a:bodyPr>
           <a:lstStyle/>
@@ -22350,7 +22352,7 @@
           <a:noFill/>
         </p:spPr>
         <p:txBody>
-          <a:bodyPr wrap="none" lIns="0" rIns="0" tIns="0" bIns="0" anchor="ctr">
+          <a:bodyPr wrap="none" lIns="0" tIns="0" rIns="0" bIns="0" anchor="ctr">
             <a:spAutoFit/>
           </a:bodyPr>
           <a:lstStyle/>
@@ -22395,7 +22397,7 @@
           <a:noFill/>
         </p:spPr>
         <p:txBody>
-          <a:bodyPr wrap="none" lIns="0" rIns="0" tIns="0" bIns="0" anchor="ctr">
+          <a:bodyPr wrap="none" lIns="0" tIns="0" rIns="0" bIns="0" anchor="ctr">
             <a:spAutoFit/>
           </a:bodyPr>
           <a:lstStyle/>
@@ -22482,7 +22484,9 @@
         <p:txBody>
           <a:bodyPr rtlCol="0" anchor="ctr"/>
           <a:lstStyle/>
-          <a:p/>
+          <a:p>
+            <a:endParaRPr/>
+          </a:p>
         </p:txBody>
       </p:sp>
       <p:sp>
@@ -22502,7 +22506,7 @@
           <a:noFill/>
         </p:spPr>
         <p:txBody>
-          <a:bodyPr wrap="square" lIns="0" rIns="0" tIns="0" bIns="0" anchor="ctr">
+          <a:bodyPr wrap="square" lIns="0" tIns="0" rIns="0" bIns="0" anchor="ctr">
             <a:spAutoFit/>
           </a:bodyPr>
           <a:lstStyle/>
@@ -22547,7 +22551,7 @@
           <a:noFill/>
         </p:spPr>
         <p:txBody>
-          <a:bodyPr wrap="none" lIns="0" rIns="0" tIns="0" bIns="0" anchor="ctr">
+          <a:bodyPr wrap="none" lIns="0" tIns="0" rIns="0" bIns="0" anchor="ctr">
             <a:spAutoFit/>
           </a:bodyPr>
           <a:lstStyle/>
@@ -22592,7 +22596,7 @@
           <a:noFill/>
         </p:spPr>
         <p:txBody>
-          <a:bodyPr wrap="none" lIns="0" rIns="0" tIns="0" bIns="0" anchor="ctr">
+          <a:bodyPr wrap="none" lIns="0" tIns="0" rIns="0" bIns="0" anchor="ctr">
             <a:spAutoFit/>
           </a:bodyPr>
           <a:lstStyle/>
@@ -22679,7 +22683,9 @@
         <p:txBody>
           <a:bodyPr rtlCol="0" anchor="ctr"/>
           <a:lstStyle/>
-          <a:p/>
+          <a:p>
+            <a:endParaRPr/>
+          </a:p>
         </p:txBody>
       </p:sp>
       <p:sp>
@@ -22699,7 +22705,7 @@
           <a:noFill/>
         </p:spPr>
         <p:txBody>
-          <a:bodyPr wrap="square" lIns="0" rIns="0" tIns="0" bIns="0" anchor="ctr">
+          <a:bodyPr wrap="square" lIns="0" tIns="0" rIns="0" bIns="0" anchor="ctr">
             <a:spAutoFit/>
           </a:bodyPr>
           <a:lstStyle/>
@@ -22744,7 +22750,7 @@
           <a:noFill/>
         </p:spPr>
         <p:txBody>
-          <a:bodyPr wrap="none" lIns="0" rIns="0" tIns="0" bIns="0" anchor="ctr">
+          <a:bodyPr wrap="none" lIns="0" tIns="0" rIns="0" bIns="0" anchor="ctr">
             <a:spAutoFit/>
           </a:bodyPr>
           <a:lstStyle/>
@@ -22789,7 +22795,7 @@
           <a:noFill/>
         </p:spPr>
         <p:txBody>
-          <a:bodyPr wrap="none" lIns="0" rIns="0" tIns="0" bIns="0" anchor="ctr">
+          <a:bodyPr wrap="none" lIns="0" tIns="0" rIns="0" bIns="0" anchor="ctr">
             <a:spAutoFit/>
           </a:bodyPr>
           <a:lstStyle/>
@@ -22876,7 +22882,9 @@
         <p:txBody>
           <a:bodyPr rtlCol="0" anchor="ctr"/>
           <a:lstStyle/>
-          <a:p/>
+          <a:p>
+            <a:endParaRPr/>
+          </a:p>
         </p:txBody>
       </p:sp>
       <p:sp>
@@ -22896,7 +22904,7 @@
           <a:noFill/>
         </p:spPr>
         <p:txBody>
-          <a:bodyPr wrap="square" lIns="0" rIns="0" tIns="0" bIns="0" anchor="ctr">
+          <a:bodyPr wrap="square" lIns="0" tIns="0" rIns="0" bIns="0" anchor="ctr">
             <a:spAutoFit/>
           </a:bodyPr>
           <a:lstStyle/>
@@ -22941,7 +22949,7 @@
           <a:noFill/>
         </p:spPr>
         <p:txBody>
-          <a:bodyPr wrap="none" lIns="0" rIns="0" tIns="0" bIns="0" anchor="ctr">
+          <a:bodyPr wrap="none" lIns="0" tIns="0" rIns="0" bIns="0" anchor="ctr">
             <a:spAutoFit/>
           </a:bodyPr>
           <a:lstStyle/>
@@ -22986,7 +22994,7 @@
           <a:noFill/>
         </p:spPr>
         <p:txBody>
-          <a:bodyPr wrap="none" lIns="0" rIns="0" tIns="0" bIns="0" anchor="ctr">
+          <a:bodyPr wrap="none" lIns="0" tIns="0" rIns="0" bIns="0" anchor="ctr">
             <a:spAutoFit/>
           </a:bodyPr>
           <a:lstStyle/>

--- a/Final/Slides_novos.pptx
+++ b/Final/Slides_novos.pptx
@@ -5,7 +5,7 @@
     <p:sldMasterId id="2147483648" r:id="rId1"/>
   </p:sldMasterIdLst>
   <p:notesMasterIdLst>
-    <p:notesMasterId r:id="rId28"/>
+    <p:notesMasterId r:id="rId32"/>
   </p:notesMasterIdLst>
   <p:sldIdLst>
     <p:sldId id="256" r:id="rId2"/>
@@ -23,21 +23,21 @@
     <p:sldId id="270" r:id="rId14"/>
     <p:sldId id="271" r:id="rId15"/>
     <p:sldId id="272" r:id="rId16"/>
-    <p:sldId id="284" r:id="rId33"/>
-    <p:sldId id="285" r:id="rId34"/>
-    <p:sldId id="287" r:id="rId36"/>
-    <p:sldId id="273" r:id="rId17"/>
-    <p:sldId id="274" r:id="rId18"/>
-    <p:sldId id="275" r:id="rId19"/>
-    <p:sldId id="276" r:id="rId20"/>
-    <p:sldId id="277" r:id="rId21"/>
-    <p:sldId id="278" r:id="rId22"/>
-    <p:sldId id="279" r:id="rId23"/>
-    <p:sldId id="280" r:id="rId24"/>
-    <p:sldId id="281" r:id="rId25"/>
-    <p:sldId id="282" r:id="rId26"/>
-    <p:sldId id="286" r:id="rId35"/>
-    <p:sldId id="283" r:id="rId27"/>
+    <p:sldId id="284" r:id="rId17"/>
+    <p:sldId id="285" r:id="rId18"/>
+    <p:sldId id="287" r:id="rId19"/>
+    <p:sldId id="273" r:id="rId20"/>
+    <p:sldId id="274" r:id="rId21"/>
+    <p:sldId id="275" r:id="rId22"/>
+    <p:sldId id="276" r:id="rId23"/>
+    <p:sldId id="277" r:id="rId24"/>
+    <p:sldId id="278" r:id="rId25"/>
+    <p:sldId id="279" r:id="rId26"/>
+    <p:sldId id="280" r:id="rId27"/>
+    <p:sldId id="281" r:id="rId28"/>
+    <p:sldId id="282" r:id="rId29"/>
+    <p:sldId id="286" r:id="rId30"/>
+    <p:sldId id="283" r:id="rId31"/>
   </p:sldIdLst>
   <p:sldSz cx="12192000" cy="6858000"/>
   <p:notesSz cx="6858000" cy="9144000"/>
@@ -969,7 +969,27 @@
           <a:lstStyle/>
           <a:p>
             <a:r>
-              <a:t>Fonte: scripts/estudo_polymarket.py → Uteis/analises/Metricas_estudo.md; guia de leitura em Final/estudo/Guia_slide16.md. Amostra = todo o dado macro do repo (FOMC 76 faixas/18 reuniões, CPI 74 faixas/12 meses), sem exclusão. Brier 0,043 [0,022; 0,067]; calibração b = 1,04 (p = 0,15); FF = proxy DTB3−DFF corrigido do viés (cru: 8,9 bps), DM p = 0,002; 17/17 no desfecho modal. Terceira informação, se pedirem: o movimento do preço não é sinal (VR(5) = 0,78 &lt; 1, Δp com t ≈ 0) — por isso usamos o nível, não o Δp. Detalhe nos apêndices A1–A3.</a:t>
+              <a:t>Exposição à queda. Nos dois tombos a carteira caiu junto e, em abril/2025, mais fundo que o índice: −19,6% contra −18,8%. O ganho vem da subida, não da defesa.</a:t>
+            </a:r>
+          </a:p>
+          <a:p>
+            <a:r>
+              <a:t>Uma janela, um regime. 374 pregões de alta do S&amp;P, sem correção para as ~200 comparações da busca tática. O teste em regime de queda é o que falta.</a:t>
+            </a:r>
+          </a:p>
+          <a:p>
+            <a:r>
+              <a:t>Teto de risco: somar é dividir. A camada tática faz +42,6 pp sozinha e −2,94 pp dentro da carteira. Sob teto fixo, entrar não acrescenta — reparte o mesmo orçamento.</a:t>
+            </a:r>
+          </a:p>
+          <a:p>
+            <a:r>
+              <a:t>Giramos os quatro botões da estratégia — risco, confiança, gatilho e correção das probabilidades — e a vantagem sobre o SPY não vira negativa em nenhuma posição: +0,5 a +15,8 pp. Não é um parâmetro bem escolhido.</a:t>
+            </a:r>
+          </a:p>
+          <a:p>
+            <a:r>
+              <a:t>O tile novo (sorte ou habilidade?): bootstrap estacionário (Politis-Romano, blocos de 10 pregões, B = 2 000) sobre a série diária. IC95 do excesso [−12,9; 20,6] pp, P(&gt; 0) = 64%; Sharpe 1,18 com IC95 [−0,23; 3,04]; alpha t = 0,6 (Newey-West) contra a régua de 3 de Harvey-Liu; PSR = 93%; track record mínimo a 95 % = 457 pregões, faltam 83. Leitura: o número é positivo em toda leitura, mas 18 meses não separam habilidade de sorte — o que sustenta a estratégia é o mecanismo medido fora do resultado (slides 8, 9 e 16). Detalhe no apêndice A9 e em Uteis/analises/Analise_backtest.md.</a:t>
             </a:r>
           </a:p>
         </p:txBody>
@@ -1039,7 +1059,12 @@
           <a:lstStyle/>
           <a:p>
             <a:r>
-              <a:t>Tabela: Uteis/dados/estudo/brier_horizonte.csv (IC por bootstrap de evento). BSS = 1 − Brier/Brier da uniforme (1/K por faixa): 0,73 pooled na véspera; FOMC 0,96, CPI 0,42. A 60 dias o FOMC ainda tem BSS 0,67.</a:t>
+              <a:t>Fala (~60 s): três números para ler a estratégia. (1) 457: o track record mínimo para dizer com 95 % que o Sharpe é positivo — temos 374. O excesso é positivo em toda leitura (P = 64%), mas não é prova; o próximo semestre é o teste fora da amostra, e vai ser pré-registrado. (2) +6,2 bps por dia de queda do SPY, −3,9 nos de alta: o ganho vem de perder menos quando o mercado cai — tilt defensivo sobre beta 0,95. Não é proteção de cauda: no tombo de abril/2025 caímos mais fundo (−19,6 % × −18,8 %) e na 2ª metade, só de alta, ficamos atrás (−0,6 pp). (3) 3 de 7 no protocolo de Arnott, Harvey e Markowitz: fechados motivação econômica, dados/amostra e cultura de pesquisa; parciais testes múltiplos (~200 comparações da tática sem correção; DSR reportado no A9), dinâmica (parâmetros fixos, mas excesso só na 1ª metade) e complexidade (Ω diagonal não vê correlação entre views); aberto validação fora da amostra.</a:t>
+            </a:r>
+          </a:p>
+          <a:p>
+            <a:r>
+              <a:t>Se perguntarem 'por que mostrar os fracos?': porque o protocolo pede e porque um slide só de fortes em 18 meses de dado é o que a literatura chama de storytelling. Scorecard completo em Final/analise/Pesquisa_avaliacao_estrategia.md §2.</a:t>
             </a:r>
           </a:p>
         </p:txBody>
@@ -1109,7 +1134,7 @@
           <a:lstStyle/>
           <a:p>
             <a:r>
-              <a:t>Tabelas: Uteis/dados/estudo/fomc_vs_ff.csv, encompassing.csv, leadlag_*.csv. DM com correção HLN; n = 17-18 reuniões por horizonte. A 60 dias a vantagem some (p = 0,76). Granger com Newey-West: t = 1,8 (poly → FF) e 1,9 (FF → poly).</a:t>
+              <a:t>Transição (~10 s): 'Voltamos à hipótese do começo. Mercados de previsão antecipam o mercado financeiro — esse era o sinal. A pergunta agora é se ele se confirmou no dado.' Avança para o slide do estudo (calibração e decisão do Fed).</a:t>
             </a:r>
           </a:p>
         </p:txBody>
@@ -1179,7 +1204,7 @@
           <a:lstStyle/>
           <a:p>
             <a:r>
-              <a:t>Tabelas: Uteis/dados/estudo/event_study.csv e martingale.csv. FOMC n = 17; a surpresa-FF corrigida explica mais (R² médio 0,19 vs 0,08) porque carrega o caminho de 3 meses, não porque o Polymarket erre. CPI: R² ≈ 0 para as duas. VR(5) por família: FOMC 0,78, CPI 0,72, payrolls 0,43 — nenhuma &gt; 1.</a:t>
+              <a:t>Fonte: scripts/estudo_polymarket.py → Uteis/analises/Metricas_estudo.md; guia de leitura em Final/estudo/Guia_slide16.md. Amostra = todo o dado macro do repo (FOMC 76 faixas/18 reuniões, CPI 74 faixas/12 meses), sem exclusão. Brier 0,043 [0,022; 0,067]; calibração b = 1,04 (p = 0,15); FF = proxy DTB3−DFF corrigido do viés (cru: 8,9 bps), DM p = 0,002; 17/17 no desfecho modal. Terceira informação, se pedirem: o movimento do preço não é sinal (VR(5) = 0,78 &lt; 1, Δp com t ≈ 0) — por isso usamos o nível, não o Δp. Detalhe nos apêndices A1–A3.</a:t>
             </a:r>
           </a:p>
         </p:txBody>
@@ -1205,7 +1230,7 @@
 </file>
 
 <file path=ppt/notesSlides/notesSlide19.xml><?xml version="1.0" encoding="utf-8"?>
-<p:notes xmlns:a="http://schemas.openxmlformats.org/drawingml/2006/main" xmlns:p="http://schemas.openxmlformats.org/presentationml/2006/main" xmlns:r="http://schemas.openxmlformats.org/officeDocument/2006/relationships">
+<p:notes xmlns:a="http://schemas.openxmlformats.org/drawingml/2006/main" xmlns:r="http://schemas.openxmlformats.org/officeDocument/2006/relationships" xmlns:p="http://schemas.openxmlformats.org/presentationml/2006/main">
   <p:cSld>
     <p:spTree>
       <p:nvGrpSpPr>
@@ -1225,7 +1250,7 @@
         <p:nvSpPr>
           <p:cNvPr id="2" name="Slide Image Placeholder 1"/>
           <p:cNvSpPr>
-            <a:spLocks noGrp="1"/>
+            <a:spLocks noGrp="1" noRot="1" noChangeAspect="1"/>
           </p:cNvSpPr>
           <p:nvPr>
             <p:ph type="sldImg" idx="2"/>
@@ -1240,7 +1265,7 @@
             <a:spLocks noGrp="1"/>
           </p:cNvSpPr>
           <p:nvPr>
-            <p:ph type="body" idx="3" sz="quarter"/>
+            <p:ph type="body" sz="quarter" idx="3"/>
           </p:nvPr>
         </p:nvSpPr>
         <p:spPr/>
@@ -1249,27 +1274,7 @@
           <a:lstStyle/>
           <a:p>
             <a:r>
-              <a:t>Exposição à queda. Nos dois tombos a carteira caiu junto e, em abril/2025, mais fundo que o índice: −19,6% contra −18,8%. O ganho vem da subida, não da defesa.</a:t>
-            </a:r>
-          </a:p>
-          <a:p>
-            <a:r>
-              <a:t>Uma janela, um regime. 374 pregões de alta do S&amp;P, sem correção para as ~200 comparações da busca tática. O teste em regime de queda é o que falta.</a:t>
-            </a:r>
-          </a:p>
-          <a:p>
-            <a:r>
-              <a:t>Teto de risco: somar é dividir. A camada tática faz +42,6 pp sozinha e −2,94 pp dentro da carteira. Sob teto fixo, entrar não acrescenta — reparte o mesmo orçamento.</a:t>
-            </a:r>
-          </a:p>
-          <a:p>
-            <a:r>
-              <a:t>Giramos os quatro botões da estratégia — risco, confiança, gatilho e correção das probabilidades — e a vantagem sobre o SPY não vira negativa em nenhuma posição: +0,5 a +15,8 pp. Não é um parâmetro bem escolhido.</a:t>
-            </a:r>
-          </a:p>
-          <a:p>
-            <a:r>
-              <a:t>O tile novo (sorte ou habilidade?): bootstrap estacionário (Politis-Romano, blocos de 10 pregões, B = 2 000) sobre a série diária. IC95 do excesso [−12,9; 20,6] pp, P(&gt; 0) = 64%; Sharpe 1,18 com IC95 [−0,23; 3,04]; alpha t = 0,6 (Newey-West) contra a régua de 3 de Harvey-Liu; PSR = 93%; track record mínimo a 95 % = 457 pregões, faltam 83. Leitura: o número é positivo em toda leitura, mas 18 meses não separam habilidade de sorte — o que sustenta a estratégia é o mecanismo medido fora do resultado (slides 8, 9 e 16). Detalhe no apêndice A9 e em Uteis/analises/Analise_backtest.md.</a:t>
+              <a:t>Tabela: Uteis/dados/estudo/brier_horizonte.csv (IC por bootstrap de evento). BSS = 1 − Brier/Brier da uniforme (1/K por faixa): 0,73 pooled na véspera; FOMC 0,96, CPI 0,42. A 60 dias o FOMC ainda tem BSS 0,67.</a:t>
             </a:r>
           </a:p>
         </p:txBody>
@@ -1281,7 +1286,7 @@
             <a:spLocks noGrp="1"/>
           </p:cNvSpPr>
           <p:nvPr>
-            <p:ph type="sldNum" idx="5" sz="quarter"/>
+            <p:ph type="sldNum" sz="quarter" idx="5"/>
           </p:nvPr>
         </p:nvSpPr>
         <p:spPr/>
@@ -1365,7 +1370,7 @@
 </file>
 
 <file path=ppt/notesSlides/notesSlide20.xml><?xml version="1.0" encoding="utf-8"?>
-<p:notes xmlns:a="http://schemas.openxmlformats.org/drawingml/2006/main" xmlns:p="http://schemas.openxmlformats.org/presentationml/2006/main" xmlns:r="http://schemas.openxmlformats.org/officeDocument/2006/relationships">
+<p:notes xmlns:a="http://schemas.openxmlformats.org/drawingml/2006/main" xmlns:r="http://schemas.openxmlformats.org/officeDocument/2006/relationships" xmlns:p="http://schemas.openxmlformats.org/presentationml/2006/main">
   <p:cSld>
     <p:spTree>
       <p:nvGrpSpPr>
@@ -1385,7 +1390,7 @@
         <p:nvSpPr>
           <p:cNvPr id="2" name="Slide Image Placeholder 1"/>
           <p:cNvSpPr>
-            <a:spLocks noGrp="1"/>
+            <a:spLocks noGrp="1" noRot="1" noChangeAspect="1"/>
           </p:cNvSpPr>
           <p:nvPr>
             <p:ph type="sldImg" idx="2"/>
@@ -1400,7 +1405,7 @@
             <a:spLocks noGrp="1"/>
           </p:cNvSpPr>
           <p:nvPr>
-            <p:ph type="body" idx="3" sz="quarter"/>
+            <p:ph type="body" sz="quarter" idx="3"/>
           </p:nvPr>
         </p:nvSpPr>
         <p:spPr/>
@@ -1409,12 +1414,7 @@
           <a:lstStyle/>
           <a:p>
             <a:r>
-              <a:t>Fala (~60 s): três números para ler a estratégia. (1) 457: o track record mínimo para dizer com 95 % que o Sharpe é positivo — temos 374. O excesso é positivo em toda leitura (P = 64%), mas não é prova; o próximo semestre é o teste fora da amostra, e vai ser pré-registrado. (2) +6,2 bps por dia de queda do SPY, −3,9 nos de alta: o ganho vem de perder menos quando o mercado cai — tilt defensivo sobre beta 0,95. Não é proteção de cauda: no tombo de abril/2025 caímos mais fundo (−19,6 % × −18,8 %) e na 2ª metade, só de alta, ficamos atrás (−0,6 pp). (3) 3 de 7 no protocolo de Arnott, Harvey e Markowitz: fechados motivação econômica, dados/amostra e cultura de pesquisa; parciais testes múltiplos (~200 comparações da tática sem correção; DSR reportado no A9), dinâmica (parâmetros fixos, mas excesso só na 1ª metade) e complexidade (Ω diagonal não vê correlação entre views); aberto validação fora da amostra.</a:t>
-            </a:r>
-          </a:p>
-          <a:p>
-            <a:r>
-              <a:t>Se perguntarem 'por que mostrar os fracos?': porque o protocolo pede e porque um slide só de fortes em 18 meses de dado é o que a literatura chama de storytelling. Scorecard completo em Final/analise/Pesquisa_avaliacao_estrategia.md §2.</a:t>
+              <a:t>Tabelas: Uteis/dados/estudo/fomc_vs_ff.csv, encompassing.csv, leadlag_*.csv. DM com correção HLN; n = 17-18 reuniões por horizonte. A 60 dias a vantagem some (p = 0,76). Granger com Newey-West: t = 1,8 (poly → FF) e 1,9 (FF → poly).</a:t>
             </a:r>
           </a:p>
         </p:txBody>
@@ -1426,7 +1426,7 @@
             <a:spLocks noGrp="1"/>
           </p:cNvSpPr>
           <p:nvPr>
-            <p:ph type="sldNum" idx="5" sz="quarter"/>
+            <p:ph type="sldNum" sz="quarter" idx="5"/>
           </p:nvPr>
         </p:nvSpPr>
         <p:spPr/>
@@ -1440,7 +1440,7 @@
 </file>
 
 <file path=ppt/notesSlides/notesSlide21.xml><?xml version="1.0" encoding="utf-8"?>
-<p:notes xmlns:a="http://schemas.openxmlformats.org/drawingml/2006/main" xmlns:p="http://schemas.openxmlformats.org/presentationml/2006/main" xmlns:r="http://schemas.openxmlformats.org/officeDocument/2006/relationships">
+<p:notes xmlns:a="http://schemas.openxmlformats.org/drawingml/2006/main" xmlns:r="http://schemas.openxmlformats.org/officeDocument/2006/relationships" xmlns:p="http://schemas.openxmlformats.org/presentationml/2006/main">
   <p:cSld>
     <p:spTree>
       <p:nvGrpSpPr>
@@ -1460,7 +1460,7 @@
         <p:nvSpPr>
           <p:cNvPr id="2" name="Slide Image Placeholder 1"/>
           <p:cNvSpPr>
-            <a:spLocks noGrp="1"/>
+            <a:spLocks noGrp="1" noRot="1" noChangeAspect="1"/>
           </p:cNvSpPr>
           <p:nvPr>
             <p:ph type="sldImg" idx="2"/>
@@ -1475,7 +1475,7 @@
             <a:spLocks noGrp="1"/>
           </p:cNvSpPr>
           <p:nvPr>
-            <p:ph type="body" idx="3" sz="quarter"/>
+            <p:ph type="body" sz="quarter" idx="3"/>
           </p:nvPr>
         </p:nvSpPr>
         <p:spPr/>
@@ -1484,7 +1484,7 @@
           <a:lstStyle/>
           <a:p>
             <a:r>
-              <a:t>Definições: PSR = P(Sharpe verdadeiro &gt; 0) dado T, assimetria e curtose (Bailey-LdP 2012). MinTRL = T necessário para PSR = 95 %. DSR = PSR contra o Sharpe esperado do máximo de N tentativas de ruído (Bailey-LdP 2014); N vem do registro do projeto (configurações gravadas, hipóteses do LOG, células da D27). HHI = concentração de Herfindahl dos dias positivos/negativos (0 = uniforme). TuW = maior sequência de pregões abaixo do pico. Bootstrap: Politis-Romano, bloco médio 10, B = 2 000, semente 20260918. Alpha com Newey-West 5 lags.</a:t>
+              <a:t>Tabelas: Uteis/dados/estudo/event_study.csv e martingale.csv. FOMC n = 17; a surpresa-FF corrigida explica mais (R² médio 0,19 vs 0,08) porque carrega o caminho de 3 meses, não porque o Polymarket erre. CPI: R² ≈ 0 para as duas. VR(5) por família: FOMC 0,78, CPI 0,72, payrolls 0,43 — nenhuma &gt; 1.</a:t>
             </a:r>
           </a:p>
         </p:txBody>
@@ -1496,7 +1496,7 @@
             <a:spLocks noGrp="1"/>
           </p:cNvSpPr>
           <p:nvPr>
-            <p:ph type="sldNum" idx="5" sz="quarter"/>
+            <p:ph type="sldNum" sz="quarter" idx="5"/>
           </p:nvPr>
         </p:nvSpPr>
         <p:spPr/>
@@ -1510,7 +1510,7 @@
 </file>
 
 <file path=ppt/notesSlides/notesSlide22.xml><?xml version="1.0" encoding="utf-8"?>
-<p:notes xmlns:a="http://schemas.openxmlformats.org/drawingml/2006/main" xmlns:p="http://schemas.openxmlformats.org/presentationml/2006/main" xmlns:r="http://schemas.openxmlformats.org/officeDocument/2006/relationships">
+<p:notes xmlns:a="http://schemas.openxmlformats.org/drawingml/2006/main" xmlns:r="http://schemas.openxmlformats.org/officeDocument/2006/relationships" xmlns:p="http://schemas.openxmlformats.org/presentationml/2006/main">
   <p:cSld>
     <p:spTree>
       <p:nvGrpSpPr>
@@ -1530,7 +1530,7 @@
         <p:nvSpPr>
           <p:cNvPr id="2" name="Slide Image Placeholder 1"/>
           <p:cNvSpPr>
-            <a:spLocks noGrp="1"/>
+            <a:spLocks noGrp="1" noRot="1" noChangeAspect="1"/>
           </p:cNvSpPr>
           <p:nvPr>
             <p:ph type="sldImg" idx="2"/>
@@ -1545,7 +1545,7 @@
             <a:spLocks noGrp="1"/>
           </p:cNvSpPr>
           <p:nvPr>
-            <p:ph type="body" idx="3" sz="quarter"/>
+            <p:ph type="body" sz="quarter" idx="3"/>
           </p:nvPr>
         </p:nvSpPr>
         <p:spPr/>
@@ -1554,7 +1554,7 @@
           <a:lstStyle/>
           <a:p>
             <a:r>
-              <a:t>Transição (~10 s): 'Voltamos à hipótese do começo. Mercados de previsão antecipam o mercado financeiro — esse era o sinal. A pergunta agora é se ele se confirmou no dado.' Avança para o slide do estudo (calibração e decisão do Fed).</a:t>
+              <a:t>Definições: PSR = P(Sharpe verdadeiro &gt; 0) dado T, assimetria e curtose (Bailey-LdP 2012). MinTRL = T necessário para PSR = 95 %. DSR = PSR contra o Sharpe esperado do máximo de N tentativas de ruído (Bailey-LdP 2014); N vem do registro do projeto (configurações gravadas, hipóteses do LOG, células da D27). HHI = concentração de Herfindahl dos dias positivos/negativos (0 = uniforme). TuW = maior sequência de pregões abaixo do pico. Bootstrap: Politis-Romano, bloco médio 10, B = 2 000, semente 20260918. Alpha com Newey-West 5 lags.</a:t>
             </a:r>
           </a:p>
         </p:txBody>
@@ -1566,7 +1566,7 @@
             <a:spLocks noGrp="1"/>
           </p:cNvSpPr>
           <p:nvPr>
-            <p:ph type="sldNum" idx="5" sz="quarter"/>
+            <p:ph type="sldNum" sz="quarter" idx="5"/>
           </p:nvPr>
         </p:nvSpPr>
         <p:spPr/>
@@ -21865,7 +21865,7 @@
         </p:nvSpPr>
         <p:spPr>
           <a:xfrm>
-            <a:off x="-2600000" y="-2200000"/>
+            <a:off x="-2567312" y="-2200000"/>
             <a:ext cx="7000000" cy="5200000"/>
           </a:xfrm>
           <a:prstGeom prst="ellipse">
@@ -22431,7 +22431,7 @@
               </a:spcAft>
             </a:pPr>
             <a:r>
-              <a:rPr sz="900" b="1" i="0" spc="180">
+              <a:rPr sz="900" b="1" i="0" spc="180" dirty="0">
                 <a:solidFill>
                   <a:srgbClr val="FFB531"/>
                 </a:solidFill>
@@ -22723,7 +22723,7 @@
               </a:spcAft>
             </a:pPr>
             <a:r>
-              <a:rPr sz="850" b="0" i="0">
+              <a:rPr sz="850" b="0" i="0" dirty="0">
                 <a:solidFill>
                   <a:srgbClr val="8395B5"/>
                 </a:solidFill>
@@ -23340,7 +23340,7 @@
 </file>
 
 <file path=ppt/slides/slide16.xml><?xml version="1.0" encoding="utf-8"?>
-<p:sld xmlns:a="http://schemas.openxmlformats.org/drawingml/2006/main" xmlns:p="http://schemas.openxmlformats.org/presentationml/2006/main" xmlns:r="http://schemas.openxmlformats.org/officeDocument/2006/relationships">
+<p:sld xmlns:a="http://schemas.openxmlformats.org/drawingml/2006/main" xmlns:r="http://schemas.openxmlformats.org/officeDocument/2006/relationships" xmlns:p="http://schemas.openxmlformats.org/presentationml/2006/main">
   <p:cSld>
     <p:bg>
       <p:bgPr>
@@ -23369,7 +23369,14 @@
         <p:cNvGrpSpPr/>
         <p:nvPr/>
       </p:nvGrpSpPr>
-      <p:grpSpPr/>
+      <p:grpSpPr>
+        <a:xfrm>
+          <a:off x="0" y="0"/>
+          <a:ext cx="0" cy="0"/>
+          <a:chOff x="0" y="0"/>
+          <a:chExt cx="0" cy="0"/>
+        </a:xfrm>
+      </p:grpSpPr>
       <p:sp>
         <p:nvSpPr>
           <p:cNvPr id="2" name="!!glow_tl"/>
@@ -23432,7 +23439,9 @@
         <p:txBody>
           <a:bodyPr rtlCol="0" anchor="ctr"/>
           <a:lstStyle/>
-          <a:p/>
+          <a:p>
+            <a:endParaRPr/>
+          </a:p>
         </p:txBody>
       </p:sp>
       <p:sp>
@@ -23497,7 +23506,9 @@
         <p:txBody>
           <a:bodyPr rtlCol="0" anchor="ctr"/>
           <a:lstStyle/>
-          <a:p/>
+          <a:p>
+            <a:endParaRPr/>
+          </a:p>
         </p:txBody>
       </p:sp>
       <p:sp>
@@ -23517,7 +23528,7 @@
           <a:noFill/>
         </p:spPr>
         <p:txBody>
-          <a:bodyPr wrap="none" lIns="0" rIns="0" tIns="0" bIns="0" anchor="t">
+          <a:bodyPr wrap="none" lIns="0" tIns="0" rIns="0" bIns="0" anchor="t">
             <a:spAutoFit/>
           </a:bodyPr>
           <a:lstStyle/>
@@ -23585,6 +23596,7 @@
           <a:lstStyle/>
           <a:p>
             <a:pPr algn="ctr"/>
+            <a:endParaRPr/>
           </a:p>
         </p:txBody>
       </p:sp>
@@ -23605,7 +23617,7 @@
           <a:noFill/>
         </p:spPr>
         <p:txBody>
-          <a:bodyPr wrap="square" lIns="0" rIns="0" tIns="0" bIns="0" anchor="ctr">
+          <a:bodyPr wrap="square" lIns="0" tIns="0" rIns="0" bIns="0" anchor="ctr">
             <a:spAutoFit/>
           </a:bodyPr>
           <a:lstStyle/>
@@ -23659,7 +23671,7 @@
           <a:noFill/>
         </p:spPr>
         <p:txBody>
-          <a:bodyPr wrap="square" lIns="0" rIns="0" tIns="0" bIns="0" anchor="ctr">
+          <a:bodyPr wrap="square" lIns="0" tIns="0" rIns="0" bIns="0" anchor="ctr">
             <a:spAutoFit/>
           </a:bodyPr>
           <a:lstStyle/>
@@ -23752,7 +23764,7 @@
           <a:noFill/>
         </p:spPr>
         <p:txBody>
-          <a:bodyPr wrap="square" lIns="0" rIns="0" tIns="0" bIns="0" anchor="t">
+          <a:bodyPr wrap="square" lIns="0" tIns="0" rIns="0" bIns="0" anchor="t">
             <a:spAutoFit/>
           </a:bodyPr>
           <a:lstStyle/>
@@ -23832,7 +23844,7 @@
           <a:noFill/>
         </p:spPr>
         <p:txBody>
-          <a:bodyPr wrap="none" lIns="0" rIns="0" tIns="0" bIns="0" anchor="t">
+          <a:bodyPr wrap="none" lIns="0" tIns="0" rIns="0" bIns="0" anchor="t">
             <a:spAutoFit/>
           </a:bodyPr>
           <a:lstStyle/>
@@ -23877,7 +23889,7 @@
           <a:noFill/>
         </p:spPr>
         <p:txBody>
-          <a:bodyPr wrap="none" lIns="0" rIns="0" tIns="0" bIns="0" anchor="t">
+          <a:bodyPr wrap="none" lIns="0" tIns="0" rIns="0" bIns="0" anchor="t">
             <a:spAutoFit/>
           </a:bodyPr>
           <a:lstStyle/>
@@ -23922,7 +23934,7 @@
           <a:noFill/>
         </p:spPr>
         <p:txBody>
-          <a:bodyPr wrap="square" lIns="0" rIns="0" tIns="0" bIns="0" anchor="t">
+          <a:bodyPr wrap="square" lIns="0" tIns="0" rIns="0" bIns="0" anchor="t">
             <a:spAutoFit/>
           </a:bodyPr>
           <a:lstStyle/>
@@ -24009,7 +24021,9 @@
         <p:txBody>
           <a:bodyPr rtlCol="0" anchor="ctr"/>
           <a:lstStyle/>
-          <a:p/>
+          <a:p>
+            <a:endParaRPr/>
+          </a:p>
         </p:txBody>
       </p:sp>
       <p:sp>
@@ -24029,7 +24043,7 @@
           <a:noFill/>
         </p:spPr>
         <p:txBody>
-          <a:bodyPr wrap="none" lIns="0" rIns="0" tIns="0" bIns="0" anchor="t">
+          <a:bodyPr wrap="none" lIns="0" tIns="0" rIns="0" bIns="0" anchor="t">
             <a:spAutoFit/>
           </a:bodyPr>
           <a:lstStyle/>
@@ -24074,7 +24088,7 @@
           <a:noFill/>
         </p:spPr>
         <p:txBody>
-          <a:bodyPr wrap="none" lIns="0" rIns="0" tIns="0" bIns="0" anchor="ctr">
+          <a:bodyPr wrap="none" lIns="0" tIns="0" rIns="0" bIns="0" anchor="ctr">
             <a:spAutoFit/>
           </a:bodyPr>
           <a:lstStyle/>
@@ -24119,7 +24133,7 @@
           <a:noFill/>
         </p:spPr>
         <p:txBody>
-          <a:bodyPr wrap="none" lIns="0" rIns="0" tIns="0" bIns="0" anchor="ctr">
+          <a:bodyPr wrap="none" lIns="0" tIns="0" rIns="0" bIns="0" anchor="ctr">
             <a:spAutoFit/>
           </a:bodyPr>
           <a:lstStyle/>
@@ -24206,7 +24220,9 @@
         <p:txBody>
           <a:bodyPr rtlCol="0" anchor="ctr"/>
           <a:lstStyle/>
-          <a:p/>
+          <a:p>
+            <a:endParaRPr/>
+          </a:p>
         </p:txBody>
       </p:sp>
       <p:sp>
@@ -24226,7 +24242,7 @@
           <a:noFill/>
         </p:spPr>
         <p:txBody>
-          <a:bodyPr wrap="none" lIns="0" rIns="0" tIns="0" bIns="0" anchor="t">
+          <a:bodyPr wrap="none" lIns="0" tIns="0" rIns="0" bIns="0" anchor="t">
             <a:spAutoFit/>
           </a:bodyPr>
           <a:lstStyle/>
@@ -24271,7 +24287,7 @@
           <a:noFill/>
         </p:spPr>
         <p:txBody>
-          <a:bodyPr wrap="none" lIns="0" rIns="0" tIns="0" bIns="0" anchor="ctr">
+          <a:bodyPr wrap="none" lIns="0" tIns="0" rIns="0" bIns="0" anchor="ctr">
             <a:spAutoFit/>
           </a:bodyPr>
           <a:lstStyle/>
@@ -24316,7 +24332,7 @@
           <a:noFill/>
         </p:spPr>
         <p:txBody>
-          <a:bodyPr wrap="none" lIns="0" rIns="0" tIns="0" bIns="0" anchor="ctr">
+          <a:bodyPr wrap="none" lIns="0" tIns="0" rIns="0" bIns="0" anchor="ctr">
             <a:spAutoFit/>
           </a:bodyPr>
           <a:lstStyle/>
@@ -24403,7 +24419,9 @@
         <p:txBody>
           <a:bodyPr rtlCol="0" anchor="ctr"/>
           <a:lstStyle/>
-          <a:p/>
+          <a:p>
+            <a:endParaRPr/>
+          </a:p>
         </p:txBody>
       </p:sp>
       <p:sp>
@@ -24423,7 +24441,7 @@
           <a:noFill/>
         </p:spPr>
         <p:txBody>
-          <a:bodyPr wrap="none" lIns="0" rIns="0" tIns="0" bIns="0" anchor="t">
+          <a:bodyPr wrap="none" lIns="0" tIns="0" rIns="0" bIns="0" anchor="t">
             <a:spAutoFit/>
           </a:bodyPr>
           <a:lstStyle/>
@@ -24468,7 +24486,7 @@
           <a:noFill/>
         </p:spPr>
         <p:txBody>
-          <a:bodyPr wrap="none" lIns="0" rIns="0" tIns="0" bIns="0" anchor="ctr">
+          <a:bodyPr wrap="none" lIns="0" tIns="0" rIns="0" bIns="0" anchor="ctr">
             <a:spAutoFit/>
           </a:bodyPr>
           <a:lstStyle/>
@@ -24513,7 +24531,7 @@
           <a:noFill/>
         </p:spPr>
         <p:txBody>
-          <a:bodyPr wrap="none" lIns="0" rIns="0" tIns="0" bIns="0" anchor="ctr">
+          <a:bodyPr wrap="none" lIns="0" tIns="0" rIns="0" bIns="0" anchor="ctr">
             <a:spAutoFit/>
           </a:bodyPr>
           <a:lstStyle/>
@@ -24600,7 +24618,9 @@
         <p:txBody>
           <a:bodyPr rtlCol="0" anchor="ctr"/>
           <a:lstStyle/>
-          <a:p/>
+          <a:p>
+            <a:endParaRPr/>
+          </a:p>
         </p:txBody>
       </p:sp>
       <p:sp>
@@ -24620,7 +24640,7 @@
           <a:noFill/>
         </p:spPr>
         <p:txBody>
-          <a:bodyPr wrap="none" lIns="0" rIns="0" tIns="0" bIns="0" anchor="t">
+          <a:bodyPr wrap="none" lIns="0" tIns="0" rIns="0" bIns="0" anchor="t">
             <a:spAutoFit/>
           </a:bodyPr>
           <a:lstStyle/>
@@ -24665,7 +24685,7 @@
           <a:noFill/>
         </p:spPr>
         <p:txBody>
-          <a:bodyPr wrap="none" lIns="0" rIns="0" tIns="0" bIns="0" anchor="ctr">
+          <a:bodyPr wrap="none" lIns="0" tIns="0" rIns="0" bIns="0" anchor="ctr">
             <a:spAutoFit/>
           </a:bodyPr>
           <a:lstStyle/>
@@ -24682,7 +24702,7 @@
               </a:spcAft>
             </a:pPr>
             <a:r>
-              <a:rPr sz="2400" b="0" i="0">
+              <a:rPr sz="2400" b="0" i="0" dirty="0">
                 <a:solidFill>
                   <a:srgbClr val="FFB531"/>
                 </a:solidFill>
@@ -24710,7 +24730,7 @@
           <a:noFill/>
         </p:spPr>
         <p:txBody>
-          <a:bodyPr wrap="none" lIns="0" rIns="0" tIns="0" bIns="0" anchor="ctr">
+          <a:bodyPr wrap="none" lIns="0" tIns="0" rIns="0" bIns="0" anchor="ctr">
             <a:spAutoFit/>
           </a:bodyPr>
           <a:lstStyle/>
@@ -24797,7 +24817,9 @@
         <p:txBody>
           <a:bodyPr rtlCol="0" anchor="ctr"/>
           <a:lstStyle/>
-          <a:p/>
+          <a:p>
+            <a:endParaRPr/>
+          </a:p>
         </p:txBody>
       </p:sp>
       <p:sp>
@@ -24817,7 +24839,7 @@
           <a:noFill/>
         </p:spPr>
         <p:txBody>
-          <a:bodyPr wrap="none" lIns="0" rIns="0" tIns="0" bIns="0" anchor="t">
+          <a:bodyPr wrap="none" lIns="0" tIns="0" rIns="0" bIns="0" anchor="t">
             <a:spAutoFit/>
           </a:bodyPr>
           <a:lstStyle/>
@@ -24862,7 +24884,7 @@
           <a:noFill/>
         </p:spPr>
         <p:txBody>
-          <a:bodyPr wrap="none" lIns="0" rIns="0" tIns="0" bIns="0" anchor="ctr">
+          <a:bodyPr wrap="none" lIns="0" tIns="0" rIns="0" bIns="0" anchor="ctr">
             <a:spAutoFit/>
           </a:bodyPr>
           <a:lstStyle/>
@@ -24879,7 +24901,7 @@
               </a:spcAft>
             </a:pPr>
             <a:r>
-              <a:rPr sz="2400" b="0" i="0">
+              <a:rPr sz="2400" b="0" i="0" dirty="0">
                 <a:solidFill>
                   <a:srgbClr val="2FD3B0"/>
                 </a:solidFill>
@@ -24907,7 +24929,7 @@
           <a:noFill/>
         </p:spPr>
         <p:txBody>
-          <a:bodyPr wrap="none" lIns="0" rIns="0" tIns="0" bIns="0" anchor="ctr">
+          <a:bodyPr wrap="none" lIns="0" tIns="0" rIns="0" bIns="0" anchor="ctr">
             <a:spAutoFit/>
           </a:bodyPr>
           <a:lstStyle/>
@@ -24952,7 +24974,7 @@
           <a:noFill/>
         </p:spPr>
         <p:txBody>
-          <a:bodyPr wrap="none" lIns="0" rIns="0" tIns="0" bIns="0" anchor="ctr">
+          <a:bodyPr wrap="none" lIns="0" tIns="0" rIns="0" bIns="0" anchor="ctr">
             <a:spAutoFit/>
           </a:bodyPr>
           <a:lstStyle/>
@@ -24969,13 +24991,58 @@
               </a:spcAft>
             </a:pPr>
             <a:r>
-              <a:rPr sz="800" b="0" i="0">
+              <a:rPr sz="800" b="0" i="0" dirty="0" err="1">
                 <a:solidFill>
                   <a:srgbClr val="8395B5"/>
                 </a:solidFill>
                 <a:latin typeface="Bahnschrift"/>
               </a:rPr>
-              <a:t>faltam 83 pregões p/ 95 % (MinTRL)</a:t>
+              <a:t>faltam</a:t>
+            </a:r>
+            <a:r>
+              <a:rPr sz="800" b="0" i="0" dirty="0">
+                <a:solidFill>
+                  <a:srgbClr val="8395B5"/>
+                </a:solidFill>
+                <a:latin typeface="Bahnschrift"/>
+              </a:rPr>
+              <a:t> 83 </a:t>
+            </a:r>
+            <a:r>
+              <a:rPr sz="800" b="0" i="0" dirty="0" err="1">
+                <a:solidFill>
+                  <a:srgbClr val="8395B5"/>
+                </a:solidFill>
+                <a:latin typeface="Bahnschrift"/>
+              </a:rPr>
+              <a:t>pregões</a:t>
+            </a:r>
+            <a:r>
+              <a:rPr sz="800" b="0" i="0" dirty="0">
+                <a:solidFill>
+                  <a:srgbClr val="8395B5"/>
+                </a:solidFill>
+                <a:latin typeface="Bahnschrift"/>
+              </a:rPr>
+              <a:t> p/ 95 % (</a:t>
+            </a:r>
+            <a:r>
+              <a:rPr sz="800" b="0" i="0" dirty="0" err="1">
+                <a:solidFill>
+                  <a:srgbClr val="8395B5"/>
+                </a:solidFill>
+                <a:latin typeface="Bahnschrift"/>
+              </a:rPr>
+              <a:t>MinTRL</a:t>
+            </a:r>
+            <a:r>
+              <a:rPr sz="800" b="0" i="0" dirty="0">
+                <a:solidFill>
+                  <a:srgbClr val="8395B5"/>
+                </a:solidFill>
+                <a:latin typeface="Bahnschrift"/>
+              </a:rPr>
+              <a:t>)</a:t>
             </a:r>
           </a:p>
         </p:txBody>
@@ -24997,7 +25064,7 @@
           <a:noFill/>
         </p:spPr>
         <p:txBody>
-          <a:bodyPr wrap="none" lIns="0" rIns="0" tIns="0" bIns="0" anchor="t">
+          <a:bodyPr wrap="none" lIns="0" tIns="0" rIns="0" bIns="0" anchor="t">
             <a:spAutoFit/>
           </a:bodyPr>
           <a:lstStyle/>
@@ -25042,7 +25109,7 @@
           <a:noFill/>
         </p:spPr>
         <p:txBody>
-          <a:bodyPr wrap="none" lIns="0" rIns="0" tIns="0" bIns="0" anchor="t">
+          <a:bodyPr wrap="none" lIns="0" tIns="0" rIns="0" bIns="0" anchor="t">
             <a:spAutoFit/>
           </a:bodyPr>
           <a:lstStyle/>
@@ -25087,7 +25154,7 @@
           <a:noFill/>
         </p:spPr>
         <p:txBody>
-          <a:bodyPr wrap="square" lIns="0" rIns="0" tIns="0" bIns="0" anchor="t">
+          <a:bodyPr wrap="square" lIns="0" tIns="0" rIns="0" bIns="0" anchor="t">
             <a:spAutoFit/>
           </a:bodyPr>
           <a:lstStyle/>
@@ -25115,30 +25182,6 @@
           </a:p>
         </p:txBody>
       </p:sp>
-      <p:pic>
-        <p:nvPicPr>
-          <p:cNvPr id="38" name="s14_36" descr="p4_composicao.png"/>
-          <p:cNvPicPr>
-            <a:picLocks noChangeAspect="1"/>
-          </p:cNvPicPr>
-          <p:nvPr/>
-        </p:nvPicPr>
-        <p:blipFill>
-          <a:blip r:embed="rId2"/>
-          <a:stretch>
-            <a:fillRect/>
-          </a:stretch>
-        </p:blipFill>
-        <p:spPr>
-          <a:xfrm>
-            <a:off x="731520" y="4727448"/>
-            <a:ext cx="2834640" cy="1445536"/>
-          </a:xfrm>
-          <a:prstGeom prst="rect">
-            <a:avLst/>
-          </a:prstGeom>
-        </p:spPr>
-      </p:pic>
       <p:sp>
         <p:nvSpPr>
           <p:cNvPr id="39" name="s14_37"/>
@@ -25156,7 +25199,7 @@
           <a:noFill/>
         </p:spPr>
         <p:txBody>
-          <a:bodyPr wrap="square" lIns="0" rIns="0" tIns="0" bIns="0" anchor="t">
+          <a:bodyPr wrap="square" lIns="0" tIns="0" rIns="0" bIns="0" anchor="t">
             <a:spAutoFit/>
           </a:bodyPr>
           <a:lstStyle/>
@@ -25236,7 +25279,7 @@
           <a:noFill/>
         </p:spPr>
         <p:txBody>
-          <a:bodyPr wrap="square" lIns="0" rIns="0" tIns="0" bIns="0" anchor="t">
+          <a:bodyPr wrap="square" lIns="0" tIns="0" rIns="0" bIns="0" anchor="t">
             <a:spAutoFit/>
           </a:bodyPr>
           <a:lstStyle/>
@@ -25281,7 +25324,7 @@
           <a:noFill/>
         </p:spPr>
         <p:txBody>
-          <a:bodyPr wrap="none" lIns="0" rIns="0" tIns="0" bIns="0" anchor="t">
+          <a:bodyPr wrap="none" lIns="0" tIns="0" rIns="0" bIns="0" anchor="t">
             <a:spAutoFit/>
           </a:bodyPr>
           <a:lstStyle/>
@@ -25327,6 +25370,36 @@
           <a:xfrm>
             <a:off x="3886200" y="1664208"/>
             <a:ext cx="7571231" cy="4681212"/>
+          </a:xfrm>
+          <a:prstGeom prst="rect">
+            <a:avLst/>
+          </a:prstGeom>
+        </p:spPr>
+      </p:pic>
+      <p:pic>
+        <p:nvPicPr>
+          <p:cNvPr id="45" name="Picture 46" descr="p9_atribuicao.png">
+            <a:extLst>
+              <a:ext uri="{FF2B5EF4-FFF2-40B4-BE49-F238E27FC236}">
+                <a16:creationId xmlns:a16="http://schemas.microsoft.com/office/drawing/2014/main" id="{897FF4EE-3D3B-BF83-72F9-731D7013F524}"/>
+              </a:ext>
+            </a:extLst>
+          </p:cNvPr>
+          <p:cNvPicPr>
+            <a:picLocks noChangeAspect="1"/>
+          </p:cNvPicPr>
+          <p:nvPr/>
+        </p:nvPicPr>
+        <p:blipFill>
+          <a:blip r:embed="rId4"/>
+          <a:stretch>
+            <a:fillRect/>
+          </a:stretch>
+        </p:blipFill>
+        <p:spPr>
+          <a:xfrm>
+            <a:off x="772729" y="4609631"/>
+            <a:ext cx="2462021" cy="1620031"/>
           </a:xfrm>
           <a:prstGeom prst="rect">
             <a:avLst/>
@@ -25342,7 +25415,7 @@
 </file>
 
 <file path=ppt/slides/slide17.xml><?xml version="1.0" encoding="utf-8"?>
-<p:sld xmlns:a="http://schemas.openxmlformats.org/drawingml/2006/main" xmlns:p="http://schemas.openxmlformats.org/presentationml/2006/main" xmlns:r="http://schemas.openxmlformats.org/officeDocument/2006/relationships">
+<p:sld xmlns:a="http://schemas.openxmlformats.org/drawingml/2006/main" xmlns:r="http://schemas.openxmlformats.org/officeDocument/2006/relationships" xmlns:p="http://schemas.openxmlformats.org/presentationml/2006/main">
   <p:cSld>
     <p:bg>
       <p:bgPr>
@@ -25371,7 +25444,14 @@
         <p:cNvGrpSpPr/>
         <p:nvPr/>
       </p:nvGrpSpPr>
-      <p:grpSpPr/>
+      <p:grpSpPr>
+        <a:xfrm>
+          <a:off x="0" y="0"/>
+          <a:ext cx="0" cy="0"/>
+          <a:chOff x="0" y="0"/>
+          <a:chExt cx="0" cy="0"/>
+        </a:xfrm>
+      </p:grpSpPr>
       <p:sp>
         <p:nvSpPr>
           <p:cNvPr id="2" name="!!glow_tl"/>
@@ -25434,7 +25514,9 @@
         <p:txBody>
           <a:bodyPr rtlCol="0" anchor="ctr"/>
           <a:lstStyle/>
-          <a:p/>
+          <a:p>
+            <a:endParaRPr/>
+          </a:p>
         </p:txBody>
       </p:sp>
       <p:sp>
@@ -25499,7 +25581,9 @@
         <p:txBody>
           <a:bodyPr rtlCol="0" anchor="ctr"/>
           <a:lstStyle/>
-          <a:p/>
+          <a:p>
+            <a:endParaRPr/>
+          </a:p>
         </p:txBody>
       </p:sp>
       <p:sp>
@@ -25510,8 +25594,8 @@
         </p:nvSpPr>
         <p:spPr>
           <a:xfrm>
-            <a:off x="6900062" y="-230428"/>
-            <a:ext cx="4949647" cy="1999792"/>
+            <a:off x="10487608" y="-230428"/>
+            <a:ext cx="1362101" cy="2308324"/>
           </a:xfrm>
           <a:prstGeom prst="rect">
             <a:avLst/>
@@ -25519,7 +25603,7 @@
           <a:noFill/>
         </p:spPr>
         <p:txBody>
-          <a:bodyPr wrap="none" lIns="0" rIns="0" tIns="0" bIns="0" anchor="t">
+          <a:bodyPr wrap="square" lIns="0" tIns="0" rIns="0" bIns="0" anchor="t">
             <a:spAutoFit/>
           </a:bodyPr>
           <a:lstStyle/>
@@ -25536,7 +25620,7 @@
               </a:spcAft>
             </a:pPr>
             <a:r>
-              <a:rPr sz="15000" b="0" i="0">
+              <a:rPr sz="15000" b="0" i="0" dirty="0">
                 <a:solidFill>
                   <a:srgbClr val="101A2E"/>
                 </a:solidFill>
@@ -25587,6 +25671,7 @@
           <a:lstStyle/>
           <a:p>
             <a:pPr algn="ctr"/>
+            <a:endParaRPr/>
           </a:p>
         </p:txBody>
       </p:sp>
@@ -25607,7 +25692,7 @@
           <a:noFill/>
         </p:spPr>
         <p:txBody>
-          <a:bodyPr wrap="square" lIns="0" rIns="0" tIns="0" bIns="0" anchor="ctr">
+          <a:bodyPr wrap="square" lIns="0" tIns="0" rIns="0" bIns="0" anchor="ctr">
             <a:spAutoFit/>
           </a:bodyPr>
           <a:lstStyle/>
@@ -25661,7 +25746,7 @@
           <a:noFill/>
         </p:spPr>
         <p:txBody>
-          <a:bodyPr wrap="square" lIns="0" rIns="0" tIns="0" bIns="0" anchor="ctr">
+          <a:bodyPr wrap="square" lIns="0" tIns="0" rIns="0" bIns="0" anchor="ctr">
             <a:spAutoFit/>
           </a:bodyPr>
           <a:lstStyle/>
@@ -25754,7 +25839,7 @@
           <a:noFill/>
         </p:spPr>
         <p:txBody>
-          <a:bodyPr wrap="square" lIns="0" rIns="0" tIns="0" bIns="0" anchor="t">
+          <a:bodyPr wrap="square" lIns="0" tIns="0" rIns="0" bIns="0" anchor="t">
             <a:spAutoFit/>
           </a:bodyPr>
           <a:lstStyle/>
@@ -25834,7 +25919,7 @@
           <a:noFill/>
         </p:spPr>
         <p:txBody>
-          <a:bodyPr wrap="none" lIns="0" rIns="0" tIns="0" bIns="0" anchor="t">
+          <a:bodyPr wrap="none" lIns="0" tIns="0" rIns="0" bIns="0" anchor="t">
             <a:spAutoFit/>
           </a:bodyPr>
           <a:lstStyle/>
@@ -25879,7 +25964,7 @@
           <a:noFill/>
         </p:spPr>
         <p:txBody>
-          <a:bodyPr wrap="none" lIns="0" rIns="0" tIns="0" bIns="0" anchor="t">
+          <a:bodyPr wrap="none" lIns="0" tIns="0" rIns="0" bIns="0" anchor="t">
             <a:spAutoFit/>
           </a:bodyPr>
           <a:lstStyle/>
@@ -25966,7 +26051,9 @@
         <p:txBody>
           <a:bodyPr rtlCol="0" anchor="ctr"/>
           <a:lstStyle/>
-          <a:p/>
+          <a:p>
+            <a:endParaRPr/>
+          </a:p>
         </p:txBody>
       </p:sp>
       <p:sp>
@@ -25986,7 +26073,7 @@
           <a:noFill/>
         </p:spPr>
         <p:txBody>
-          <a:bodyPr wrap="square" lIns="0" rIns="0" tIns="0" bIns="0" anchor="t">
+          <a:bodyPr wrap="square" lIns="0" tIns="0" rIns="0" bIns="0" anchor="t">
             <a:spAutoFit/>
           </a:bodyPr>
           <a:lstStyle/>
@@ -26031,7 +26118,7 @@
           <a:noFill/>
         </p:spPr>
         <p:txBody>
-          <a:bodyPr wrap="none" lIns="0" rIns="0" tIns="0" bIns="0" anchor="ctr">
+          <a:bodyPr wrap="none" lIns="0" tIns="0" rIns="0" bIns="0" anchor="ctr">
             <a:spAutoFit/>
           </a:bodyPr>
           <a:lstStyle/>
@@ -26048,7 +26135,7 @@
               </a:spcAft>
             </a:pPr>
             <a:r>
-              <a:rPr sz="4400" b="0" i="0">
+              <a:rPr sz="4400" b="0" i="0" dirty="0">
                 <a:solidFill>
                   <a:srgbClr val="FFB531"/>
                 </a:solidFill>
@@ -26076,7 +26163,7 @@
           <a:noFill/>
         </p:spPr>
         <p:txBody>
-          <a:bodyPr wrap="square" lIns="0" rIns="0" tIns="0" bIns="0" anchor="t">
+          <a:bodyPr wrap="square" lIns="0" tIns="0" rIns="0" bIns="0" anchor="t">
             <a:spAutoFit/>
           </a:bodyPr>
           <a:lstStyle/>
@@ -26121,7 +26208,7 @@
           <a:noFill/>
         </p:spPr>
         <p:txBody>
-          <a:bodyPr wrap="square" lIns="0" rIns="0" tIns="0" bIns="0" anchor="t">
+          <a:bodyPr wrap="square" lIns="0" tIns="0" rIns="0" bIns="0" anchor="t">
             <a:spAutoFit/>
           </a:bodyPr>
           <a:lstStyle/>
@@ -26166,7 +26253,7 @@
           <a:noFill/>
         </p:spPr>
         <p:txBody>
-          <a:bodyPr wrap="square" lIns="0" rIns="0" tIns="0" bIns="0" anchor="t">
+          <a:bodyPr wrap="square" lIns="0" tIns="0" rIns="0" bIns="0" anchor="t">
             <a:spAutoFit/>
           </a:bodyPr>
           <a:lstStyle/>
@@ -26253,7 +26340,9 @@
         <p:txBody>
           <a:bodyPr rtlCol="0" anchor="ctr"/>
           <a:lstStyle/>
-          <a:p/>
+          <a:p>
+            <a:endParaRPr/>
+          </a:p>
         </p:txBody>
       </p:sp>
       <p:sp>
@@ -26273,7 +26362,7 @@
           <a:noFill/>
         </p:spPr>
         <p:txBody>
-          <a:bodyPr wrap="square" lIns="0" rIns="0" tIns="0" bIns="0" anchor="t">
+          <a:bodyPr wrap="square" lIns="0" tIns="0" rIns="0" bIns="0" anchor="t">
             <a:spAutoFit/>
           </a:bodyPr>
           <a:lstStyle/>
@@ -26318,7 +26407,7 @@
           <a:noFill/>
         </p:spPr>
         <p:txBody>
-          <a:bodyPr wrap="none" lIns="0" rIns="0" tIns="0" bIns="0" anchor="ctr">
+          <a:bodyPr wrap="none" lIns="0" tIns="0" rIns="0" bIns="0" anchor="ctr">
             <a:spAutoFit/>
           </a:bodyPr>
           <a:lstStyle/>
@@ -26335,7 +26424,7 @@
               </a:spcAft>
             </a:pPr>
             <a:r>
-              <a:rPr sz="4400" b="0" i="0">
+              <a:rPr sz="4400" b="0" i="0" dirty="0">
                 <a:solidFill>
                   <a:srgbClr val="FFB531"/>
                 </a:solidFill>
@@ -26363,7 +26452,7 @@
           <a:noFill/>
         </p:spPr>
         <p:txBody>
-          <a:bodyPr wrap="square" lIns="0" rIns="0" tIns="0" bIns="0" anchor="t">
+          <a:bodyPr wrap="square" lIns="0" tIns="0" rIns="0" bIns="0" anchor="t">
             <a:spAutoFit/>
           </a:bodyPr>
           <a:lstStyle/>
@@ -26408,7 +26497,7 @@
           <a:noFill/>
         </p:spPr>
         <p:txBody>
-          <a:bodyPr wrap="square" lIns="0" rIns="0" tIns="0" bIns="0" anchor="t">
+          <a:bodyPr wrap="square" lIns="0" tIns="0" rIns="0" bIns="0" anchor="t">
             <a:spAutoFit/>
           </a:bodyPr>
           <a:lstStyle/>
@@ -26453,7 +26542,7 @@
           <a:noFill/>
         </p:spPr>
         <p:txBody>
-          <a:bodyPr wrap="square" lIns="0" rIns="0" tIns="0" bIns="0" anchor="t">
+          <a:bodyPr wrap="square" lIns="0" tIns="0" rIns="0" bIns="0" anchor="t">
             <a:spAutoFit/>
           </a:bodyPr>
           <a:lstStyle/>
@@ -26540,7 +26629,9 @@
         <p:txBody>
           <a:bodyPr rtlCol="0" anchor="ctr"/>
           <a:lstStyle/>
-          <a:p/>
+          <a:p>
+            <a:endParaRPr/>
+          </a:p>
         </p:txBody>
       </p:sp>
       <p:sp>
@@ -26560,7 +26651,7 @@
           <a:noFill/>
         </p:spPr>
         <p:txBody>
-          <a:bodyPr wrap="square" lIns="0" rIns="0" tIns="0" bIns="0" anchor="t">
+          <a:bodyPr wrap="square" lIns="0" tIns="0" rIns="0" bIns="0" anchor="t">
             <a:spAutoFit/>
           </a:bodyPr>
           <a:lstStyle/>
@@ -26605,7 +26696,7 @@
           <a:noFill/>
         </p:spPr>
         <p:txBody>
-          <a:bodyPr wrap="none" lIns="0" rIns="0" tIns="0" bIns="0" anchor="ctr">
+          <a:bodyPr wrap="none" lIns="0" tIns="0" rIns="0" bIns="0" anchor="ctr">
             <a:spAutoFit/>
           </a:bodyPr>
           <a:lstStyle/>
@@ -26622,7 +26713,7 @@
               </a:spcAft>
             </a:pPr>
             <a:r>
-              <a:rPr sz="4400" b="0" i="0">
+              <a:rPr sz="4400" b="0" i="0" dirty="0">
                 <a:solidFill>
                   <a:srgbClr val="FFB531"/>
                 </a:solidFill>
@@ -26650,7 +26741,7 @@
           <a:noFill/>
         </p:spPr>
         <p:txBody>
-          <a:bodyPr wrap="square" lIns="0" rIns="0" tIns="0" bIns="0" anchor="t">
+          <a:bodyPr wrap="square" lIns="0" tIns="0" rIns="0" bIns="0" anchor="t">
             <a:spAutoFit/>
           </a:bodyPr>
           <a:lstStyle/>
@@ -26695,7 +26786,7 @@
           <a:noFill/>
         </p:spPr>
         <p:txBody>
-          <a:bodyPr wrap="square" lIns="0" rIns="0" tIns="0" bIns="0" anchor="t">
+          <a:bodyPr wrap="square" lIns="0" tIns="0" rIns="0" bIns="0" anchor="t">
             <a:spAutoFit/>
           </a:bodyPr>
           <a:lstStyle/>
@@ -26740,7 +26831,7 @@
           <a:noFill/>
         </p:spPr>
         <p:txBody>
-          <a:bodyPr wrap="square" lIns="0" rIns="0" tIns="0" bIns="0" anchor="t">
+          <a:bodyPr wrap="square" lIns="0" tIns="0" rIns="0" bIns="0" anchor="t">
             <a:spAutoFit/>
           </a:bodyPr>
           <a:lstStyle/>
@@ -26785,7 +26876,7 @@
           <a:noFill/>
         </p:spPr>
         <p:txBody>
-          <a:bodyPr wrap="square" lIns="0" rIns="0" tIns="0" bIns="0" anchor="t">
+          <a:bodyPr wrap="square" lIns="0" tIns="0" rIns="0" bIns="0" anchor="t">
             <a:spAutoFit/>
           </a:bodyPr>
           <a:lstStyle/>
@@ -26830,7 +26921,7 @@
           <a:noFill/>
         </p:spPr>
         <p:txBody>
-          <a:bodyPr wrap="none" lIns="0" rIns="0" tIns="0" bIns="0" anchor="t">
+          <a:bodyPr wrap="none" lIns="0" tIns="0" rIns="0" bIns="0" anchor="t">
             <a:spAutoFit/>
           </a:bodyPr>
           <a:lstStyle/>
@@ -26875,7 +26966,7 @@
           <a:noFill/>
         </p:spPr>
         <p:txBody>
-          <a:bodyPr wrap="none" lIns="0" rIns="0" tIns="0" bIns="0" anchor="t">
+          <a:bodyPr wrap="none" lIns="0" tIns="0" rIns="0" bIns="0" anchor="t">
             <a:spAutoFit/>
           </a:bodyPr>
           <a:lstStyle/>
@@ -26912,7 +27003,7 @@
 </file>
 
 <file path=ppt/slides/slide18.xml><?xml version="1.0" encoding="utf-8"?>
-<p:sld xmlns:a="http://schemas.openxmlformats.org/drawingml/2006/main" xmlns:p="http://schemas.openxmlformats.org/presentationml/2006/main" xmlns:r="http://schemas.openxmlformats.org/officeDocument/2006/relationships">
+<p:sld xmlns:a="http://schemas.openxmlformats.org/drawingml/2006/main" xmlns:r="http://schemas.openxmlformats.org/officeDocument/2006/relationships" xmlns:p="http://schemas.openxmlformats.org/presentationml/2006/main">
   <p:cSld>
     <p:bg>
       <p:bgPr>
@@ -26941,7 +27032,14 @@
         <p:cNvGrpSpPr/>
         <p:nvPr/>
       </p:nvGrpSpPr>
-      <p:grpSpPr/>
+      <p:grpSpPr>
+        <a:xfrm>
+          <a:off x="0" y="0"/>
+          <a:ext cx="0" cy="0"/>
+          <a:chOff x="0" y="0"/>
+          <a:chExt cx="0" cy="0"/>
+        </a:xfrm>
+      </p:grpSpPr>
       <p:sp>
         <p:nvSpPr>
           <p:cNvPr id="2" name="!!glow_tl"/>
@@ -27004,7 +27102,9 @@
         <p:txBody>
           <a:bodyPr rtlCol="0" anchor="ctr"/>
           <a:lstStyle/>
-          <a:p/>
+          <a:p>
+            <a:endParaRPr/>
+          </a:p>
         </p:txBody>
       </p:sp>
       <p:sp>
@@ -27069,7 +27169,9 @@
         <p:txBody>
           <a:bodyPr rtlCol="0" anchor="ctr"/>
           <a:lstStyle/>
-          <a:p/>
+          <a:p>
+            <a:endParaRPr/>
+          </a:p>
         </p:txBody>
       </p:sp>
       <p:sp>
@@ -27089,7 +27191,7 @@
           <a:noFill/>
         </p:spPr>
         <p:txBody>
-          <a:bodyPr wrap="none" lIns="0" rIns="0" tIns="0" bIns="0" anchor="t">
+          <a:bodyPr wrap="none" lIns="0" tIns="0" rIns="0" bIns="0" anchor="t">
             <a:spAutoFit/>
           </a:bodyPr>
           <a:lstStyle/>
@@ -27105,15 +27207,7 @@
                 <a:spcPts val="0"/>
               </a:spcAft>
             </a:pPr>
-            <a:r>
-              <a:rPr sz="15000" b="0" i="0">
-                <a:solidFill>
-                  <a:srgbClr val="101A2E"/>
-                </a:solidFill>
-                <a:latin typeface="Bahnschrift SemiBold Condensed"/>
-              </a:rPr>
-              <a:t/>
-            </a:r>
+            <a:endParaRPr/>
           </a:p>
         </p:txBody>
       </p:sp>
@@ -27157,6 +27251,7 @@
           <a:lstStyle/>
           <a:p>
             <a:pPr algn="ctr"/>
+            <a:endParaRPr/>
           </a:p>
         </p:txBody>
       </p:sp>
@@ -27177,7 +27272,7 @@
           <a:noFill/>
         </p:spPr>
         <p:txBody>
-          <a:bodyPr wrap="square" lIns="0" rIns="0" tIns="0" bIns="0" anchor="ctr">
+          <a:bodyPr wrap="square" lIns="0" tIns="0" rIns="0" bIns="0" anchor="ctr">
             <a:spAutoFit/>
           </a:bodyPr>
           <a:lstStyle/>
@@ -27231,7 +27326,7 @@
           <a:noFill/>
         </p:spPr>
         <p:txBody>
-          <a:bodyPr wrap="square" lIns="0" rIns="0" tIns="0" bIns="0" anchor="ctr">
+          <a:bodyPr wrap="square" lIns="0" tIns="0" rIns="0" bIns="0" anchor="ctr">
             <a:spAutoFit/>
           </a:bodyPr>
           <a:lstStyle/>
@@ -27247,15 +27342,7 @@
                 <a:spcPts val="0"/>
               </a:spcAft>
             </a:pPr>
-            <a:r>
-              <a:rPr sz="900" b="0" i="0" spc="45">
-                <a:solidFill>
-                  <a:srgbClr val="8395B5"/>
-                </a:solidFill>
-                <a:latin typeface="Consolas"/>
-              </a:rPr>
-              <a:t/>
-            </a:r>
+            <a:endParaRPr/>
           </a:p>
         </p:txBody>
       </p:sp>
@@ -27324,7 +27411,7 @@
           <a:noFill/>
         </p:spPr>
         <p:txBody>
-          <a:bodyPr wrap="square" lIns="0" rIns="0" tIns="0" bIns="0" anchor="t">
+          <a:bodyPr wrap="square" lIns="0" tIns="0" rIns="0" bIns="0" anchor="t">
             <a:spAutoFit/>
           </a:bodyPr>
           <a:lstStyle/>
@@ -27340,15 +27427,7 @@
                 <a:spcPts val="0"/>
               </a:spcAft>
             </a:pPr>
-            <a:r>
-              <a:rPr sz="2000" b="0" i="0">
-                <a:solidFill>
-                  <a:srgbClr val="F5F7FB"/>
-                </a:solidFill>
-                <a:latin typeface="Bahnschrift SemiBold"/>
-              </a:rPr>
-              <a:t/>
-            </a:r>
+            <a:endParaRPr/>
           </a:p>
         </p:txBody>
       </p:sp>
@@ -27404,7 +27483,7 @@
           <a:noFill/>
         </p:spPr>
         <p:txBody>
-          <a:bodyPr wrap="none" lIns="0" rIns="0" tIns="0" bIns="0" anchor="t">
+          <a:bodyPr wrap="none" lIns="0" tIns="0" rIns="0" bIns="0" anchor="t">
             <a:spAutoFit/>
           </a:bodyPr>
           <a:lstStyle/>
@@ -27449,7 +27528,7 @@
           <a:noFill/>
         </p:spPr>
         <p:txBody>
-          <a:bodyPr wrap="none" lIns="0" rIns="0" tIns="0" bIns="0" anchor="t">
+          <a:bodyPr wrap="none" lIns="0" tIns="0" rIns="0" bIns="0" anchor="t">
             <a:spAutoFit/>
           </a:bodyPr>
           <a:lstStyle/>
@@ -27494,7 +27573,7 @@
           <a:noFill/>
         </p:spPr>
         <p:txBody>
-          <a:bodyPr wrap="none" lIns="0" rIns="0" tIns="0" bIns="0" anchor="ctr">
+          <a:bodyPr wrap="none" lIns="0" tIns="0" rIns="0" bIns="0" anchor="ctr">
             <a:spAutoFit/>
           </a:bodyPr>
           <a:lstStyle/>
@@ -27539,7 +27618,7 @@
           <a:noFill/>
         </p:spPr>
         <p:txBody>
-          <a:bodyPr wrap="square" lIns="0" rIns="0" tIns="0" bIns="0" anchor="t">
+          <a:bodyPr wrap="square" lIns="0" tIns="0" rIns="0" bIns="0" anchor="t">
             <a:spAutoFit/>
           </a:bodyPr>
           <a:lstStyle/>
@@ -27584,7 +27663,7 @@
           <a:noFill/>
         </p:spPr>
         <p:txBody>
-          <a:bodyPr wrap="square" lIns="0" rIns="0" tIns="0" bIns="0" anchor="t">
+          <a:bodyPr wrap="square" lIns="0" tIns="0" rIns="0" bIns="0" anchor="t">
             <a:spAutoFit/>
           </a:bodyPr>
           <a:lstStyle/>
@@ -27601,22 +27680,112 @@
               </a:spcAft>
             </a:pPr>
             <a:r>
-              <a:rPr sz="2200" b="0" i="0">
+              <a:rPr sz="2200" b="0" i="0" dirty="0">
                 <a:solidFill>
                   <a:srgbClr val="BAC6DA"/>
                 </a:solidFill>
                 <a:latin typeface="Bahnschrift SemiBold"/>
               </a:rPr>
-              <a:t>“Mercados de previsão antecipam o mercado financeiro. </a:t>
-            </a:r>
-            <a:r>
-              <a:rPr sz="2200" b="0" i="0">
+              <a:t>“Mercados de </a:t>
+            </a:r>
+            <a:r>
+              <a:rPr sz="2200" b="0" i="0" dirty="0" err="1">
+                <a:solidFill>
+                  <a:srgbClr val="BAC6DA"/>
+                </a:solidFill>
+                <a:latin typeface="Bahnschrift SemiBold"/>
+              </a:rPr>
+              <a:t>previsão</a:t>
+            </a:r>
+            <a:r>
+              <a:rPr sz="2200" b="0" i="0" dirty="0">
+                <a:solidFill>
+                  <a:srgbClr val="BAC6DA"/>
+                </a:solidFill>
+                <a:latin typeface="Bahnschrift SemiBold"/>
+              </a:rPr>
+              <a:t> </a:t>
+            </a:r>
+            <a:r>
+              <a:rPr sz="2200" b="0" i="0" dirty="0" err="1">
+                <a:solidFill>
+                  <a:srgbClr val="BAC6DA"/>
+                </a:solidFill>
+                <a:latin typeface="Bahnschrift SemiBold"/>
+              </a:rPr>
+              <a:t>antecipam</a:t>
+            </a:r>
+            <a:r>
+              <a:rPr sz="2200" b="0" i="0" dirty="0">
+                <a:solidFill>
+                  <a:srgbClr val="BAC6DA"/>
+                </a:solidFill>
+                <a:latin typeface="Bahnschrift SemiBold"/>
+              </a:rPr>
+              <a:t> o mercado </a:t>
+            </a:r>
+            <a:r>
+              <a:rPr sz="2200" b="0" i="0" dirty="0" err="1">
+                <a:solidFill>
+                  <a:srgbClr val="BAC6DA"/>
+                </a:solidFill>
+                <a:latin typeface="Bahnschrift SemiBold"/>
+              </a:rPr>
+              <a:t>financeiro</a:t>
+            </a:r>
+            <a:r>
+              <a:rPr sz="2200" b="0" i="0" dirty="0">
+                <a:solidFill>
+                  <a:srgbClr val="BAC6DA"/>
+                </a:solidFill>
+                <a:latin typeface="Bahnschrift SemiBold"/>
+              </a:rPr>
+              <a:t>. </a:t>
+            </a:r>
+            <a:r>
+              <a:rPr sz="2200" b="0" i="0" dirty="0">
                 <a:solidFill>
                   <a:srgbClr val="FFB531"/>
                 </a:solidFill>
                 <a:latin typeface="Bahnschrift SemiBold"/>
               </a:rPr>
-              <a:t>Esse é o nosso sinal.”</a:t>
+              <a:t>Esse é o </a:t>
+            </a:r>
+            <a:r>
+              <a:rPr sz="2200" b="0" i="0" dirty="0" err="1">
+                <a:solidFill>
+                  <a:srgbClr val="FFB531"/>
+                </a:solidFill>
+                <a:latin typeface="Bahnschrift SemiBold"/>
+              </a:rPr>
+              <a:t>nosso</a:t>
+            </a:r>
+            <a:r>
+              <a:rPr sz="2200" b="0" i="0" dirty="0">
+                <a:solidFill>
+                  <a:srgbClr val="FFB531"/>
+                </a:solidFill>
+                <a:latin typeface="Bahnschrift SemiBold"/>
+              </a:rPr>
+              <a:t> </a:t>
+            </a:r>
+            <a:r>
+              <a:rPr sz="2200" b="0" i="0" dirty="0" err="1">
+                <a:solidFill>
+                  <a:srgbClr val="FFB531"/>
+                </a:solidFill>
+                <a:latin typeface="Bahnschrift SemiBold"/>
+              </a:rPr>
+              <a:t>sinal</a:t>
+            </a:r>
+            <a:r>
+              <a:rPr sz="2200" b="0" i="0" dirty="0">
+                <a:solidFill>
+                  <a:srgbClr val="FFB531"/>
+                </a:solidFill>
+                <a:latin typeface="Bahnschrift SemiBold"/>
+              </a:rPr>
+              <a:t>.”</a:t>
             </a:r>
           </a:p>
         </p:txBody>
@@ -27638,7 +27807,7 @@
           <a:noFill/>
         </p:spPr>
         <p:txBody>
-          <a:bodyPr wrap="none" lIns="0" rIns="0" tIns="0" bIns="0" anchor="t">
+          <a:bodyPr wrap="none" lIns="0" tIns="0" rIns="0" bIns="0" anchor="t">
             <a:spAutoFit/>
           </a:bodyPr>
           <a:lstStyle/>
@@ -27788,7 +27957,7 @@
           <p:nvPr/>
         </p:nvPicPr>
         <p:blipFill>
-          <a:blip r:embed="rId6"/>
+          <a:blip r:embed="rId3"/>
           <a:stretch>
             <a:fillRect/>
           </a:stretch>
@@ -30427,7 +30596,7 @@
         </p:nvSpPr>
         <p:spPr>
           <a:xfrm>
-            <a:off x="6135624" y="3422498"/>
+            <a:off x="6135624" y="3386093"/>
             <a:ext cx="5102351" cy="845040"/>
           </a:xfrm>
           <a:prstGeom prst="rect">
@@ -45180,7 +45349,7 @@
 </file>
 
 <file path=ppt/slides/slide29.xml><?xml version="1.0" encoding="utf-8"?>
-<p:sld xmlns:a="http://schemas.openxmlformats.org/drawingml/2006/main" xmlns:p="http://schemas.openxmlformats.org/presentationml/2006/main" xmlns:r="http://schemas.openxmlformats.org/officeDocument/2006/relationships">
+<p:sld xmlns:a="http://schemas.openxmlformats.org/drawingml/2006/main" xmlns:r="http://schemas.openxmlformats.org/officeDocument/2006/relationships" xmlns:p="http://schemas.openxmlformats.org/presentationml/2006/main">
   <p:cSld>
     <p:bg>
       <p:bgPr>
@@ -45209,7 +45378,14 @@
         <p:cNvGrpSpPr/>
         <p:nvPr/>
       </p:nvGrpSpPr>
-      <p:grpSpPr/>
+      <p:grpSpPr>
+        <a:xfrm>
+          <a:off x="0" y="0"/>
+          <a:ext cx="0" cy="0"/>
+          <a:chOff x="0" y="0"/>
+          <a:chExt cx="0" cy="0"/>
+        </a:xfrm>
+      </p:grpSpPr>
       <p:sp>
         <p:nvSpPr>
           <p:cNvPr id="2" name="!!glow_tl"/>
@@ -45272,7 +45448,9 @@
         <p:txBody>
           <a:bodyPr rtlCol="0" anchor="ctr"/>
           <a:lstStyle/>
-          <a:p/>
+          <a:p>
+            <a:endParaRPr/>
+          </a:p>
         </p:txBody>
       </p:sp>
       <p:sp>
@@ -45337,7 +45515,9 @@
         <p:txBody>
           <a:bodyPr rtlCol="0" anchor="ctr"/>
           <a:lstStyle/>
-          <a:p/>
+          <a:p>
+            <a:endParaRPr/>
+          </a:p>
         </p:txBody>
       </p:sp>
       <p:sp>
@@ -45357,7 +45537,7 @@
           <a:noFill/>
         </p:spPr>
         <p:txBody>
-          <a:bodyPr wrap="none" lIns="0" rIns="0" tIns="0" bIns="0" anchor="t">
+          <a:bodyPr wrap="none" lIns="0" tIns="0" rIns="0" bIns="0" anchor="t">
             <a:spAutoFit/>
           </a:bodyPr>
           <a:lstStyle/>
@@ -45425,6 +45605,7 @@
           <a:lstStyle/>
           <a:p>
             <a:pPr algn="ctr"/>
+            <a:endParaRPr/>
           </a:p>
         </p:txBody>
       </p:sp>
@@ -45445,7 +45626,7 @@
           <a:noFill/>
         </p:spPr>
         <p:txBody>
-          <a:bodyPr wrap="square" lIns="0" rIns="0" tIns="0" bIns="0" anchor="ctr">
+          <a:bodyPr wrap="square" lIns="0" tIns="0" rIns="0" bIns="0" anchor="ctr">
             <a:spAutoFit/>
           </a:bodyPr>
           <a:lstStyle/>
@@ -45499,7 +45680,7 @@
           <a:noFill/>
         </p:spPr>
         <p:txBody>
-          <a:bodyPr wrap="square" lIns="0" rIns="0" tIns="0" bIns="0" anchor="ctr">
+          <a:bodyPr wrap="square" lIns="0" tIns="0" rIns="0" bIns="0" anchor="ctr">
             <a:spAutoFit/>
           </a:bodyPr>
           <a:lstStyle/>
@@ -45592,7 +45773,7 @@
           <a:noFill/>
         </p:spPr>
         <p:txBody>
-          <a:bodyPr wrap="square" lIns="0" rIns="0" tIns="0" bIns="0" anchor="t">
+          <a:bodyPr wrap="square" lIns="0" tIns="0" rIns="0" bIns="0" anchor="t">
             <a:spAutoFit/>
           </a:bodyPr>
           <a:lstStyle/>
@@ -45672,7 +45853,7 @@
           <a:noFill/>
         </p:spPr>
         <p:txBody>
-          <a:bodyPr wrap="none" lIns="0" rIns="0" tIns="0" bIns="0" anchor="t">
+          <a:bodyPr wrap="none" lIns="0" tIns="0" rIns="0" bIns="0" anchor="t">
             <a:spAutoFit/>
           </a:bodyPr>
           <a:lstStyle/>
@@ -45717,7 +45898,7 @@
           <a:noFill/>
         </p:spPr>
         <p:txBody>
-          <a:bodyPr wrap="none" lIns="0" rIns="0" tIns="0" bIns="0" anchor="t">
+          <a:bodyPr wrap="none" lIns="0" tIns="0" rIns="0" bIns="0" anchor="t">
             <a:spAutoFit/>
           </a:bodyPr>
           <a:lstStyle/>
@@ -45762,7 +45943,7 @@
           <a:noFill/>
         </p:spPr>
         <p:txBody>
-          <a:bodyPr wrap="square" lIns="0" rIns="0" tIns="0" bIns="0" anchor="t">
+          <a:bodyPr wrap="square" lIns="0" tIns="0" rIns="0" bIns="0" anchor="t">
             <a:spAutoFit/>
           </a:bodyPr>
           <a:lstStyle/>
@@ -45844,7 +46025,7 @@
           <a:noFill/>
         </p:spPr>
         <p:txBody>
-          <a:bodyPr wrap="square" lIns="0" rIns="0" tIns="0" bIns="0" anchor="t">
+          <a:bodyPr wrap="square" lIns="0" tIns="0" rIns="0" bIns="0" anchor="t">
             <a:spAutoFit/>
           </a:bodyPr>
           <a:lstStyle/>
@@ -45889,7 +46070,7 @@
           <a:noFill/>
         </p:spPr>
         <p:txBody>
-          <a:bodyPr wrap="none" lIns="0" rIns="0" tIns="0" bIns="0" anchor="ctr">
+          <a:bodyPr wrap="none" lIns="0" tIns="0" rIns="0" bIns="0" anchor="ctr">
             <a:spAutoFit/>
           </a:bodyPr>
           <a:lstStyle/>
@@ -45934,7 +46115,7 @@
           <a:noFill/>
         </p:spPr>
         <p:txBody>
-          <a:bodyPr wrap="none" lIns="0" rIns="0" tIns="0" bIns="0" anchor="ctr">
+          <a:bodyPr wrap="none" lIns="0" tIns="0" rIns="0" bIns="0" anchor="ctr">
             <a:spAutoFit/>
           </a:bodyPr>
           <a:lstStyle/>
@@ -45979,7 +46160,7 @@
           <a:noFill/>
         </p:spPr>
         <p:txBody>
-          <a:bodyPr wrap="none" lIns="0" rIns="0" tIns="0" bIns="0" anchor="ctr">
+          <a:bodyPr wrap="none" lIns="0" tIns="0" rIns="0" bIns="0" anchor="ctr">
             <a:spAutoFit/>
           </a:bodyPr>
           <a:lstStyle/>
@@ -46024,7 +46205,7 @@
           <a:noFill/>
         </p:spPr>
         <p:txBody>
-          <a:bodyPr wrap="none" lIns="0" rIns="0" tIns="0" bIns="0" anchor="ctr">
+          <a:bodyPr wrap="none" lIns="0" tIns="0" rIns="0" bIns="0" anchor="ctr">
             <a:spAutoFit/>
           </a:bodyPr>
           <a:lstStyle/>
@@ -46069,7 +46250,7 @@
           <a:noFill/>
         </p:spPr>
         <p:txBody>
-          <a:bodyPr wrap="none" lIns="0" rIns="0" tIns="0" bIns="0" anchor="ctr">
+          <a:bodyPr wrap="none" lIns="0" tIns="0" rIns="0" bIns="0" anchor="ctr">
             <a:spAutoFit/>
           </a:bodyPr>
           <a:lstStyle/>
@@ -46114,7 +46295,7 @@
           <a:noFill/>
         </p:spPr>
         <p:txBody>
-          <a:bodyPr wrap="none" lIns="0" rIns="0" tIns="0" bIns="0" anchor="ctr">
+          <a:bodyPr wrap="none" lIns="0" tIns="0" rIns="0" bIns="0" anchor="ctr">
             <a:spAutoFit/>
           </a:bodyPr>
           <a:lstStyle/>
@@ -46159,7 +46340,7 @@
           <a:noFill/>
         </p:spPr>
         <p:txBody>
-          <a:bodyPr wrap="none" lIns="0" rIns="0" tIns="0" bIns="0" anchor="ctr">
+          <a:bodyPr wrap="none" lIns="0" tIns="0" rIns="0" bIns="0" anchor="ctr">
             <a:spAutoFit/>
           </a:bodyPr>
           <a:lstStyle/>
@@ -46204,7 +46385,7 @@
           <a:noFill/>
         </p:spPr>
         <p:txBody>
-          <a:bodyPr wrap="none" lIns="0" rIns="0" tIns="0" bIns="0" anchor="ctr">
+          <a:bodyPr wrap="none" lIns="0" tIns="0" rIns="0" bIns="0" anchor="ctr">
             <a:spAutoFit/>
           </a:bodyPr>
           <a:lstStyle/>
@@ -46249,7 +46430,7 @@
           <a:noFill/>
         </p:spPr>
         <p:txBody>
-          <a:bodyPr wrap="none" lIns="0" rIns="0" tIns="0" bIns="0" anchor="ctr">
+          <a:bodyPr wrap="none" lIns="0" tIns="0" rIns="0" bIns="0" anchor="ctr">
             <a:spAutoFit/>
           </a:bodyPr>
           <a:lstStyle/>
@@ -46294,7 +46475,7 @@
           <a:noFill/>
         </p:spPr>
         <p:txBody>
-          <a:bodyPr wrap="none" lIns="0" rIns="0" tIns="0" bIns="0" anchor="ctr">
+          <a:bodyPr wrap="none" lIns="0" tIns="0" rIns="0" bIns="0" anchor="ctr">
             <a:spAutoFit/>
           </a:bodyPr>
           <a:lstStyle/>
@@ -46339,7 +46520,7 @@
           <a:noFill/>
         </p:spPr>
         <p:txBody>
-          <a:bodyPr wrap="none" lIns="0" rIns="0" tIns="0" bIns="0" anchor="ctr">
+          <a:bodyPr wrap="none" lIns="0" tIns="0" rIns="0" bIns="0" anchor="ctr">
             <a:spAutoFit/>
           </a:bodyPr>
           <a:lstStyle/>
@@ -46384,7 +46565,7 @@
           <a:noFill/>
         </p:spPr>
         <p:txBody>
-          <a:bodyPr wrap="none" lIns="0" rIns="0" tIns="0" bIns="0" anchor="ctr">
+          <a:bodyPr wrap="none" lIns="0" tIns="0" rIns="0" bIns="0" anchor="ctr">
             <a:spAutoFit/>
           </a:bodyPr>
           <a:lstStyle/>
@@ -46429,7 +46610,7 @@
           <a:noFill/>
         </p:spPr>
         <p:txBody>
-          <a:bodyPr wrap="none" lIns="0" rIns="0" tIns="0" bIns="0" anchor="ctr">
+          <a:bodyPr wrap="none" lIns="0" tIns="0" rIns="0" bIns="0" anchor="ctr">
             <a:spAutoFit/>
           </a:bodyPr>
           <a:lstStyle/>
@@ -46474,7 +46655,7 @@
           <a:noFill/>
         </p:spPr>
         <p:txBody>
-          <a:bodyPr wrap="none" lIns="0" rIns="0" tIns="0" bIns="0" anchor="ctr">
+          <a:bodyPr wrap="none" lIns="0" tIns="0" rIns="0" bIns="0" anchor="ctr">
             <a:spAutoFit/>
           </a:bodyPr>
           <a:lstStyle/>
@@ -46519,7 +46700,7 @@
           <a:noFill/>
         </p:spPr>
         <p:txBody>
-          <a:bodyPr wrap="none" lIns="0" rIns="0" tIns="0" bIns="0" anchor="ctr">
+          <a:bodyPr wrap="none" lIns="0" tIns="0" rIns="0" bIns="0" anchor="ctr">
             <a:spAutoFit/>
           </a:bodyPr>
           <a:lstStyle/>
@@ -46564,7 +46745,7 @@
           <a:noFill/>
         </p:spPr>
         <p:txBody>
-          <a:bodyPr wrap="none" lIns="0" rIns="0" tIns="0" bIns="0" anchor="ctr">
+          <a:bodyPr wrap="none" lIns="0" tIns="0" rIns="0" bIns="0" anchor="ctr">
             <a:spAutoFit/>
           </a:bodyPr>
           <a:lstStyle/>
@@ -46646,7 +46827,7 @@
           <a:noFill/>
         </p:spPr>
         <p:txBody>
-          <a:bodyPr wrap="square" lIns="0" rIns="0" tIns="0" bIns="0" anchor="t">
+          <a:bodyPr wrap="square" lIns="0" tIns="0" rIns="0" bIns="0" anchor="t">
             <a:spAutoFit/>
           </a:bodyPr>
           <a:lstStyle/>
@@ -46691,7 +46872,7 @@
           <a:noFill/>
         </p:spPr>
         <p:txBody>
-          <a:bodyPr wrap="none" lIns="0" rIns="0" tIns="0" bIns="0" anchor="ctr">
+          <a:bodyPr wrap="none" lIns="0" tIns="0" rIns="0" bIns="0" anchor="ctr">
             <a:spAutoFit/>
           </a:bodyPr>
           <a:lstStyle/>
@@ -46736,7 +46917,7 @@
           <a:noFill/>
         </p:spPr>
         <p:txBody>
-          <a:bodyPr wrap="none" lIns="0" rIns="0" tIns="0" bIns="0" anchor="ctr">
+          <a:bodyPr wrap="none" lIns="0" tIns="0" rIns="0" bIns="0" anchor="ctr">
             <a:spAutoFit/>
           </a:bodyPr>
           <a:lstStyle/>
@@ -46781,7 +46962,7 @@
           <a:noFill/>
         </p:spPr>
         <p:txBody>
-          <a:bodyPr wrap="none" lIns="0" rIns="0" tIns="0" bIns="0" anchor="ctr">
+          <a:bodyPr wrap="none" lIns="0" tIns="0" rIns="0" bIns="0" anchor="ctr">
             <a:spAutoFit/>
           </a:bodyPr>
           <a:lstStyle/>
@@ -46826,7 +47007,7 @@
           <a:noFill/>
         </p:spPr>
         <p:txBody>
-          <a:bodyPr wrap="none" lIns="0" rIns="0" tIns="0" bIns="0" anchor="ctr">
+          <a:bodyPr wrap="none" lIns="0" tIns="0" rIns="0" bIns="0" anchor="ctr">
             <a:spAutoFit/>
           </a:bodyPr>
           <a:lstStyle/>
@@ -46908,7 +47089,7 @@
           <a:noFill/>
         </p:spPr>
         <p:txBody>
-          <a:bodyPr wrap="square" lIns="0" rIns="0" tIns="0" bIns="0" anchor="t">
+          <a:bodyPr wrap="square" lIns="0" tIns="0" rIns="0" bIns="0" anchor="t">
             <a:spAutoFit/>
           </a:bodyPr>
           <a:lstStyle/>
@@ -46953,7 +47134,7 @@
           <a:noFill/>
         </p:spPr>
         <p:txBody>
-          <a:bodyPr wrap="none" lIns="0" rIns="0" tIns="0" bIns="0" anchor="ctr">
+          <a:bodyPr wrap="none" lIns="0" tIns="0" rIns="0" bIns="0" anchor="ctr">
             <a:spAutoFit/>
           </a:bodyPr>
           <a:lstStyle/>
@@ -46998,7 +47179,7 @@
           <a:noFill/>
         </p:spPr>
         <p:txBody>
-          <a:bodyPr wrap="none" lIns="0" rIns="0" tIns="0" bIns="0" anchor="ctr">
+          <a:bodyPr wrap="none" lIns="0" tIns="0" rIns="0" bIns="0" anchor="ctr">
             <a:spAutoFit/>
           </a:bodyPr>
           <a:lstStyle/>
@@ -47043,7 +47224,7 @@
           <a:noFill/>
         </p:spPr>
         <p:txBody>
-          <a:bodyPr wrap="none" lIns="0" rIns="0" tIns="0" bIns="0" anchor="ctr">
+          <a:bodyPr wrap="none" lIns="0" tIns="0" rIns="0" bIns="0" anchor="ctr">
             <a:spAutoFit/>
           </a:bodyPr>
           <a:lstStyle/>
@@ -47088,7 +47269,7 @@
           <a:noFill/>
         </p:spPr>
         <p:txBody>
-          <a:bodyPr wrap="none" lIns="0" rIns="0" tIns="0" bIns="0" anchor="ctr">
+          <a:bodyPr wrap="none" lIns="0" tIns="0" rIns="0" bIns="0" anchor="ctr">
             <a:spAutoFit/>
           </a:bodyPr>
           <a:lstStyle/>
@@ -47133,7 +47314,7 @@
           <a:noFill/>
         </p:spPr>
         <p:txBody>
-          <a:bodyPr wrap="none" lIns="0" rIns="0" tIns="0" bIns="0" anchor="ctr">
+          <a:bodyPr wrap="none" lIns="0" tIns="0" rIns="0" bIns="0" anchor="ctr">
             <a:spAutoFit/>
           </a:bodyPr>
           <a:lstStyle/>
@@ -47178,7 +47359,7 @@
           <a:noFill/>
         </p:spPr>
         <p:txBody>
-          <a:bodyPr wrap="none" lIns="0" rIns="0" tIns="0" bIns="0" anchor="ctr">
+          <a:bodyPr wrap="none" lIns="0" tIns="0" rIns="0" bIns="0" anchor="ctr">
             <a:spAutoFit/>
           </a:bodyPr>
           <a:lstStyle/>
@@ -47223,7 +47404,7 @@
           <a:noFill/>
         </p:spPr>
         <p:txBody>
-          <a:bodyPr wrap="none" lIns="0" rIns="0" tIns="0" bIns="0" anchor="ctr">
+          <a:bodyPr wrap="none" lIns="0" tIns="0" rIns="0" bIns="0" anchor="ctr">
             <a:spAutoFit/>
           </a:bodyPr>
           <a:lstStyle/>
@@ -47268,7 +47449,7 @@
           <a:noFill/>
         </p:spPr>
         <p:txBody>
-          <a:bodyPr wrap="none" lIns="0" rIns="0" tIns="0" bIns="0" anchor="ctr">
+          <a:bodyPr wrap="none" lIns="0" tIns="0" rIns="0" bIns="0" anchor="ctr">
             <a:spAutoFit/>
           </a:bodyPr>
           <a:lstStyle/>
@@ -47313,7 +47494,7 @@
           <a:noFill/>
         </p:spPr>
         <p:txBody>
-          <a:bodyPr wrap="none" lIns="0" rIns="0" tIns="0" bIns="0" anchor="ctr">
+          <a:bodyPr wrap="none" lIns="0" tIns="0" rIns="0" bIns="0" anchor="ctr">
             <a:spAutoFit/>
           </a:bodyPr>
           <a:lstStyle/>
@@ -47358,7 +47539,7 @@
           <a:noFill/>
         </p:spPr>
         <p:txBody>
-          <a:bodyPr wrap="none" lIns="0" rIns="0" tIns="0" bIns="0" anchor="ctr">
+          <a:bodyPr wrap="none" lIns="0" tIns="0" rIns="0" bIns="0" anchor="ctr">
             <a:spAutoFit/>
           </a:bodyPr>
           <a:lstStyle/>
@@ -47440,7 +47621,7 @@
           <a:noFill/>
         </p:spPr>
         <p:txBody>
-          <a:bodyPr wrap="square" lIns="0" rIns="0" tIns="0" bIns="0" anchor="t">
+          <a:bodyPr wrap="square" lIns="0" tIns="0" rIns="0" bIns="0" anchor="t">
             <a:spAutoFit/>
           </a:bodyPr>
           <a:lstStyle/>
@@ -47485,7 +47666,7 @@
           <a:noFill/>
         </p:spPr>
         <p:txBody>
-          <a:bodyPr wrap="none" lIns="0" rIns="0" tIns="0" bIns="0" anchor="ctr">
+          <a:bodyPr wrap="none" lIns="0" tIns="0" rIns="0" bIns="0" anchor="ctr">
             <a:spAutoFit/>
           </a:bodyPr>
           <a:lstStyle/>
@@ -47530,7 +47711,7 @@
           <a:noFill/>
         </p:spPr>
         <p:txBody>
-          <a:bodyPr wrap="none" lIns="0" rIns="0" tIns="0" bIns="0" anchor="ctr">
+          <a:bodyPr wrap="none" lIns="0" tIns="0" rIns="0" bIns="0" anchor="ctr">
             <a:spAutoFit/>
           </a:bodyPr>
           <a:lstStyle/>
@@ -47575,7 +47756,7 @@
           <a:noFill/>
         </p:spPr>
         <p:txBody>
-          <a:bodyPr wrap="none" lIns="0" rIns="0" tIns="0" bIns="0" anchor="ctr">
+          <a:bodyPr wrap="none" lIns="0" tIns="0" rIns="0" bIns="0" anchor="ctr">
             <a:spAutoFit/>
           </a:bodyPr>
           <a:lstStyle/>
@@ -47620,7 +47801,7 @@
           <a:noFill/>
         </p:spPr>
         <p:txBody>
-          <a:bodyPr wrap="none" lIns="0" rIns="0" tIns="0" bIns="0" anchor="ctr">
+          <a:bodyPr wrap="none" lIns="0" tIns="0" rIns="0" bIns="0" anchor="ctr">
             <a:spAutoFit/>
           </a:bodyPr>
           <a:lstStyle/>
@@ -47665,7 +47846,7 @@
           <a:noFill/>
         </p:spPr>
         <p:txBody>
-          <a:bodyPr wrap="square" lIns="0" rIns="0" tIns="0" bIns="0" anchor="t">
+          <a:bodyPr wrap="square" lIns="0" tIns="0" rIns="0" bIns="0" anchor="t">
             <a:spAutoFit/>
           </a:bodyPr>
           <a:lstStyle/>
@@ -47696,75 +47877,6 @@
       <p:pic>
         <p:nvPicPr>
           <p:cNvPr id="57" name="sA9_55" descr="ab_rolling_ir.png"/>
-          <p:cNvPicPr>
-            <a:picLocks noChangeAspect="1"/>
-          </p:cNvPicPr>
-          <p:nvPr/>
-        </p:nvPicPr>
-        <p:blipFill>
-          <a:blip r:embed="rId2"/>
-          <a:stretch>
-            <a:fillRect/>
-          </a:stretch>
-        </p:blipFill>
-        <p:spPr>
-          <a:xfrm>
-            <a:off x="6309360" y="1627632"/>
-            <a:ext cx="5148071" cy="1937366"/>
-          </a:xfrm>
-          <a:prstGeom prst="rect">
-            <a:avLst/>
-          </a:prstGeom>
-        </p:spPr>
-      </p:pic>
-      <p:sp>
-        <p:nvSpPr>
-          <p:cNvPr id="58" name="sA9_56"/>
-          <p:cNvSpPr txBox="1"/>
-          <p:nvPr/>
-        </p:nvSpPr>
-        <p:spPr>
-          <a:xfrm>
-            <a:off x="6309360" y="3840480"/>
-            <a:ext cx="5148071" cy="182880"/>
-          </a:xfrm>
-          <a:prstGeom prst="rect">
-            <a:avLst/>
-          </a:prstGeom>
-          <a:noFill/>
-        </p:spPr>
-        <p:txBody>
-          <a:bodyPr wrap="square" lIns="0" rIns="0" tIns="0" bIns="0" anchor="t">
-            <a:spAutoFit/>
-          </a:bodyPr>
-          <a:lstStyle/>
-          <a:p>
-            <a:pPr algn="l">
-              <a:lnSpc>
-                <a:spcPct val="100000"/>
-              </a:lnSpc>
-              <a:spcBef>
-                <a:spcPts val="0"/>
-              </a:spcBef>
-              <a:spcAft>
-                <a:spcPts val="0"/>
-              </a:spcAft>
-            </a:pPr>
-            <a:r>
-              <a:rPr sz="900" b="1" i="0" spc="180">
-                <a:solidFill>
-                  <a:srgbClr val="FFB531"/>
-                </a:solidFill>
-                <a:latin typeface="Consolas"/>
-              </a:rPr>
-              <a:t>DEFLATED SHARPE RATIO PELO Nº DE TENTATIVAS</a:t>
-            </a:r>
-          </a:p>
-        </p:txBody>
-      </p:sp>
-      <p:pic>
-        <p:nvPicPr>
-          <p:cNvPr id="59" name="sA9_57" descr="ab_dsr.png"/>
           <p:cNvPicPr>
             <a:picLocks noChangeAspect="1"/>
           </p:cNvPicPr>
@@ -47778,6 +47890,75 @@
         </p:blipFill>
         <p:spPr>
           <a:xfrm>
+            <a:off x="6309360" y="1627632"/>
+            <a:ext cx="5148071" cy="1937366"/>
+          </a:xfrm>
+          <a:prstGeom prst="rect">
+            <a:avLst/>
+          </a:prstGeom>
+        </p:spPr>
+      </p:pic>
+      <p:sp>
+        <p:nvSpPr>
+          <p:cNvPr id="58" name="sA9_56"/>
+          <p:cNvSpPr txBox="1"/>
+          <p:nvPr/>
+        </p:nvSpPr>
+        <p:spPr>
+          <a:xfrm>
+            <a:off x="6309360" y="3840480"/>
+            <a:ext cx="5148071" cy="182880"/>
+          </a:xfrm>
+          <a:prstGeom prst="rect">
+            <a:avLst/>
+          </a:prstGeom>
+          <a:noFill/>
+        </p:spPr>
+        <p:txBody>
+          <a:bodyPr wrap="square" lIns="0" tIns="0" rIns="0" bIns="0" anchor="t">
+            <a:spAutoFit/>
+          </a:bodyPr>
+          <a:lstStyle/>
+          <a:p>
+            <a:pPr algn="l">
+              <a:lnSpc>
+                <a:spcPct val="100000"/>
+              </a:lnSpc>
+              <a:spcBef>
+                <a:spcPts val="0"/>
+              </a:spcBef>
+              <a:spcAft>
+                <a:spcPts val="0"/>
+              </a:spcAft>
+            </a:pPr>
+            <a:r>
+              <a:rPr sz="900" b="1" i="0" spc="180">
+                <a:solidFill>
+                  <a:srgbClr val="FFB531"/>
+                </a:solidFill>
+                <a:latin typeface="Consolas"/>
+              </a:rPr>
+              <a:t>DEFLATED SHARPE RATIO PELO Nº DE TENTATIVAS</a:t>
+            </a:r>
+          </a:p>
+        </p:txBody>
+      </p:sp>
+      <p:pic>
+        <p:nvPicPr>
+          <p:cNvPr id="59" name="sA9_57" descr="ab_dsr.png"/>
+          <p:cNvPicPr>
+            <a:picLocks noChangeAspect="1"/>
+          </p:cNvPicPr>
+          <p:nvPr/>
+        </p:nvPicPr>
+        <p:blipFill>
+          <a:blip r:embed="rId4"/>
+          <a:stretch>
+            <a:fillRect/>
+          </a:stretch>
+        </p:blipFill>
+        <p:spPr>
+          <a:xfrm>
             <a:off x="6583680" y="4050791"/>
             <a:ext cx="3593591" cy="1832027"/>
           </a:xfrm>
@@ -47803,7 +47984,7 @@
           <a:noFill/>
         </p:spPr>
         <p:txBody>
-          <a:bodyPr wrap="square" lIns="0" rIns="0" tIns="0" bIns="0" anchor="t">
+          <a:bodyPr wrap="square" lIns="0" tIns="0" rIns="0" bIns="0" anchor="t">
             <a:spAutoFit/>
           </a:bodyPr>
           <a:lstStyle/>
@@ -47848,7 +48029,7 @@
           <a:noFill/>
         </p:spPr>
         <p:txBody>
-          <a:bodyPr wrap="none" lIns="0" rIns="0" tIns="0" bIns="0" anchor="t">
+          <a:bodyPr wrap="none" lIns="0" tIns="0" rIns="0" bIns="0" anchor="t">
             <a:spAutoFit/>
           </a:bodyPr>
           <a:lstStyle/>
